--- a/docs/PARITY-review3-deck.pptx
+++ b/docs/PARITY-review3-deck.pptx
@@ -29,6 +29,7 @@
     <p:sldId id="277" r:id="rId28"/>
     <p:sldId id="278" r:id="rId29"/>
     <p:sldId id="279" r:id="rId30"/>
+    <p:sldId id="280" r:id="rId31"/>
   </p:sldIdLst>
   <p:sldSz cx="12191695" cy="6858000" type="screen4x3"/>
   <p:notesSz cx="6858000" cy="9144000"/>
@@ -1505,7 +1506,7 @@
           <a:lstStyle/>
           <a:p>
             <a:r>
-              <a:t>Open the build and leave it running while you talk. Point at the ring on the map and say it out loud: it is confidently wrong, because the player has been using doors it cannot hear. That single image answers 'show us the AI functioning'.</a:t>
+              <a:t>Lead with this. Walk two rooms, let a window open and close, and let them read the panel top-right while you move. It answers 'where is the game' and 'show the AI functioning' in one go.</a:t>
             </a:r>
           </a:p>
         </p:txBody>
@@ -5296,7 +5297,7 @@
                 </a:solidFill>
                 <a:latin typeface="Arial"/>
               </a:rPr>
-              <a:t>The belief filter over door events</a:t>
+              <a:t>The predictor: variable-order Markov with back-off</a:t>
             </a:r>
           </a:p>
         </p:txBody>
@@ -5397,7 +5398,7 @@
         </p:nvSpPr>
         <p:spPr>
           <a:xfrm>
-            <a:off x="1005840" y="1975104"/>
+            <a:off x="1005840" y="1993392"/>
             <a:ext cx="10241280" cy="914400"/>
           </a:xfrm>
           <a:prstGeom prst="rect">
@@ -5426,7 +5427,7 @@
                 </a:solidFill>
                 <a:latin typeface="Consolas"/>
               </a:rPr>
-              <a:t>predict    b'(c)  =  Σ_r  b(r) · T(r → c)</a:t>
+              <a:t>P_o(x | ctx)  =  w · f_o(x | ctx)  +  (1 − w) · P_(o−1)(x | ctx[1:])</a:t>
             </a:r>
           </a:p>
           <a:p>
@@ -5445,380 +5446,21 @@
                 </a:solidFill>
                 <a:latin typeface="Consolas"/>
               </a:rPr>
-              <a:t>update     zero any state inconsistent with the evidence, renormalise</a:t>
-            </a:r>
-          </a:p>
-        </p:txBody>
-      </p:sp>
-      <p:graphicFrame>
-        <p:nvGraphicFramePr>
-          <p:cNvPr id="7" name="Table 6"/>
-          <p:cNvGraphicFramePr>
-            <a:graphicFrameLocks noGrp="1"/>
-          </p:cNvGraphicFramePr>
-          <p:nvPr/>
-        </p:nvGraphicFramePr>
-        <p:xfrm>
-          <a:off x="658368" y="3200400"/>
-          <a:ext cx="10881360" cy="1536192"/>
-        </p:xfrm>
-        <a:graphic>
-          <a:graphicData uri="http://schemas.openxmlformats.org/drawingml/2006/table">
-            <a:tbl>
-              <a:tblPr firstRow="1" bandRow="1">
-                <a:tableStyleId>{5C22544A-7EE6-4342-B048-85BDC9FD1C3A}</a:tableStyleId>
-              </a:tblPr>
-              <a:tblGrid>
-                <a:gridCol w="2651760"/>
-                <a:gridCol w="4572000"/>
-                <a:gridCol w="3657600"/>
-              </a:tblGrid>
-              <a:tr h="384048">
-                <a:tc>
-                  <a:txBody>
-                    <a:bodyPr/>
-                    <a:lstStyle/>
-                    <a:p>
-                      <a:pPr>
-                        <a:lnSpc>
-                          <a:spcPct val="115000"/>
-                        </a:lnSpc>
-                      </a:pPr>
-                      <a:r>
-                        <a:rPr sz="950" b="1">
-                          <a:solidFill>
-                            <a:srgbClr val="6B7178"/>
-                          </a:solidFill>
-                          <a:latin typeface="Arial"/>
-                        </a:rPr>
-                        <a:t>Evidence</a:t>
-                      </a:r>
-                    </a:p>
-                  </a:txBody>
-                  <a:tcPr marL="73152" marR="73152" marT="36576" marB="36576">
-                    <a:solidFill>
-                      <a:srgbClr val="F4F6F8"/>
-                    </a:solidFill>
-                  </a:tcPr>
-                </a:tc>
-                <a:tc>
-                  <a:txBody>
-                    <a:bodyPr/>
-                    <a:lstStyle/>
-                    <a:p>
-                      <a:pPr>
-                        <a:lnSpc>
-                          <a:spcPct val="115000"/>
-                        </a:lnSpc>
-                      </a:pPr>
-                      <a:r>
-                        <a:rPr sz="950" b="1">
-                          <a:solidFill>
-                            <a:srgbClr val="6B7178"/>
-                          </a:solidFill>
-                          <a:latin typeface="Arial"/>
-                        </a:rPr>
-                        <a:t>What it rules out</a:t>
-                      </a:r>
-                    </a:p>
-                  </a:txBody>
-                  <a:tcPr marL="73152" marR="73152" marT="36576" marB="36576">
-                    <a:solidFill>
-                      <a:srgbClr val="F4F6F8"/>
-                    </a:solidFill>
-                  </a:tcPr>
-                </a:tc>
-                <a:tc>
-                  <a:txBody>
-                    <a:bodyPr/>
-                    <a:lstStyle/>
-                    <a:p>
-                      <a:pPr>
-                        <a:lnSpc>
-                          <a:spcPct val="115000"/>
-                        </a:lnSpc>
-                      </a:pPr>
-                      <a:r>
-                        <a:rPr sz="950" b="1">
-                          <a:solidFill>
-                            <a:srgbClr val="6B7178"/>
-                          </a:solidFill>
-                          <a:latin typeface="Arial"/>
-                        </a:rPr>
-                        <a:t>Effect on the belief</a:t>
-                      </a:r>
-                    </a:p>
-                  </a:txBody>
-                  <a:tcPr marL="73152" marR="73152" marT="36576" marB="36576">
-                    <a:solidFill>
-                      <a:srgbClr val="F4F6F8"/>
-                    </a:solidFill>
-                  </a:tcPr>
-                </a:tc>
-              </a:tr>
-              <a:tr h="384048">
-                <a:tc>
-                  <a:txBody>
-                    <a:bodyPr/>
-                    <a:lstStyle/>
-                    <a:p>
-                      <a:pPr>
-                        <a:lnSpc>
-                          <a:spcPct val="115000"/>
-                        </a:lnSpc>
-                      </a:pPr>
-                      <a:r>
-                        <a:rPr sz="1250" b="0">
-                          <a:solidFill>
-                            <a:srgbClr val="16181A"/>
-                          </a:solidFill>
-                          <a:latin typeface="Arial"/>
-                        </a:rPr>
-                        <a:t>Door (a,b) tripped</a:t>
-                      </a:r>
-                    </a:p>
-                  </a:txBody>
-                  <a:tcPr marL="73152" marR="73152" marT="36576" marB="36576">
-                    <a:solidFill>
-                      <a:srgbClr val="FCFCFB"/>
-                    </a:solidFill>
-                  </a:tcPr>
-                </a:tc>
-                <a:tc>
-                  <a:txBody>
-                    <a:bodyPr/>
-                    <a:lstStyle/>
-                    <a:p>
-                      <a:pPr>
-                        <a:lnSpc>
-                          <a:spcPct val="115000"/>
-                        </a:lnSpc>
-                      </a:pPr>
-                      <a:r>
-                        <a:rPr sz="1250" b="0">
-                          <a:solidFill>
-                            <a:srgbClr val="16181A"/>
-                          </a:solidFill>
-                          <a:latin typeface="Arial"/>
-                        </a:rPr>
-                        <a:t>Everything except a crossing of that door</a:t>
-                      </a:r>
-                    </a:p>
-                  </a:txBody>
-                  <a:tcPr marL="73152" marR="73152" marT="36576" marB="36576">
-                    <a:solidFill>
-                      <a:srgbClr val="FCFCFB"/>
-                    </a:solidFill>
-                  </a:tcPr>
-                </a:tc>
-                <a:tc>
-                  <a:txBody>
-                    <a:bodyPr/>
-                    <a:lstStyle/>
-                    <a:p>
-                      <a:pPr>
-                        <a:lnSpc>
-                          <a:spcPct val="115000"/>
-                        </a:lnSpc>
-                      </a:pPr>
-                      <a:r>
-                        <a:rPr sz="1250" b="0">
-                          <a:solidFill>
-                            <a:srgbClr val="16181A"/>
-                          </a:solidFill>
-                          <a:latin typeface="Arial"/>
-                        </a:rPr>
-                        <a:t>Collapses to near-certainty</a:t>
-                      </a:r>
-                    </a:p>
-                  </a:txBody>
-                  <a:tcPr marL="73152" marR="73152" marT="36576" marB="36576">
-                    <a:solidFill>
-                      <a:srgbClr val="FCFCFB"/>
-                    </a:solidFill>
-                  </a:tcPr>
-                </a:tc>
-              </a:tr>
-              <a:tr h="384048">
-                <a:tc>
-                  <a:txBody>
-                    <a:bodyPr/>
-                    <a:lstStyle/>
-                    <a:p>
-                      <a:pPr>
-                        <a:lnSpc>
-                          <a:spcPct val="115000"/>
-                        </a:lnSpc>
-                      </a:pPr>
-                      <a:r>
-                        <a:rPr sz="1250" b="0">
-                          <a:solidFill>
-                            <a:srgbClr val="16181A"/>
-                          </a:solidFill>
-                          <a:latin typeface="Arial"/>
-                        </a:rPr>
-                        <a:t>Silence</a:t>
-                      </a:r>
-                    </a:p>
-                  </a:txBody>
-                  <a:tcPr marL="73152" marR="73152" marT="36576" marB="36576">
-                    <a:solidFill>
-                      <a:srgbClr val="FCFCFB"/>
-                    </a:solidFill>
-                  </a:tcPr>
-                </a:tc>
-                <a:tc>
-                  <a:txBody>
-                    <a:bodyPr/>
-                    <a:lstStyle/>
-                    <a:p>
-                      <a:pPr>
-                        <a:lnSpc>
-                          <a:spcPct val="115000"/>
-                        </a:lnSpc>
-                      </a:pPr>
-                      <a:r>
-                        <a:rPr sz="1250" b="0">
-                          <a:solidFill>
-                            <a:srgbClr val="16181A"/>
-                          </a:solidFill>
-                          <a:latin typeface="Arial"/>
-                        </a:rPr>
-                        <a:t>Any crossing of a WIRED door</a:t>
-                      </a:r>
-                    </a:p>
-                  </a:txBody>
-                  <a:tcPr marL="73152" marR="73152" marT="36576" marB="36576">
-                    <a:solidFill>
-                      <a:srgbClr val="FCFCFB"/>
-                    </a:solidFill>
-                  </a:tcPr>
-                </a:tc>
-                <a:tc>
-                  <a:txBody>
-                    <a:bodyPr/>
-                    <a:lstStyle/>
-                    <a:p>
-                      <a:pPr>
-                        <a:lnSpc>
-                          <a:spcPct val="115000"/>
-                        </a:lnSpc>
-                      </a:pPr>
-                      <a:r>
-                        <a:rPr sz="1250" b="0">
-                          <a:solidFill>
-                            <a:srgbClr val="16181A"/>
-                          </a:solidFill>
-                          <a:latin typeface="Arial"/>
-                        </a:rPr>
-                        <a:t>Keeps staying put and unwired crossings</a:t>
-                      </a:r>
-                    </a:p>
-                  </a:txBody>
-                  <a:tcPr marL="73152" marR="73152" marT="36576" marB="36576">
-                    <a:solidFill>
-                      <a:srgbClr val="FCFCFB"/>
-                    </a:solidFill>
-                  </a:tcPr>
-                </a:tc>
-              </a:tr>
-              <a:tr h="384048">
-                <a:tc>
-                  <a:txBody>
-                    <a:bodyPr/>
-                    <a:lstStyle/>
-                    <a:p>
-                      <a:pPr>
-                        <a:lnSpc>
-                          <a:spcPct val="115000"/>
-                        </a:lnSpc>
-                      </a:pPr>
-                      <a:r>
-                        <a:rPr sz="1250" b="0">
-                          <a:solidFill>
-                            <a:srgbClr val="16181A"/>
-                          </a:solidFill>
-                          <a:latin typeface="Arial"/>
-                        </a:rPr>
-                        <a:t>Co-location</a:t>
-                      </a:r>
-                    </a:p>
-                  </a:txBody>
-                  <a:tcPr marL="73152" marR="73152" marT="36576" marB="36576">
-                    <a:solidFill>
-                      <a:srgbClr val="FCFCFB"/>
-                    </a:solidFill>
-                  </a:tcPr>
-                </a:tc>
-                <a:tc>
-                  <a:txBody>
-                    <a:bodyPr/>
-                    <a:lstStyle/>
-                    <a:p>
-                      <a:pPr>
-                        <a:lnSpc>
-                          <a:spcPct val="115000"/>
-                        </a:lnSpc>
-                      </a:pPr>
-                      <a:r>
-                        <a:rPr sz="1250" b="0">
-                          <a:solidFill>
-                            <a:srgbClr val="16181A"/>
-                          </a:solidFill>
-                          <a:latin typeface="Arial"/>
-                        </a:rPr>
-                        <a:t>Everything else</a:t>
-                      </a:r>
-                    </a:p>
-                  </a:txBody>
-                  <a:tcPr marL="73152" marR="73152" marT="36576" marB="36576">
-                    <a:solidFill>
-                      <a:srgbClr val="FCFCFB"/>
-                    </a:solidFill>
-                  </a:tcPr>
-                </a:tc>
-                <a:tc>
-                  <a:txBody>
-                    <a:bodyPr/>
-                    <a:lstStyle/>
-                    <a:p>
-                      <a:pPr>
-                        <a:lnSpc>
-                          <a:spcPct val="115000"/>
-                        </a:lnSpc>
-                      </a:pPr>
-                      <a:r>
-                        <a:rPr sz="1250" b="0">
-                          <a:solidFill>
-                            <a:srgbClr val="16181A"/>
-                          </a:solidFill>
-                          <a:latin typeface="Arial"/>
-                        </a:rPr>
-                        <a:t>Collapses to certainty</a:t>
-                      </a:r>
-                    </a:p>
-                  </a:txBody>
-                  <a:tcPr marL="73152" marR="73152" marT="36576" marB="36576">
-                    <a:solidFill>
-                      <a:srgbClr val="FCFCFB"/>
-                    </a:solidFill>
-                  </a:tcPr>
-                </a:tc>
-              </a:tr>
-            </a:tbl>
-          </a:graphicData>
-        </a:graphic>
-      </p:graphicFrame>
-      <p:sp>
-        <p:nvSpPr>
-          <p:cNvPr id="8" name="TextBox 7"/>
+              <a:t>w  =  C(ctx) / (C(ctx) + α)                    α = 1.6,  k = 4</a:t>
+            </a:r>
+          </a:p>
+        </p:txBody>
+      </p:sp>
+      <p:sp>
+        <p:nvSpPr>
+          <p:cNvPr id="7" name="TextBox 6"/>
           <p:cNvSpPr txBox="1"/>
           <p:nvPr/>
         </p:nvSpPr>
         <p:spPr>
           <a:xfrm>
-            <a:off x="658368" y="4754880"/>
-            <a:ext cx="10881360" cy="1188720"/>
+            <a:off x="658368" y="3246120"/>
+            <a:ext cx="10881360" cy="4480560"/>
           </a:xfrm>
           <a:prstGeom prst="rect">
             <a:avLst/>
@@ -5831,22 +5473,115 @@
           </a:bodyPr>
           <a:lstStyle/>
           <a:p>
-            <a:pPr algn="l">
+            <a:pPr>
               <a:lnSpc>
-                <a:spcPct val="132000"/>
+                <a:spcPct val="130000"/>
               </a:lnSpc>
               <a:spcAft>
-                <a:spcPts val="600"/>
+                <a:spcPts val="900"/>
               </a:spcAft>
             </a:pPr>
             <a:r>
-              <a:rPr sz="1300" b="0">
+              <a:rPr sz="1350" b="1">
+                <a:solidFill>
+                  <a:srgbClr val="16181A"/>
+                </a:solidFill>
+                <a:latin typeface="Arial"/>
+              </a:rPr>
+              <a:t>Why not order-1 —  </a:t>
+            </a:r>
+            <a:r>
+              <a:rPr sz="1350">
                 <a:solidFill>
                   <a:srgbClr val="6B7178"/>
                 </a:solidFill>
                 <a:latin typeface="Arial"/>
               </a:rPr>
-              <a:t>Two transition priors are compared: a uniform prior that assumes nothing about habits, and one that learns an order-1 model from the antagonist's own track. A detail worth stating plainly — if EVERY door is wired, silence proves the player stayed, so full coverage is still perfect tracking. Partial observation only exists because coverage is incomplete.</a:t>
+              <a:t>a route means the same room has different successors depending on how it was entered. Order-1 conditions only on the current room and cannot represent that.</a:t>
+            </a:r>
+          </a:p>
+          <a:p>
+            <a:pPr>
+              <a:lnSpc>
+                <a:spcPct val="130000"/>
+              </a:lnSpc>
+              <a:spcAft>
+                <a:spcPts val="900"/>
+              </a:spcAft>
+            </a:pPr>
+            <a:r>
+              <a:rPr sz="1350" b="1">
+                <a:solidFill>
+                  <a:srgbClr val="16181A"/>
+                </a:solidFill>
+                <a:latin typeface="Arial"/>
+              </a:rPr>
+              <a:t>Why not fixed high order —  </a:t>
+            </a:r>
+            <a:r>
+              <a:rPr sz="1350">
+                <a:solidFill>
+                  <a:srgbClr val="6B7178"/>
+                </a:solidFill>
+                <a:latin typeface="Arial"/>
+              </a:rPr>
+              <a:t>10 rooms and order 4 is 10,000 contexts; almost all are never seen.</a:t>
+            </a:r>
+          </a:p>
+          <a:p>
+            <a:pPr>
+              <a:lnSpc>
+                <a:spcPct val="130000"/>
+              </a:lnSpc>
+              <a:spcAft>
+                <a:spcPts val="900"/>
+              </a:spcAft>
+            </a:pPr>
+            <a:r>
+              <a:rPr sz="1350" b="1">
+                <a:solidFill>
+                  <a:srgbClr val="16181A"/>
+                </a:solidFill>
+                <a:latin typeface="Arial"/>
+              </a:rPr>
+              <a:t>Variable order resolves both —  </a:t>
+            </a:r>
+            <a:r>
+              <a:rPr sz="1350">
+                <a:solidFill>
+                  <a:srgbClr val="6B7178"/>
+                </a:solidFill>
+                <a:latin typeface="Arial"/>
+              </a:rPr>
+              <a:t>use the longest context with enough support, back off when there is not. Witten-Bell interpolation, following Begleiter et al., JAIR 22 (2004).</a:t>
+            </a:r>
+          </a:p>
+          <a:p>
+            <a:pPr>
+              <a:lnSpc>
+                <a:spcPct val="130000"/>
+              </a:lnSpc>
+              <a:spcAft>
+                <a:spcPts val="900"/>
+              </a:spcAft>
+            </a:pPr>
+            <a:r>
+              <a:rPr sz="1350" b="1">
+                <a:solidFill>
+                  <a:srgbClr val="16181A"/>
+                </a:solidFill>
+                <a:latin typeface="Arial"/>
+              </a:rPr>
+              <a:t>Action space —  </a:t>
+            </a:r>
+            <a:r>
+              <a:rPr sz="1350">
+                <a:solidFill>
+                  <a:srgbClr val="6B7178"/>
+                </a:solidFill>
+                <a:latin typeface="Arial"/>
+              </a:rPr>
+              <a:t>at each window the player takes a door OR declines to move, so the candidate set is N(v) ∪ {v}. Dwell is predicted, not assumed.</a:t>
             </a:r>
           </a:p>
         </p:txBody>
@@ -5956,7 +5691,7 @@
                 </a:solidFill>
                 <a:latin typeface="Arial"/>
               </a:rPr>
-              <a:t>Evaluation protocol and controls</a:t>
+              <a:t>The belief filter over door events</a:t>
             </a:r>
           </a:p>
         </p:txBody>
@@ -6005,17 +5740,122 @@
           </a:p>
         </p:txBody>
       </p:sp>
+      <p:sp>
+        <p:nvSpPr>
+          <p:cNvPr id="5" name="Rectangle 4"/>
+          <p:cNvSpPr/>
+          <p:nvPr/>
+        </p:nvSpPr>
+        <p:spPr>
+          <a:xfrm>
+            <a:off x="658368" y="1783080"/>
+            <a:ext cx="10881360" cy="1234440"/>
+          </a:xfrm>
+          <a:prstGeom prst="rect">
+            <a:avLst/>
+          </a:prstGeom>
+          <a:solidFill>
+            <a:srgbClr val="16181A"/>
+          </a:solidFill>
+          <a:ln>
+            <a:noFill/>
+          </a:ln>
+          <a:effectLst/>
+        </p:spPr>
+        <p:style>
+          <a:lnRef idx="1">
+            <a:schemeClr val="accent1"/>
+          </a:lnRef>
+          <a:fillRef idx="3">
+            <a:schemeClr val="accent1"/>
+          </a:fillRef>
+          <a:effectRef idx="2">
+            <a:schemeClr val="accent1"/>
+          </a:effectRef>
+          <a:fontRef idx="minor">
+            <a:schemeClr val="lt1"/>
+          </a:fontRef>
+        </p:style>
+        <p:txBody>
+          <a:bodyPr rtlCol="0" anchor="ctr"/>
+          <a:lstStyle/>
+          <a:p>
+            <a:pPr algn="ctr"/>
+          </a:p>
+        </p:txBody>
+      </p:sp>
+      <p:sp>
+        <p:nvSpPr>
+          <p:cNvPr id="6" name="TextBox 5"/>
+          <p:cNvSpPr txBox="1"/>
+          <p:nvPr/>
+        </p:nvSpPr>
+        <p:spPr>
+          <a:xfrm>
+            <a:off x="1005840" y="1975104"/>
+            <a:ext cx="10241280" cy="914400"/>
+          </a:xfrm>
+          <a:prstGeom prst="rect">
+            <a:avLst/>
+          </a:prstGeom>
+          <a:noFill/>
+        </p:spPr>
+        <p:txBody>
+          <a:bodyPr wrap="square" lIns="0" rIns="0" tIns="0" bIns="0">
+            <a:spAutoFit/>
+          </a:bodyPr>
+          <a:lstStyle/>
+          <a:p>
+            <a:pPr algn="l">
+              <a:lnSpc>
+                <a:spcPct val="160000"/>
+              </a:lnSpc>
+              <a:spcAft>
+                <a:spcPts val="400"/>
+              </a:spcAft>
+            </a:pPr>
+            <a:r>
+              <a:rPr sz="1500" b="0">
+                <a:solidFill>
+                  <a:srgbClr val="FFFFFF"/>
+                </a:solidFill>
+                <a:latin typeface="Consolas"/>
+              </a:rPr>
+              <a:t>predict    b'(c)  =  Σ_r  b(r) · T(r → c)</a:t>
+            </a:r>
+          </a:p>
+          <a:p>
+            <a:pPr algn="l">
+              <a:lnSpc>
+                <a:spcPct val="160000"/>
+              </a:lnSpc>
+              <a:spcAft>
+                <a:spcPts val="400"/>
+              </a:spcAft>
+            </a:pPr>
+            <a:r>
+              <a:rPr sz="1500" b="0">
+                <a:solidFill>
+                  <a:srgbClr val="FFFFFF"/>
+                </a:solidFill>
+                <a:latin typeface="Consolas"/>
+              </a:rPr>
+              <a:t>update     zero any state inconsistent with the evidence, renormalise</a:t>
+            </a:r>
+          </a:p>
+        </p:txBody>
+      </p:sp>
       <p:graphicFrame>
         <p:nvGraphicFramePr>
-          <p:cNvPr id="5" name="Table 4"/>
+          <p:cNvPr id="7" name="Table 6"/>
           <p:cNvGraphicFramePr>
             <a:graphicFrameLocks noGrp="1"/>
           </p:cNvGraphicFramePr>
           <p:nvPr/>
         </p:nvGraphicFramePr>
         <p:xfrm>
-          <a:off x="658368" y="1783080"/>
-          <a:ext cx="10881360" cy="2688336"/>
+          <a:off x="658368" y="3200400"/>
+          <a:ext cx="10881360" cy="1536192"/>
         </p:xfrm>
         <a:graphic>
           <a:graphicData uri="http://schemas.openxmlformats.org/drawingml/2006/table">
@@ -6025,8 +5865,8 @@
               </a:tblPr>
               <a:tblGrid>
                 <a:gridCol w="2651760"/>
-                <a:gridCol w="5120640"/>
-                <a:gridCol w="3108960"/>
+                <a:gridCol w="4572000"/>
+                <a:gridCol w="3657600"/>
               </a:tblGrid>
               <a:tr h="384048">
                 <a:tc>
@@ -6040,13 +5880,13 @@
                         </a:lnSpc>
                       </a:pPr>
                       <a:r>
-                        <a:rPr sz="900" b="1">
+                        <a:rPr sz="950" b="1">
                           <a:solidFill>
                             <a:srgbClr val="6B7178"/>
                           </a:solidFill>
                           <a:latin typeface="Arial"/>
                         </a:rPr>
-                        <a:t>Guard</a:t>
+                        <a:t>Evidence</a:t>
                       </a:r>
                     </a:p>
                   </a:txBody>
@@ -6067,13 +5907,13 @@
                         </a:lnSpc>
                       </a:pPr>
                       <a:r>
-                        <a:rPr sz="900" b="1">
+                        <a:rPr sz="950" b="1">
                           <a:solidFill>
                             <a:srgbClr val="6B7178"/>
                           </a:solidFill>
                           <a:latin typeface="Arial"/>
                         </a:rPr>
-                        <a:t>What it prevents</a:t>
+                        <a:t>What it rules out</a:t>
                       </a:r>
                     </a:p>
                   </a:txBody>
@@ -6094,13 +5934,13 @@
                         </a:lnSpc>
                       </a:pPr>
                       <a:r>
-                        <a:rPr sz="900" b="1">
+                        <a:rPr sz="950" b="1">
                           <a:solidFill>
                             <a:srgbClr val="6B7178"/>
                           </a:solidFill>
                           <a:latin typeface="Arial"/>
                         </a:rPr>
-                        <a:t>Result</a:t>
+                        <a:t>Effect on the belief</a:t>
                       </a:r>
                     </a:p>
                   </a:txBody>
@@ -6123,67 +5963,67 @@
                         </a:lnSpc>
                       </a:pPr>
                       <a:r>
-                        <a:rPr sz="1150" b="0">
-                          <a:solidFill>
-                            <a:srgbClr val="16181A"/>
-                          </a:solidFill>
-                          <a:latin typeface="Arial"/>
-                        </a:rPr>
-                        <a:t>Prequential evaluation</a:t>
-                      </a:r>
-                    </a:p>
-                  </a:txBody>
-                  <a:tcPr marL="73152" marR="73152" marT="36576" marB="36576">
-                    <a:solidFill>
-                      <a:srgbClr val="FCFCFB"/>
-                    </a:solidFill>
-                  </a:tcPr>
-                </a:tc>
-                <a:tc>
-                  <a:txBody>
-                    <a:bodyPr/>
-                    <a:lstStyle/>
-                    <a:p>
-                      <a:pPr>
-                        <a:lnSpc>
-                          <a:spcPct val="115000"/>
-                        </a:lnSpc>
-                      </a:pPr>
-                      <a:r>
-                        <a:rPr sz="1150" b="0">
-                          <a:solidFill>
-                            <a:srgbClr val="16181A"/>
-                          </a:solidFill>
-                          <a:latin typeface="Arial"/>
-                        </a:rPr>
-                        <a:t>Train/test leakage — every prediction precedes its outcome</a:t>
-                      </a:r>
-                    </a:p>
-                  </a:txBody>
-                  <a:tcPr marL="73152" marR="73152" marT="36576" marB="36576">
-                    <a:solidFill>
-                      <a:srgbClr val="FCFCFB"/>
-                    </a:solidFill>
-                  </a:tcPr>
-                </a:tc>
-                <a:tc>
-                  <a:txBody>
-                    <a:bodyPr/>
-                    <a:lstStyle/>
-                    <a:p>
-                      <a:pPr>
-                        <a:lnSpc>
-                          <a:spcPct val="115000"/>
-                        </a:lnSpc>
-                      </a:pPr>
-                      <a:r>
-                        <a:rPr sz="1150" b="0">
-                          <a:solidFill>
-                            <a:srgbClr val="16181A"/>
-                          </a:solidFill>
-                          <a:latin typeface="Arial"/>
-                        </a:rPr>
-                        <a:t>By construction</a:t>
+                        <a:rPr sz="1250" b="0">
+                          <a:solidFill>
+                            <a:srgbClr val="16181A"/>
+                          </a:solidFill>
+                          <a:latin typeface="Arial"/>
+                        </a:rPr>
+                        <a:t>Door (a,b) tripped</a:t>
+                      </a:r>
+                    </a:p>
+                  </a:txBody>
+                  <a:tcPr marL="73152" marR="73152" marT="36576" marB="36576">
+                    <a:solidFill>
+                      <a:srgbClr val="FCFCFB"/>
+                    </a:solidFill>
+                  </a:tcPr>
+                </a:tc>
+                <a:tc>
+                  <a:txBody>
+                    <a:bodyPr/>
+                    <a:lstStyle/>
+                    <a:p>
+                      <a:pPr>
+                        <a:lnSpc>
+                          <a:spcPct val="115000"/>
+                        </a:lnSpc>
+                      </a:pPr>
+                      <a:r>
+                        <a:rPr sz="1250" b="0">
+                          <a:solidFill>
+                            <a:srgbClr val="16181A"/>
+                          </a:solidFill>
+                          <a:latin typeface="Arial"/>
+                        </a:rPr>
+                        <a:t>Everything except a crossing of that door</a:t>
+                      </a:r>
+                    </a:p>
+                  </a:txBody>
+                  <a:tcPr marL="73152" marR="73152" marT="36576" marB="36576">
+                    <a:solidFill>
+                      <a:srgbClr val="FCFCFB"/>
+                    </a:solidFill>
+                  </a:tcPr>
+                </a:tc>
+                <a:tc>
+                  <a:txBody>
+                    <a:bodyPr/>
+                    <a:lstStyle/>
+                    <a:p>
+                      <a:pPr>
+                        <a:lnSpc>
+                          <a:spcPct val="115000"/>
+                        </a:lnSpc>
+                      </a:pPr>
+                      <a:r>
+                        <a:rPr sz="1250" b="0">
+                          <a:solidFill>
+                            <a:srgbClr val="16181A"/>
+                          </a:solidFill>
+                          <a:latin typeface="Arial"/>
+                        </a:rPr>
+                        <a:t>Collapses to near-certainty</a:t>
                       </a:r>
                     </a:p>
                   </a:txBody>
@@ -6206,67 +6046,67 @@
                         </a:lnSpc>
                       </a:pPr>
                       <a:r>
-                        <a:rPr sz="1150" b="0">
-                          <a:solidFill>
-                            <a:srgbClr val="16181A"/>
-                          </a:solidFill>
-                          <a:latin typeface="Arial"/>
-                        </a:rPr>
-                        <a:t>Random-player control</a:t>
-                      </a:r>
-                    </a:p>
-                  </a:txBody>
-                  <a:tcPr marL="73152" marR="73152" marT="36576" marB="36576">
-                    <a:solidFill>
-                      <a:srgbClr val="FCFCFB"/>
-                    </a:solidFill>
-                  </a:tcPr>
-                </a:tc>
-                <a:tc>
-                  <a:txBody>
-                    <a:bodyPr/>
-                    <a:lstStyle/>
-                    <a:p>
-                      <a:pPr>
-                        <a:lnSpc>
-                          <a:spcPct val="115000"/>
-                        </a:lnSpc>
-                      </a:pPr>
-                      <a:r>
-                        <a:rPr sz="1150" b="0">
-                          <a:solidFill>
-                            <a:srgbClr val="16181A"/>
-                          </a:solidFill>
-                          <a:latin typeface="Arial"/>
-                        </a:rPr>
-                        <a:t>A model that appears to predict noise</a:t>
-                      </a:r>
-                    </a:p>
-                  </a:txBody>
-                  <a:tcPr marL="73152" marR="73152" marT="36576" marB="36576">
-                    <a:solidFill>
-                      <a:srgbClr val="FCFCFB"/>
-                    </a:solidFill>
-                  </a:tcPr>
-                </a:tc>
-                <a:tc>
-                  <a:txBody>
-                    <a:bodyPr/>
-                    <a:lstStyle/>
-                    <a:p>
-                      <a:pPr>
-                        <a:lnSpc>
-                          <a:spcPct val="115000"/>
-                        </a:lnSpc>
-                      </a:pPr>
-                      <a:r>
-                        <a:rPr sz="1150" b="0">
-                          <a:solidFill>
-                            <a:srgbClr val="16181A"/>
-                          </a:solidFill>
-                          <a:latin typeface="Arial"/>
-                        </a:rPr>
-                        <a:t>26.7% vs 26.9% baseline</a:t>
+                        <a:rPr sz="1250" b="0">
+                          <a:solidFill>
+                            <a:srgbClr val="16181A"/>
+                          </a:solidFill>
+                          <a:latin typeface="Arial"/>
+                        </a:rPr>
+                        <a:t>Silence</a:t>
+                      </a:r>
+                    </a:p>
+                  </a:txBody>
+                  <a:tcPr marL="73152" marR="73152" marT="36576" marB="36576">
+                    <a:solidFill>
+                      <a:srgbClr val="FCFCFB"/>
+                    </a:solidFill>
+                  </a:tcPr>
+                </a:tc>
+                <a:tc>
+                  <a:txBody>
+                    <a:bodyPr/>
+                    <a:lstStyle/>
+                    <a:p>
+                      <a:pPr>
+                        <a:lnSpc>
+                          <a:spcPct val="115000"/>
+                        </a:lnSpc>
+                      </a:pPr>
+                      <a:r>
+                        <a:rPr sz="1250" b="0">
+                          <a:solidFill>
+                            <a:srgbClr val="16181A"/>
+                          </a:solidFill>
+                          <a:latin typeface="Arial"/>
+                        </a:rPr>
+                        <a:t>Any crossing of a WIRED door</a:t>
+                      </a:r>
+                    </a:p>
+                  </a:txBody>
+                  <a:tcPr marL="73152" marR="73152" marT="36576" marB="36576">
+                    <a:solidFill>
+                      <a:srgbClr val="FCFCFB"/>
+                    </a:solidFill>
+                  </a:tcPr>
+                </a:tc>
+                <a:tc>
+                  <a:txBody>
+                    <a:bodyPr/>
+                    <a:lstStyle/>
+                    <a:p>
+                      <a:pPr>
+                        <a:lnSpc>
+                          <a:spcPct val="115000"/>
+                        </a:lnSpc>
+                      </a:pPr>
+                      <a:r>
+                        <a:rPr sz="1250" b="0">
+                          <a:solidFill>
+                            <a:srgbClr val="16181A"/>
+                          </a:solidFill>
+                          <a:latin typeface="Arial"/>
+                        </a:rPr>
+                        <a:t>Keeps staying put and unwired crossings</a:t>
                       </a:r>
                     </a:p>
                   </a:txBody>
@@ -6289,316 +6129,67 @@
                         </a:lnSpc>
                       </a:pPr>
                       <a:r>
-                        <a:rPr sz="1150" b="0">
-                          <a:solidFill>
-                            <a:srgbClr val="16181A"/>
-                          </a:solidFill>
-                          <a:latin typeface="Arial"/>
-                        </a:rPr>
-                        <a:t>Non-learning baselines</a:t>
-                      </a:r>
-                    </a:p>
-                  </a:txBody>
-                  <a:tcPr marL="73152" marR="73152" marT="36576" marB="36576">
-                    <a:solidFill>
-                      <a:srgbClr val="FCFCFB"/>
-                    </a:solidFill>
-                  </a:tcPr>
-                </a:tc>
-                <a:tc>
-                  <a:txBody>
-                    <a:bodyPr/>
-                    <a:lstStyle/>
-                    <a:p>
-                      <a:pPr>
-                        <a:lnSpc>
-                          <a:spcPct val="115000"/>
-                        </a:lnSpc>
-                      </a:pPr>
-                      <a:r>
-                        <a:rPr sz="1150" b="0">
-                          <a:solidFill>
-                            <a:srgbClr val="16181A"/>
-                          </a:solidFill>
-                          <a:latin typeface="Arial"/>
-                        </a:rPr>
-                        <a:t>Complexity that has not earned itself</a:t>
-                      </a:r>
-                    </a:p>
-                  </a:txBody>
-                  <a:tcPr marL="73152" marR="73152" marT="36576" marB="36576">
-                    <a:solidFill>
-                      <a:srgbClr val="FCFCFB"/>
-                    </a:solidFill>
-                  </a:tcPr>
-                </a:tc>
-                <a:tc>
-                  <a:txBody>
-                    <a:bodyPr/>
-                    <a:lstStyle/>
-                    <a:p>
-                      <a:pPr>
-                        <a:lnSpc>
-                          <a:spcPct val="115000"/>
-                        </a:lnSpc>
-                      </a:pPr>
-                      <a:r>
-                        <a:rPr sz="1150" b="0">
-                          <a:solidFill>
-                            <a:srgbClr val="16181A"/>
-                          </a:solidFill>
-                          <a:latin typeface="Arial"/>
-                        </a:rPr>
-                        <a:t>Hub-camping, order-1 Markov</a:t>
-                      </a:r>
-                    </a:p>
-                  </a:txBody>
-                  <a:tcPr marL="73152" marR="73152" marT="36576" marB="36576">
-                    <a:solidFill>
-                      <a:srgbClr val="FCFCFB"/>
-                    </a:solidFill>
-                  </a:tcPr>
-                </a:tc>
-              </a:tr>
-              <a:tr h="384048">
-                <a:tc>
-                  <a:txBody>
-                    <a:bodyPr/>
-                    <a:lstStyle/>
-                    <a:p>
-                      <a:pPr>
-                        <a:lnSpc>
-                          <a:spcPct val="115000"/>
-                        </a:lnSpc>
-                      </a:pPr>
-                      <a:r>
-                        <a:rPr sz="1150" b="0">
-                          <a:solidFill>
-                            <a:srgbClr val="16181A"/>
-                          </a:solidFill>
-                          <a:latin typeface="Arial"/>
-                        </a:rPr>
-                        <a:t>Per-objective metric</a:t>
-                      </a:r>
-                    </a:p>
-                  </a:txBody>
-                  <a:tcPr marL="73152" marR="73152" marT="36576" marB="36576">
-                    <a:solidFill>
-                      <a:srgbClr val="FCFCFB"/>
-                    </a:solidFill>
-                  </a:tcPr>
-                </a:tc>
-                <a:tc>
-                  <a:txBody>
-                    <a:bodyPr/>
-                    <a:lstStyle/>
-                    <a:p>
-                      <a:pPr>
-                        <a:lnSpc>
-                          <a:spcPct val="115000"/>
-                        </a:lnSpc>
-                      </a:pPr>
-                      <a:r>
-                        <a:rPr sz="1150" b="0">
-                          <a:solidFill>
-                            <a:srgbClr val="16181A"/>
-                          </a:solidFill>
-                          <a:latin typeface="Arial"/>
-                        </a:rPr>
-                        <a:t>Strategies that look safe by achieving less</a:t>
-                      </a:r>
-                    </a:p>
-                  </a:txBody>
-                  <a:tcPr marL="73152" marR="73152" marT="36576" marB="36576">
-                    <a:solidFill>
-                      <a:srgbClr val="FCFCFB"/>
-                    </a:solidFill>
-                  </a:tcPr>
-                </a:tc>
-                <a:tc>
-                  <a:txBody>
-                    <a:bodyPr/>
-                    <a:lstStyle/>
-                    <a:p>
-                      <a:pPr>
-                        <a:lnSpc>
-                          <a:spcPct val="115000"/>
-                        </a:lnSpc>
-                      </a:pPr>
-                      <a:r>
-                        <a:rPr sz="1150" b="0">
-                          <a:solidFill>
-                            <a:srgbClr val="16181A"/>
-                          </a:solidFill>
-                          <a:latin typeface="Arial"/>
-                        </a:rPr>
-                        <a:t>Captures per completed lap</a:t>
-                      </a:r>
-                    </a:p>
-                  </a:txBody>
-                  <a:tcPr marL="73152" marR="73152" marT="36576" marB="36576">
-                    <a:solidFill>
-                      <a:srgbClr val="FCFCFB"/>
-                    </a:solidFill>
-                  </a:tcPr>
-                </a:tc>
-              </a:tr>
-              <a:tr h="384048">
-                <a:tc>
-                  <a:txBody>
-                    <a:bodyPr/>
-                    <a:lstStyle/>
-                    <a:p>
-                      <a:pPr>
-                        <a:lnSpc>
-                          <a:spcPct val="115000"/>
-                        </a:lnSpc>
-                      </a:pPr>
-                      <a:r>
-                        <a:rPr sz="1150" b="0">
-                          <a:solidFill>
-                            <a:srgbClr val="16181A"/>
-                          </a:solidFill>
-                          <a:latin typeface="Arial"/>
-                        </a:rPr>
-                        <a:t>Matched player cost</a:t>
-                      </a:r>
-                    </a:p>
-                  </a:txBody>
-                  <a:tcPr marL="73152" marR="73152" marT="36576" marB="36576">
-                    <a:solidFill>
-                      <a:srgbClr val="FCFCFB"/>
-                    </a:solidFill>
-                  </a:tcPr>
-                </a:tc>
-                <a:tc>
-                  <a:txBody>
-                    <a:bodyPr/>
-                    <a:lstStyle/>
-                    <a:p>
-                      <a:pPr>
-                        <a:lnSpc>
-                          <a:spcPct val="115000"/>
-                        </a:lnSpc>
-                      </a:pPr>
-                      <a:r>
-                        <a:rPr sz="1150" b="0">
-                          <a:solidFill>
-                            <a:srgbClr val="16181A"/>
-                          </a:solidFill>
-                          <a:latin typeface="Arial"/>
-                        </a:rPr>
-                        <a:t>Comparing players who pay different prices</a:t>
-                      </a:r>
-                    </a:p>
-                  </a:txBody>
-                  <a:tcPr marL="73152" marR="73152" marT="36576" marB="36576">
-                    <a:solidFill>
-                      <a:srgbClr val="FCFCFB"/>
-                    </a:solidFill>
-                  </a:tcPr>
-                </a:tc>
-                <a:tc>
-                  <a:txBody>
-                    <a:bodyPr/>
-                    <a:lstStyle/>
-                    <a:p>
-                      <a:pPr>
-                        <a:lnSpc>
-                          <a:spcPct val="115000"/>
-                        </a:lnSpc>
-                      </a:pPr>
-                      <a:r>
-                        <a:rPr sz="1150" b="0">
-                          <a:solidFill>
-                            <a:srgbClr val="16181A"/>
-                          </a:solidFill>
-                          <a:latin typeface="Arial"/>
-                        </a:rPr>
-                        <a:t>All strategies write pages</a:t>
-                      </a:r>
-                    </a:p>
-                  </a:txBody>
-                  <a:tcPr marL="73152" marR="73152" marT="36576" marB="36576">
-                    <a:solidFill>
-                      <a:srgbClr val="FCFCFB"/>
-                    </a:solidFill>
-                  </a:tcPr>
-                </a:tc>
-              </a:tr>
-              <a:tr h="384048">
-                <a:tc>
-                  <a:txBody>
-                    <a:bodyPr/>
-                    <a:lstStyle/>
-                    <a:p>
-                      <a:pPr>
-                        <a:lnSpc>
-                          <a:spcPct val="115000"/>
-                        </a:lnSpc>
-                      </a:pPr>
-                      <a:r>
-                        <a:rPr sz="1150" b="0">
-                          <a:solidFill>
-                            <a:srgbClr val="16181A"/>
-                          </a:solidFill>
-                          <a:latin typeface="Arial"/>
-                        </a:rPr>
-                        <a:t>9 invariant tests</a:t>
-                      </a:r>
-                    </a:p>
-                  </a:txBody>
-                  <a:tcPr marL="73152" marR="73152" marT="36576" marB="36576">
-                    <a:solidFill>
-                      <a:srgbClr val="FCFCFB"/>
-                    </a:solidFill>
-                  </a:tcPr>
-                </a:tc>
-                <a:tc>
-                  <a:txBody>
-                    <a:bodyPr/>
-                    <a:lstStyle/>
-                    <a:p>
-                      <a:pPr>
-                        <a:lnSpc>
-                          <a:spcPct val="115000"/>
-                        </a:lnSpc>
-                      </a:pPr>
-                      <a:r>
-                        <a:rPr sz="1150" b="0">
-                          <a:solidFill>
-                            <a:srgbClr val="16181A"/>
-                          </a:solidFill>
-                          <a:latin typeface="Arial"/>
-                        </a:rPr>
-                        <a:t>Soft-locks, leakage, unfair mutation</a:t>
-                      </a:r>
-                    </a:p>
-                  </a:txBody>
-                  <a:tcPr marL="73152" marR="73152" marT="36576" marB="36576">
-                    <a:solidFill>
-                      <a:srgbClr val="FCFCFB"/>
-                    </a:solidFill>
-                  </a:tcPr>
-                </a:tc>
-                <a:tc>
-                  <a:txBody>
-                    <a:bodyPr/>
-                    <a:lstStyle/>
-                    <a:p>
-                      <a:pPr>
-                        <a:lnSpc>
-                          <a:spcPct val="115000"/>
-                        </a:lnSpc>
-                      </a:pPr>
-                      <a:r>
-                        <a:rPr sz="1150" b="0">
-                          <a:solidFill>
-                            <a:srgbClr val="16181A"/>
-                          </a:solidFill>
-                          <a:latin typeface="Arial"/>
-                        </a:rPr>
-                        <a:t>9/9 passing</a:t>
+                        <a:rPr sz="1250" b="0">
+                          <a:solidFill>
+                            <a:srgbClr val="16181A"/>
+                          </a:solidFill>
+                          <a:latin typeface="Arial"/>
+                        </a:rPr>
+                        <a:t>Co-location</a:t>
+                      </a:r>
+                    </a:p>
+                  </a:txBody>
+                  <a:tcPr marL="73152" marR="73152" marT="36576" marB="36576">
+                    <a:solidFill>
+                      <a:srgbClr val="FCFCFB"/>
+                    </a:solidFill>
+                  </a:tcPr>
+                </a:tc>
+                <a:tc>
+                  <a:txBody>
+                    <a:bodyPr/>
+                    <a:lstStyle/>
+                    <a:p>
+                      <a:pPr>
+                        <a:lnSpc>
+                          <a:spcPct val="115000"/>
+                        </a:lnSpc>
+                      </a:pPr>
+                      <a:r>
+                        <a:rPr sz="1250" b="0">
+                          <a:solidFill>
+                            <a:srgbClr val="16181A"/>
+                          </a:solidFill>
+                          <a:latin typeface="Arial"/>
+                        </a:rPr>
+                        <a:t>Everything else</a:t>
+                      </a:r>
+                    </a:p>
+                  </a:txBody>
+                  <a:tcPr marL="73152" marR="73152" marT="36576" marB="36576">
+                    <a:solidFill>
+                      <a:srgbClr val="FCFCFB"/>
+                    </a:solidFill>
+                  </a:tcPr>
+                </a:tc>
+                <a:tc>
+                  <a:txBody>
+                    <a:bodyPr/>
+                    <a:lstStyle/>
+                    <a:p>
+                      <a:pPr>
+                        <a:lnSpc>
+                          <a:spcPct val="115000"/>
+                        </a:lnSpc>
+                      </a:pPr>
+                      <a:r>
+                        <a:rPr sz="1250" b="0">
+                          <a:solidFill>
+                            <a:srgbClr val="16181A"/>
+                          </a:solidFill>
+                          <a:latin typeface="Arial"/>
+                        </a:rPr>
+                        <a:t>Collapses to certainty</a:t>
                       </a:r>
                     </a:p>
                   </a:txBody>
@@ -6615,14 +6206,14 @@
       </p:graphicFrame>
       <p:sp>
         <p:nvSpPr>
-          <p:cNvPr id="6" name="TextBox 5"/>
+          <p:cNvPr id="8" name="TextBox 7"/>
           <p:cNvSpPr txBox="1"/>
           <p:nvPr/>
         </p:nvSpPr>
         <p:spPr>
           <a:xfrm>
-            <a:off x="658368" y="5029200"/>
-            <a:ext cx="10881360" cy="914400"/>
+            <a:off x="658368" y="4754880"/>
+            <a:ext cx="10881360" cy="1188720"/>
           </a:xfrm>
           <a:prstGeom prst="rect">
             <a:avLst/>
@@ -6637,7 +6228,7 @@
           <a:p>
             <a:pPr algn="l">
               <a:lnSpc>
-                <a:spcPct val="130000"/>
+                <a:spcPct val="132000"/>
               </a:lnSpc>
               <a:spcAft>
                 <a:spcPts val="600"/>
@@ -6650,7 +6241,7 @@
                 </a:solidFill>
                 <a:latin typeface="Arial"/>
               </a:rPr>
-              <a:t>The control is the load-bearing one. Against a random player the model must NOT beat baseline — and it does not. Two of this cycle's findings came from noticing that a strategy looked good only because it was measured per window rather than per objective.</a:t>
+              <a:t>Two transition priors are compared: a uniform prior that assumes nothing about habits, and one that learns an order-1 model from the antagonist's own track. A detail worth stating plainly — if EVERY door is wired, silence proves the player stayed, so full coverage is still perfect tracking. Partial observation only exists because coverage is incomplete.</a:t>
             </a:r>
           </a:p>
         </p:txBody>
@@ -6718,7 +6309,7 @@
                 </a:solidFill>
                 <a:latin typeface="Arial"/>
               </a:rPr>
-              <a:t>RESULTS</a:t>
+              <a:t>TECHNICAL ACCURACY</a:t>
             </a:r>
           </a:p>
         </p:txBody>
@@ -6760,7 +6351,7 @@
                 </a:solidFill>
                 <a:latin typeface="Arial"/>
               </a:rPr>
-              <a:t>Next-move prediction</a:t>
+              <a:t>Evaluation protocol and controls</a:t>
             </a:r>
           </a:p>
         </p:txBody>
@@ -6809,30 +6400,614 @@
           </a:p>
         </p:txBody>
       </p:sp>
-      <p:pic>
-        <p:nvPicPr>
-          <p:cNvPr id="5" name="Picture 4" descr="fig_accuracy.png"/>
-          <p:cNvPicPr>
-            <a:picLocks noChangeAspect="1"/>
-          </p:cNvPicPr>
+      <p:graphicFrame>
+        <p:nvGraphicFramePr>
+          <p:cNvPr id="5" name="Table 4"/>
+          <p:cNvGraphicFramePr>
+            <a:graphicFrameLocks noGrp="1"/>
+          </p:cNvGraphicFramePr>
           <p:nvPr/>
-        </p:nvPicPr>
-        <p:blipFill>
-          <a:blip r:embed="rId2"/>
-          <a:stretch>
-            <a:fillRect/>
-          </a:stretch>
-        </p:blipFill>
-        <p:spPr>
-          <a:xfrm>
-            <a:off x="2075688" y="1691640"/>
-            <a:ext cx="8046720" cy="4121491"/>
-          </a:xfrm>
-          <a:prstGeom prst="rect">
-            <a:avLst/>
-          </a:prstGeom>
-        </p:spPr>
-      </p:pic>
+        </p:nvGraphicFramePr>
+        <p:xfrm>
+          <a:off x="658368" y="1783080"/>
+          <a:ext cx="10881360" cy="2688336"/>
+        </p:xfrm>
+        <a:graphic>
+          <a:graphicData uri="http://schemas.openxmlformats.org/drawingml/2006/table">
+            <a:tbl>
+              <a:tblPr firstRow="1" bandRow="1">
+                <a:tableStyleId>{5C22544A-7EE6-4342-B048-85BDC9FD1C3A}</a:tableStyleId>
+              </a:tblPr>
+              <a:tblGrid>
+                <a:gridCol w="2651760"/>
+                <a:gridCol w="5120640"/>
+                <a:gridCol w="3108960"/>
+              </a:tblGrid>
+              <a:tr h="384048">
+                <a:tc>
+                  <a:txBody>
+                    <a:bodyPr/>
+                    <a:lstStyle/>
+                    <a:p>
+                      <a:pPr>
+                        <a:lnSpc>
+                          <a:spcPct val="115000"/>
+                        </a:lnSpc>
+                      </a:pPr>
+                      <a:r>
+                        <a:rPr sz="900" b="1">
+                          <a:solidFill>
+                            <a:srgbClr val="6B7178"/>
+                          </a:solidFill>
+                          <a:latin typeface="Arial"/>
+                        </a:rPr>
+                        <a:t>Guard</a:t>
+                      </a:r>
+                    </a:p>
+                  </a:txBody>
+                  <a:tcPr marL="73152" marR="73152" marT="36576" marB="36576">
+                    <a:solidFill>
+                      <a:srgbClr val="F4F6F8"/>
+                    </a:solidFill>
+                  </a:tcPr>
+                </a:tc>
+                <a:tc>
+                  <a:txBody>
+                    <a:bodyPr/>
+                    <a:lstStyle/>
+                    <a:p>
+                      <a:pPr>
+                        <a:lnSpc>
+                          <a:spcPct val="115000"/>
+                        </a:lnSpc>
+                      </a:pPr>
+                      <a:r>
+                        <a:rPr sz="900" b="1">
+                          <a:solidFill>
+                            <a:srgbClr val="6B7178"/>
+                          </a:solidFill>
+                          <a:latin typeface="Arial"/>
+                        </a:rPr>
+                        <a:t>What it prevents</a:t>
+                      </a:r>
+                    </a:p>
+                  </a:txBody>
+                  <a:tcPr marL="73152" marR="73152" marT="36576" marB="36576">
+                    <a:solidFill>
+                      <a:srgbClr val="F4F6F8"/>
+                    </a:solidFill>
+                  </a:tcPr>
+                </a:tc>
+                <a:tc>
+                  <a:txBody>
+                    <a:bodyPr/>
+                    <a:lstStyle/>
+                    <a:p>
+                      <a:pPr>
+                        <a:lnSpc>
+                          <a:spcPct val="115000"/>
+                        </a:lnSpc>
+                      </a:pPr>
+                      <a:r>
+                        <a:rPr sz="900" b="1">
+                          <a:solidFill>
+                            <a:srgbClr val="6B7178"/>
+                          </a:solidFill>
+                          <a:latin typeface="Arial"/>
+                        </a:rPr>
+                        <a:t>Result</a:t>
+                      </a:r>
+                    </a:p>
+                  </a:txBody>
+                  <a:tcPr marL="73152" marR="73152" marT="36576" marB="36576">
+                    <a:solidFill>
+                      <a:srgbClr val="F4F6F8"/>
+                    </a:solidFill>
+                  </a:tcPr>
+                </a:tc>
+              </a:tr>
+              <a:tr h="384048">
+                <a:tc>
+                  <a:txBody>
+                    <a:bodyPr/>
+                    <a:lstStyle/>
+                    <a:p>
+                      <a:pPr>
+                        <a:lnSpc>
+                          <a:spcPct val="115000"/>
+                        </a:lnSpc>
+                      </a:pPr>
+                      <a:r>
+                        <a:rPr sz="1150" b="0">
+                          <a:solidFill>
+                            <a:srgbClr val="16181A"/>
+                          </a:solidFill>
+                          <a:latin typeface="Arial"/>
+                        </a:rPr>
+                        <a:t>Prequential evaluation</a:t>
+                      </a:r>
+                    </a:p>
+                  </a:txBody>
+                  <a:tcPr marL="73152" marR="73152" marT="36576" marB="36576">
+                    <a:solidFill>
+                      <a:srgbClr val="FCFCFB"/>
+                    </a:solidFill>
+                  </a:tcPr>
+                </a:tc>
+                <a:tc>
+                  <a:txBody>
+                    <a:bodyPr/>
+                    <a:lstStyle/>
+                    <a:p>
+                      <a:pPr>
+                        <a:lnSpc>
+                          <a:spcPct val="115000"/>
+                        </a:lnSpc>
+                      </a:pPr>
+                      <a:r>
+                        <a:rPr sz="1150" b="0">
+                          <a:solidFill>
+                            <a:srgbClr val="16181A"/>
+                          </a:solidFill>
+                          <a:latin typeface="Arial"/>
+                        </a:rPr>
+                        <a:t>Train/test leakage — every prediction precedes its outcome</a:t>
+                      </a:r>
+                    </a:p>
+                  </a:txBody>
+                  <a:tcPr marL="73152" marR="73152" marT="36576" marB="36576">
+                    <a:solidFill>
+                      <a:srgbClr val="FCFCFB"/>
+                    </a:solidFill>
+                  </a:tcPr>
+                </a:tc>
+                <a:tc>
+                  <a:txBody>
+                    <a:bodyPr/>
+                    <a:lstStyle/>
+                    <a:p>
+                      <a:pPr>
+                        <a:lnSpc>
+                          <a:spcPct val="115000"/>
+                        </a:lnSpc>
+                      </a:pPr>
+                      <a:r>
+                        <a:rPr sz="1150" b="0">
+                          <a:solidFill>
+                            <a:srgbClr val="16181A"/>
+                          </a:solidFill>
+                          <a:latin typeface="Arial"/>
+                        </a:rPr>
+                        <a:t>By construction</a:t>
+                      </a:r>
+                    </a:p>
+                  </a:txBody>
+                  <a:tcPr marL="73152" marR="73152" marT="36576" marB="36576">
+                    <a:solidFill>
+                      <a:srgbClr val="FCFCFB"/>
+                    </a:solidFill>
+                  </a:tcPr>
+                </a:tc>
+              </a:tr>
+              <a:tr h="384048">
+                <a:tc>
+                  <a:txBody>
+                    <a:bodyPr/>
+                    <a:lstStyle/>
+                    <a:p>
+                      <a:pPr>
+                        <a:lnSpc>
+                          <a:spcPct val="115000"/>
+                        </a:lnSpc>
+                      </a:pPr>
+                      <a:r>
+                        <a:rPr sz="1150" b="0">
+                          <a:solidFill>
+                            <a:srgbClr val="16181A"/>
+                          </a:solidFill>
+                          <a:latin typeface="Arial"/>
+                        </a:rPr>
+                        <a:t>Random-player control</a:t>
+                      </a:r>
+                    </a:p>
+                  </a:txBody>
+                  <a:tcPr marL="73152" marR="73152" marT="36576" marB="36576">
+                    <a:solidFill>
+                      <a:srgbClr val="FCFCFB"/>
+                    </a:solidFill>
+                  </a:tcPr>
+                </a:tc>
+                <a:tc>
+                  <a:txBody>
+                    <a:bodyPr/>
+                    <a:lstStyle/>
+                    <a:p>
+                      <a:pPr>
+                        <a:lnSpc>
+                          <a:spcPct val="115000"/>
+                        </a:lnSpc>
+                      </a:pPr>
+                      <a:r>
+                        <a:rPr sz="1150" b="0">
+                          <a:solidFill>
+                            <a:srgbClr val="16181A"/>
+                          </a:solidFill>
+                          <a:latin typeface="Arial"/>
+                        </a:rPr>
+                        <a:t>A model that appears to predict noise</a:t>
+                      </a:r>
+                    </a:p>
+                  </a:txBody>
+                  <a:tcPr marL="73152" marR="73152" marT="36576" marB="36576">
+                    <a:solidFill>
+                      <a:srgbClr val="FCFCFB"/>
+                    </a:solidFill>
+                  </a:tcPr>
+                </a:tc>
+                <a:tc>
+                  <a:txBody>
+                    <a:bodyPr/>
+                    <a:lstStyle/>
+                    <a:p>
+                      <a:pPr>
+                        <a:lnSpc>
+                          <a:spcPct val="115000"/>
+                        </a:lnSpc>
+                      </a:pPr>
+                      <a:r>
+                        <a:rPr sz="1150" b="0">
+                          <a:solidFill>
+                            <a:srgbClr val="16181A"/>
+                          </a:solidFill>
+                          <a:latin typeface="Arial"/>
+                        </a:rPr>
+                        <a:t>26.7% vs 26.9% baseline</a:t>
+                      </a:r>
+                    </a:p>
+                  </a:txBody>
+                  <a:tcPr marL="73152" marR="73152" marT="36576" marB="36576">
+                    <a:solidFill>
+                      <a:srgbClr val="FCFCFB"/>
+                    </a:solidFill>
+                  </a:tcPr>
+                </a:tc>
+              </a:tr>
+              <a:tr h="384048">
+                <a:tc>
+                  <a:txBody>
+                    <a:bodyPr/>
+                    <a:lstStyle/>
+                    <a:p>
+                      <a:pPr>
+                        <a:lnSpc>
+                          <a:spcPct val="115000"/>
+                        </a:lnSpc>
+                      </a:pPr>
+                      <a:r>
+                        <a:rPr sz="1150" b="0">
+                          <a:solidFill>
+                            <a:srgbClr val="16181A"/>
+                          </a:solidFill>
+                          <a:latin typeface="Arial"/>
+                        </a:rPr>
+                        <a:t>Non-learning baselines</a:t>
+                      </a:r>
+                    </a:p>
+                  </a:txBody>
+                  <a:tcPr marL="73152" marR="73152" marT="36576" marB="36576">
+                    <a:solidFill>
+                      <a:srgbClr val="FCFCFB"/>
+                    </a:solidFill>
+                  </a:tcPr>
+                </a:tc>
+                <a:tc>
+                  <a:txBody>
+                    <a:bodyPr/>
+                    <a:lstStyle/>
+                    <a:p>
+                      <a:pPr>
+                        <a:lnSpc>
+                          <a:spcPct val="115000"/>
+                        </a:lnSpc>
+                      </a:pPr>
+                      <a:r>
+                        <a:rPr sz="1150" b="0">
+                          <a:solidFill>
+                            <a:srgbClr val="16181A"/>
+                          </a:solidFill>
+                          <a:latin typeface="Arial"/>
+                        </a:rPr>
+                        <a:t>Complexity that has not earned itself</a:t>
+                      </a:r>
+                    </a:p>
+                  </a:txBody>
+                  <a:tcPr marL="73152" marR="73152" marT="36576" marB="36576">
+                    <a:solidFill>
+                      <a:srgbClr val="FCFCFB"/>
+                    </a:solidFill>
+                  </a:tcPr>
+                </a:tc>
+                <a:tc>
+                  <a:txBody>
+                    <a:bodyPr/>
+                    <a:lstStyle/>
+                    <a:p>
+                      <a:pPr>
+                        <a:lnSpc>
+                          <a:spcPct val="115000"/>
+                        </a:lnSpc>
+                      </a:pPr>
+                      <a:r>
+                        <a:rPr sz="1150" b="0">
+                          <a:solidFill>
+                            <a:srgbClr val="16181A"/>
+                          </a:solidFill>
+                          <a:latin typeface="Arial"/>
+                        </a:rPr>
+                        <a:t>Hub-camping, order-1 Markov</a:t>
+                      </a:r>
+                    </a:p>
+                  </a:txBody>
+                  <a:tcPr marL="73152" marR="73152" marT="36576" marB="36576">
+                    <a:solidFill>
+                      <a:srgbClr val="FCFCFB"/>
+                    </a:solidFill>
+                  </a:tcPr>
+                </a:tc>
+              </a:tr>
+              <a:tr h="384048">
+                <a:tc>
+                  <a:txBody>
+                    <a:bodyPr/>
+                    <a:lstStyle/>
+                    <a:p>
+                      <a:pPr>
+                        <a:lnSpc>
+                          <a:spcPct val="115000"/>
+                        </a:lnSpc>
+                      </a:pPr>
+                      <a:r>
+                        <a:rPr sz="1150" b="0">
+                          <a:solidFill>
+                            <a:srgbClr val="16181A"/>
+                          </a:solidFill>
+                          <a:latin typeface="Arial"/>
+                        </a:rPr>
+                        <a:t>Per-objective metric</a:t>
+                      </a:r>
+                    </a:p>
+                  </a:txBody>
+                  <a:tcPr marL="73152" marR="73152" marT="36576" marB="36576">
+                    <a:solidFill>
+                      <a:srgbClr val="FCFCFB"/>
+                    </a:solidFill>
+                  </a:tcPr>
+                </a:tc>
+                <a:tc>
+                  <a:txBody>
+                    <a:bodyPr/>
+                    <a:lstStyle/>
+                    <a:p>
+                      <a:pPr>
+                        <a:lnSpc>
+                          <a:spcPct val="115000"/>
+                        </a:lnSpc>
+                      </a:pPr>
+                      <a:r>
+                        <a:rPr sz="1150" b="0">
+                          <a:solidFill>
+                            <a:srgbClr val="16181A"/>
+                          </a:solidFill>
+                          <a:latin typeface="Arial"/>
+                        </a:rPr>
+                        <a:t>Strategies that look safe by achieving less</a:t>
+                      </a:r>
+                    </a:p>
+                  </a:txBody>
+                  <a:tcPr marL="73152" marR="73152" marT="36576" marB="36576">
+                    <a:solidFill>
+                      <a:srgbClr val="FCFCFB"/>
+                    </a:solidFill>
+                  </a:tcPr>
+                </a:tc>
+                <a:tc>
+                  <a:txBody>
+                    <a:bodyPr/>
+                    <a:lstStyle/>
+                    <a:p>
+                      <a:pPr>
+                        <a:lnSpc>
+                          <a:spcPct val="115000"/>
+                        </a:lnSpc>
+                      </a:pPr>
+                      <a:r>
+                        <a:rPr sz="1150" b="0">
+                          <a:solidFill>
+                            <a:srgbClr val="16181A"/>
+                          </a:solidFill>
+                          <a:latin typeface="Arial"/>
+                        </a:rPr>
+                        <a:t>Captures per completed lap</a:t>
+                      </a:r>
+                    </a:p>
+                  </a:txBody>
+                  <a:tcPr marL="73152" marR="73152" marT="36576" marB="36576">
+                    <a:solidFill>
+                      <a:srgbClr val="FCFCFB"/>
+                    </a:solidFill>
+                  </a:tcPr>
+                </a:tc>
+              </a:tr>
+              <a:tr h="384048">
+                <a:tc>
+                  <a:txBody>
+                    <a:bodyPr/>
+                    <a:lstStyle/>
+                    <a:p>
+                      <a:pPr>
+                        <a:lnSpc>
+                          <a:spcPct val="115000"/>
+                        </a:lnSpc>
+                      </a:pPr>
+                      <a:r>
+                        <a:rPr sz="1150" b="0">
+                          <a:solidFill>
+                            <a:srgbClr val="16181A"/>
+                          </a:solidFill>
+                          <a:latin typeface="Arial"/>
+                        </a:rPr>
+                        <a:t>Matched player cost</a:t>
+                      </a:r>
+                    </a:p>
+                  </a:txBody>
+                  <a:tcPr marL="73152" marR="73152" marT="36576" marB="36576">
+                    <a:solidFill>
+                      <a:srgbClr val="FCFCFB"/>
+                    </a:solidFill>
+                  </a:tcPr>
+                </a:tc>
+                <a:tc>
+                  <a:txBody>
+                    <a:bodyPr/>
+                    <a:lstStyle/>
+                    <a:p>
+                      <a:pPr>
+                        <a:lnSpc>
+                          <a:spcPct val="115000"/>
+                        </a:lnSpc>
+                      </a:pPr>
+                      <a:r>
+                        <a:rPr sz="1150" b="0">
+                          <a:solidFill>
+                            <a:srgbClr val="16181A"/>
+                          </a:solidFill>
+                          <a:latin typeface="Arial"/>
+                        </a:rPr>
+                        <a:t>Comparing players who pay different prices</a:t>
+                      </a:r>
+                    </a:p>
+                  </a:txBody>
+                  <a:tcPr marL="73152" marR="73152" marT="36576" marB="36576">
+                    <a:solidFill>
+                      <a:srgbClr val="FCFCFB"/>
+                    </a:solidFill>
+                  </a:tcPr>
+                </a:tc>
+                <a:tc>
+                  <a:txBody>
+                    <a:bodyPr/>
+                    <a:lstStyle/>
+                    <a:p>
+                      <a:pPr>
+                        <a:lnSpc>
+                          <a:spcPct val="115000"/>
+                        </a:lnSpc>
+                      </a:pPr>
+                      <a:r>
+                        <a:rPr sz="1150" b="0">
+                          <a:solidFill>
+                            <a:srgbClr val="16181A"/>
+                          </a:solidFill>
+                          <a:latin typeface="Arial"/>
+                        </a:rPr>
+                        <a:t>All strategies write pages</a:t>
+                      </a:r>
+                    </a:p>
+                  </a:txBody>
+                  <a:tcPr marL="73152" marR="73152" marT="36576" marB="36576">
+                    <a:solidFill>
+                      <a:srgbClr val="FCFCFB"/>
+                    </a:solidFill>
+                  </a:tcPr>
+                </a:tc>
+              </a:tr>
+              <a:tr h="384048">
+                <a:tc>
+                  <a:txBody>
+                    <a:bodyPr/>
+                    <a:lstStyle/>
+                    <a:p>
+                      <a:pPr>
+                        <a:lnSpc>
+                          <a:spcPct val="115000"/>
+                        </a:lnSpc>
+                      </a:pPr>
+                      <a:r>
+                        <a:rPr sz="1150" b="0">
+                          <a:solidFill>
+                            <a:srgbClr val="16181A"/>
+                          </a:solidFill>
+                          <a:latin typeface="Arial"/>
+                        </a:rPr>
+                        <a:t>9 invariant tests</a:t>
+                      </a:r>
+                    </a:p>
+                  </a:txBody>
+                  <a:tcPr marL="73152" marR="73152" marT="36576" marB="36576">
+                    <a:solidFill>
+                      <a:srgbClr val="FCFCFB"/>
+                    </a:solidFill>
+                  </a:tcPr>
+                </a:tc>
+                <a:tc>
+                  <a:txBody>
+                    <a:bodyPr/>
+                    <a:lstStyle/>
+                    <a:p>
+                      <a:pPr>
+                        <a:lnSpc>
+                          <a:spcPct val="115000"/>
+                        </a:lnSpc>
+                      </a:pPr>
+                      <a:r>
+                        <a:rPr sz="1150" b="0">
+                          <a:solidFill>
+                            <a:srgbClr val="16181A"/>
+                          </a:solidFill>
+                          <a:latin typeface="Arial"/>
+                        </a:rPr>
+                        <a:t>Soft-locks, leakage, unfair mutation</a:t>
+                      </a:r>
+                    </a:p>
+                  </a:txBody>
+                  <a:tcPr marL="73152" marR="73152" marT="36576" marB="36576">
+                    <a:solidFill>
+                      <a:srgbClr val="FCFCFB"/>
+                    </a:solidFill>
+                  </a:tcPr>
+                </a:tc>
+                <a:tc>
+                  <a:txBody>
+                    <a:bodyPr/>
+                    <a:lstStyle/>
+                    <a:p>
+                      <a:pPr>
+                        <a:lnSpc>
+                          <a:spcPct val="115000"/>
+                        </a:lnSpc>
+                      </a:pPr>
+                      <a:r>
+                        <a:rPr sz="1150" b="0">
+                          <a:solidFill>
+                            <a:srgbClr val="16181A"/>
+                          </a:solidFill>
+                          <a:latin typeface="Arial"/>
+                        </a:rPr>
+                        <a:t>9/9 passing</a:t>
+                      </a:r>
+                    </a:p>
+                  </a:txBody>
+                  <a:tcPr marL="73152" marR="73152" marT="36576" marB="36576">
+                    <a:solidFill>
+                      <a:srgbClr val="FCFCFB"/>
+                    </a:solidFill>
+                  </a:tcPr>
+                </a:tc>
+              </a:tr>
+            </a:tbl>
+          </a:graphicData>
+        </a:graphic>
+      </p:graphicFrame>
       <p:sp>
         <p:nvSpPr>
           <p:cNvPr id="6" name="TextBox 5"/>
@@ -6841,8 +7016,8 @@
         </p:nvSpPr>
         <p:spPr>
           <a:xfrm>
-            <a:off x="658368" y="6035040"/>
-            <a:ext cx="10881360" cy="548640"/>
+            <a:off x="658368" y="5029200"/>
+            <a:ext cx="10881360" cy="914400"/>
           </a:xfrm>
           <a:prstGeom prst="rect">
             <a:avLst/>
@@ -6870,7 +7045,7 @@
                 </a:solidFill>
                 <a:latin typeface="Arial"/>
               </a:rPr>
-              <a:t>Read the control first: on a random player VOMM scores 26.7% against a 26.9% baseline — identical. The gains on structured players are learned habit, not leakage.</a:t>
+              <a:t>The control is the load-bearing one. Against a random player the model must NOT beat baseline — and it does not. Two of this cycle's findings came from noticing that a strategy looked good only because it was measured per window rather than per objective.</a:t>
             </a:r>
           </a:p>
         </p:txBody>
@@ -6980,7 +7155,7 @@
                 </a:solidFill>
                 <a:latin typeface="Arial"/>
               </a:rPr>
-              <a:t>It learned where you stop to write</a:t>
+              <a:t>Next-move prediction</a:t>
             </a:r>
           </a:p>
         </p:txBody>
@@ -7031,7 +7206,7 @@
       </p:sp>
       <p:pic>
         <p:nvPicPr>
-          <p:cNvPr id="5" name="Picture 4" descr="fig_dwell.png"/>
+          <p:cNvPr id="5" name="Picture 4" descr="fig_accuracy.png"/>
           <p:cNvPicPr>
             <a:picLocks noChangeAspect="1"/>
           </p:cNvPicPr>
@@ -7045,8 +7220,8 @@
         </p:blipFill>
         <p:spPr>
           <a:xfrm>
-            <a:off x="2286000" y="1664208"/>
-            <a:ext cx="7680960" cy="3746810"/>
+            <a:off x="2075688" y="1691640"/>
+            <a:ext cx="8046720" cy="4121491"/>
           </a:xfrm>
           <a:prstGeom prst="rect">
             <a:avLst/>
@@ -7061,8 +7236,8 @@
         </p:nvSpPr>
         <p:spPr>
           <a:xfrm>
-            <a:off x="658368" y="5806440"/>
-            <a:ext cx="10881360" cy="822960"/>
+            <a:off x="658368" y="6035040"/>
+            <a:ext cx="10881360" cy="548640"/>
           </a:xfrm>
           <a:prstGeom prst="rect">
             <a:avLst/>
@@ -7084,13 +7259,13 @@
               </a:spcAft>
             </a:pPr>
             <a:r>
-              <a:rPr sz="1250" b="0">
+              <a:rPr sz="1300" b="0">
                 <a:solidFill>
                   <a:srgbClr val="6B7178"/>
                 </a:solidFill>
                 <a:latin typeface="Arial"/>
               </a:rPr>
-              <a:t>Dwell is behaviour, not a parameter. Predicting 'will they decline this window?' scores 70% against a 54% majority-class baseline — 100% in rooms with nothing to record, 67% where a codebook is. The uncertainty sits exactly where the real variation is.</a:t>
+              <a:t>Read the control first: on a random player VOMM scores 26.7% against a 26.9% baseline — identical. The gains on structured players are learned habit, not leakage.</a:t>
             </a:r>
           </a:p>
         </p:txBody>
@@ -7200,7 +7375,7 @@
                 </a:solidFill>
                 <a:latin typeface="Arial"/>
               </a:rPr>
-              <a:t>The advantage grows with the facility</a:t>
+              <a:t>It learned where you stop to write</a:t>
             </a:r>
           </a:p>
         </p:txBody>
@@ -7251,7 +7426,7 @@
       </p:sp>
       <p:pic>
         <p:nvPicPr>
-          <p:cNvPr id="5" name="Picture 4" descr="fig_scaling.png"/>
+          <p:cNvPr id="5" name="Picture 4" descr="fig_dwell.png"/>
           <p:cNvPicPr>
             <a:picLocks noChangeAspect="1"/>
           </p:cNvPicPr>
@@ -7265,8 +7440,8 @@
         </p:blipFill>
         <p:spPr>
           <a:xfrm>
-            <a:off x="2286000" y="1691640"/>
-            <a:ext cx="7680960" cy="4027820"/>
+            <a:off x="2286000" y="1664208"/>
+            <a:ext cx="7680960" cy="3746810"/>
           </a:xfrm>
           <a:prstGeom prst="rect">
             <a:avLst/>
@@ -7281,8 +7456,8 @@
         </p:nvSpPr>
         <p:spPr>
           <a:xfrm>
-            <a:off x="658368" y="5623560"/>
-            <a:ext cx="10881360" cy="914400"/>
+            <a:off x="658368" y="5806440"/>
+            <a:ext cx="10881360" cy="822960"/>
           </a:xfrm>
           <a:prstGeom prst="rect">
             <a:avLst/>
@@ -7310,7 +7485,7 @@
                 </a:solidFill>
                 <a:latin typeface="Arial"/>
               </a:rPr>
-              <a:t>On 10 rooms with one dominant junction, 'camp the busiest room' is competitive for reasons unrelated to intelligence. As the facility grows it decays fastest and the interceptor's advantage widens from 1.15× to 1.57×.</a:t>
+              <a:t>Dwell is behaviour, not a parameter. Predicting 'will they decline this window?' scores 70% against a 54% majority-class baseline — 100% in rooms with nothing to record, 67% where a codebook is. The uncertainty sits exactly where the real variation is.</a:t>
             </a:r>
           </a:p>
         </p:txBody>
@@ -7420,7 +7595,7 @@
                 </a:solidFill>
                 <a:latin typeface="Arial"/>
               </a:rPr>
-              <a:t>World editing imposes a real cost</a:t>
+              <a:t>The advantage grows with the facility</a:t>
             </a:r>
           </a:p>
         </p:txBody>
@@ -7471,7 +7646,7 @@
       </p:sp>
       <p:pic>
         <p:nvPicPr>
-          <p:cNvPr id="5" name="Picture 4" descr="fig_disruption.png"/>
+          <p:cNvPr id="5" name="Picture 4" descr="fig_scaling.png"/>
           <p:cNvPicPr>
             <a:picLocks noChangeAspect="1"/>
           </p:cNvPicPr>
@@ -7485,8 +7660,8 @@
         </p:blipFill>
         <p:spPr>
           <a:xfrm>
-            <a:off x="2286000" y="1737360"/>
-            <a:ext cx="7680960" cy="3653140"/>
+            <a:off x="2286000" y="1691640"/>
+            <a:ext cx="7680960" cy="4027820"/>
           </a:xfrm>
           <a:prstGeom prst="rect">
             <a:avLst/>
@@ -7530,7 +7705,7 @@
                 </a:solidFill>
                 <a:latin typeface="Arial"/>
               </a:rPr>
-              <a:t>The entity is removed here, isolating topology mutation from hunting. Sealing and rewiring ahead of the player raises the cost of an objective by 54% (20.9 to 32.3 moves per lap). Every mutation passed a reachability check, so no run was ever soft-locked.</a:t>
+              <a:t>On 10 rooms with one dominant junction, 'camp the busiest room' is competitive for reasons unrelated to intelligence. As the facility grows it decays fastest and the interceptor's advantage widens from 1.15× to 1.57×.</a:t>
             </a:r>
           </a:p>
         </p:txBody>
@@ -7598,7 +7773,7 @@
                 </a:solidFill>
                 <a:latin typeface="Arial"/>
               </a:rPr>
-              <a:t>RESULTS — NEW</a:t>
+              <a:t>RESULTS</a:t>
             </a:r>
           </a:p>
         </p:txBody>
@@ -7640,7 +7815,7 @@
                 </a:solidFill>
                 <a:latin typeface="Arial"/>
               </a:rPr>
-              <a:t>What the sensors actually buy the antagonist</a:t>
+              <a:t>World editing imposes a real cost</a:t>
             </a:r>
           </a:p>
         </p:txBody>
@@ -7691,7 +7866,7 @@
       </p:sp>
       <p:pic>
         <p:nvPicPr>
-          <p:cNvPr id="5" name="Picture 4" descr="fig_localisation.png"/>
+          <p:cNvPr id="5" name="Picture 4" descr="fig_disruption.png"/>
           <p:cNvPicPr>
             <a:picLocks noChangeAspect="1"/>
           </p:cNvPicPr>
@@ -7705,8 +7880,8 @@
         </p:blipFill>
         <p:spPr>
           <a:xfrm>
-            <a:off x="2286000" y="1691640"/>
-            <a:ext cx="7680960" cy="3840480"/>
+            <a:off x="2286000" y="1737360"/>
+            <a:ext cx="7680960" cy="3653140"/>
           </a:xfrm>
           <a:prstGeom prst="rect">
             <a:avLst/>
@@ -7750,7 +7925,7 @@
                 </a:solidFill>
                 <a:latin typeface="Arial"/>
               </a:rPr>
-              <a:t>A fully wired facility leaks everything: with a sensor on every door, silence proves the player stayed, so tracking is essentially perfect. Localisation falls roughly linearly as coverage drops. The learned transition prior helps only where there is still evidence to sharpen.</a:t>
+              <a:t>The entity is removed here, isolating topology mutation from hunting. Sealing and rewiring ahead of the player raises the cost of an objective by 54% (20.9 to 32.3 moves per lap). Every mutation passed a reachability check, so no run was ever soft-locked.</a:t>
             </a:r>
           </a:p>
         </p:txBody>
@@ -7860,7 +8035,7 @@
                 </a:solidFill>
                 <a:latin typeface="Arial"/>
               </a:rPr>
-              <a:t>What the player can actually do about it</a:t>
+              <a:t>What the sensors actually buy the antagonist</a:t>
             </a:r>
           </a:p>
         </p:txBody>
@@ -7911,7 +8086,7 @@
       </p:sp>
       <p:pic>
         <p:nvPicPr>
-          <p:cNvPr id="5" name="Picture 4" descr="fig_counterplay.png"/>
+          <p:cNvPr id="5" name="Picture 4" descr="fig_localisation.png"/>
           <p:cNvPicPr>
             <a:picLocks noChangeAspect="1"/>
           </p:cNvPicPr>
@@ -7925,8 +8100,8 @@
         </p:blipFill>
         <p:spPr>
           <a:xfrm>
-            <a:off x="2194560" y="1664208"/>
-            <a:ext cx="7863840" cy="4025537"/>
+            <a:off x="2286000" y="1691640"/>
+            <a:ext cx="7680960" cy="3840480"/>
           </a:xfrm>
           <a:prstGeom prst="rect">
             <a:avLst/>
@@ -7941,7 +8116,7 @@
         </p:nvSpPr>
         <p:spPr>
           <a:xfrm>
-            <a:off x="658368" y="5760720"/>
+            <a:off x="658368" y="5623560"/>
             <a:ext cx="10881360" cy="914400"/>
           </a:xfrm>
           <a:prstGeom prst="rect">
@@ -7970,7 +8145,7 @@
                 </a:solidFill>
                 <a:latin typeface="Arial"/>
               </a:rPr>
-              <a:t>Measured per objective completed, not per window. Waiting at random is WORSE than not waiting at every coverage level. Routing around sensors helps a little. Spending three dangerous tasks to silence sensors on the route you already use cuts capture risk by 39% at 60% coverage.</a:t>
+              <a:t>A fully wired facility leaks everything: with a sensor on every door, silence proves the player stayed, so tracking is essentially perfect. Localisation falls roughly linearly as coverage drops. The learned transition prior helps only where there is still evidence to sharpen.</a:t>
             </a:r>
           </a:p>
         </p:txBody>
@@ -8038,7 +8213,7 @@
                 </a:solidFill>
                 <a:latin typeface="Arial"/>
               </a:rPr>
-              <a:t>RESULTS</a:t>
+              <a:t>RESULTS — NEW</a:t>
             </a:r>
           </a:p>
         </p:txBody>
@@ -8080,7 +8255,7 @@
                 </a:solidFill>
                 <a:latin typeface="Arial"/>
               </a:rPr>
-              <a:t>All twelve experiments at a glance</a:t>
+              <a:t>What the player can actually do about it</a:t>
             </a:r>
           </a:p>
         </p:txBody>
@@ -8129,1464 +8304,72 @@
           </a:p>
         </p:txBody>
       </p:sp>
-      <p:graphicFrame>
-        <p:nvGraphicFramePr>
-          <p:cNvPr id="5" name="Table 4"/>
-          <p:cNvGraphicFramePr>
-            <a:graphicFrameLocks noGrp="1"/>
-          </p:cNvGraphicFramePr>
+      <p:pic>
+        <p:nvPicPr>
+          <p:cNvPr id="5" name="Picture 4" descr="fig_counterplay.png"/>
+          <p:cNvPicPr>
+            <a:picLocks noChangeAspect="1"/>
+          </p:cNvPicPr>
           <p:nvPr/>
-        </p:nvGraphicFramePr>
-        <p:xfrm>
-          <a:off x="658368" y="1783080"/>
-          <a:ext cx="10881360" cy="4480560"/>
-        </p:xfrm>
-        <a:graphic>
-          <a:graphicData uri="http://schemas.openxmlformats.org/drawingml/2006/table">
-            <a:tbl>
-              <a:tblPr firstRow="1" bandRow="1">
-                <a:tableStyleId>{5C22544A-7EE6-4342-B048-85BDC9FD1C3A}</a:tableStyleId>
-              </a:tblPr>
-              <a:tblGrid>
-                <a:gridCol w="548640"/>
-                <a:gridCol w="3840480"/>
-                <a:gridCol w="4114800"/>
-                <a:gridCol w="2377440"/>
-              </a:tblGrid>
-              <a:tr h="344658">
-                <a:tc>
-                  <a:txBody>
-                    <a:bodyPr/>
-                    <a:lstStyle/>
-                    <a:p>
-                      <a:pPr>
-                        <a:lnSpc>
-                          <a:spcPct val="115000"/>
-                        </a:lnSpc>
-                      </a:pPr>
-                      <a:r>
-                        <a:rPr sz="850" b="1">
-                          <a:solidFill>
-                            <a:srgbClr val="6B7178"/>
-                          </a:solidFill>
-                          <a:latin typeface="Arial"/>
-                        </a:rPr>
-                        <a:t>#</a:t>
-                      </a:r>
-                    </a:p>
-                  </a:txBody>
-                  <a:tcPr marL="73152" marR="73152" marT="36576" marB="36576">
-                    <a:solidFill>
-                      <a:srgbClr val="F4F6F8"/>
-                    </a:solidFill>
-                  </a:tcPr>
-                </a:tc>
-                <a:tc>
-                  <a:txBody>
-                    <a:bodyPr/>
-                    <a:lstStyle/>
-                    <a:p>
-                      <a:pPr>
-                        <a:lnSpc>
-                          <a:spcPct val="115000"/>
-                        </a:lnSpc>
-                      </a:pPr>
-                      <a:r>
-                        <a:rPr sz="850" b="1">
-                          <a:solidFill>
-                            <a:srgbClr val="6B7178"/>
-                          </a:solidFill>
-                          <a:latin typeface="Arial"/>
-                        </a:rPr>
-                        <a:t>Question</a:t>
-                      </a:r>
-                    </a:p>
-                  </a:txBody>
-                  <a:tcPr marL="73152" marR="73152" marT="36576" marB="36576">
-                    <a:solidFill>
-                      <a:srgbClr val="F4F6F8"/>
-                    </a:solidFill>
-                  </a:tcPr>
-                </a:tc>
-                <a:tc>
-                  <a:txBody>
-                    <a:bodyPr/>
-                    <a:lstStyle/>
-                    <a:p>
-                      <a:pPr>
-                        <a:lnSpc>
-                          <a:spcPct val="115000"/>
-                        </a:lnSpc>
-                      </a:pPr>
-                      <a:r>
-                        <a:rPr sz="850" b="1">
-                          <a:solidFill>
-                            <a:srgbClr val="6B7178"/>
-                          </a:solidFill>
-                          <a:latin typeface="Arial"/>
-                        </a:rPr>
-                        <a:t>Headline</a:t>
-                      </a:r>
-                    </a:p>
-                  </a:txBody>
-                  <a:tcPr marL="73152" marR="73152" marT="36576" marB="36576">
-                    <a:solidFill>
-                      <a:srgbClr val="F4F6F8"/>
-                    </a:solidFill>
-                  </a:tcPr>
-                </a:tc>
-                <a:tc>
-                  <a:txBody>
-                    <a:bodyPr/>
-                    <a:lstStyle/>
-                    <a:p>
-                      <a:pPr>
-                        <a:lnSpc>
-                          <a:spcPct val="115000"/>
-                        </a:lnSpc>
-                      </a:pPr>
-                      <a:r>
-                        <a:rPr sz="850" b="1">
-                          <a:solidFill>
-                            <a:srgbClr val="6B7178"/>
-                          </a:solidFill>
-                          <a:latin typeface="Arial"/>
-                        </a:rPr>
-                        <a:t>Reading</a:t>
-                      </a:r>
-                    </a:p>
-                  </a:txBody>
-                  <a:tcPr marL="73152" marR="73152" marT="36576" marB="36576">
-                    <a:solidFill>
-                      <a:srgbClr val="F4F6F8"/>
-                    </a:solidFill>
-                  </a:tcPr>
-                </a:tc>
-              </a:tr>
-              <a:tr h="344658">
-                <a:tc>
-                  <a:txBody>
-                    <a:bodyPr/>
-                    <a:lstStyle/>
-                    <a:p>
-                      <a:pPr>
-                        <a:lnSpc>
-                          <a:spcPct val="115000"/>
-                        </a:lnSpc>
-                      </a:pPr>
-                      <a:r>
-                        <a:rPr sz="1050" b="0">
-                          <a:solidFill>
-                            <a:srgbClr val="16181A"/>
-                          </a:solidFill>
-                          <a:latin typeface="Arial"/>
-                        </a:rPr>
-                        <a:t>E1</a:t>
-                      </a:r>
-                    </a:p>
-                  </a:txBody>
-                  <a:tcPr marL="73152" marR="73152" marT="36576" marB="36576">
-                    <a:solidFill>
-                      <a:srgbClr val="FCFCFB"/>
-                    </a:solidFill>
-                  </a:tcPr>
-                </a:tc>
-                <a:tc>
-                  <a:txBody>
-                    <a:bodyPr/>
-                    <a:lstStyle/>
-                    <a:p>
-                      <a:pPr>
-                        <a:lnSpc>
-                          <a:spcPct val="115000"/>
-                        </a:lnSpc>
-                      </a:pPr>
-                      <a:r>
-                        <a:rPr sz="1050" b="0">
-                          <a:solidFill>
-                            <a:srgbClr val="16181A"/>
-                          </a:solidFill>
-                          <a:latin typeface="Arial"/>
-                        </a:rPr>
-                        <a:t>Can it predict the next move?</a:t>
-                      </a:r>
-                    </a:p>
-                  </a:txBody>
-                  <a:tcPr marL="73152" marR="73152" marT="36576" marB="36576">
-                    <a:solidFill>
-                      <a:srgbClr val="FCFCFB"/>
-                    </a:solidFill>
-                  </a:tcPr>
-                </a:tc>
-                <a:tc>
-                  <a:txBody>
-                    <a:bodyPr/>
-                    <a:lstStyle/>
-                    <a:p>
-                      <a:pPr>
-                        <a:lnSpc>
-                          <a:spcPct val="115000"/>
-                        </a:lnSpc>
-                      </a:pPr>
-                      <a:r>
-                        <a:rPr sz="1050" b="0">
-                          <a:solidFill>
-                            <a:srgbClr val="16181A"/>
-                          </a:solidFill>
-                          <a:latin typeface="Arial"/>
-                        </a:rPr>
-                        <a:t>60.5% vs 46.5% vs 30.5%</a:t>
-                      </a:r>
-                    </a:p>
-                  </a:txBody>
-                  <a:tcPr marL="73152" marR="73152" marT="36576" marB="36576">
-                    <a:solidFill>
-                      <a:srgbClr val="FCFCFB"/>
-                    </a:solidFill>
-                  </a:tcPr>
-                </a:tc>
-                <a:tc>
-                  <a:txBody>
-                    <a:bodyPr/>
-                    <a:lstStyle/>
-                    <a:p>
-                      <a:pPr>
-                        <a:lnSpc>
-                          <a:spcPct val="115000"/>
-                        </a:lnSpc>
-                      </a:pPr>
-                      <a:r>
-                        <a:rPr sz="1050" b="0">
-                          <a:solidFill>
-                            <a:srgbClr val="16181A"/>
-                          </a:solidFill>
-                          <a:latin typeface="Arial"/>
-                        </a:rPr>
-                        <a:t>Learns routes</a:t>
-                      </a:r>
-                    </a:p>
-                  </a:txBody>
-                  <a:tcPr marL="73152" marR="73152" marT="36576" marB="36576">
-                    <a:solidFill>
-                      <a:srgbClr val="FCFCFB"/>
-                    </a:solidFill>
-                  </a:tcPr>
-                </a:tc>
-              </a:tr>
-              <a:tr h="344658">
-                <a:tc>
-                  <a:txBody>
-                    <a:bodyPr/>
-                    <a:lstStyle/>
-                    <a:p>
-                      <a:pPr>
-                        <a:lnSpc>
-                          <a:spcPct val="115000"/>
-                        </a:lnSpc>
-                      </a:pPr>
-                      <a:r>
-                        <a:rPr sz="1050" b="0">
-                          <a:solidFill>
-                            <a:srgbClr val="16181A"/>
-                          </a:solidFill>
-                          <a:latin typeface="Arial"/>
-                        </a:rPr>
-                        <a:t>E1c</a:t>
-                      </a:r>
-                    </a:p>
-                  </a:txBody>
-                  <a:tcPr marL="73152" marR="73152" marT="36576" marB="36576">
-                    <a:solidFill>
-                      <a:srgbClr val="FCFCFB"/>
-                    </a:solidFill>
-                  </a:tcPr>
-                </a:tc>
-                <a:tc>
-                  <a:txBody>
-                    <a:bodyPr/>
-                    <a:lstStyle/>
-                    <a:p>
-                      <a:pPr>
-                        <a:lnSpc>
-                          <a:spcPct val="115000"/>
-                        </a:lnSpc>
-                      </a:pPr>
-                      <a:r>
-                        <a:rPr sz="1050" b="0">
-                          <a:solidFill>
-                            <a:srgbClr val="16181A"/>
-                          </a:solidFill>
-                          <a:latin typeface="Arial"/>
-                        </a:rPr>
-                        <a:t>Does it learn from a random player?</a:t>
-                      </a:r>
-                    </a:p>
-                  </a:txBody>
-                  <a:tcPr marL="73152" marR="73152" marT="36576" marB="36576">
-                    <a:solidFill>
-                      <a:srgbClr val="FCFCFB"/>
-                    </a:solidFill>
-                  </a:tcPr>
-                </a:tc>
-                <a:tc>
-                  <a:txBody>
-                    <a:bodyPr/>
-                    <a:lstStyle/>
-                    <a:p>
-                      <a:pPr>
-                        <a:lnSpc>
-                          <a:spcPct val="115000"/>
-                        </a:lnSpc>
-                      </a:pPr>
-                      <a:r>
-                        <a:rPr sz="1050" b="0">
-                          <a:solidFill>
-                            <a:srgbClr val="16181A"/>
-                          </a:solidFill>
-                          <a:latin typeface="Arial"/>
-                        </a:rPr>
-                        <a:t>26.7% vs 26.9%</a:t>
-                      </a:r>
-                    </a:p>
-                  </a:txBody>
-                  <a:tcPr marL="73152" marR="73152" marT="36576" marB="36576">
-                    <a:solidFill>
-                      <a:srgbClr val="FCFCFB"/>
-                    </a:solidFill>
-                  </a:tcPr>
-                </a:tc>
-                <a:tc>
-                  <a:txBody>
-                    <a:bodyPr/>
-                    <a:lstStyle/>
-                    <a:p>
-                      <a:pPr>
-                        <a:lnSpc>
-                          <a:spcPct val="115000"/>
-                        </a:lnSpc>
-                      </a:pPr>
-                      <a:r>
-                        <a:rPr sz="1050" b="0">
-                          <a:solidFill>
-                            <a:srgbClr val="16181A"/>
-                          </a:solidFill>
-                          <a:latin typeface="Arial"/>
-                        </a:rPr>
-                        <a:t>No leakage</a:t>
-                      </a:r>
-                    </a:p>
-                  </a:txBody>
-                  <a:tcPr marL="73152" marR="73152" marT="36576" marB="36576">
-                    <a:solidFill>
-                      <a:srgbClr val="FCFCFB"/>
-                    </a:solidFill>
-                  </a:tcPr>
-                </a:tc>
-              </a:tr>
-              <a:tr h="344658">
-                <a:tc>
-                  <a:txBody>
-                    <a:bodyPr/>
-                    <a:lstStyle/>
-                    <a:p>
-                      <a:pPr>
-                        <a:lnSpc>
-                          <a:spcPct val="115000"/>
-                        </a:lnSpc>
-                      </a:pPr>
-                      <a:r>
-                        <a:rPr sz="1050" b="0">
-                          <a:solidFill>
-                            <a:srgbClr val="16181A"/>
-                          </a:solidFill>
-                          <a:latin typeface="Arial"/>
-                        </a:rPr>
-                        <a:t>E2</a:t>
-                      </a:r>
-                    </a:p>
-                  </a:txBody>
-                  <a:tcPr marL="73152" marR="73152" marT="36576" marB="36576">
-                    <a:solidFill>
-                      <a:srgbClr val="FCFCFB"/>
-                    </a:solidFill>
-                  </a:tcPr>
-                </a:tc>
-                <a:tc>
-                  <a:txBody>
-                    <a:bodyPr/>
-                    <a:lstStyle/>
-                    <a:p>
-                      <a:pPr>
-                        <a:lnSpc>
-                          <a:spcPct val="115000"/>
-                        </a:lnSpc>
-                      </a:pPr>
-                      <a:r>
-                        <a:rPr sz="1050" b="0">
-                          <a:solidFill>
-                            <a:srgbClr val="16181A"/>
-                          </a:solidFill>
-                          <a:latin typeface="Arial"/>
-                        </a:rPr>
-                        <a:t>How fast does it learn?</a:t>
-                      </a:r>
-                    </a:p>
-                  </a:txBody>
-                  <a:tcPr marL="73152" marR="73152" marT="36576" marB="36576">
-                    <a:solidFill>
-                      <a:srgbClr val="FCFCFB"/>
-                    </a:solidFill>
-                  </a:tcPr>
-                </a:tc>
-                <a:tc>
-                  <a:txBody>
-                    <a:bodyPr/>
-                    <a:lstStyle/>
-                    <a:p>
-                      <a:pPr>
-                        <a:lnSpc>
-                          <a:spcPct val="115000"/>
-                        </a:lnSpc>
-                      </a:pPr>
-                      <a:r>
-                        <a:rPr sz="1050" b="0">
-                          <a:solidFill>
-                            <a:srgbClr val="16181A"/>
-                          </a:solidFill>
-                          <a:latin typeface="Arial"/>
-                        </a:rPr>
-                        <a:t>Useful inside ~60 moves</a:t>
-                      </a:r>
-                    </a:p>
-                  </a:txBody>
-                  <a:tcPr marL="73152" marR="73152" marT="36576" marB="36576">
-                    <a:solidFill>
-                      <a:srgbClr val="FCFCFB"/>
-                    </a:solidFill>
-                  </a:tcPr>
-                </a:tc>
-                <a:tc>
-                  <a:txBody>
-                    <a:bodyPr/>
-                    <a:lstStyle/>
-                    <a:p>
-                      <a:pPr>
-                        <a:lnSpc>
-                          <a:spcPct val="115000"/>
-                        </a:lnSpc>
-                      </a:pPr>
-                      <a:r>
-                        <a:rPr sz="1050" b="0">
-                          <a:solidFill>
-                            <a:srgbClr val="16181A"/>
-                          </a:solidFill>
-                          <a:latin typeface="Arial"/>
-                        </a:rPr>
-                        <a:t>Cold start solved</a:t>
-                      </a:r>
-                    </a:p>
-                  </a:txBody>
-                  <a:tcPr marL="73152" marR="73152" marT="36576" marB="36576">
-                    <a:solidFill>
-                      <a:srgbClr val="FCFCFB"/>
-                    </a:solidFill>
-                  </a:tcPr>
-                </a:tc>
-              </a:tr>
-              <a:tr h="344658">
-                <a:tc>
-                  <a:txBody>
-                    <a:bodyPr/>
-                    <a:lstStyle/>
-                    <a:p>
-                      <a:pPr>
-                        <a:lnSpc>
-                          <a:spcPct val="115000"/>
-                        </a:lnSpc>
-                      </a:pPr>
-                      <a:r>
-                        <a:rPr sz="1050" b="0">
-                          <a:solidFill>
-                            <a:srgbClr val="16181A"/>
-                          </a:solidFill>
-                          <a:latin typeface="Arial"/>
-                        </a:rPr>
-                        <a:t>E4</a:t>
-                      </a:r>
-                    </a:p>
-                  </a:txBody>
-                  <a:tcPr marL="73152" marR="73152" marT="36576" marB="36576">
-                    <a:solidFill>
-                      <a:srgbClr val="FCFCFB"/>
-                    </a:solidFill>
-                  </a:tcPr>
-                </a:tc>
-                <a:tc>
-                  <a:txBody>
-                    <a:bodyPr/>
-                    <a:lstStyle/>
-                    <a:p>
-                      <a:pPr>
-                        <a:lnSpc>
-                          <a:spcPct val="115000"/>
-                        </a:lnSpc>
-                      </a:pPr>
-                      <a:r>
-                        <a:rPr sz="1050" b="0">
-                          <a:solidFill>
-                            <a:srgbClr val="16181A"/>
-                          </a:solidFill>
-                          <a:latin typeface="Arial"/>
-                        </a:rPr>
-                        <a:t>Does prediction make it deadlier?</a:t>
-                      </a:r>
-                    </a:p>
-                  </a:txBody>
-                  <a:tcPr marL="73152" marR="73152" marT="36576" marB="36576">
-                    <a:solidFill>
-                      <a:srgbClr val="FCFCFB"/>
-                    </a:solidFill>
-                  </a:tcPr>
-                </a:tc>
-                <a:tc>
-                  <a:txBody>
-                    <a:bodyPr/>
-                    <a:lstStyle/>
-                    <a:p>
-                      <a:pPr>
-                        <a:lnSpc>
-                          <a:spcPct val="115000"/>
-                        </a:lnSpc>
-                      </a:pPr>
-                      <a:r>
-                        <a:rPr sz="1050" b="0">
-                          <a:solidFill>
-                            <a:srgbClr val="16181A"/>
-                          </a:solidFill>
-                          <a:latin typeface="Arial"/>
-                        </a:rPr>
-                        <a:t>319 vs 111 per 1000</a:t>
-                      </a:r>
-                    </a:p>
-                  </a:txBody>
-                  <a:tcPr marL="73152" marR="73152" marT="36576" marB="36576">
-                    <a:solidFill>
-                      <a:srgbClr val="FCFCFB"/>
-                    </a:solidFill>
-                  </a:tcPr>
-                </a:tc>
-                <a:tc>
-                  <a:txBody>
-                    <a:bodyPr/>
-                    <a:lstStyle/>
-                    <a:p>
-                      <a:pPr>
-                        <a:lnSpc>
-                          <a:spcPct val="115000"/>
-                        </a:lnSpc>
-                      </a:pPr>
-                      <a:r>
-                        <a:rPr sz="1050" b="0">
-                          <a:solidFill>
-                            <a:srgbClr val="16181A"/>
-                          </a:solidFill>
-                          <a:latin typeface="Arial"/>
-                        </a:rPr>
-                        <a:t>Yes, vs no model</a:t>
-                      </a:r>
-                    </a:p>
-                  </a:txBody>
-                  <a:tcPr marL="73152" marR="73152" marT="36576" marB="36576">
-                    <a:solidFill>
-                      <a:srgbClr val="FCFCFB"/>
-                    </a:solidFill>
-                  </a:tcPr>
-                </a:tc>
-              </a:tr>
-              <a:tr h="344658">
-                <a:tc>
-                  <a:txBody>
-                    <a:bodyPr/>
-                    <a:lstStyle/>
-                    <a:p>
-                      <a:pPr>
-                        <a:lnSpc>
-                          <a:spcPct val="115000"/>
-                        </a:lnSpc>
-                      </a:pPr>
-                      <a:r>
-                        <a:rPr sz="1050" b="0">
-                          <a:solidFill>
-                            <a:srgbClr val="16181A"/>
-                          </a:solidFill>
-                          <a:latin typeface="Arial"/>
-                        </a:rPr>
-                        <a:t>E7</a:t>
-                      </a:r>
-                    </a:p>
-                  </a:txBody>
-                  <a:tcPr marL="73152" marR="73152" marT="36576" marB="36576">
-                    <a:solidFill>
-                      <a:srgbClr val="FCFCFB"/>
-                    </a:solidFill>
-                  </a:tcPr>
-                </a:tc>
-                <a:tc>
-                  <a:txBody>
-                    <a:bodyPr/>
-                    <a:lstStyle/>
-                    <a:p>
-                      <a:pPr>
-                        <a:lnSpc>
-                          <a:spcPct val="115000"/>
-                        </a:lnSpc>
-                      </a:pPr>
-                      <a:r>
-                        <a:rPr sz="1050" b="0">
-                          <a:solidFill>
-                            <a:srgbClr val="16181A"/>
-                          </a:solidFill>
-                          <a:latin typeface="Arial"/>
-                        </a:rPr>
-                        <a:t>Does that hold at scale?</a:t>
-                      </a:r>
-                    </a:p>
-                  </a:txBody>
-                  <a:tcPr marL="73152" marR="73152" marT="36576" marB="36576">
-                    <a:solidFill>
-                      <a:srgbClr val="FCFCFB"/>
-                    </a:solidFill>
-                  </a:tcPr>
-                </a:tc>
-                <a:tc>
-                  <a:txBody>
-                    <a:bodyPr/>
-                    <a:lstStyle/>
-                    <a:p>
-                      <a:pPr>
-                        <a:lnSpc>
-                          <a:spcPct val="115000"/>
-                        </a:lnSpc>
-                      </a:pPr>
-                      <a:r>
-                        <a:rPr sz="1050" b="0">
-                          <a:solidFill>
-                            <a:srgbClr val="16181A"/>
-                          </a:solidFill>
-                          <a:latin typeface="Arial"/>
-                        </a:rPr>
-                        <a:t>1.15× → 1.57× over hub-camping</a:t>
-                      </a:r>
-                    </a:p>
-                  </a:txBody>
-                  <a:tcPr marL="73152" marR="73152" marT="36576" marB="36576">
-                    <a:solidFill>
-                      <a:srgbClr val="FCFCFB"/>
-                    </a:solidFill>
-                  </a:tcPr>
-                </a:tc>
-                <a:tc>
-                  <a:txBody>
-                    <a:bodyPr/>
-                    <a:lstStyle/>
-                    <a:p>
-                      <a:pPr>
-                        <a:lnSpc>
-                          <a:spcPct val="115000"/>
-                        </a:lnSpc>
-                      </a:pPr>
-                      <a:r>
-                        <a:rPr sz="1050" b="0">
-                          <a:solidFill>
-                            <a:srgbClr val="16181A"/>
-                          </a:solidFill>
-                          <a:latin typeface="Arial"/>
-                        </a:rPr>
-                        <a:t>Grows with size</a:t>
-                      </a:r>
-                    </a:p>
-                  </a:txBody>
-                  <a:tcPr marL="73152" marR="73152" marT="36576" marB="36576">
-                    <a:solidFill>
-                      <a:srgbClr val="FCFCFB"/>
-                    </a:solidFill>
-                  </a:tcPr>
-                </a:tc>
-              </a:tr>
-              <a:tr h="344658">
-                <a:tc>
-                  <a:txBody>
-                    <a:bodyPr/>
-                    <a:lstStyle/>
-                    <a:p>
-                      <a:pPr>
-                        <a:lnSpc>
-                          <a:spcPct val="115000"/>
-                        </a:lnSpc>
-                      </a:pPr>
-                      <a:r>
-                        <a:rPr sz="1050" b="0">
-                          <a:solidFill>
-                            <a:srgbClr val="16181A"/>
-                          </a:solidFill>
-                          <a:latin typeface="Arial"/>
-                        </a:rPr>
-                        <a:t>E5</a:t>
-                      </a:r>
-                    </a:p>
-                  </a:txBody>
-                  <a:tcPr marL="73152" marR="73152" marT="36576" marB="36576">
-                    <a:solidFill>
-                      <a:srgbClr val="FCFCFB"/>
-                    </a:solidFill>
-                  </a:tcPr>
-                </a:tc>
-                <a:tc>
-                  <a:txBody>
-                    <a:bodyPr/>
-                    <a:lstStyle/>
-                    <a:p>
-                      <a:pPr>
-                        <a:lnSpc>
-                          <a:spcPct val="115000"/>
-                        </a:lnSpc>
-                      </a:pPr>
-                      <a:r>
-                        <a:rPr sz="1050" b="0">
-                          <a:solidFill>
-                            <a:srgbClr val="16181A"/>
-                          </a:solidFill>
-                          <a:latin typeface="Arial"/>
-                        </a:rPr>
-                        <a:t>Do world edits cost the player?</a:t>
-                      </a:r>
-                    </a:p>
-                  </a:txBody>
-                  <a:tcPr marL="73152" marR="73152" marT="36576" marB="36576">
-                    <a:solidFill>
-                      <a:srgbClr val="FCFCFB"/>
-                    </a:solidFill>
-                  </a:tcPr>
-                </a:tc>
-                <a:tc>
-                  <a:txBody>
-                    <a:bodyPr/>
-                    <a:lstStyle/>
-                    <a:p>
-                      <a:pPr>
-                        <a:lnSpc>
-                          <a:spcPct val="115000"/>
-                        </a:lnSpc>
-                      </a:pPr>
-                      <a:r>
-                        <a:rPr sz="1050" b="0">
-                          <a:solidFill>
-                            <a:srgbClr val="16181A"/>
-                          </a:solidFill>
-                          <a:latin typeface="Arial"/>
-                        </a:rPr>
-                        <a:t>+54% per objective</a:t>
-                      </a:r>
-                    </a:p>
-                  </a:txBody>
-                  <a:tcPr marL="73152" marR="73152" marT="36576" marB="36576">
-                    <a:solidFill>
-                      <a:srgbClr val="FCFCFB"/>
-                    </a:solidFill>
-                  </a:tcPr>
-                </a:tc>
-                <a:tc>
-                  <a:txBody>
-                    <a:bodyPr/>
-                    <a:lstStyle/>
-                    <a:p>
-                      <a:pPr>
-                        <a:lnSpc>
-                          <a:spcPct val="115000"/>
-                        </a:lnSpc>
-                      </a:pPr>
-                      <a:r>
-                        <a:rPr sz="1050" b="0">
-                          <a:solidFill>
-                            <a:srgbClr val="16181A"/>
-                          </a:solidFill>
-                          <a:latin typeface="Arial"/>
-                        </a:rPr>
-                        <a:t>Yes</a:t>
-                      </a:r>
-                    </a:p>
-                  </a:txBody>
-                  <a:tcPr marL="73152" marR="73152" marT="36576" marB="36576">
-                    <a:solidFill>
-                      <a:srgbClr val="FCFCFB"/>
-                    </a:solidFill>
-                  </a:tcPr>
-                </a:tc>
-              </a:tr>
-              <a:tr h="344658">
-                <a:tc>
-                  <a:txBody>
-                    <a:bodyPr/>
-                    <a:lstStyle/>
-                    <a:p>
-                      <a:pPr>
-                        <a:lnSpc>
-                          <a:spcPct val="115000"/>
-                        </a:lnSpc>
-                      </a:pPr>
-                      <a:r>
-                        <a:rPr sz="1050" b="0">
-                          <a:solidFill>
-                            <a:srgbClr val="16181A"/>
-                          </a:solidFill>
-                          <a:latin typeface="Arial"/>
-                        </a:rPr>
-                        <a:t>E6</a:t>
-                      </a:r>
-                    </a:p>
-                  </a:txBody>
-                  <a:tcPr marL="73152" marR="73152" marT="36576" marB="36576">
-                    <a:solidFill>
-                      <a:srgbClr val="FCFCFB"/>
-                    </a:solidFill>
-                  </a:tcPr>
-                </a:tc>
-                <a:tc>
-                  <a:txBody>
-                    <a:bodyPr/>
-                    <a:lstStyle/>
-                    <a:p>
-                      <a:pPr>
-                        <a:lnSpc>
-                          <a:spcPct val="115000"/>
-                        </a:lnSpc>
-                      </a:pPr>
-                      <a:r>
-                        <a:rPr sz="1050" b="0">
-                          <a:solidFill>
-                            <a:srgbClr val="16181A"/>
-                          </a:solidFill>
-                          <a:latin typeface="Arial"/>
-                        </a:rPr>
-                        <a:t>Is sabotage aimed?</a:t>
-                      </a:r>
-                    </a:p>
-                  </a:txBody>
-                  <a:tcPr marL="73152" marR="73152" marT="36576" marB="36576">
-                    <a:solidFill>
-                      <a:srgbClr val="FCFCFB"/>
-                    </a:solidFill>
-                  </a:tcPr>
-                </a:tc>
-                <a:tc>
-                  <a:txBody>
-                    <a:bodyPr/>
-                    <a:lstStyle/>
-                    <a:p>
-                      <a:pPr>
-                        <a:lnSpc>
-                          <a:spcPct val="115000"/>
-                        </a:lnSpc>
-                      </a:pPr>
-                      <a:r>
-                        <a:rPr sz="1050" b="0">
-                          <a:solidFill>
-                            <a:srgbClr val="16181A"/>
-                          </a:solidFill>
-                          <a:latin typeface="Arial"/>
-                        </a:rPr>
-                        <a:t>No gain on uniform reliance; 13% on uneven</a:t>
-                      </a:r>
-                    </a:p>
-                  </a:txBody>
-                  <a:tcPr marL="73152" marR="73152" marT="36576" marB="36576">
-                    <a:solidFill>
-                      <a:srgbClr val="FCFCFB"/>
-                    </a:solidFill>
-                  </a:tcPr>
-                </a:tc>
-                <a:tc>
-                  <a:txBody>
-                    <a:bodyPr/>
-                    <a:lstStyle/>
-                    <a:p>
-                      <a:pPr>
-                        <a:lnSpc>
-                          <a:spcPct val="115000"/>
-                        </a:lnSpc>
-                      </a:pPr>
-                      <a:r>
-                        <a:rPr sz="1050" b="0">
-                          <a:solidFill>
-                            <a:srgbClr val="16181A"/>
-                          </a:solidFill>
-                          <a:latin typeface="Arial"/>
-                        </a:rPr>
-                        <a:t>Conditional</a:t>
-                      </a:r>
-                    </a:p>
-                  </a:txBody>
-                  <a:tcPr marL="73152" marR="73152" marT="36576" marB="36576">
-                    <a:solidFill>
-                      <a:srgbClr val="FCFCFB"/>
-                    </a:solidFill>
-                  </a:tcPr>
-                </a:tc>
-              </a:tr>
-              <a:tr h="344658">
-                <a:tc>
-                  <a:txBody>
-                    <a:bodyPr/>
-                    <a:lstStyle/>
-                    <a:p>
-                      <a:pPr>
-                        <a:lnSpc>
-                          <a:spcPct val="115000"/>
-                        </a:lnSpc>
-                      </a:pPr>
-                      <a:r>
-                        <a:rPr sz="1050" b="0">
-                          <a:solidFill>
-                            <a:srgbClr val="16181A"/>
-                          </a:solidFill>
-                          <a:latin typeface="Arial"/>
-                        </a:rPr>
-                        <a:t>E8</a:t>
-                      </a:r>
-                    </a:p>
-                  </a:txBody>
-                  <a:tcPr marL="73152" marR="73152" marT="36576" marB="36576">
-                    <a:solidFill>
-                      <a:srgbClr val="FCFCFB"/>
-                    </a:solidFill>
-                  </a:tcPr>
-                </a:tc>
-                <a:tc>
-                  <a:txBody>
-                    <a:bodyPr/>
-                    <a:lstStyle/>
-                    <a:p>
-                      <a:pPr>
-                        <a:lnSpc>
-                          <a:spcPct val="115000"/>
-                        </a:lnSpc>
-                      </a:pPr>
-                      <a:r>
-                        <a:rPr sz="1050" b="0">
-                          <a:solidFill>
-                            <a:srgbClr val="16181A"/>
-                          </a:solidFill>
-                          <a:latin typeface="Arial"/>
-                        </a:rPr>
-                        <a:t>Does waiting defend? (full obs.)</a:t>
-                      </a:r>
-                    </a:p>
-                  </a:txBody>
-                  <a:tcPr marL="73152" marR="73152" marT="36576" marB="36576">
-                    <a:solidFill>
-                      <a:srgbClr val="FCFCFB"/>
-                    </a:solidFill>
-                  </a:tcPr>
-                </a:tc>
-                <a:tc>
-                  <a:txBody>
-                    <a:bodyPr/>
-                    <a:lstStyle/>
-                    <a:p>
-                      <a:pPr>
-                        <a:lnSpc>
-                          <a:spcPct val="115000"/>
-                        </a:lnSpc>
-                      </a:pPr>
-                      <a:r>
-                        <a:rPr sz="1050" b="0">
-                          <a:solidFill>
-                            <a:srgbClr val="16181A"/>
-                          </a:solidFill>
-                          <a:latin typeface="Arial"/>
-                        </a:rPr>
-                        <a:t>1.7% risk cut</a:t>
-                      </a:r>
-                    </a:p>
-                  </a:txBody>
-                  <a:tcPr marL="73152" marR="73152" marT="36576" marB="36576">
-                    <a:solidFill>
-                      <a:srgbClr val="FCFCFB"/>
-                    </a:solidFill>
-                  </a:tcPr>
-                </a:tc>
-                <a:tc>
-                  <a:txBody>
-                    <a:bodyPr/>
-                    <a:lstStyle/>
-                    <a:p>
-                      <a:pPr>
-                        <a:lnSpc>
-                          <a:spcPct val="115000"/>
-                        </a:lnSpc>
-                      </a:pPr>
-                      <a:r>
-                        <a:rPr sz="1050" b="0">
-                          <a:solidFill>
-                            <a:srgbClr val="16181A"/>
-                          </a:solidFill>
-                          <a:latin typeface="Arial"/>
-                        </a:rPr>
-                        <a:t>NEGATIVE</a:t>
-                      </a:r>
-                    </a:p>
-                  </a:txBody>
-                  <a:tcPr marL="73152" marR="73152" marT="36576" marB="36576">
-                    <a:solidFill>
-                      <a:srgbClr val="FCFCFB"/>
-                    </a:solidFill>
-                  </a:tcPr>
-                </a:tc>
-              </a:tr>
-              <a:tr h="344658">
-                <a:tc>
-                  <a:txBody>
-                    <a:bodyPr/>
-                    <a:lstStyle/>
-                    <a:p>
-                      <a:pPr>
-                        <a:lnSpc>
-                          <a:spcPct val="115000"/>
-                        </a:lnSpc>
-                      </a:pPr>
-                      <a:r>
-                        <a:rPr sz="1050" b="0">
-                          <a:solidFill>
-                            <a:srgbClr val="16181A"/>
-                          </a:solidFill>
-                          <a:latin typeface="Arial"/>
-                        </a:rPr>
-                        <a:t>E9</a:t>
-                      </a:r>
-                    </a:p>
-                  </a:txBody>
-                  <a:tcPr marL="73152" marR="73152" marT="36576" marB="36576">
-                    <a:solidFill>
-                      <a:srgbClr val="FCFCFB"/>
-                    </a:solidFill>
-                  </a:tcPr>
-                </a:tc>
-                <a:tc>
-                  <a:txBody>
-                    <a:bodyPr/>
-                    <a:lstStyle/>
-                    <a:p>
-                      <a:pPr>
-                        <a:lnSpc>
-                          <a:spcPct val="115000"/>
-                        </a:lnSpc>
-                      </a:pPr>
-                      <a:r>
-                        <a:rPr sz="1050" b="0">
-                          <a:solidFill>
-                            <a:srgbClr val="16181A"/>
-                          </a:solidFill>
-                          <a:latin typeface="Arial"/>
-                        </a:rPr>
-                        <a:t>Does explicit dwell modelling help?</a:t>
-                      </a:r>
-                    </a:p>
-                  </a:txBody>
-                  <a:tcPr marL="73152" marR="73152" marT="36576" marB="36576">
-                    <a:solidFill>
-                      <a:srgbClr val="FCFCFB"/>
-                    </a:solidFill>
-                  </a:tcPr>
-                </a:tc>
-                <a:tc>
-                  <a:txBody>
-                    <a:bodyPr/>
-                    <a:lstStyle/>
-                    <a:p>
-                      <a:pPr>
-                        <a:lnSpc>
-                          <a:spcPct val="115000"/>
-                        </a:lnSpc>
-                      </a:pPr>
-                      <a:r>
-                        <a:rPr sz="1050" b="0">
-                          <a:solidFill>
-                            <a:srgbClr val="16181A"/>
-                          </a:solidFill>
-                          <a:latin typeface="Arial"/>
-                        </a:rPr>
-                        <a:t>2.0% worse than position-only</a:t>
-                      </a:r>
-                    </a:p>
-                  </a:txBody>
-                  <a:tcPr marL="73152" marR="73152" marT="36576" marB="36576">
-                    <a:solidFill>
-                      <a:srgbClr val="FCFCFB"/>
-                    </a:solidFill>
-                  </a:tcPr>
-                </a:tc>
-                <a:tc>
-                  <a:txBody>
-                    <a:bodyPr/>
-                    <a:lstStyle/>
-                    <a:p>
-                      <a:pPr>
-                        <a:lnSpc>
-                          <a:spcPct val="115000"/>
-                        </a:lnSpc>
-                      </a:pPr>
-                      <a:r>
-                        <a:rPr sz="1050" b="0">
-                          <a:solidFill>
-                            <a:srgbClr val="16181A"/>
-                          </a:solidFill>
-                          <a:latin typeface="Arial"/>
-                        </a:rPr>
-                        <a:t>NEGATIVE</a:t>
-                      </a:r>
-                    </a:p>
-                  </a:txBody>
-                  <a:tcPr marL="73152" marR="73152" marT="36576" marB="36576">
-                    <a:solidFill>
-                      <a:srgbClr val="FCFCFB"/>
-                    </a:solidFill>
-                  </a:tcPr>
-                </a:tc>
-              </a:tr>
-              <a:tr h="344658">
-                <a:tc>
-                  <a:txBody>
-                    <a:bodyPr/>
-                    <a:lstStyle/>
-                    <a:p>
-                      <a:pPr>
-                        <a:lnSpc>
-                          <a:spcPct val="115000"/>
-                        </a:lnSpc>
-                      </a:pPr>
-                      <a:r>
-                        <a:rPr sz="1050" b="0">
-                          <a:solidFill>
-                            <a:srgbClr val="16181A"/>
-                          </a:solidFill>
-                          <a:latin typeface="Arial"/>
-                        </a:rPr>
-                        <a:t>E10</a:t>
-                      </a:r>
-                    </a:p>
-                  </a:txBody>
-                  <a:tcPr marL="73152" marR="73152" marT="36576" marB="36576">
-                    <a:solidFill>
-                      <a:srgbClr val="FCFCFB"/>
-                    </a:solidFill>
-                  </a:tcPr>
-                </a:tc>
-                <a:tc>
-                  <a:txBody>
-                    <a:bodyPr/>
-                    <a:lstStyle/>
-                    <a:p>
-                      <a:pPr>
-                        <a:lnSpc>
-                          <a:spcPct val="115000"/>
-                        </a:lnSpc>
-                      </a:pPr>
-                      <a:r>
-                        <a:rPr sz="1050" b="0">
-                          <a:solidFill>
-                            <a:srgbClr val="16181A"/>
-                          </a:solidFill>
-                          <a:latin typeface="Arial"/>
-                        </a:rPr>
-                        <a:t>Is dwell learnable?</a:t>
-                      </a:r>
-                    </a:p>
-                  </a:txBody>
-                  <a:tcPr marL="73152" marR="73152" marT="36576" marB="36576">
-                    <a:solidFill>
-                      <a:srgbClr val="FCFCFB"/>
-                    </a:solidFill>
-                  </a:tcPr>
-                </a:tc>
-                <a:tc>
-                  <a:txBody>
-                    <a:bodyPr/>
-                    <a:lstStyle/>
-                    <a:p>
-                      <a:pPr>
-                        <a:lnSpc>
-                          <a:spcPct val="115000"/>
-                        </a:lnSpc>
-                      </a:pPr>
-                      <a:r>
-                        <a:rPr sz="1050" b="0">
-                          <a:solidFill>
-                            <a:srgbClr val="16181A"/>
-                          </a:solidFill>
-                          <a:latin typeface="Arial"/>
-                        </a:rPr>
-                        <a:t>70% vs 54% baseline</a:t>
-                      </a:r>
-                    </a:p>
-                  </a:txBody>
-                  <a:tcPr marL="73152" marR="73152" marT="36576" marB="36576">
-                    <a:solidFill>
-                      <a:srgbClr val="FCFCFB"/>
-                    </a:solidFill>
-                  </a:tcPr>
-                </a:tc>
-                <a:tc>
-                  <a:txBody>
-                    <a:bodyPr/>
-                    <a:lstStyle/>
-                    <a:p>
-                      <a:pPr>
-                        <a:lnSpc>
-                          <a:spcPct val="115000"/>
-                        </a:lnSpc>
-                      </a:pPr>
-                      <a:r>
-                        <a:rPr sz="1050" b="0">
-                          <a:solidFill>
-                            <a:srgbClr val="16181A"/>
-                          </a:solidFill>
-                          <a:latin typeface="Arial"/>
-                        </a:rPr>
-                        <a:t>Yes</a:t>
-                      </a:r>
-                    </a:p>
-                  </a:txBody>
-                  <a:tcPr marL="73152" marR="73152" marT="36576" marB="36576">
-                    <a:solidFill>
-                      <a:srgbClr val="FCFCFB"/>
-                    </a:solidFill>
-                  </a:tcPr>
-                </a:tc>
-              </a:tr>
-              <a:tr h="344658">
-                <a:tc>
-                  <a:txBody>
-                    <a:bodyPr/>
-                    <a:lstStyle/>
-                    <a:p>
-                      <a:pPr>
-                        <a:lnSpc>
-                          <a:spcPct val="115000"/>
-                        </a:lnSpc>
-                      </a:pPr>
-                      <a:r>
-                        <a:rPr sz="1050" b="0">
-                          <a:solidFill>
-                            <a:srgbClr val="16181A"/>
-                          </a:solidFill>
-                          <a:latin typeface="Arial"/>
-                        </a:rPr>
-                        <a:t>E11</a:t>
-                      </a:r>
-                    </a:p>
-                  </a:txBody>
-                  <a:tcPr marL="73152" marR="73152" marT="36576" marB="36576">
-                    <a:solidFill>
-                      <a:srgbClr val="FCFCFB"/>
-                    </a:solidFill>
-                  </a:tcPr>
-                </a:tc>
-                <a:tc>
-                  <a:txBody>
-                    <a:bodyPr/>
-                    <a:lstStyle/>
-                    <a:p>
-                      <a:pPr>
-                        <a:lnSpc>
-                          <a:spcPct val="115000"/>
-                        </a:lnSpc>
-                      </a:pPr>
-                      <a:r>
-                        <a:rPr sz="1050" b="0">
-                          <a:solidFill>
-                            <a:srgbClr val="16181A"/>
-                          </a:solidFill>
-                          <a:latin typeface="Arial"/>
-                        </a:rPr>
-                        <a:t>What do sensors buy? (NEW)</a:t>
-                      </a:r>
-                    </a:p>
-                  </a:txBody>
-                  <a:tcPr marL="73152" marR="73152" marT="36576" marB="36576">
-                    <a:solidFill>
-                      <a:srgbClr val="FCFCFB"/>
-                    </a:solidFill>
-                  </a:tcPr>
-                </a:tc>
-                <a:tc>
-                  <a:txBody>
-                    <a:bodyPr/>
-                    <a:lstStyle/>
-                    <a:p>
-                      <a:pPr>
-                        <a:lnSpc>
-                          <a:spcPct val="115000"/>
-                        </a:lnSpc>
-                      </a:pPr>
-                      <a:r>
-                        <a:rPr sz="1050" b="0">
-                          <a:solidFill>
-                            <a:srgbClr val="16181A"/>
-                          </a:solidFill>
-                          <a:latin typeface="Arial"/>
-                        </a:rPr>
-                        <a:t>Full coverage = perfect tracking</a:t>
-                      </a:r>
-                    </a:p>
-                  </a:txBody>
-                  <a:tcPr marL="73152" marR="73152" marT="36576" marB="36576">
-                    <a:solidFill>
-                      <a:srgbClr val="FCFCFB"/>
-                    </a:solidFill>
-                  </a:tcPr>
-                </a:tc>
-                <a:tc>
-                  <a:txBody>
-                    <a:bodyPr/>
-                    <a:lstStyle/>
-                    <a:p>
-                      <a:pPr>
-                        <a:lnSpc>
-                          <a:spcPct val="115000"/>
-                        </a:lnSpc>
-                      </a:pPr>
-                      <a:r>
-                        <a:rPr sz="1050" b="0">
-                          <a:solidFill>
-                            <a:srgbClr val="16181A"/>
-                          </a:solidFill>
-                          <a:latin typeface="Arial"/>
-                        </a:rPr>
-                        <a:t>Mechanism</a:t>
-                      </a:r>
-                    </a:p>
-                  </a:txBody>
-                  <a:tcPr marL="73152" marR="73152" marT="36576" marB="36576">
-                    <a:solidFill>
-                      <a:srgbClr val="FCFCFB"/>
-                    </a:solidFill>
-                  </a:tcPr>
-                </a:tc>
-              </a:tr>
-              <a:tr h="344664">
-                <a:tc>
-                  <a:txBody>
-                    <a:bodyPr/>
-                    <a:lstStyle/>
-                    <a:p>
-                      <a:pPr>
-                        <a:lnSpc>
-                          <a:spcPct val="115000"/>
-                        </a:lnSpc>
-                      </a:pPr>
-                      <a:r>
-                        <a:rPr sz="1050" b="0">
-                          <a:solidFill>
-                            <a:srgbClr val="16181A"/>
-                          </a:solidFill>
-                          <a:latin typeface="Arial"/>
-                        </a:rPr>
-                        <a:t>E12</a:t>
-                      </a:r>
-                    </a:p>
-                  </a:txBody>
-                  <a:tcPr marL="73152" marR="73152" marT="36576" marB="36576">
-                    <a:solidFill>
-                      <a:srgbClr val="FCFCFB"/>
-                    </a:solidFill>
-                  </a:tcPr>
-                </a:tc>
-                <a:tc>
-                  <a:txBody>
-                    <a:bodyPr/>
-                    <a:lstStyle/>
-                    <a:p>
-                      <a:pPr>
-                        <a:lnSpc>
-                          <a:spcPct val="115000"/>
-                        </a:lnSpc>
-                      </a:pPr>
-                      <a:r>
-                        <a:rPr sz="1050" b="0">
-                          <a:solidFill>
-                            <a:srgbClr val="16181A"/>
-                          </a:solidFill>
-                          <a:latin typeface="Arial"/>
-                        </a:rPr>
-                        <a:t>What is the counter-play? (NEW)</a:t>
-                      </a:r>
-                    </a:p>
-                  </a:txBody>
-                  <a:tcPr marL="73152" marR="73152" marT="36576" marB="36576">
-                    <a:solidFill>
-                      <a:srgbClr val="FCFCFB"/>
-                    </a:solidFill>
-                  </a:tcPr>
-                </a:tc>
-                <a:tc>
-                  <a:txBody>
-                    <a:bodyPr/>
-                    <a:lstStyle/>
-                    <a:p>
-                      <a:pPr>
-                        <a:lnSpc>
-                          <a:spcPct val="115000"/>
-                        </a:lnSpc>
-                      </a:pPr>
-                      <a:r>
-                        <a:rPr sz="1050" b="0">
-                          <a:solidFill>
-                            <a:srgbClr val="16181A"/>
-                          </a:solidFill>
-                          <a:latin typeface="Arial"/>
-                        </a:rPr>
-                        <a:t>Disabling sensors: 39% risk cut</a:t>
-                      </a:r>
-                    </a:p>
-                  </a:txBody>
-                  <a:tcPr marL="73152" marR="73152" marT="36576" marB="36576">
-                    <a:solidFill>
-                      <a:srgbClr val="FCFCFB"/>
-                    </a:solidFill>
-                  </a:tcPr>
-                </a:tc>
-                <a:tc>
-                  <a:txBody>
-                    <a:bodyPr/>
-                    <a:lstStyle/>
-                    <a:p>
-                      <a:pPr>
-                        <a:lnSpc>
-                          <a:spcPct val="115000"/>
-                        </a:lnSpc>
-                      </a:pPr>
-                      <a:r>
-                        <a:rPr sz="1050" b="0">
-                          <a:solidFill>
-                            <a:srgbClr val="16181A"/>
-                          </a:solidFill>
-                          <a:latin typeface="Arial"/>
-                        </a:rPr>
-                        <a:t>Design answer</a:t>
-                      </a:r>
-                    </a:p>
-                  </a:txBody>
-                  <a:tcPr marL="73152" marR="73152" marT="36576" marB="36576">
-                    <a:solidFill>
-                      <a:srgbClr val="FCFCFB"/>
-                    </a:solidFill>
-                  </a:tcPr>
-                </a:tc>
-              </a:tr>
-            </a:tbl>
-          </a:graphicData>
-        </a:graphic>
-      </p:graphicFrame>
+        </p:nvPicPr>
+        <p:blipFill>
+          <a:blip r:embed="rId2"/>
+          <a:stretch>
+            <a:fillRect/>
+          </a:stretch>
+        </p:blipFill>
+        <p:spPr>
+          <a:xfrm>
+            <a:off x="2194560" y="1664208"/>
+            <a:ext cx="7863840" cy="4025537"/>
+          </a:xfrm>
+          <a:prstGeom prst="rect">
+            <a:avLst/>
+          </a:prstGeom>
+        </p:spPr>
+      </p:pic>
+      <p:sp>
+        <p:nvSpPr>
+          <p:cNvPr id="6" name="TextBox 5"/>
+          <p:cNvSpPr txBox="1"/>
+          <p:nvPr/>
+        </p:nvSpPr>
+        <p:spPr>
+          <a:xfrm>
+            <a:off x="658368" y="5760720"/>
+            <a:ext cx="10881360" cy="914400"/>
+          </a:xfrm>
+          <a:prstGeom prst="rect">
+            <a:avLst/>
+          </a:prstGeom>
+          <a:noFill/>
+        </p:spPr>
+        <p:txBody>
+          <a:bodyPr wrap="square" lIns="0" rIns="0" tIns="0" bIns="0">
+            <a:spAutoFit/>
+          </a:bodyPr>
+          <a:lstStyle/>
+          <a:p>
+            <a:pPr algn="l">
+              <a:lnSpc>
+                <a:spcPct val="130000"/>
+              </a:lnSpc>
+              <a:spcAft>
+                <a:spcPts val="600"/>
+              </a:spcAft>
+            </a:pPr>
+            <a:r>
+              <a:rPr sz="1250" b="0">
+                <a:solidFill>
+                  <a:srgbClr val="6B7178"/>
+                </a:solidFill>
+                <a:latin typeface="Arial"/>
+              </a:rPr>
+              <a:t>Measured per objective completed, not per window. Waiting at random is WORSE than not waiting at every coverage level. Routing around sensors helps a little. Spending three dangerous tasks to silence sensors on the route you already use cuts capture risk by 39% at 60% coverage.</a:t>
+            </a:r>
+          </a:p>
+        </p:txBody>
+      </p:sp>
     </p:spTree>
   </p:cSld>
   <p:clrMapOvr>
@@ -9650,7 +8433,7 @@
                 </a:solidFill>
                 <a:latin typeface="Arial"/>
               </a:rPr>
-              <a:t>INTERPRETATION</a:t>
+              <a:t>RESULTS</a:t>
             </a:r>
           </a:p>
         </p:txBody>
@@ -9692,7 +8475,7 @@
                 </a:solidFill>
                 <a:latin typeface="Arial"/>
               </a:rPr>
-              <a:t>Three findings changed the design</a:t>
+              <a:t>All twelve experiments at a glance</a:t>
             </a:r>
           </a:p>
         </p:txBody>
@@ -9741,113 +8524,1464 @@
           </a:p>
         </p:txBody>
       </p:sp>
-      <p:sp>
-        <p:nvSpPr>
-          <p:cNvPr id="5" name="TextBox 4"/>
-          <p:cNvSpPr txBox="1"/>
+      <p:graphicFrame>
+        <p:nvGraphicFramePr>
+          <p:cNvPr id="5" name="Table 4"/>
+          <p:cNvGraphicFramePr>
+            <a:graphicFrameLocks noGrp="1"/>
+          </p:cNvGraphicFramePr>
           <p:nvPr/>
-        </p:nvSpPr>
-        <p:spPr>
-          <a:xfrm>
-            <a:off x="658368" y="1783080"/>
-            <a:ext cx="10881360" cy="4480560"/>
-          </a:xfrm>
-          <a:prstGeom prst="rect">
-            <a:avLst/>
-          </a:prstGeom>
-          <a:noFill/>
-        </p:spPr>
-        <p:txBody>
-          <a:bodyPr wrap="square" lIns="0" rIns="0" tIns="0" bIns="0">
-            <a:spAutoFit/>
-          </a:bodyPr>
-          <a:lstStyle/>
-          <a:p>
-            <a:pPr>
-              <a:lnSpc>
-                <a:spcPct val="130000"/>
-              </a:lnSpc>
-              <a:spcAft>
-                <a:spcPts val="1300"/>
-              </a:spcAft>
-            </a:pPr>
-            <a:r>
-              <a:rPr sz="1350" b="1">
-                <a:solidFill>
-                  <a:srgbClr val="16181A"/>
-                </a:solidFill>
-                <a:latin typeface="Arial"/>
-              </a:rPr>
-              <a:t>1 · A negative result set this cycle's work.  </a:t>
-            </a:r>
-            <a:r>
-              <a:rPr sz="1350">
-                <a:solidFill>
-                  <a:srgbClr val="6B7178"/>
-                </a:solidFill>
-                <a:latin typeface="Arial"/>
-              </a:rPr>
-              <a:t>Waiting did not defend, and the cause was perfect observation. That diagnosis — not a guess — is why door sensors were the next milestone. The fix was verified: at 100% coverage the new filter reproduces the old fully-observed behaviour, which is how we know the re-implementation is sound.</a:t>
-            </a:r>
-          </a:p>
-          <a:p>
-            <a:pPr>
-              <a:lnSpc>
-                <a:spcPct val="130000"/>
-              </a:lnSpc>
-              <a:spcAft>
-                <a:spcPts val="1300"/>
-              </a:spcAft>
-            </a:pPr>
-            <a:r>
-              <a:rPr sz="1350" b="1">
-                <a:solidFill>
-                  <a:srgbClr val="16181A"/>
-                </a:solidFill>
-                <a:latin typeface="Arial"/>
-              </a:rPr>
-              <a:t>2 · The metric was hiding the answer.  </a:t>
-            </a:r>
-            <a:r>
-              <a:rPr sz="1350">
-                <a:solidFill>
-                  <a:srgbClr val="6B7178"/>
-                </a:solidFill>
-                <a:latin typeface="Arial"/>
-              </a:rPr>
-              <a:t>Measured per window, avoiding sensors looked excellent. Measured per objective completed, it was worse than doing nothing — the player was simply achieving less. Two strategies that looked like wins disappeared under the corrected metric.</a:t>
-            </a:r>
-          </a:p>
-          <a:p>
-            <a:pPr>
-              <a:lnSpc>
-                <a:spcPct val="130000"/>
-              </a:lnSpc>
-              <a:spcAft>
-                <a:spcPts val="1300"/>
-              </a:spcAft>
-            </a:pPr>
-            <a:r>
-              <a:rPr sz="1350" b="1">
-                <a:solidFill>
-                  <a:srgbClr val="16181A"/>
-                </a:solidFill>
-                <a:latin typeface="Arial"/>
-              </a:rPr>
-              <a:t>3 · The mechanic the fiction already had is the one that works.  </a:t>
-            </a:r>
-            <a:r>
-              <a:rPr sz="1350">
-                <a:solidFill>
-                  <a:srgbClr val="6B7178"/>
-                </a:solidFill>
-                <a:latin typeface="Arial"/>
-              </a:rPr>
-              <a:t>Detouring around live sensors costs more exposure than it saves. Spending a dangerous task to silence a sensor on your existing route is the strategy that cuts risk. The design was right before the measurement was.</a:t>
-            </a:r>
-          </a:p>
-        </p:txBody>
-      </p:sp>
+        </p:nvGraphicFramePr>
+        <p:xfrm>
+          <a:off x="658368" y="1783080"/>
+          <a:ext cx="10881360" cy="4480560"/>
+        </p:xfrm>
+        <a:graphic>
+          <a:graphicData uri="http://schemas.openxmlformats.org/drawingml/2006/table">
+            <a:tbl>
+              <a:tblPr firstRow="1" bandRow="1">
+                <a:tableStyleId>{5C22544A-7EE6-4342-B048-85BDC9FD1C3A}</a:tableStyleId>
+              </a:tblPr>
+              <a:tblGrid>
+                <a:gridCol w="548640"/>
+                <a:gridCol w="3840480"/>
+                <a:gridCol w="4114800"/>
+                <a:gridCol w="2377440"/>
+              </a:tblGrid>
+              <a:tr h="344658">
+                <a:tc>
+                  <a:txBody>
+                    <a:bodyPr/>
+                    <a:lstStyle/>
+                    <a:p>
+                      <a:pPr>
+                        <a:lnSpc>
+                          <a:spcPct val="115000"/>
+                        </a:lnSpc>
+                      </a:pPr>
+                      <a:r>
+                        <a:rPr sz="850" b="1">
+                          <a:solidFill>
+                            <a:srgbClr val="6B7178"/>
+                          </a:solidFill>
+                          <a:latin typeface="Arial"/>
+                        </a:rPr>
+                        <a:t>#</a:t>
+                      </a:r>
+                    </a:p>
+                  </a:txBody>
+                  <a:tcPr marL="73152" marR="73152" marT="36576" marB="36576">
+                    <a:solidFill>
+                      <a:srgbClr val="F4F6F8"/>
+                    </a:solidFill>
+                  </a:tcPr>
+                </a:tc>
+                <a:tc>
+                  <a:txBody>
+                    <a:bodyPr/>
+                    <a:lstStyle/>
+                    <a:p>
+                      <a:pPr>
+                        <a:lnSpc>
+                          <a:spcPct val="115000"/>
+                        </a:lnSpc>
+                      </a:pPr>
+                      <a:r>
+                        <a:rPr sz="850" b="1">
+                          <a:solidFill>
+                            <a:srgbClr val="6B7178"/>
+                          </a:solidFill>
+                          <a:latin typeface="Arial"/>
+                        </a:rPr>
+                        <a:t>Question</a:t>
+                      </a:r>
+                    </a:p>
+                  </a:txBody>
+                  <a:tcPr marL="73152" marR="73152" marT="36576" marB="36576">
+                    <a:solidFill>
+                      <a:srgbClr val="F4F6F8"/>
+                    </a:solidFill>
+                  </a:tcPr>
+                </a:tc>
+                <a:tc>
+                  <a:txBody>
+                    <a:bodyPr/>
+                    <a:lstStyle/>
+                    <a:p>
+                      <a:pPr>
+                        <a:lnSpc>
+                          <a:spcPct val="115000"/>
+                        </a:lnSpc>
+                      </a:pPr>
+                      <a:r>
+                        <a:rPr sz="850" b="1">
+                          <a:solidFill>
+                            <a:srgbClr val="6B7178"/>
+                          </a:solidFill>
+                          <a:latin typeface="Arial"/>
+                        </a:rPr>
+                        <a:t>Headline</a:t>
+                      </a:r>
+                    </a:p>
+                  </a:txBody>
+                  <a:tcPr marL="73152" marR="73152" marT="36576" marB="36576">
+                    <a:solidFill>
+                      <a:srgbClr val="F4F6F8"/>
+                    </a:solidFill>
+                  </a:tcPr>
+                </a:tc>
+                <a:tc>
+                  <a:txBody>
+                    <a:bodyPr/>
+                    <a:lstStyle/>
+                    <a:p>
+                      <a:pPr>
+                        <a:lnSpc>
+                          <a:spcPct val="115000"/>
+                        </a:lnSpc>
+                      </a:pPr>
+                      <a:r>
+                        <a:rPr sz="850" b="1">
+                          <a:solidFill>
+                            <a:srgbClr val="6B7178"/>
+                          </a:solidFill>
+                          <a:latin typeface="Arial"/>
+                        </a:rPr>
+                        <a:t>Reading</a:t>
+                      </a:r>
+                    </a:p>
+                  </a:txBody>
+                  <a:tcPr marL="73152" marR="73152" marT="36576" marB="36576">
+                    <a:solidFill>
+                      <a:srgbClr val="F4F6F8"/>
+                    </a:solidFill>
+                  </a:tcPr>
+                </a:tc>
+              </a:tr>
+              <a:tr h="344658">
+                <a:tc>
+                  <a:txBody>
+                    <a:bodyPr/>
+                    <a:lstStyle/>
+                    <a:p>
+                      <a:pPr>
+                        <a:lnSpc>
+                          <a:spcPct val="115000"/>
+                        </a:lnSpc>
+                      </a:pPr>
+                      <a:r>
+                        <a:rPr sz="1050" b="0">
+                          <a:solidFill>
+                            <a:srgbClr val="16181A"/>
+                          </a:solidFill>
+                          <a:latin typeface="Arial"/>
+                        </a:rPr>
+                        <a:t>E1</a:t>
+                      </a:r>
+                    </a:p>
+                  </a:txBody>
+                  <a:tcPr marL="73152" marR="73152" marT="36576" marB="36576">
+                    <a:solidFill>
+                      <a:srgbClr val="FCFCFB"/>
+                    </a:solidFill>
+                  </a:tcPr>
+                </a:tc>
+                <a:tc>
+                  <a:txBody>
+                    <a:bodyPr/>
+                    <a:lstStyle/>
+                    <a:p>
+                      <a:pPr>
+                        <a:lnSpc>
+                          <a:spcPct val="115000"/>
+                        </a:lnSpc>
+                      </a:pPr>
+                      <a:r>
+                        <a:rPr sz="1050" b="0">
+                          <a:solidFill>
+                            <a:srgbClr val="16181A"/>
+                          </a:solidFill>
+                          <a:latin typeface="Arial"/>
+                        </a:rPr>
+                        <a:t>Can it predict the next move?</a:t>
+                      </a:r>
+                    </a:p>
+                  </a:txBody>
+                  <a:tcPr marL="73152" marR="73152" marT="36576" marB="36576">
+                    <a:solidFill>
+                      <a:srgbClr val="FCFCFB"/>
+                    </a:solidFill>
+                  </a:tcPr>
+                </a:tc>
+                <a:tc>
+                  <a:txBody>
+                    <a:bodyPr/>
+                    <a:lstStyle/>
+                    <a:p>
+                      <a:pPr>
+                        <a:lnSpc>
+                          <a:spcPct val="115000"/>
+                        </a:lnSpc>
+                      </a:pPr>
+                      <a:r>
+                        <a:rPr sz="1050" b="0">
+                          <a:solidFill>
+                            <a:srgbClr val="16181A"/>
+                          </a:solidFill>
+                          <a:latin typeface="Arial"/>
+                        </a:rPr>
+                        <a:t>60.5% vs 46.5% vs 30.5%</a:t>
+                      </a:r>
+                    </a:p>
+                  </a:txBody>
+                  <a:tcPr marL="73152" marR="73152" marT="36576" marB="36576">
+                    <a:solidFill>
+                      <a:srgbClr val="FCFCFB"/>
+                    </a:solidFill>
+                  </a:tcPr>
+                </a:tc>
+                <a:tc>
+                  <a:txBody>
+                    <a:bodyPr/>
+                    <a:lstStyle/>
+                    <a:p>
+                      <a:pPr>
+                        <a:lnSpc>
+                          <a:spcPct val="115000"/>
+                        </a:lnSpc>
+                      </a:pPr>
+                      <a:r>
+                        <a:rPr sz="1050" b="0">
+                          <a:solidFill>
+                            <a:srgbClr val="16181A"/>
+                          </a:solidFill>
+                          <a:latin typeface="Arial"/>
+                        </a:rPr>
+                        <a:t>Learns routes</a:t>
+                      </a:r>
+                    </a:p>
+                  </a:txBody>
+                  <a:tcPr marL="73152" marR="73152" marT="36576" marB="36576">
+                    <a:solidFill>
+                      <a:srgbClr val="FCFCFB"/>
+                    </a:solidFill>
+                  </a:tcPr>
+                </a:tc>
+              </a:tr>
+              <a:tr h="344658">
+                <a:tc>
+                  <a:txBody>
+                    <a:bodyPr/>
+                    <a:lstStyle/>
+                    <a:p>
+                      <a:pPr>
+                        <a:lnSpc>
+                          <a:spcPct val="115000"/>
+                        </a:lnSpc>
+                      </a:pPr>
+                      <a:r>
+                        <a:rPr sz="1050" b="0">
+                          <a:solidFill>
+                            <a:srgbClr val="16181A"/>
+                          </a:solidFill>
+                          <a:latin typeface="Arial"/>
+                        </a:rPr>
+                        <a:t>E1c</a:t>
+                      </a:r>
+                    </a:p>
+                  </a:txBody>
+                  <a:tcPr marL="73152" marR="73152" marT="36576" marB="36576">
+                    <a:solidFill>
+                      <a:srgbClr val="FCFCFB"/>
+                    </a:solidFill>
+                  </a:tcPr>
+                </a:tc>
+                <a:tc>
+                  <a:txBody>
+                    <a:bodyPr/>
+                    <a:lstStyle/>
+                    <a:p>
+                      <a:pPr>
+                        <a:lnSpc>
+                          <a:spcPct val="115000"/>
+                        </a:lnSpc>
+                      </a:pPr>
+                      <a:r>
+                        <a:rPr sz="1050" b="0">
+                          <a:solidFill>
+                            <a:srgbClr val="16181A"/>
+                          </a:solidFill>
+                          <a:latin typeface="Arial"/>
+                        </a:rPr>
+                        <a:t>Does it learn from a random player?</a:t>
+                      </a:r>
+                    </a:p>
+                  </a:txBody>
+                  <a:tcPr marL="73152" marR="73152" marT="36576" marB="36576">
+                    <a:solidFill>
+                      <a:srgbClr val="FCFCFB"/>
+                    </a:solidFill>
+                  </a:tcPr>
+                </a:tc>
+                <a:tc>
+                  <a:txBody>
+                    <a:bodyPr/>
+                    <a:lstStyle/>
+                    <a:p>
+                      <a:pPr>
+                        <a:lnSpc>
+                          <a:spcPct val="115000"/>
+                        </a:lnSpc>
+                      </a:pPr>
+                      <a:r>
+                        <a:rPr sz="1050" b="0">
+                          <a:solidFill>
+                            <a:srgbClr val="16181A"/>
+                          </a:solidFill>
+                          <a:latin typeface="Arial"/>
+                        </a:rPr>
+                        <a:t>26.7% vs 26.9%</a:t>
+                      </a:r>
+                    </a:p>
+                  </a:txBody>
+                  <a:tcPr marL="73152" marR="73152" marT="36576" marB="36576">
+                    <a:solidFill>
+                      <a:srgbClr val="FCFCFB"/>
+                    </a:solidFill>
+                  </a:tcPr>
+                </a:tc>
+                <a:tc>
+                  <a:txBody>
+                    <a:bodyPr/>
+                    <a:lstStyle/>
+                    <a:p>
+                      <a:pPr>
+                        <a:lnSpc>
+                          <a:spcPct val="115000"/>
+                        </a:lnSpc>
+                      </a:pPr>
+                      <a:r>
+                        <a:rPr sz="1050" b="0">
+                          <a:solidFill>
+                            <a:srgbClr val="16181A"/>
+                          </a:solidFill>
+                          <a:latin typeface="Arial"/>
+                        </a:rPr>
+                        <a:t>No leakage</a:t>
+                      </a:r>
+                    </a:p>
+                  </a:txBody>
+                  <a:tcPr marL="73152" marR="73152" marT="36576" marB="36576">
+                    <a:solidFill>
+                      <a:srgbClr val="FCFCFB"/>
+                    </a:solidFill>
+                  </a:tcPr>
+                </a:tc>
+              </a:tr>
+              <a:tr h="344658">
+                <a:tc>
+                  <a:txBody>
+                    <a:bodyPr/>
+                    <a:lstStyle/>
+                    <a:p>
+                      <a:pPr>
+                        <a:lnSpc>
+                          <a:spcPct val="115000"/>
+                        </a:lnSpc>
+                      </a:pPr>
+                      <a:r>
+                        <a:rPr sz="1050" b="0">
+                          <a:solidFill>
+                            <a:srgbClr val="16181A"/>
+                          </a:solidFill>
+                          <a:latin typeface="Arial"/>
+                        </a:rPr>
+                        <a:t>E2</a:t>
+                      </a:r>
+                    </a:p>
+                  </a:txBody>
+                  <a:tcPr marL="73152" marR="73152" marT="36576" marB="36576">
+                    <a:solidFill>
+                      <a:srgbClr val="FCFCFB"/>
+                    </a:solidFill>
+                  </a:tcPr>
+                </a:tc>
+                <a:tc>
+                  <a:txBody>
+                    <a:bodyPr/>
+                    <a:lstStyle/>
+                    <a:p>
+                      <a:pPr>
+                        <a:lnSpc>
+                          <a:spcPct val="115000"/>
+                        </a:lnSpc>
+                      </a:pPr>
+                      <a:r>
+                        <a:rPr sz="1050" b="0">
+                          <a:solidFill>
+                            <a:srgbClr val="16181A"/>
+                          </a:solidFill>
+                          <a:latin typeface="Arial"/>
+                        </a:rPr>
+                        <a:t>How fast does it learn?</a:t>
+                      </a:r>
+                    </a:p>
+                  </a:txBody>
+                  <a:tcPr marL="73152" marR="73152" marT="36576" marB="36576">
+                    <a:solidFill>
+                      <a:srgbClr val="FCFCFB"/>
+                    </a:solidFill>
+                  </a:tcPr>
+                </a:tc>
+                <a:tc>
+                  <a:txBody>
+                    <a:bodyPr/>
+                    <a:lstStyle/>
+                    <a:p>
+                      <a:pPr>
+                        <a:lnSpc>
+                          <a:spcPct val="115000"/>
+                        </a:lnSpc>
+                      </a:pPr>
+                      <a:r>
+                        <a:rPr sz="1050" b="0">
+                          <a:solidFill>
+                            <a:srgbClr val="16181A"/>
+                          </a:solidFill>
+                          <a:latin typeface="Arial"/>
+                        </a:rPr>
+                        <a:t>Useful inside ~60 moves</a:t>
+                      </a:r>
+                    </a:p>
+                  </a:txBody>
+                  <a:tcPr marL="73152" marR="73152" marT="36576" marB="36576">
+                    <a:solidFill>
+                      <a:srgbClr val="FCFCFB"/>
+                    </a:solidFill>
+                  </a:tcPr>
+                </a:tc>
+                <a:tc>
+                  <a:txBody>
+                    <a:bodyPr/>
+                    <a:lstStyle/>
+                    <a:p>
+                      <a:pPr>
+                        <a:lnSpc>
+                          <a:spcPct val="115000"/>
+                        </a:lnSpc>
+                      </a:pPr>
+                      <a:r>
+                        <a:rPr sz="1050" b="0">
+                          <a:solidFill>
+                            <a:srgbClr val="16181A"/>
+                          </a:solidFill>
+                          <a:latin typeface="Arial"/>
+                        </a:rPr>
+                        <a:t>Cold start solved</a:t>
+                      </a:r>
+                    </a:p>
+                  </a:txBody>
+                  <a:tcPr marL="73152" marR="73152" marT="36576" marB="36576">
+                    <a:solidFill>
+                      <a:srgbClr val="FCFCFB"/>
+                    </a:solidFill>
+                  </a:tcPr>
+                </a:tc>
+              </a:tr>
+              <a:tr h="344658">
+                <a:tc>
+                  <a:txBody>
+                    <a:bodyPr/>
+                    <a:lstStyle/>
+                    <a:p>
+                      <a:pPr>
+                        <a:lnSpc>
+                          <a:spcPct val="115000"/>
+                        </a:lnSpc>
+                      </a:pPr>
+                      <a:r>
+                        <a:rPr sz="1050" b="0">
+                          <a:solidFill>
+                            <a:srgbClr val="16181A"/>
+                          </a:solidFill>
+                          <a:latin typeface="Arial"/>
+                        </a:rPr>
+                        <a:t>E4</a:t>
+                      </a:r>
+                    </a:p>
+                  </a:txBody>
+                  <a:tcPr marL="73152" marR="73152" marT="36576" marB="36576">
+                    <a:solidFill>
+                      <a:srgbClr val="FCFCFB"/>
+                    </a:solidFill>
+                  </a:tcPr>
+                </a:tc>
+                <a:tc>
+                  <a:txBody>
+                    <a:bodyPr/>
+                    <a:lstStyle/>
+                    <a:p>
+                      <a:pPr>
+                        <a:lnSpc>
+                          <a:spcPct val="115000"/>
+                        </a:lnSpc>
+                      </a:pPr>
+                      <a:r>
+                        <a:rPr sz="1050" b="0">
+                          <a:solidFill>
+                            <a:srgbClr val="16181A"/>
+                          </a:solidFill>
+                          <a:latin typeface="Arial"/>
+                        </a:rPr>
+                        <a:t>Does prediction make it deadlier?</a:t>
+                      </a:r>
+                    </a:p>
+                  </a:txBody>
+                  <a:tcPr marL="73152" marR="73152" marT="36576" marB="36576">
+                    <a:solidFill>
+                      <a:srgbClr val="FCFCFB"/>
+                    </a:solidFill>
+                  </a:tcPr>
+                </a:tc>
+                <a:tc>
+                  <a:txBody>
+                    <a:bodyPr/>
+                    <a:lstStyle/>
+                    <a:p>
+                      <a:pPr>
+                        <a:lnSpc>
+                          <a:spcPct val="115000"/>
+                        </a:lnSpc>
+                      </a:pPr>
+                      <a:r>
+                        <a:rPr sz="1050" b="0">
+                          <a:solidFill>
+                            <a:srgbClr val="16181A"/>
+                          </a:solidFill>
+                          <a:latin typeface="Arial"/>
+                        </a:rPr>
+                        <a:t>319 vs 111 per 1000</a:t>
+                      </a:r>
+                    </a:p>
+                  </a:txBody>
+                  <a:tcPr marL="73152" marR="73152" marT="36576" marB="36576">
+                    <a:solidFill>
+                      <a:srgbClr val="FCFCFB"/>
+                    </a:solidFill>
+                  </a:tcPr>
+                </a:tc>
+                <a:tc>
+                  <a:txBody>
+                    <a:bodyPr/>
+                    <a:lstStyle/>
+                    <a:p>
+                      <a:pPr>
+                        <a:lnSpc>
+                          <a:spcPct val="115000"/>
+                        </a:lnSpc>
+                      </a:pPr>
+                      <a:r>
+                        <a:rPr sz="1050" b="0">
+                          <a:solidFill>
+                            <a:srgbClr val="16181A"/>
+                          </a:solidFill>
+                          <a:latin typeface="Arial"/>
+                        </a:rPr>
+                        <a:t>Yes, vs no model</a:t>
+                      </a:r>
+                    </a:p>
+                  </a:txBody>
+                  <a:tcPr marL="73152" marR="73152" marT="36576" marB="36576">
+                    <a:solidFill>
+                      <a:srgbClr val="FCFCFB"/>
+                    </a:solidFill>
+                  </a:tcPr>
+                </a:tc>
+              </a:tr>
+              <a:tr h="344658">
+                <a:tc>
+                  <a:txBody>
+                    <a:bodyPr/>
+                    <a:lstStyle/>
+                    <a:p>
+                      <a:pPr>
+                        <a:lnSpc>
+                          <a:spcPct val="115000"/>
+                        </a:lnSpc>
+                      </a:pPr>
+                      <a:r>
+                        <a:rPr sz="1050" b="0">
+                          <a:solidFill>
+                            <a:srgbClr val="16181A"/>
+                          </a:solidFill>
+                          <a:latin typeface="Arial"/>
+                        </a:rPr>
+                        <a:t>E7</a:t>
+                      </a:r>
+                    </a:p>
+                  </a:txBody>
+                  <a:tcPr marL="73152" marR="73152" marT="36576" marB="36576">
+                    <a:solidFill>
+                      <a:srgbClr val="FCFCFB"/>
+                    </a:solidFill>
+                  </a:tcPr>
+                </a:tc>
+                <a:tc>
+                  <a:txBody>
+                    <a:bodyPr/>
+                    <a:lstStyle/>
+                    <a:p>
+                      <a:pPr>
+                        <a:lnSpc>
+                          <a:spcPct val="115000"/>
+                        </a:lnSpc>
+                      </a:pPr>
+                      <a:r>
+                        <a:rPr sz="1050" b="0">
+                          <a:solidFill>
+                            <a:srgbClr val="16181A"/>
+                          </a:solidFill>
+                          <a:latin typeface="Arial"/>
+                        </a:rPr>
+                        <a:t>Does that hold at scale?</a:t>
+                      </a:r>
+                    </a:p>
+                  </a:txBody>
+                  <a:tcPr marL="73152" marR="73152" marT="36576" marB="36576">
+                    <a:solidFill>
+                      <a:srgbClr val="FCFCFB"/>
+                    </a:solidFill>
+                  </a:tcPr>
+                </a:tc>
+                <a:tc>
+                  <a:txBody>
+                    <a:bodyPr/>
+                    <a:lstStyle/>
+                    <a:p>
+                      <a:pPr>
+                        <a:lnSpc>
+                          <a:spcPct val="115000"/>
+                        </a:lnSpc>
+                      </a:pPr>
+                      <a:r>
+                        <a:rPr sz="1050" b="0">
+                          <a:solidFill>
+                            <a:srgbClr val="16181A"/>
+                          </a:solidFill>
+                          <a:latin typeface="Arial"/>
+                        </a:rPr>
+                        <a:t>1.15× → 1.57× over hub-camping</a:t>
+                      </a:r>
+                    </a:p>
+                  </a:txBody>
+                  <a:tcPr marL="73152" marR="73152" marT="36576" marB="36576">
+                    <a:solidFill>
+                      <a:srgbClr val="FCFCFB"/>
+                    </a:solidFill>
+                  </a:tcPr>
+                </a:tc>
+                <a:tc>
+                  <a:txBody>
+                    <a:bodyPr/>
+                    <a:lstStyle/>
+                    <a:p>
+                      <a:pPr>
+                        <a:lnSpc>
+                          <a:spcPct val="115000"/>
+                        </a:lnSpc>
+                      </a:pPr>
+                      <a:r>
+                        <a:rPr sz="1050" b="0">
+                          <a:solidFill>
+                            <a:srgbClr val="16181A"/>
+                          </a:solidFill>
+                          <a:latin typeface="Arial"/>
+                        </a:rPr>
+                        <a:t>Grows with size</a:t>
+                      </a:r>
+                    </a:p>
+                  </a:txBody>
+                  <a:tcPr marL="73152" marR="73152" marT="36576" marB="36576">
+                    <a:solidFill>
+                      <a:srgbClr val="FCFCFB"/>
+                    </a:solidFill>
+                  </a:tcPr>
+                </a:tc>
+              </a:tr>
+              <a:tr h="344658">
+                <a:tc>
+                  <a:txBody>
+                    <a:bodyPr/>
+                    <a:lstStyle/>
+                    <a:p>
+                      <a:pPr>
+                        <a:lnSpc>
+                          <a:spcPct val="115000"/>
+                        </a:lnSpc>
+                      </a:pPr>
+                      <a:r>
+                        <a:rPr sz="1050" b="0">
+                          <a:solidFill>
+                            <a:srgbClr val="16181A"/>
+                          </a:solidFill>
+                          <a:latin typeface="Arial"/>
+                        </a:rPr>
+                        <a:t>E5</a:t>
+                      </a:r>
+                    </a:p>
+                  </a:txBody>
+                  <a:tcPr marL="73152" marR="73152" marT="36576" marB="36576">
+                    <a:solidFill>
+                      <a:srgbClr val="FCFCFB"/>
+                    </a:solidFill>
+                  </a:tcPr>
+                </a:tc>
+                <a:tc>
+                  <a:txBody>
+                    <a:bodyPr/>
+                    <a:lstStyle/>
+                    <a:p>
+                      <a:pPr>
+                        <a:lnSpc>
+                          <a:spcPct val="115000"/>
+                        </a:lnSpc>
+                      </a:pPr>
+                      <a:r>
+                        <a:rPr sz="1050" b="0">
+                          <a:solidFill>
+                            <a:srgbClr val="16181A"/>
+                          </a:solidFill>
+                          <a:latin typeface="Arial"/>
+                        </a:rPr>
+                        <a:t>Do world edits cost the player?</a:t>
+                      </a:r>
+                    </a:p>
+                  </a:txBody>
+                  <a:tcPr marL="73152" marR="73152" marT="36576" marB="36576">
+                    <a:solidFill>
+                      <a:srgbClr val="FCFCFB"/>
+                    </a:solidFill>
+                  </a:tcPr>
+                </a:tc>
+                <a:tc>
+                  <a:txBody>
+                    <a:bodyPr/>
+                    <a:lstStyle/>
+                    <a:p>
+                      <a:pPr>
+                        <a:lnSpc>
+                          <a:spcPct val="115000"/>
+                        </a:lnSpc>
+                      </a:pPr>
+                      <a:r>
+                        <a:rPr sz="1050" b="0">
+                          <a:solidFill>
+                            <a:srgbClr val="16181A"/>
+                          </a:solidFill>
+                          <a:latin typeface="Arial"/>
+                        </a:rPr>
+                        <a:t>+54% per objective</a:t>
+                      </a:r>
+                    </a:p>
+                  </a:txBody>
+                  <a:tcPr marL="73152" marR="73152" marT="36576" marB="36576">
+                    <a:solidFill>
+                      <a:srgbClr val="FCFCFB"/>
+                    </a:solidFill>
+                  </a:tcPr>
+                </a:tc>
+                <a:tc>
+                  <a:txBody>
+                    <a:bodyPr/>
+                    <a:lstStyle/>
+                    <a:p>
+                      <a:pPr>
+                        <a:lnSpc>
+                          <a:spcPct val="115000"/>
+                        </a:lnSpc>
+                      </a:pPr>
+                      <a:r>
+                        <a:rPr sz="1050" b="0">
+                          <a:solidFill>
+                            <a:srgbClr val="16181A"/>
+                          </a:solidFill>
+                          <a:latin typeface="Arial"/>
+                        </a:rPr>
+                        <a:t>Yes</a:t>
+                      </a:r>
+                    </a:p>
+                  </a:txBody>
+                  <a:tcPr marL="73152" marR="73152" marT="36576" marB="36576">
+                    <a:solidFill>
+                      <a:srgbClr val="FCFCFB"/>
+                    </a:solidFill>
+                  </a:tcPr>
+                </a:tc>
+              </a:tr>
+              <a:tr h="344658">
+                <a:tc>
+                  <a:txBody>
+                    <a:bodyPr/>
+                    <a:lstStyle/>
+                    <a:p>
+                      <a:pPr>
+                        <a:lnSpc>
+                          <a:spcPct val="115000"/>
+                        </a:lnSpc>
+                      </a:pPr>
+                      <a:r>
+                        <a:rPr sz="1050" b="0">
+                          <a:solidFill>
+                            <a:srgbClr val="16181A"/>
+                          </a:solidFill>
+                          <a:latin typeface="Arial"/>
+                        </a:rPr>
+                        <a:t>E6</a:t>
+                      </a:r>
+                    </a:p>
+                  </a:txBody>
+                  <a:tcPr marL="73152" marR="73152" marT="36576" marB="36576">
+                    <a:solidFill>
+                      <a:srgbClr val="FCFCFB"/>
+                    </a:solidFill>
+                  </a:tcPr>
+                </a:tc>
+                <a:tc>
+                  <a:txBody>
+                    <a:bodyPr/>
+                    <a:lstStyle/>
+                    <a:p>
+                      <a:pPr>
+                        <a:lnSpc>
+                          <a:spcPct val="115000"/>
+                        </a:lnSpc>
+                      </a:pPr>
+                      <a:r>
+                        <a:rPr sz="1050" b="0">
+                          <a:solidFill>
+                            <a:srgbClr val="16181A"/>
+                          </a:solidFill>
+                          <a:latin typeface="Arial"/>
+                        </a:rPr>
+                        <a:t>Is sabotage aimed?</a:t>
+                      </a:r>
+                    </a:p>
+                  </a:txBody>
+                  <a:tcPr marL="73152" marR="73152" marT="36576" marB="36576">
+                    <a:solidFill>
+                      <a:srgbClr val="FCFCFB"/>
+                    </a:solidFill>
+                  </a:tcPr>
+                </a:tc>
+                <a:tc>
+                  <a:txBody>
+                    <a:bodyPr/>
+                    <a:lstStyle/>
+                    <a:p>
+                      <a:pPr>
+                        <a:lnSpc>
+                          <a:spcPct val="115000"/>
+                        </a:lnSpc>
+                      </a:pPr>
+                      <a:r>
+                        <a:rPr sz="1050" b="0">
+                          <a:solidFill>
+                            <a:srgbClr val="16181A"/>
+                          </a:solidFill>
+                          <a:latin typeface="Arial"/>
+                        </a:rPr>
+                        <a:t>No gain on uniform reliance; 13% on uneven</a:t>
+                      </a:r>
+                    </a:p>
+                  </a:txBody>
+                  <a:tcPr marL="73152" marR="73152" marT="36576" marB="36576">
+                    <a:solidFill>
+                      <a:srgbClr val="FCFCFB"/>
+                    </a:solidFill>
+                  </a:tcPr>
+                </a:tc>
+                <a:tc>
+                  <a:txBody>
+                    <a:bodyPr/>
+                    <a:lstStyle/>
+                    <a:p>
+                      <a:pPr>
+                        <a:lnSpc>
+                          <a:spcPct val="115000"/>
+                        </a:lnSpc>
+                      </a:pPr>
+                      <a:r>
+                        <a:rPr sz="1050" b="0">
+                          <a:solidFill>
+                            <a:srgbClr val="16181A"/>
+                          </a:solidFill>
+                          <a:latin typeface="Arial"/>
+                        </a:rPr>
+                        <a:t>Conditional</a:t>
+                      </a:r>
+                    </a:p>
+                  </a:txBody>
+                  <a:tcPr marL="73152" marR="73152" marT="36576" marB="36576">
+                    <a:solidFill>
+                      <a:srgbClr val="FCFCFB"/>
+                    </a:solidFill>
+                  </a:tcPr>
+                </a:tc>
+              </a:tr>
+              <a:tr h="344658">
+                <a:tc>
+                  <a:txBody>
+                    <a:bodyPr/>
+                    <a:lstStyle/>
+                    <a:p>
+                      <a:pPr>
+                        <a:lnSpc>
+                          <a:spcPct val="115000"/>
+                        </a:lnSpc>
+                      </a:pPr>
+                      <a:r>
+                        <a:rPr sz="1050" b="0">
+                          <a:solidFill>
+                            <a:srgbClr val="16181A"/>
+                          </a:solidFill>
+                          <a:latin typeface="Arial"/>
+                        </a:rPr>
+                        <a:t>E8</a:t>
+                      </a:r>
+                    </a:p>
+                  </a:txBody>
+                  <a:tcPr marL="73152" marR="73152" marT="36576" marB="36576">
+                    <a:solidFill>
+                      <a:srgbClr val="FCFCFB"/>
+                    </a:solidFill>
+                  </a:tcPr>
+                </a:tc>
+                <a:tc>
+                  <a:txBody>
+                    <a:bodyPr/>
+                    <a:lstStyle/>
+                    <a:p>
+                      <a:pPr>
+                        <a:lnSpc>
+                          <a:spcPct val="115000"/>
+                        </a:lnSpc>
+                      </a:pPr>
+                      <a:r>
+                        <a:rPr sz="1050" b="0">
+                          <a:solidFill>
+                            <a:srgbClr val="16181A"/>
+                          </a:solidFill>
+                          <a:latin typeface="Arial"/>
+                        </a:rPr>
+                        <a:t>Does waiting defend? (full obs.)</a:t>
+                      </a:r>
+                    </a:p>
+                  </a:txBody>
+                  <a:tcPr marL="73152" marR="73152" marT="36576" marB="36576">
+                    <a:solidFill>
+                      <a:srgbClr val="FCFCFB"/>
+                    </a:solidFill>
+                  </a:tcPr>
+                </a:tc>
+                <a:tc>
+                  <a:txBody>
+                    <a:bodyPr/>
+                    <a:lstStyle/>
+                    <a:p>
+                      <a:pPr>
+                        <a:lnSpc>
+                          <a:spcPct val="115000"/>
+                        </a:lnSpc>
+                      </a:pPr>
+                      <a:r>
+                        <a:rPr sz="1050" b="0">
+                          <a:solidFill>
+                            <a:srgbClr val="16181A"/>
+                          </a:solidFill>
+                          <a:latin typeface="Arial"/>
+                        </a:rPr>
+                        <a:t>1.7% risk cut</a:t>
+                      </a:r>
+                    </a:p>
+                  </a:txBody>
+                  <a:tcPr marL="73152" marR="73152" marT="36576" marB="36576">
+                    <a:solidFill>
+                      <a:srgbClr val="FCFCFB"/>
+                    </a:solidFill>
+                  </a:tcPr>
+                </a:tc>
+                <a:tc>
+                  <a:txBody>
+                    <a:bodyPr/>
+                    <a:lstStyle/>
+                    <a:p>
+                      <a:pPr>
+                        <a:lnSpc>
+                          <a:spcPct val="115000"/>
+                        </a:lnSpc>
+                      </a:pPr>
+                      <a:r>
+                        <a:rPr sz="1050" b="0">
+                          <a:solidFill>
+                            <a:srgbClr val="16181A"/>
+                          </a:solidFill>
+                          <a:latin typeface="Arial"/>
+                        </a:rPr>
+                        <a:t>NEGATIVE</a:t>
+                      </a:r>
+                    </a:p>
+                  </a:txBody>
+                  <a:tcPr marL="73152" marR="73152" marT="36576" marB="36576">
+                    <a:solidFill>
+                      <a:srgbClr val="FCFCFB"/>
+                    </a:solidFill>
+                  </a:tcPr>
+                </a:tc>
+              </a:tr>
+              <a:tr h="344658">
+                <a:tc>
+                  <a:txBody>
+                    <a:bodyPr/>
+                    <a:lstStyle/>
+                    <a:p>
+                      <a:pPr>
+                        <a:lnSpc>
+                          <a:spcPct val="115000"/>
+                        </a:lnSpc>
+                      </a:pPr>
+                      <a:r>
+                        <a:rPr sz="1050" b="0">
+                          <a:solidFill>
+                            <a:srgbClr val="16181A"/>
+                          </a:solidFill>
+                          <a:latin typeface="Arial"/>
+                        </a:rPr>
+                        <a:t>E9</a:t>
+                      </a:r>
+                    </a:p>
+                  </a:txBody>
+                  <a:tcPr marL="73152" marR="73152" marT="36576" marB="36576">
+                    <a:solidFill>
+                      <a:srgbClr val="FCFCFB"/>
+                    </a:solidFill>
+                  </a:tcPr>
+                </a:tc>
+                <a:tc>
+                  <a:txBody>
+                    <a:bodyPr/>
+                    <a:lstStyle/>
+                    <a:p>
+                      <a:pPr>
+                        <a:lnSpc>
+                          <a:spcPct val="115000"/>
+                        </a:lnSpc>
+                      </a:pPr>
+                      <a:r>
+                        <a:rPr sz="1050" b="0">
+                          <a:solidFill>
+                            <a:srgbClr val="16181A"/>
+                          </a:solidFill>
+                          <a:latin typeface="Arial"/>
+                        </a:rPr>
+                        <a:t>Does explicit dwell modelling help?</a:t>
+                      </a:r>
+                    </a:p>
+                  </a:txBody>
+                  <a:tcPr marL="73152" marR="73152" marT="36576" marB="36576">
+                    <a:solidFill>
+                      <a:srgbClr val="FCFCFB"/>
+                    </a:solidFill>
+                  </a:tcPr>
+                </a:tc>
+                <a:tc>
+                  <a:txBody>
+                    <a:bodyPr/>
+                    <a:lstStyle/>
+                    <a:p>
+                      <a:pPr>
+                        <a:lnSpc>
+                          <a:spcPct val="115000"/>
+                        </a:lnSpc>
+                      </a:pPr>
+                      <a:r>
+                        <a:rPr sz="1050" b="0">
+                          <a:solidFill>
+                            <a:srgbClr val="16181A"/>
+                          </a:solidFill>
+                          <a:latin typeface="Arial"/>
+                        </a:rPr>
+                        <a:t>2.0% worse than position-only</a:t>
+                      </a:r>
+                    </a:p>
+                  </a:txBody>
+                  <a:tcPr marL="73152" marR="73152" marT="36576" marB="36576">
+                    <a:solidFill>
+                      <a:srgbClr val="FCFCFB"/>
+                    </a:solidFill>
+                  </a:tcPr>
+                </a:tc>
+                <a:tc>
+                  <a:txBody>
+                    <a:bodyPr/>
+                    <a:lstStyle/>
+                    <a:p>
+                      <a:pPr>
+                        <a:lnSpc>
+                          <a:spcPct val="115000"/>
+                        </a:lnSpc>
+                      </a:pPr>
+                      <a:r>
+                        <a:rPr sz="1050" b="0">
+                          <a:solidFill>
+                            <a:srgbClr val="16181A"/>
+                          </a:solidFill>
+                          <a:latin typeface="Arial"/>
+                        </a:rPr>
+                        <a:t>NEGATIVE</a:t>
+                      </a:r>
+                    </a:p>
+                  </a:txBody>
+                  <a:tcPr marL="73152" marR="73152" marT="36576" marB="36576">
+                    <a:solidFill>
+                      <a:srgbClr val="FCFCFB"/>
+                    </a:solidFill>
+                  </a:tcPr>
+                </a:tc>
+              </a:tr>
+              <a:tr h="344658">
+                <a:tc>
+                  <a:txBody>
+                    <a:bodyPr/>
+                    <a:lstStyle/>
+                    <a:p>
+                      <a:pPr>
+                        <a:lnSpc>
+                          <a:spcPct val="115000"/>
+                        </a:lnSpc>
+                      </a:pPr>
+                      <a:r>
+                        <a:rPr sz="1050" b="0">
+                          <a:solidFill>
+                            <a:srgbClr val="16181A"/>
+                          </a:solidFill>
+                          <a:latin typeface="Arial"/>
+                        </a:rPr>
+                        <a:t>E10</a:t>
+                      </a:r>
+                    </a:p>
+                  </a:txBody>
+                  <a:tcPr marL="73152" marR="73152" marT="36576" marB="36576">
+                    <a:solidFill>
+                      <a:srgbClr val="FCFCFB"/>
+                    </a:solidFill>
+                  </a:tcPr>
+                </a:tc>
+                <a:tc>
+                  <a:txBody>
+                    <a:bodyPr/>
+                    <a:lstStyle/>
+                    <a:p>
+                      <a:pPr>
+                        <a:lnSpc>
+                          <a:spcPct val="115000"/>
+                        </a:lnSpc>
+                      </a:pPr>
+                      <a:r>
+                        <a:rPr sz="1050" b="0">
+                          <a:solidFill>
+                            <a:srgbClr val="16181A"/>
+                          </a:solidFill>
+                          <a:latin typeface="Arial"/>
+                        </a:rPr>
+                        <a:t>Is dwell learnable?</a:t>
+                      </a:r>
+                    </a:p>
+                  </a:txBody>
+                  <a:tcPr marL="73152" marR="73152" marT="36576" marB="36576">
+                    <a:solidFill>
+                      <a:srgbClr val="FCFCFB"/>
+                    </a:solidFill>
+                  </a:tcPr>
+                </a:tc>
+                <a:tc>
+                  <a:txBody>
+                    <a:bodyPr/>
+                    <a:lstStyle/>
+                    <a:p>
+                      <a:pPr>
+                        <a:lnSpc>
+                          <a:spcPct val="115000"/>
+                        </a:lnSpc>
+                      </a:pPr>
+                      <a:r>
+                        <a:rPr sz="1050" b="0">
+                          <a:solidFill>
+                            <a:srgbClr val="16181A"/>
+                          </a:solidFill>
+                          <a:latin typeface="Arial"/>
+                        </a:rPr>
+                        <a:t>70% vs 54% baseline</a:t>
+                      </a:r>
+                    </a:p>
+                  </a:txBody>
+                  <a:tcPr marL="73152" marR="73152" marT="36576" marB="36576">
+                    <a:solidFill>
+                      <a:srgbClr val="FCFCFB"/>
+                    </a:solidFill>
+                  </a:tcPr>
+                </a:tc>
+                <a:tc>
+                  <a:txBody>
+                    <a:bodyPr/>
+                    <a:lstStyle/>
+                    <a:p>
+                      <a:pPr>
+                        <a:lnSpc>
+                          <a:spcPct val="115000"/>
+                        </a:lnSpc>
+                      </a:pPr>
+                      <a:r>
+                        <a:rPr sz="1050" b="0">
+                          <a:solidFill>
+                            <a:srgbClr val="16181A"/>
+                          </a:solidFill>
+                          <a:latin typeface="Arial"/>
+                        </a:rPr>
+                        <a:t>Yes</a:t>
+                      </a:r>
+                    </a:p>
+                  </a:txBody>
+                  <a:tcPr marL="73152" marR="73152" marT="36576" marB="36576">
+                    <a:solidFill>
+                      <a:srgbClr val="FCFCFB"/>
+                    </a:solidFill>
+                  </a:tcPr>
+                </a:tc>
+              </a:tr>
+              <a:tr h="344658">
+                <a:tc>
+                  <a:txBody>
+                    <a:bodyPr/>
+                    <a:lstStyle/>
+                    <a:p>
+                      <a:pPr>
+                        <a:lnSpc>
+                          <a:spcPct val="115000"/>
+                        </a:lnSpc>
+                      </a:pPr>
+                      <a:r>
+                        <a:rPr sz="1050" b="0">
+                          <a:solidFill>
+                            <a:srgbClr val="16181A"/>
+                          </a:solidFill>
+                          <a:latin typeface="Arial"/>
+                        </a:rPr>
+                        <a:t>E11</a:t>
+                      </a:r>
+                    </a:p>
+                  </a:txBody>
+                  <a:tcPr marL="73152" marR="73152" marT="36576" marB="36576">
+                    <a:solidFill>
+                      <a:srgbClr val="FCFCFB"/>
+                    </a:solidFill>
+                  </a:tcPr>
+                </a:tc>
+                <a:tc>
+                  <a:txBody>
+                    <a:bodyPr/>
+                    <a:lstStyle/>
+                    <a:p>
+                      <a:pPr>
+                        <a:lnSpc>
+                          <a:spcPct val="115000"/>
+                        </a:lnSpc>
+                      </a:pPr>
+                      <a:r>
+                        <a:rPr sz="1050" b="0">
+                          <a:solidFill>
+                            <a:srgbClr val="16181A"/>
+                          </a:solidFill>
+                          <a:latin typeface="Arial"/>
+                        </a:rPr>
+                        <a:t>What do sensors buy? (NEW)</a:t>
+                      </a:r>
+                    </a:p>
+                  </a:txBody>
+                  <a:tcPr marL="73152" marR="73152" marT="36576" marB="36576">
+                    <a:solidFill>
+                      <a:srgbClr val="FCFCFB"/>
+                    </a:solidFill>
+                  </a:tcPr>
+                </a:tc>
+                <a:tc>
+                  <a:txBody>
+                    <a:bodyPr/>
+                    <a:lstStyle/>
+                    <a:p>
+                      <a:pPr>
+                        <a:lnSpc>
+                          <a:spcPct val="115000"/>
+                        </a:lnSpc>
+                      </a:pPr>
+                      <a:r>
+                        <a:rPr sz="1050" b="0">
+                          <a:solidFill>
+                            <a:srgbClr val="16181A"/>
+                          </a:solidFill>
+                          <a:latin typeface="Arial"/>
+                        </a:rPr>
+                        <a:t>Full coverage = perfect tracking</a:t>
+                      </a:r>
+                    </a:p>
+                  </a:txBody>
+                  <a:tcPr marL="73152" marR="73152" marT="36576" marB="36576">
+                    <a:solidFill>
+                      <a:srgbClr val="FCFCFB"/>
+                    </a:solidFill>
+                  </a:tcPr>
+                </a:tc>
+                <a:tc>
+                  <a:txBody>
+                    <a:bodyPr/>
+                    <a:lstStyle/>
+                    <a:p>
+                      <a:pPr>
+                        <a:lnSpc>
+                          <a:spcPct val="115000"/>
+                        </a:lnSpc>
+                      </a:pPr>
+                      <a:r>
+                        <a:rPr sz="1050" b="0">
+                          <a:solidFill>
+                            <a:srgbClr val="16181A"/>
+                          </a:solidFill>
+                          <a:latin typeface="Arial"/>
+                        </a:rPr>
+                        <a:t>Mechanism</a:t>
+                      </a:r>
+                    </a:p>
+                  </a:txBody>
+                  <a:tcPr marL="73152" marR="73152" marT="36576" marB="36576">
+                    <a:solidFill>
+                      <a:srgbClr val="FCFCFB"/>
+                    </a:solidFill>
+                  </a:tcPr>
+                </a:tc>
+              </a:tr>
+              <a:tr h="344664">
+                <a:tc>
+                  <a:txBody>
+                    <a:bodyPr/>
+                    <a:lstStyle/>
+                    <a:p>
+                      <a:pPr>
+                        <a:lnSpc>
+                          <a:spcPct val="115000"/>
+                        </a:lnSpc>
+                      </a:pPr>
+                      <a:r>
+                        <a:rPr sz="1050" b="0">
+                          <a:solidFill>
+                            <a:srgbClr val="16181A"/>
+                          </a:solidFill>
+                          <a:latin typeface="Arial"/>
+                        </a:rPr>
+                        <a:t>E12</a:t>
+                      </a:r>
+                    </a:p>
+                  </a:txBody>
+                  <a:tcPr marL="73152" marR="73152" marT="36576" marB="36576">
+                    <a:solidFill>
+                      <a:srgbClr val="FCFCFB"/>
+                    </a:solidFill>
+                  </a:tcPr>
+                </a:tc>
+                <a:tc>
+                  <a:txBody>
+                    <a:bodyPr/>
+                    <a:lstStyle/>
+                    <a:p>
+                      <a:pPr>
+                        <a:lnSpc>
+                          <a:spcPct val="115000"/>
+                        </a:lnSpc>
+                      </a:pPr>
+                      <a:r>
+                        <a:rPr sz="1050" b="0">
+                          <a:solidFill>
+                            <a:srgbClr val="16181A"/>
+                          </a:solidFill>
+                          <a:latin typeface="Arial"/>
+                        </a:rPr>
+                        <a:t>What is the counter-play? (NEW)</a:t>
+                      </a:r>
+                    </a:p>
+                  </a:txBody>
+                  <a:tcPr marL="73152" marR="73152" marT="36576" marB="36576">
+                    <a:solidFill>
+                      <a:srgbClr val="FCFCFB"/>
+                    </a:solidFill>
+                  </a:tcPr>
+                </a:tc>
+                <a:tc>
+                  <a:txBody>
+                    <a:bodyPr/>
+                    <a:lstStyle/>
+                    <a:p>
+                      <a:pPr>
+                        <a:lnSpc>
+                          <a:spcPct val="115000"/>
+                        </a:lnSpc>
+                      </a:pPr>
+                      <a:r>
+                        <a:rPr sz="1050" b="0">
+                          <a:solidFill>
+                            <a:srgbClr val="16181A"/>
+                          </a:solidFill>
+                          <a:latin typeface="Arial"/>
+                        </a:rPr>
+                        <a:t>Disabling sensors: 39% risk cut</a:t>
+                      </a:r>
+                    </a:p>
+                  </a:txBody>
+                  <a:tcPr marL="73152" marR="73152" marT="36576" marB="36576">
+                    <a:solidFill>
+                      <a:srgbClr val="FCFCFB"/>
+                    </a:solidFill>
+                  </a:tcPr>
+                </a:tc>
+                <a:tc>
+                  <a:txBody>
+                    <a:bodyPr/>
+                    <a:lstStyle/>
+                    <a:p>
+                      <a:pPr>
+                        <a:lnSpc>
+                          <a:spcPct val="115000"/>
+                        </a:lnSpc>
+                      </a:pPr>
+                      <a:r>
+                        <a:rPr sz="1050" b="0">
+                          <a:solidFill>
+                            <a:srgbClr val="16181A"/>
+                          </a:solidFill>
+                          <a:latin typeface="Arial"/>
+                        </a:rPr>
+                        <a:t>Design answer</a:t>
+                      </a:r>
+                    </a:p>
+                  </a:txBody>
+                  <a:tcPr marL="73152" marR="73152" marT="36576" marB="36576">
+                    <a:solidFill>
+                      <a:srgbClr val="FCFCFB"/>
+                    </a:solidFill>
+                  </a:tcPr>
+                </a:tc>
+              </a:tr>
+            </a:tbl>
+          </a:graphicData>
+        </a:graphic>
+      </p:graphicFrame>
     </p:spTree>
   </p:cSld>
   <p:clrMapOvr>
@@ -10562,7 +10696,7 @@
                 </a:solidFill>
                 <a:latin typeface="Arial"/>
               </a:rPr>
-              <a:t>LIMITATIONS</a:t>
+              <a:t>INTERPRETATION</a:t>
             </a:r>
           </a:p>
         </p:txBody>
@@ -10604,7 +10738,7 @@
                 </a:solidFill>
                 <a:latin typeface="Arial"/>
               </a:rPr>
-              <a:t>Stated before the panel finds them</a:t>
+              <a:t>Three findings changed the design</a:t>
             </a:r>
           </a:p>
         </p:txBody>
@@ -10653,541 +10787,16 @@
           </a:p>
         </p:txBody>
       </p:sp>
-      <p:graphicFrame>
-        <p:nvGraphicFramePr>
-          <p:cNvPr id="5" name="Table 4"/>
-          <p:cNvGraphicFramePr>
-            <a:graphicFrameLocks noGrp="1"/>
-          </p:cNvGraphicFramePr>
-          <p:nvPr/>
-        </p:nvGraphicFramePr>
-        <p:xfrm>
-          <a:off x="658368" y="1783080"/>
-          <a:ext cx="10881360" cy="2304288"/>
-        </p:xfrm>
-        <a:graphic>
-          <a:graphicData uri="http://schemas.openxmlformats.org/drawingml/2006/table">
-            <a:tbl>
-              <a:tblPr firstRow="1" bandRow="1">
-                <a:tableStyleId>{5C22544A-7EE6-4342-B048-85BDC9FD1C3A}</a:tableStyleId>
-              </a:tblPr>
-              <a:tblGrid>
-                <a:gridCol w="2834640"/>
-                <a:gridCol w="4480560"/>
-                <a:gridCol w="3566160"/>
-              </a:tblGrid>
-              <a:tr h="384048">
-                <a:tc>
-                  <a:txBody>
-                    <a:bodyPr/>
-                    <a:lstStyle/>
-                    <a:p>
-                      <a:pPr>
-                        <a:lnSpc>
-                          <a:spcPct val="115000"/>
-                        </a:lnSpc>
-                      </a:pPr>
-                      <a:r>
-                        <a:rPr sz="900" b="1">
-                          <a:solidFill>
-                            <a:srgbClr val="6B7178"/>
-                          </a:solidFill>
-                          <a:latin typeface="Arial"/>
-                        </a:rPr>
-                        <a:t>Limitation</a:t>
-                      </a:r>
-                    </a:p>
-                  </a:txBody>
-                  <a:tcPr marL="73152" marR="73152" marT="36576" marB="36576">
-                    <a:solidFill>
-                      <a:srgbClr val="F4F6F8"/>
-                    </a:solidFill>
-                  </a:tcPr>
-                </a:tc>
-                <a:tc>
-                  <a:txBody>
-                    <a:bodyPr/>
-                    <a:lstStyle/>
-                    <a:p>
-                      <a:pPr>
-                        <a:lnSpc>
-                          <a:spcPct val="115000"/>
-                        </a:lnSpc>
-                      </a:pPr>
-                      <a:r>
-                        <a:rPr sz="900" b="1">
-                          <a:solidFill>
-                            <a:srgbClr val="6B7178"/>
-                          </a:solidFill>
-                          <a:latin typeface="Arial"/>
-                        </a:rPr>
-                        <a:t>Why it stands</a:t>
-                      </a:r>
-                    </a:p>
-                  </a:txBody>
-                  <a:tcPr marL="73152" marR="73152" marT="36576" marB="36576">
-                    <a:solidFill>
-                      <a:srgbClr val="F4F6F8"/>
-                    </a:solidFill>
-                  </a:tcPr>
-                </a:tc>
-                <a:tc>
-                  <a:txBody>
-                    <a:bodyPr/>
-                    <a:lstStyle/>
-                    <a:p>
-                      <a:pPr>
-                        <a:lnSpc>
-                          <a:spcPct val="115000"/>
-                        </a:lnSpc>
-                      </a:pPr>
-                      <a:r>
-                        <a:rPr sz="900" b="1">
-                          <a:solidFill>
-                            <a:srgbClr val="6B7178"/>
-                          </a:solidFill>
-                          <a:latin typeface="Arial"/>
-                        </a:rPr>
-                        <a:t>What resolves it</a:t>
-                      </a:r>
-                    </a:p>
-                  </a:txBody>
-                  <a:tcPr marL="73152" marR="73152" marT="36576" marB="36576">
-                    <a:solidFill>
-                      <a:srgbClr val="F4F6F8"/>
-                    </a:solidFill>
-                  </a:tcPr>
-                </a:tc>
-              </a:tr>
-              <a:tr h="384048">
-                <a:tc>
-                  <a:txBody>
-                    <a:bodyPr/>
-                    <a:lstStyle/>
-                    <a:p>
-                      <a:pPr>
-                        <a:lnSpc>
-                          <a:spcPct val="115000"/>
-                        </a:lnSpc>
-                      </a:pPr>
-                      <a:r>
-                        <a:rPr sz="1150" b="0">
-                          <a:solidFill>
-                            <a:srgbClr val="16181A"/>
-                          </a:solidFill>
-                          <a:latin typeface="Arial"/>
-                        </a:rPr>
-                        <a:t>No human playtest data</a:t>
-                      </a:r>
-                    </a:p>
-                  </a:txBody>
-                  <a:tcPr marL="73152" marR="73152" marT="36576" marB="36576">
-                    <a:solidFill>
-                      <a:srgbClr val="FCFCFB"/>
-                    </a:solidFill>
-                  </a:tcPr>
-                </a:tc>
-                <a:tc>
-                  <a:txBody>
-                    <a:bodyPr/>
-                    <a:lstStyle/>
-                    <a:p>
-                      <a:pPr>
-                        <a:lnSpc>
-                          <a:spcPct val="115000"/>
-                        </a:lnSpc>
-                      </a:pPr>
-                      <a:r>
-                        <a:rPr sz="1150" b="0">
-                          <a:solidFill>
-                            <a:srgbClr val="16181A"/>
-                          </a:solidFill>
-                          <a:latin typeface="Arial"/>
-                        </a:rPr>
-                        <a:t>All evaluation is against scripted players</a:t>
-                      </a:r>
-                    </a:p>
-                  </a:txBody>
-                  <a:tcPr marL="73152" marR="73152" marT="36576" marB="36576">
-                    <a:solidFill>
-                      <a:srgbClr val="FCFCFB"/>
-                    </a:solidFill>
-                  </a:tcPr>
-                </a:tc>
-                <a:tc>
-                  <a:txBody>
-                    <a:bodyPr/>
-                    <a:lstStyle/>
-                    <a:p>
-                      <a:pPr>
-                        <a:lnSpc>
-                          <a:spcPct val="115000"/>
-                        </a:lnSpc>
-                      </a:pPr>
-                      <a:r>
-                        <a:rPr sz="1150" b="0">
-                          <a:solidFill>
-                            <a:srgbClr val="16181A"/>
-                          </a:solidFill>
-                          <a:latin typeface="Arial"/>
-                        </a:rPr>
-                        <a:t>M5 playtest; telemetry format exists</a:t>
-                      </a:r>
-                    </a:p>
-                  </a:txBody>
-                  <a:tcPr marL="73152" marR="73152" marT="36576" marB="36576">
-                    <a:solidFill>
-                      <a:srgbClr val="FCFCFB"/>
-                    </a:solidFill>
-                  </a:tcPr>
-                </a:tc>
-              </a:tr>
-              <a:tr h="384048">
-                <a:tc>
-                  <a:txBody>
-                    <a:bodyPr/>
-                    <a:lstStyle/>
-                    <a:p>
-                      <a:pPr>
-                        <a:lnSpc>
-                          <a:spcPct val="115000"/>
-                        </a:lnSpc>
-                      </a:pPr>
-                      <a:r>
-                        <a:rPr sz="1150" b="0">
-                          <a:solidFill>
-                            <a:srgbClr val="16181A"/>
-                          </a:solidFill>
-                          <a:latin typeface="Arial"/>
-                        </a:rPr>
-                        <a:t>Dwell rate is an assumption</a:t>
-                      </a:r>
-                    </a:p>
-                  </a:txBody>
-                  <a:tcPr marL="73152" marR="73152" marT="36576" marB="36576">
-                    <a:solidFill>
-                      <a:srgbClr val="FCFCFB"/>
-                    </a:solidFill>
-                  </a:tcPr>
-                </a:tc>
-                <a:tc>
-                  <a:txBody>
-                    <a:bodyPr/>
-                    <a:lstStyle/>
-                    <a:p>
-                      <a:pPr>
-                        <a:lnSpc>
-                          <a:spcPct val="115000"/>
-                        </a:lnSpc>
-                      </a:pPr>
-                      <a:r>
-                        <a:rPr sz="1150" b="0">
-                          <a:solidFill>
-                            <a:srgbClr val="16181A"/>
-                          </a:solidFill>
-                          <a:latin typeface="Arial"/>
-                        </a:rPr>
-                        <a:t>Calibrated to ~24% of windows, not measured</a:t>
-                      </a:r>
-                    </a:p>
-                  </a:txBody>
-                  <a:tcPr marL="73152" marR="73152" marT="36576" marB="36576">
-                    <a:solidFill>
-                      <a:srgbClr val="FCFCFB"/>
-                    </a:solidFill>
-                  </a:tcPr>
-                </a:tc>
-                <a:tc>
-                  <a:txBody>
-                    <a:bodyPr/>
-                    <a:lstStyle/>
-                    <a:p>
-                      <a:pPr>
-                        <a:lnSpc>
-                          <a:spcPct val="115000"/>
-                        </a:lnSpc>
-                      </a:pPr>
-                      <a:r>
-                        <a:rPr sz="1150" b="0">
-                          <a:solidFill>
-                            <a:srgbClr val="16181A"/>
-                          </a:solidFill>
-                          <a:latin typeface="Arial"/>
-                        </a:rPr>
-                        <a:t>Same playtest</a:t>
-                      </a:r>
-                    </a:p>
-                  </a:txBody>
-                  <a:tcPr marL="73152" marR="73152" marT="36576" marB="36576">
-                    <a:solidFill>
-                      <a:srgbClr val="FCFCFB"/>
-                    </a:solidFill>
-                  </a:tcPr>
-                </a:tc>
-              </a:tr>
-              <a:tr h="384048">
-                <a:tc>
-                  <a:txBody>
-                    <a:bodyPr/>
-                    <a:lstStyle/>
-                    <a:p>
-                      <a:pPr>
-                        <a:lnSpc>
-                          <a:spcPct val="115000"/>
-                        </a:lnSpc>
-                      </a:pPr>
-                      <a:r>
-                        <a:rPr sz="1150" b="0">
-                          <a:solidFill>
-                            <a:srgbClr val="16181A"/>
-                          </a:solidFill>
-                          <a:latin typeface="Arial"/>
-                        </a:rPr>
-                        <a:t>Models close at interception</a:t>
-                      </a:r>
-                    </a:p>
-                  </a:txBody>
-                  <a:tcPr marL="73152" marR="73152" marT="36576" marB="36576">
-                    <a:solidFill>
-                      <a:srgbClr val="FCFCFB"/>
-                    </a:solidFill>
-                  </a:tcPr>
-                </a:tc>
-                <a:tc>
-                  <a:txBody>
-                    <a:bodyPr/>
-                    <a:lstStyle/>
-                    <a:p>
-                      <a:pPr>
-                        <a:lnSpc>
-                          <a:spcPct val="115000"/>
-                        </a:lnSpc>
-                      </a:pPr>
-                      <a:r>
-                        <a:rPr sz="1150" b="0">
-                          <a:solidFill>
-                            <a:srgbClr val="16181A"/>
-                          </a:solidFill>
-                          <a:latin typeface="Arial"/>
-                        </a:rPr>
-                        <a:t>VOMM and order-1 within noise on capture rate</a:t>
-                      </a:r>
-                    </a:p>
-                  </a:txBody>
-                  <a:tcPr marL="73152" marR="73152" marT="36576" marB="36576">
-                    <a:solidFill>
-                      <a:srgbClr val="FCFCFB"/>
-                    </a:solidFill>
-                  </a:tcPr>
-                </a:tc>
-                <a:tc>
-                  <a:txBody>
-                    <a:bodyPr/>
-                    <a:lstStyle/>
-                    <a:p>
-                      <a:pPr>
-                        <a:lnSpc>
-                          <a:spcPct val="115000"/>
-                        </a:lnSpc>
-                      </a:pPr>
-                      <a:r>
-                        <a:rPr sz="1150" b="0">
-                          <a:solidFill>
-                            <a:srgbClr val="16181A"/>
-                          </a:solidFill>
-                          <a:latin typeface="Arial"/>
-                        </a:rPr>
-                        <a:t>Clear gap is at prediction, not pursuit</a:t>
-                      </a:r>
-                    </a:p>
-                  </a:txBody>
-                  <a:tcPr marL="73152" marR="73152" marT="36576" marB="36576">
-                    <a:solidFill>
-                      <a:srgbClr val="FCFCFB"/>
-                    </a:solidFill>
-                  </a:tcPr>
-                </a:tc>
-              </a:tr>
-              <a:tr h="384048">
-                <a:tc>
-                  <a:txBody>
-                    <a:bodyPr/>
-                    <a:lstStyle/>
-                    <a:p>
-                      <a:pPr>
-                        <a:lnSpc>
-                          <a:spcPct val="115000"/>
-                        </a:lnSpc>
-                      </a:pPr>
-                      <a:r>
-                        <a:rPr sz="1150" b="0">
-                          <a:solidFill>
-                            <a:srgbClr val="16181A"/>
-                          </a:solidFill>
-                          <a:latin typeface="Arial"/>
-                        </a:rPr>
-                        <a:t>Lookahead can hurt</a:t>
-                      </a:r>
-                    </a:p>
-                  </a:txBody>
-                  <a:tcPr marL="73152" marR="73152" marT="36576" marB="36576">
-                    <a:solidFill>
-                      <a:srgbClr val="FCFCFB"/>
-                    </a:solidFill>
-                  </a:tcPr>
-                </a:tc>
-                <a:tc>
-                  <a:txBody>
-                    <a:bodyPr/>
-                    <a:lstStyle/>
-                    <a:p>
-                      <a:pPr>
-                        <a:lnSpc>
-                          <a:spcPct val="115000"/>
-                        </a:lnSpc>
-                      </a:pPr>
-                      <a:r>
-                        <a:rPr sz="1150" b="0">
-                          <a:solidFill>
-                            <a:srgbClr val="16181A"/>
-                          </a:solidFill>
-                          <a:latin typeface="Arial"/>
-                        </a:rPr>
-                        <a:t>At 61% single-step accuracy, rollout error compounds</a:t>
-                      </a:r>
-                    </a:p>
-                  </a:txBody>
-                  <a:tcPr marL="73152" marR="73152" marT="36576" marB="36576">
-                    <a:solidFill>
-                      <a:srgbClr val="FCFCFB"/>
-                    </a:solidFill>
-                  </a:tcPr>
-                </a:tc>
-                <a:tc>
-                  <a:txBody>
-                    <a:bodyPr/>
-                    <a:lstStyle/>
-                    <a:p>
-                      <a:pPr>
-                        <a:lnSpc>
-                          <a:spcPct val="115000"/>
-                        </a:lnSpc>
-                      </a:pPr>
-                      <a:r>
-                        <a:rPr sz="1150" b="0">
-                          <a:solidFill>
-                            <a:srgbClr val="16181A"/>
-                          </a:solidFill>
-                          <a:latin typeface="Arial"/>
-                        </a:rPr>
-                        <a:t>Expected; documented, not hidden</a:t>
-                      </a:r>
-                    </a:p>
-                  </a:txBody>
-                  <a:tcPr marL="73152" marR="73152" marT="36576" marB="36576">
-                    <a:solidFill>
-                      <a:srgbClr val="FCFCFB"/>
-                    </a:solidFill>
-                  </a:tcPr>
-                </a:tc>
-              </a:tr>
-              <a:tr h="384048">
-                <a:tc>
-                  <a:txBody>
-                    <a:bodyPr/>
-                    <a:lstStyle/>
-                    <a:p>
-                      <a:pPr>
-                        <a:lnSpc>
-                          <a:spcPct val="115000"/>
-                        </a:lnSpc>
-                      </a:pPr>
-                      <a:r>
-                        <a:rPr sz="1150" b="0">
-                          <a:solidFill>
-                            <a:srgbClr val="16181A"/>
-                          </a:solidFill>
-                          <a:latin typeface="Arial"/>
-                        </a:rPr>
-                        <a:t>No 3D integration</a:t>
-                      </a:r>
-                    </a:p>
-                  </a:txBody>
-                  <a:tcPr marL="73152" marR="73152" marT="36576" marB="36576">
-                    <a:solidFill>
-                      <a:srgbClr val="FCFCFB"/>
-                    </a:solidFill>
-                  </a:tcPr>
-                </a:tc>
-                <a:tc>
-                  <a:txBody>
-                    <a:bodyPr/>
-                    <a:lstStyle/>
-                    <a:p>
-                      <a:pPr>
-                        <a:lnSpc>
-                          <a:spcPct val="115000"/>
-                        </a:lnSpc>
-                      </a:pPr>
-                      <a:r>
-                        <a:rPr sz="1150" b="0">
-                          <a:solidFill>
-                            <a:srgbClr val="16181A"/>
-                          </a:solidFill>
-                          <a:latin typeface="Arial"/>
-                        </a:rPr>
-                        <a:t>Godot build not started; art study only</a:t>
-                      </a:r>
-                    </a:p>
-                  </a:txBody>
-                  <a:tcPr marL="73152" marR="73152" marT="36576" marB="36576">
-                    <a:solidFill>
-                      <a:srgbClr val="FCFCFB"/>
-                    </a:solidFill>
-                  </a:tcPr>
-                </a:tc>
-                <a:tc>
-                  <a:txBody>
-                    <a:bodyPr/>
-                    <a:lstStyle/>
-                    <a:p>
-                      <a:pPr>
-                        <a:lnSpc>
-                          <a:spcPct val="115000"/>
-                        </a:lnSpc>
-                      </a:pPr>
-                      <a:r>
-                        <a:rPr sz="1150" b="0">
-                          <a:solidFill>
-                            <a:srgbClr val="16181A"/>
-                          </a:solidFill>
-                          <a:latin typeface="Arial"/>
-                        </a:rPr>
-                        <a:t>M3, next cycle</a:t>
-                      </a:r>
-                    </a:p>
-                  </a:txBody>
-                  <a:tcPr marL="73152" marR="73152" marT="36576" marB="36576">
-                    <a:solidFill>
-                      <a:srgbClr val="FCFCFB"/>
-                    </a:solidFill>
-                  </a:tcPr>
-                </a:tc>
-              </a:tr>
-            </a:tbl>
-          </a:graphicData>
-        </a:graphic>
-      </p:graphicFrame>
-      <p:sp>
-        <p:nvSpPr>
-          <p:cNvPr id="6" name="TextBox 5"/>
+      <p:sp>
+        <p:nvSpPr>
+          <p:cNvPr id="5" name="TextBox 4"/>
           <p:cNvSpPr txBox="1"/>
           <p:nvPr/>
         </p:nvSpPr>
         <p:spPr>
           <a:xfrm>
-            <a:off x="658368" y="4846320"/>
-            <a:ext cx="10881360" cy="1097280"/>
+            <a:off x="658368" y="1783080"/>
+            <a:ext cx="10881360" cy="4480560"/>
           </a:xfrm>
           <a:prstGeom prst="rect">
             <a:avLst/>
@@ -11200,22 +10809,87 @@
           </a:bodyPr>
           <a:lstStyle/>
           <a:p>
-            <a:pPr algn="l">
+            <a:pPr>
               <a:lnSpc>
-                <a:spcPct val="132000"/>
+                <a:spcPct val="130000"/>
               </a:lnSpc>
               <a:spcAft>
-                <a:spcPts val="600"/>
+                <a:spcPts val="1300"/>
               </a:spcAft>
             </a:pPr>
             <a:r>
-              <a:rPr sz="1300" b="0">
+              <a:rPr sz="1350" b="1">
+                <a:solidFill>
+                  <a:srgbClr val="16181A"/>
+                </a:solidFill>
+                <a:latin typeface="Arial"/>
+              </a:rPr>
+              <a:t>1 · A negative result set this cycle's work.  </a:t>
+            </a:r>
+            <a:r>
+              <a:rPr sz="1350">
                 <a:solidFill>
                   <a:srgbClr val="6B7178"/>
                 </a:solidFill>
                 <a:latin typeface="Arial"/>
               </a:rPr>
-              <a:t>Roadmap — M3 the Godot greybox driven by the room graph; M7 polygonal room tiles where side count is the difficulty setting; M8 the outbound register with pre-send tampering, already prototyped in the browser slice. M6 landed this cycle, ahead of M3, because the evidence said it mattered more.</a:t>
+              <a:t>Waiting did not defend, and the cause was perfect observation. That diagnosis — not a guess — is why door sensors were the next milestone. The fix was verified: at 100% coverage the new filter reproduces the old fully-observed behaviour, which is how we know the re-implementation is sound.</a:t>
+            </a:r>
+          </a:p>
+          <a:p>
+            <a:pPr>
+              <a:lnSpc>
+                <a:spcPct val="130000"/>
+              </a:lnSpc>
+              <a:spcAft>
+                <a:spcPts val="1300"/>
+              </a:spcAft>
+            </a:pPr>
+            <a:r>
+              <a:rPr sz="1350" b="1">
+                <a:solidFill>
+                  <a:srgbClr val="16181A"/>
+                </a:solidFill>
+                <a:latin typeface="Arial"/>
+              </a:rPr>
+              <a:t>2 · The metric was hiding the answer.  </a:t>
+            </a:r>
+            <a:r>
+              <a:rPr sz="1350">
+                <a:solidFill>
+                  <a:srgbClr val="6B7178"/>
+                </a:solidFill>
+                <a:latin typeface="Arial"/>
+              </a:rPr>
+              <a:t>Measured per window, avoiding sensors looked excellent. Measured per objective completed, it was worse than doing nothing — the player was simply achieving less. Two strategies that looked like wins disappeared under the corrected metric.</a:t>
+            </a:r>
+          </a:p>
+          <a:p>
+            <a:pPr>
+              <a:lnSpc>
+                <a:spcPct val="130000"/>
+              </a:lnSpc>
+              <a:spcAft>
+                <a:spcPts val="1300"/>
+              </a:spcAft>
+            </a:pPr>
+            <a:r>
+              <a:rPr sz="1350" b="1">
+                <a:solidFill>
+                  <a:srgbClr val="16181A"/>
+                </a:solidFill>
+                <a:latin typeface="Arial"/>
+              </a:rPr>
+              <a:t>3 · The mechanic the fiction already had is the one that works.  </a:t>
+            </a:r>
+            <a:r>
+              <a:rPr sz="1350">
+                <a:solidFill>
+                  <a:srgbClr val="6B7178"/>
+                </a:solidFill>
+                <a:latin typeface="Arial"/>
+              </a:rPr>
+              <a:t>Detouring around live sensors costs more exposure than it saves. Spending a dangerous task to silence a sensor on your existing route is the strategy that cuts risk. The design was right before the measurement was.</a:t>
             </a:r>
           </a:p>
         </p:txBody>
@@ -11283,7 +10957,7 @@
                 </a:solidFill>
                 <a:latin typeface="Arial"/>
               </a:rPr>
-              <a:t>DEMONSTRATION</a:t>
+              <a:t>LIMITATIONS</a:t>
             </a:r>
           </a:p>
         </p:txBody>
@@ -11325,7 +10999,7 @@
                 </a:solidFill>
                 <a:latin typeface="Arial"/>
               </a:rPr>
-              <a:t>Four things that run right now</a:t>
+              <a:t>Stated before the panel finds them</a:t>
             </a:r>
           </a:p>
         </p:txBody>
@@ -11384,6 +11058,727 @@
         </p:nvGraphicFramePr>
         <p:xfrm>
           <a:off x="658368" y="1783080"/>
+          <a:ext cx="10881360" cy="2304288"/>
+        </p:xfrm>
+        <a:graphic>
+          <a:graphicData uri="http://schemas.openxmlformats.org/drawingml/2006/table">
+            <a:tbl>
+              <a:tblPr firstRow="1" bandRow="1">
+                <a:tableStyleId>{5C22544A-7EE6-4342-B048-85BDC9FD1C3A}</a:tableStyleId>
+              </a:tblPr>
+              <a:tblGrid>
+                <a:gridCol w="2834640"/>
+                <a:gridCol w="4480560"/>
+                <a:gridCol w="3566160"/>
+              </a:tblGrid>
+              <a:tr h="384048">
+                <a:tc>
+                  <a:txBody>
+                    <a:bodyPr/>
+                    <a:lstStyle/>
+                    <a:p>
+                      <a:pPr>
+                        <a:lnSpc>
+                          <a:spcPct val="115000"/>
+                        </a:lnSpc>
+                      </a:pPr>
+                      <a:r>
+                        <a:rPr sz="900" b="1">
+                          <a:solidFill>
+                            <a:srgbClr val="6B7178"/>
+                          </a:solidFill>
+                          <a:latin typeface="Arial"/>
+                        </a:rPr>
+                        <a:t>Limitation</a:t>
+                      </a:r>
+                    </a:p>
+                  </a:txBody>
+                  <a:tcPr marL="73152" marR="73152" marT="36576" marB="36576">
+                    <a:solidFill>
+                      <a:srgbClr val="F4F6F8"/>
+                    </a:solidFill>
+                  </a:tcPr>
+                </a:tc>
+                <a:tc>
+                  <a:txBody>
+                    <a:bodyPr/>
+                    <a:lstStyle/>
+                    <a:p>
+                      <a:pPr>
+                        <a:lnSpc>
+                          <a:spcPct val="115000"/>
+                        </a:lnSpc>
+                      </a:pPr>
+                      <a:r>
+                        <a:rPr sz="900" b="1">
+                          <a:solidFill>
+                            <a:srgbClr val="6B7178"/>
+                          </a:solidFill>
+                          <a:latin typeface="Arial"/>
+                        </a:rPr>
+                        <a:t>Why it stands</a:t>
+                      </a:r>
+                    </a:p>
+                  </a:txBody>
+                  <a:tcPr marL="73152" marR="73152" marT="36576" marB="36576">
+                    <a:solidFill>
+                      <a:srgbClr val="F4F6F8"/>
+                    </a:solidFill>
+                  </a:tcPr>
+                </a:tc>
+                <a:tc>
+                  <a:txBody>
+                    <a:bodyPr/>
+                    <a:lstStyle/>
+                    <a:p>
+                      <a:pPr>
+                        <a:lnSpc>
+                          <a:spcPct val="115000"/>
+                        </a:lnSpc>
+                      </a:pPr>
+                      <a:r>
+                        <a:rPr sz="900" b="1">
+                          <a:solidFill>
+                            <a:srgbClr val="6B7178"/>
+                          </a:solidFill>
+                          <a:latin typeface="Arial"/>
+                        </a:rPr>
+                        <a:t>What resolves it</a:t>
+                      </a:r>
+                    </a:p>
+                  </a:txBody>
+                  <a:tcPr marL="73152" marR="73152" marT="36576" marB="36576">
+                    <a:solidFill>
+                      <a:srgbClr val="F4F6F8"/>
+                    </a:solidFill>
+                  </a:tcPr>
+                </a:tc>
+              </a:tr>
+              <a:tr h="384048">
+                <a:tc>
+                  <a:txBody>
+                    <a:bodyPr/>
+                    <a:lstStyle/>
+                    <a:p>
+                      <a:pPr>
+                        <a:lnSpc>
+                          <a:spcPct val="115000"/>
+                        </a:lnSpc>
+                      </a:pPr>
+                      <a:r>
+                        <a:rPr sz="1150" b="0">
+                          <a:solidFill>
+                            <a:srgbClr val="16181A"/>
+                          </a:solidFill>
+                          <a:latin typeface="Arial"/>
+                        </a:rPr>
+                        <a:t>No human playtest data</a:t>
+                      </a:r>
+                    </a:p>
+                  </a:txBody>
+                  <a:tcPr marL="73152" marR="73152" marT="36576" marB="36576">
+                    <a:solidFill>
+                      <a:srgbClr val="FCFCFB"/>
+                    </a:solidFill>
+                  </a:tcPr>
+                </a:tc>
+                <a:tc>
+                  <a:txBody>
+                    <a:bodyPr/>
+                    <a:lstStyle/>
+                    <a:p>
+                      <a:pPr>
+                        <a:lnSpc>
+                          <a:spcPct val="115000"/>
+                        </a:lnSpc>
+                      </a:pPr>
+                      <a:r>
+                        <a:rPr sz="1150" b="0">
+                          <a:solidFill>
+                            <a:srgbClr val="16181A"/>
+                          </a:solidFill>
+                          <a:latin typeface="Arial"/>
+                        </a:rPr>
+                        <a:t>All evaluation is against scripted players</a:t>
+                      </a:r>
+                    </a:p>
+                  </a:txBody>
+                  <a:tcPr marL="73152" marR="73152" marT="36576" marB="36576">
+                    <a:solidFill>
+                      <a:srgbClr val="FCFCFB"/>
+                    </a:solidFill>
+                  </a:tcPr>
+                </a:tc>
+                <a:tc>
+                  <a:txBody>
+                    <a:bodyPr/>
+                    <a:lstStyle/>
+                    <a:p>
+                      <a:pPr>
+                        <a:lnSpc>
+                          <a:spcPct val="115000"/>
+                        </a:lnSpc>
+                      </a:pPr>
+                      <a:r>
+                        <a:rPr sz="1150" b="0">
+                          <a:solidFill>
+                            <a:srgbClr val="16181A"/>
+                          </a:solidFill>
+                          <a:latin typeface="Arial"/>
+                        </a:rPr>
+                        <a:t>M5 playtest; telemetry format exists</a:t>
+                      </a:r>
+                    </a:p>
+                  </a:txBody>
+                  <a:tcPr marL="73152" marR="73152" marT="36576" marB="36576">
+                    <a:solidFill>
+                      <a:srgbClr val="FCFCFB"/>
+                    </a:solidFill>
+                  </a:tcPr>
+                </a:tc>
+              </a:tr>
+              <a:tr h="384048">
+                <a:tc>
+                  <a:txBody>
+                    <a:bodyPr/>
+                    <a:lstStyle/>
+                    <a:p>
+                      <a:pPr>
+                        <a:lnSpc>
+                          <a:spcPct val="115000"/>
+                        </a:lnSpc>
+                      </a:pPr>
+                      <a:r>
+                        <a:rPr sz="1150" b="0">
+                          <a:solidFill>
+                            <a:srgbClr val="16181A"/>
+                          </a:solidFill>
+                          <a:latin typeface="Arial"/>
+                        </a:rPr>
+                        <a:t>Dwell rate is an assumption</a:t>
+                      </a:r>
+                    </a:p>
+                  </a:txBody>
+                  <a:tcPr marL="73152" marR="73152" marT="36576" marB="36576">
+                    <a:solidFill>
+                      <a:srgbClr val="FCFCFB"/>
+                    </a:solidFill>
+                  </a:tcPr>
+                </a:tc>
+                <a:tc>
+                  <a:txBody>
+                    <a:bodyPr/>
+                    <a:lstStyle/>
+                    <a:p>
+                      <a:pPr>
+                        <a:lnSpc>
+                          <a:spcPct val="115000"/>
+                        </a:lnSpc>
+                      </a:pPr>
+                      <a:r>
+                        <a:rPr sz="1150" b="0">
+                          <a:solidFill>
+                            <a:srgbClr val="16181A"/>
+                          </a:solidFill>
+                          <a:latin typeface="Arial"/>
+                        </a:rPr>
+                        <a:t>Calibrated to ~24% of windows, not measured</a:t>
+                      </a:r>
+                    </a:p>
+                  </a:txBody>
+                  <a:tcPr marL="73152" marR="73152" marT="36576" marB="36576">
+                    <a:solidFill>
+                      <a:srgbClr val="FCFCFB"/>
+                    </a:solidFill>
+                  </a:tcPr>
+                </a:tc>
+                <a:tc>
+                  <a:txBody>
+                    <a:bodyPr/>
+                    <a:lstStyle/>
+                    <a:p>
+                      <a:pPr>
+                        <a:lnSpc>
+                          <a:spcPct val="115000"/>
+                        </a:lnSpc>
+                      </a:pPr>
+                      <a:r>
+                        <a:rPr sz="1150" b="0">
+                          <a:solidFill>
+                            <a:srgbClr val="16181A"/>
+                          </a:solidFill>
+                          <a:latin typeface="Arial"/>
+                        </a:rPr>
+                        <a:t>Same playtest</a:t>
+                      </a:r>
+                    </a:p>
+                  </a:txBody>
+                  <a:tcPr marL="73152" marR="73152" marT="36576" marB="36576">
+                    <a:solidFill>
+                      <a:srgbClr val="FCFCFB"/>
+                    </a:solidFill>
+                  </a:tcPr>
+                </a:tc>
+              </a:tr>
+              <a:tr h="384048">
+                <a:tc>
+                  <a:txBody>
+                    <a:bodyPr/>
+                    <a:lstStyle/>
+                    <a:p>
+                      <a:pPr>
+                        <a:lnSpc>
+                          <a:spcPct val="115000"/>
+                        </a:lnSpc>
+                      </a:pPr>
+                      <a:r>
+                        <a:rPr sz="1150" b="0">
+                          <a:solidFill>
+                            <a:srgbClr val="16181A"/>
+                          </a:solidFill>
+                          <a:latin typeface="Arial"/>
+                        </a:rPr>
+                        <a:t>Models close at interception</a:t>
+                      </a:r>
+                    </a:p>
+                  </a:txBody>
+                  <a:tcPr marL="73152" marR="73152" marT="36576" marB="36576">
+                    <a:solidFill>
+                      <a:srgbClr val="FCFCFB"/>
+                    </a:solidFill>
+                  </a:tcPr>
+                </a:tc>
+                <a:tc>
+                  <a:txBody>
+                    <a:bodyPr/>
+                    <a:lstStyle/>
+                    <a:p>
+                      <a:pPr>
+                        <a:lnSpc>
+                          <a:spcPct val="115000"/>
+                        </a:lnSpc>
+                      </a:pPr>
+                      <a:r>
+                        <a:rPr sz="1150" b="0">
+                          <a:solidFill>
+                            <a:srgbClr val="16181A"/>
+                          </a:solidFill>
+                          <a:latin typeface="Arial"/>
+                        </a:rPr>
+                        <a:t>VOMM and order-1 within noise on capture rate</a:t>
+                      </a:r>
+                    </a:p>
+                  </a:txBody>
+                  <a:tcPr marL="73152" marR="73152" marT="36576" marB="36576">
+                    <a:solidFill>
+                      <a:srgbClr val="FCFCFB"/>
+                    </a:solidFill>
+                  </a:tcPr>
+                </a:tc>
+                <a:tc>
+                  <a:txBody>
+                    <a:bodyPr/>
+                    <a:lstStyle/>
+                    <a:p>
+                      <a:pPr>
+                        <a:lnSpc>
+                          <a:spcPct val="115000"/>
+                        </a:lnSpc>
+                      </a:pPr>
+                      <a:r>
+                        <a:rPr sz="1150" b="0">
+                          <a:solidFill>
+                            <a:srgbClr val="16181A"/>
+                          </a:solidFill>
+                          <a:latin typeface="Arial"/>
+                        </a:rPr>
+                        <a:t>Clear gap is at prediction, not pursuit</a:t>
+                      </a:r>
+                    </a:p>
+                  </a:txBody>
+                  <a:tcPr marL="73152" marR="73152" marT="36576" marB="36576">
+                    <a:solidFill>
+                      <a:srgbClr val="FCFCFB"/>
+                    </a:solidFill>
+                  </a:tcPr>
+                </a:tc>
+              </a:tr>
+              <a:tr h="384048">
+                <a:tc>
+                  <a:txBody>
+                    <a:bodyPr/>
+                    <a:lstStyle/>
+                    <a:p>
+                      <a:pPr>
+                        <a:lnSpc>
+                          <a:spcPct val="115000"/>
+                        </a:lnSpc>
+                      </a:pPr>
+                      <a:r>
+                        <a:rPr sz="1150" b="0">
+                          <a:solidFill>
+                            <a:srgbClr val="16181A"/>
+                          </a:solidFill>
+                          <a:latin typeface="Arial"/>
+                        </a:rPr>
+                        <a:t>Lookahead can hurt</a:t>
+                      </a:r>
+                    </a:p>
+                  </a:txBody>
+                  <a:tcPr marL="73152" marR="73152" marT="36576" marB="36576">
+                    <a:solidFill>
+                      <a:srgbClr val="FCFCFB"/>
+                    </a:solidFill>
+                  </a:tcPr>
+                </a:tc>
+                <a:tc>
+                  <a:txBody>
+                    <a:bodyPr/>
+                    <a:lstStyle/>
+                    <a:p>
+                      <a:pPr>
+                        <a:lnSpc>
+                          <a:spcPct val="115000"/>
+                        </a:lnSpc>
+                      </a:pPr>
+                      <a:r>
+                        <a:rPr sz="1150" b="0">
+                          <a:solidFill>
+                            <a:srgbClr val="16181A"/>
+                          </a:solidFill>
+                          <a:latin typeface="Arial"/>
+                        </a:rPr>
+                        <a:t>At 61% single-step accuracy, rollout error compounds</a:t>
+                      </a:r>
+                    </a:p>
+                  </a:txBody>
+                  <a:tcPr marL="73152" marR="73152" marT="36576" marB="36576">
+                    <a:solidFill>
+                      <a:srgbClr val="FCFCFB"/>
+                    </a:solidFill>
+                  </a:tcPr>
+                </a:tc>
+                <a:tc>
+                  <a:txBody>
+                    <a:bodyPr/>
+                    <a:lstStyle/>
+                    <a:p>
+                      <a:pPr>
+                        <a:lnSpc>
+                          <a:spcPct val="115000"/>
+                        </a:lnSpc>
+                      </a:pPr>
+                      <a:r>
+                        <a:rPr sz="1150" b="0">
+                          <a:solidFill>
+                            <a:srgbClr val="16181A"/>
+                          </a:solidFill>
+                          <a:latin typeface="Arial"/>
+                        </a:rPr>
+                        <a:t>Expected; documented, not hidden</a:t>
+                      </a:r>
+                    </a:p>
+                  </a:txBody>
+                  <a:tcPr marL="73152" marR="73152" marT="36576" marB="36576">
+                    <a:solidFill>
+                      <a:srgbClr val="FCFCFB"/>
+                    </a:solidFill>
+                  </a:tcPr>
+                </a:tc>
+              </a:tr>
+              <a:tr h="384048">
+                <a:tc>
+                  <a:txBody>
+                    <a:bodyPr/>
+                    <a:lstStyle/>
+                    <a:p>
+                      <a:pPr>
+                        <a:lnSpc>
+                          <a:spcPct val="115000"/>
+                        </a:lnSpc>
+                      </a:pPr>
+                      <a:r>
+                        <a:rPr sz="1150" b="0">
+                          <a:solidFill>
+                            <a:srgbClr val="16181A"/>
+                          </a:solidFill>
+                          <a:latin typeface="Arial"/>
+                        </a:rPr>
+                        <a:t>No 3D integration</a:t>
+                      </a:r>
+                    </a:p>
+                  </a:txBody>
+                  <a:tcPr marL="73152" marR="73152" marT="36576" marB="36576">
+                    <a:solidFill>
+                      <a:srgbClr val="FCFCFB"/>
+                    </a:solidFill>
+                  </a:tcPr>
+                </a:tc>
+                <a:tc>
+                  <a:txBody>
+                    <a:bodyPr/>
+                    <a:lstStyle/>
+                    <a:p>
+                      <a:pPr>
+                        <a:lnSpc>
+                          <a:spcPct val="115000"/>
+                        </a:lnSpc>
+                      </a:pPr>
+                      <a:r>
+                        <a:rPr sz="1150" b="0">
+                          <a:solidFill>
+                            <a:srgbClr val="16181A"/>
+                          </a:solidFill>
+                          <a:latin typeface="Arial"/>
+                        </a:rPr>
+                        <a:t>Godot build not started; art study only</a:t>
+                      </a:r>
+                    </a:p>
+                  </a:txBody>
+                  <a:tcPr marL="73152" marR="73152" marT="36576" marB="36576">
+                    <a:solidFill>
+                      <a:srgbClr val="FCFCFB"/>
+                    </a:solidFill>
+                  </a:tcPr>
+                </a:tc>
+                <a:tc>
+                  <a:txBody>
+                    <a:bodyPr/>
+                    <a:lstStyle/>
+                    <a:p>
+                      <a:pPr>
+                        <a:lnSpc>
+                          <a:spcPct val="115000"/>
+                        </a:lnSpc>
+                      </a:pPr>
+                      <a:r>
+                        <a:rPr sz="1150" b="0">
+                          <a:solidFill>
+                            <a:srgbClr val="16181A"/>
+                          </a:solidFill>
+                          <a:latin typeface="Arial"/>
+                        </a:rPr>
+                        <a:t>M3, next cycle</a:t>
+                      </a:r>
+                    </a:p>
+                  </a:txBody>
+                  <a:tcPr marL="73152" marR="73152" marT="36576" marB="36576">
+                    <a:solidFill>
+                      <a:srgbClr val="FCFCFB"/>
+                    </a:solidFill>
+                  </a:tcPr>
+                </a:tc>
+              </a:tr>
+            </a:tbl>
+          </a:graphicData>
+        </a:graphic>
+      </p:graphicFrame>
+      <p:sp>
+        <p:nvSpPr>
+          <p:cNvPr id="6" name="TextBox 5"/>
+          <p:cNvSpPr txBox="1"/>
+          <p:nvPr/>
+        </p:nvSpPr>
+        <p:spPr>
+          <a:xfrm>
+            <a:off x="658368" y="4846320"/>
+            <a:ext cx="10881360" cy="1097280"/>
+          </a:xfrm>
+          <a:prstGeom prst="rect">
+            <a:avLst/>
+          </a:prstGeom>
+          <a:noFill/>
+        </p:spPr>
+        <p:txBody>
+          <a:bodyPr wrap="square" lIns="0" rIns="0" tIns="0" bIns="0">
+            <a:spAutoFit/>
+          </a:bodyPr>
+          <a:lstStyle/>
+          <a:p>
+            <a:pPr algn="l">
+              <a:lnSpc>
+                <a:spcPct val="132000"/>
+              </a:lnSpc>
+              <a:spcAft>
+                <a:spcPts val="600"/>
+              </a:spcAft>
+            </a:pPr>
+            <a:r>
+              <a:rPr sz="1300" b="0">
+                <a:solidFill>
+                  <a:srgbClr val="6B7178"/>
+                </a:solidFill>
+                <a:latin typeface="Arial"/>
+              </a:rPr>
+              <a:t>Roadmap — M3 the Godot greybox driven by the room graph; M7 polygonal room tiles where side count is the difficulty setting; M8 the outbound register with pre-send tampering, already prototyped in the browser slice. M6 landed this cycle, ahead of M3, because the evidence said it mattered more.</a:t>
+            </a:r>
+          </a:p>
+        </p:txBody>
+      </p:sp>
+    </p:spTree>
+  </p:cSld>
+  <p:clrMapOvr>
+    <a:masterClrMapping/>
+  </p:clrMapOvr>
+</p:sld>
+</file>
+
+<file path=ppt/slides/slide22.xml><?xml version="1.0" encoding="utf-8"?>
+<p:sld xmlns:a="http://schemas.openxmlformats.org/drawingml/2006/main" xmlns:p="http://schemas.openxmlformats.org/presentationml/2006/main" xmlns:r="http://schemas.openxmlformats.org/officeDocument/2006/relationships">
+  <p:cSld>
+    <p:bg>
+      <p:bgPr>
+        <a:solidFill>
+          <a:srgbClr val="FCFCFB"/>
+        </a:solidFill>
+        <a:effectLst/>
+      </p:bgPr>
+    </p:bg>
+    <p:spTree>
+      <p:nvGrpSpPr>
+        <p:cNvPr id="1" name=""/>
+        <p:cNvGrpSpPr/>
+        <p:nvPr/>
+      </p:nvGrpSpPr>
+      <p:grpSpPr/>
+      <p:sp>
+        <p:nvSpPr>
+          <p:cNvPr id="2" name="TextBox 1"/>
+          <p:cNvSpPr txBox="1"/>
+          <p:nvPr/>
+        </p:nvSpPr>
+        <p:spPr>
+          <a:xfrm>
+            <a:off x="658368" y="420624"/>
+            <a:ext cx="10881360" cy="274320"/>
+          </a:xfrm>
+          <a:prstGeom prst="rect">
+            <a:avLst/>
+          </a:prstGeom>
+          <a:noFill/>
+        </p:spPr>
+        <p:txBody>
+          <a:bodyPr wrap="square" lIns="0" rIns="0" tIns="0" bIns="0">
+            <a:spAutoFit/>
+          </a:bodyPr>
+          <a:lstStyle/>
+          <a:p>
+            <a:pPr algn="l">
+              <a:lnSpc>
+                <a:spcPct val="125000"/>
+              </a:lnSpc>
+              <a:spcAft>
+                <a:spcPts val="600"/>
+              </a:spcAft>
+            </a:pPr>
+            <a:r>
+              <a:rPr sz="1050" b="1">
+                <a:solidFill>
+                  <a:srgbClr val="2A78D6"/>
+                </a:solidFill>
+                <a:latin typeface="Arial"/>
+              </a:rPr>
+              <a:t>DEMONSTRATION</a:t>
+            </a:r>
+          </a:p>
+        </p:txBody>
+      </p:sp>
+      <p:sp>
+        <p:nvSpPr>
+          <p:cNvPr id="3" name="TextBox 2"/>
+          <p:cNvSpPr txBox="1"/>
+          <p:nvPr/>
+        </p:nvSpPr>
+        <p:spPr>
+          <a:xfrm>
+            <a:off x="658368" y="749808"/>
+            <a:ext cx="10881360" cy="822960"/>
+          </a:xfrm>
+          <a:prstGeom prst="rect">
+            <a:avLst/>
+          </a:prstGeom>
+          <a:noFill/>
+        </p:spPr>
+        <p:txBody>
+          <a:bodyPr wrap="square" lIns="0" rIns="0" tIns="0" bIns="0">
+            <a:spAutoFit/>
+          </a:bodyPr>
+          <a:lstStyle/>
+          <a:p>
+            <a:pPr algn="l">
+              <a:lnSpc>
+                <a:spcPct val="125000"/>
+              </a:lnSpc>
+              <a:spcAft>
+                <a:spcPts val="600"/>
+              </a:spcAft>
+            </a:pPr>
+            <a:r>
+              <a:rPr sz="2800" b="1">
+                <a:solidFill>
+                  <a:srgbClr val="16181A"/>
+                </a:solidFill>
+                <a:latin typeface="Arial"/>
+              </a:rPr>
+              <a:t>Four things that run right now</a:t>
+            </a:r>
+          </a:p>
+        </p:txBody>
+      </p:sp>
+      <p:sp>
+        <p:nvSpPr>
+          <p:cNvPr id="4" name="Rectangle 3"/>
+          <p:cNvSpPr/>
+          <p:nvPr/>
+        </p:nvSpPr>
+        <p:spPr>
+          <a:xfrm>
+            <a:off x="658368" y="1481328"/>
+            <a:ext cx="10881360" cy="18288"/>
+          </a:xfrm>
+          <a:prstGeom prst="rect">
+            <a:avLst/>
+          </a:prstGeom>
+          <a:solidFill>
+            <a:srgbClr val="D8DCE0"/>
+          </a:solidFill>
+          <a:ln>
+            <a:noFill/>
+          </a:ln>
+          <a:effectLst/>
+        </p:spPr>
+        <p:style>
+          <a:lnRef idx="1">
+            <a:schemeClr val="accent1"/>
+          </a:lnRef>
+          <a:fillRef idx="3">
+            <a:schemeClr val="accent1"/>
+          </a:fillRef>
+          <a:effectRef idx="2">
+            <a:schemeClr val="accent1"/>
+          </a:effectRef>
+          <a:fontRef idx="minor">
+            <a:schemeClr val="lt1"/>
+          </a:fontRef>
+        </p:style>
+        <p:txBody>
+          <a:bodyPr rtlCol="0" anchor="ctr"/>
+          <a:lstStyle/>
+          <a:p>
+            <a:pPr algn="ctr"/>
+          </a:p>
+        </p:txBody>
+      </p:sp>
+      <p:graphicFrame>
+        <p:nvGraphicFramePr>
+          <p:cNvPr id="5" name="Table 4"/>
+          <p:cNvGraphicFramePr>
+            <a:graphicFrameLocks noGrp="1"/>
+          </p:cNvGraphicFramePr>
+          <p:nvPr/>
+        </p:nvGraphicFramePr>
+        <p:xfrm>
+          <a:off x="658368" y="1783080"/>
           <a:ext cx="10881360" cy="1920240"/>
         </p:xfrm>
         <a:graphic>
@@ -11525,7 +11920,7 @@
                           </a:solidFill>
                           <a:latin typeface="Arial"/>
                         </a:rPr>
-                        <a:t>THE GAME — parity-game.html</a:t>
+                        <a:t>THE GAME — parity-3d.html</a:t>
                       </a:r>
                     </a:p>
                   </a:txBody>
@@ -11552,7 +11947,7 @@
                           </a:solidFill>
                           <a:latin typeface="Arial"/>
                         </a:rPr>
-                        <a:t>Play it. AI view on: belief on the map, doors it can and cannot hear, and its reasoning in English every turn</a:t>
+                        <a:t>Walk it in first person. Three codebooks, then the uplink, with the thing hunting you and narrating itself top-right</a:t>
                       </a:r>
                     </a:p>
                   </a:txBody>
@@ -11608,7 +12003,7 @@
                           </a:solidFill>
                           <a:latin typeface="Arial"/>
                         </a:rPr>
-                        <a:t>Cut a sensor</a:t>
+                        <a:t>Systems view — parity-game.html</a:t>
                       </a:r>
                     </a:p>
                   </a:txBody>
@@ -11635,7 +12030,7 @@
                           </a:solidFill>
                           <a:latin typeface="Arial"/>
                         </a:rPr>
-                        <a:t>Three windows stood still to kill a door, then watch the AI lose track of you</a:t>
+                        <a:t>The same AI with its belief drawn on the map, and a sensor you can cut</a:t>
                       </a:r>
                     </a:p>
                   </a:txBody>
@@ -11774,7 +12169,7 @@
                           </a:solidFill>
                           <a:latin typeface="Arial"/>
                         </a:rPr>
-                        <a:t>Room study — parity-room.html</a:t>
+                        <a:t>Cut a sensor</a:t>
                       </a:r>
                     </a:p>
                   </a:txBody>
@@ -11801,7 +12196,7 @@
                           </a:solidFill>
                           <a:latin typeface="Arial"/>
                         </a:rPr>
-                        <a:t>Walkable art direction for the 3D layer that is still to come</a:t>
+                        <a:t>Three windows stood still to kill a door, then watch it lose your trail</a:t>
                       </a:r>
                     </a:p>
                   </a:txBody>
@@ -11866,7 +12261,7 @@
 </p:sld>
 </file>
 
-<file path=ppt/slides/slide22.xml><?xml version="1.0" encoding="utf-8"?>
+<file path=ppt/slides/slide23.xml><?xml version="1.0" encoding="utf-8"?>
 <p:sld xmlns:a="http://schemas.openxmlformats.org/drawingml/2006/main" xmlns:p="http://schemas.openxmlformats.org/presentationml/2006/main" xmlns:r="http://schemas.openxmlformats.org/officeDocument/2006/relationships">
   <p:cSld>
     <p:bg>
@@ -12044,7 +12439,7 @@
 </p:sld>
 </file>
 
-<file path=ppt/slides/slide23.xml><?xml version="1.0" encoding="utf-8"?>
+<file path=ppt/slides/slide24.xml><?xml version="1.0" encoding="utf-8"?>
 <p:sld xmlns:a="http://schemas.openxmlformats.org/drawingml/2006/main" xmlns:p="http://schemas.openxmlformats.org/presentationml/2006/main" xmlns:r="http://schemas.openxmlformats.org/officeDocument/2006/relationships">
   <p:cSld>
     <p:bg>
@@ -12222,7 +12617,7 @@
 </p:sld>
 </file>
 
-<file path=ppt/slides/slide24.xml><?xml version="1.0" encoding="utf-8"?>
+<file path=ppt/slides/slide25.xml><?xml version="1.0" encoding="utf-8"?>
 <p:sld xmlns:a="http://schemas.openxmlformats.org/drawingml/2006/main" xmlns:p="http://schemas.openxmlformats.org/presentationml/2006/main" xmlns:r="http://schemas.openxmlformats.org/officeDocument/2006/relationships">
   <p:cSld>
     <p:bg>
@@ -12891,7 +13286,7 @@
                 </a:solidFill>
                 <a:latin typeface="Arial"/>
               </a:rPr>
-              <a:t>THE GAME IS THE IMPLEMENTATION</a:t>
+              <a:t>THE GAME</a:t>
             </a:r>
           </a:p>
         </p:txBody>
@@ -12933,7 +13328,7 @@
                 </a:solidFill>
                 <a:latin typeface="Arial"/>
               </a:rPr>
-              <a:t>One build. The AI is inside it, and it explains itself.</a:t>
+              <a:t>First-person, and the AI is in it</a:t>
             </a:r>
           </a:p>
         </p:txBody>
@@ -12984,7 +13379,7 @@
       </p:sp>
       <p:pic>
         <p:nvPicPr>
-          <p:cNvPr id="5" name="Picture 4" descr="fig_game.png"/>
+          <p:cNvPr id="5" name="Picture 4" descr="fig_3d.png"/>
           <p:cNvPicPr>
             <a:picLocks noChangeAspect="1"/>
           </p:cNvPicPr>
@@ -12999,7 +13394,7 @@
         <p:spPr>
           <a:xfrm>
             <a:off x="1874519" y="1664208"/>
-            <a:ext cx="8412480" cy="4520139"/>
+            <a:ext cx="8412480" cy="4732020"/>
           </a:xfrm>
           <a:prstGeom prst="rect">
             <a:avLst/>
@@ -13043,7 +13438,7 @@
                 </a:solidFill>
                 <a:latin typeface="Arial"/>
               </a:rPr>
-              <a:t>Live capture after 22 windows. The AI has ringed room A — 'IT THINKS YOU ARE HERE' — while the player stands in H. It is confidently wrong, because the player has been using doors with no sensor on them.</a:t>
+              <a:t>Eight cells of the facility in a hand-written WebGL build. Record three codebooks, reach the uplink, and survive a thing that hears the doors you use. Here it has just found the player — and the panel on the right shows exactly how.</a:t>
             </a:r>
           </a:p>
         </p:txBody>
@@ -13111,7 +13506,7 @@
                 </a:solidFill>
                 <a:latin typeface="Arial"/>
               </a:rPr>
-              <a:t>THE AI IN PLAIN VIEW</a:t>
+              <a:t>THE SAME AI, IN PLAIN VIEW</a:t>
             </a:r>
           </a:p>
         </p:txBody>
@@ -13153,7 +13548,7 @@
                 </a:solidFill>
                 <a:latin typeface="Arial"/>
               </a:rPr>
-              <a:t>It narrates every decision, in English</a:t>
+              <a:t>The systems view: belief, sensors, and its reasoning</a:t>
             </a:r>
           </a:p>
         </p:txBody>
@@ -13202,6 +13597,226 @@
           </a:p>
         </p:txBody>
       </p:sp>
+      <p:pic>
+        <p:nvPicPr>
+          <p:cNvPr id="5" name="Picture 4" descr="fig_game.png"/>
+          <p:cNvPicPr>
+            <a:picLocks noChangeAspect="1"/>
+          </p:cNvPicPr>
+          <p:nvPr/>
+        </p:nvPicPr>
+        <p:blipFill>
+          <a:blip r:embed="rId2"/>
+          <a:stretch>
+            <a:fillRect/>
+          </a:stretch>
+        </p:blipFill>
+        <p:spPr>
+          <a:xfrm>
+            <a:off x="1874519" y="1664208"/>
+            <a:ext cx="8412480" cy="4520139"/>
+          </a:xfrm>
+          <a:prstGeom prst="rect">
+            <a:avLst/>
+          </a:prstGeom>
+        </p:spPr>
+      </p:pic>
+      <p:sp>
+        <p:nvSpPr>
+          <p:cNvPr id="6" name="TextBox 5"/>
+          <p:cNvSpPr txBox="1"/>
+          <p:nvPr/>
+        </p:nvSpPr>
+        <p:spPr>
+          <a:xfrm>
+            <a:off x="658368" y="6291072"/>
+            <a:ext cx="10881360" cy="457200"/>
+          </a:xfrm>
+          <a:prstGeom prst="rect">
+            <a:avLst/>
+          </a:prstGeom>
+          <a:noFill/>
+        </p:spPr>
+        <p:txBody>
+          <a:bodyPr wrap="square" lIns="0" rIns="0" tIns="0" bIns="0">
+            <a:spAutoFit/>
+          </a:bodyPr>
+          <a:lstStyle/>
+          <a:p>
+            <a:pPr algn="l">
+              <a:lnSpc>
+                <a:spcPct val="128000"/>
+              </a:lnSpc>
+              <a:spcAft>
+                <a:spcPts val="600"/>
+              </a:spcAft>
+            </a:pPr>
+            <a:r>
+              <a:rPr sz="1200" b="0">
+                <a:solidFill>
+                  <a:srgbClr val="6B7178"/>
+                </a:solidFill>
+                <a:latin typeface="Arial"/>
+              </a:rPr>
+              <a:t>Live capture after 22 windows. The AI has ringed room A — 'IT THINKS YOU ARE HERE' — while the player stands in H. It is confidently wrong, because the player has been using doors with no sensor on them.</a:t>
+            </a:r>
+          </a:p>
+        </p:txBody>
+      </p:sp>
+    </p:spTree>
+  </p:cSld>
+  <p:clrMapOvr>
+    <a:masterClrMapping/>
+  </p:clrMapOvr>
+</p:sld>
+</file>
+
+<file path=ppt/slides/slide5.xml><?xml version="1.0" encoding="utf-8"?>
+<p:sld xmlns:a="http://schemas.openxmlformats.org/drawingml/2006/main" xmlns:p="http://schemas.openxmlformats.org/presentationml/2006/main" xmlns:r="http://schemas.openxmlformats.org/officeDocument/2006/relationships">
+  <p:cSld>
+    <p:bg>
+      <p:bgPr>
+        <a:solidFill>
+          <a:srgbClr val="FCFCFB"/>
+        </a:solidFill>
+        <a:effectLst/>
+      </p:bgPr>
+    </p:bg>
+    <p:spTree>
+      <p:nvGrpSpPr>
+        <p:cNvPr id="1" name=""/>
+        <p:cNvGrpSpPr/>
+        <p:nvPr/>
+      </p:nvGrpSpPr>
+      <p:grpSpPr/>
+      <p:sp>
+        <p:nvSpPr>
+          <p:cNvPr id="2" name="TextBox 1"/>
+          <p:cNvSpPr txBox="1"/>
+          <p:nvPr/>
+        </p:nvSpPr>
+        <p:spPr>
+          <a:xfrm>
+            <a:off x="658368" y="420624"/>
+            <a:ext cx="10881360" cy="274320"/>
+          </a:xfrm>
+          <a:prstGeom prst="rect">
+            <a:avLst/>
+          </a:prstGeom>
+          <a:noFill/>
+        </p:spPr>
+        <p:txBody>
+          <a:bodyPr wrap="square" lIns="0" rIns="0" tIns="0" bIns="0">
+            <a:spAutoFit/>
+          </a:bodyPr>
+          <a:lstStyle/>
+          <a:p>
+            <a:pPr algn="l">
+              <a:lnSpc>
+                <a:spcPct val="125000"/>
+              </a:lnSpc>
+              <a:spcAft>
+                <a:spcPts val="600"/>
+              </a:spcAft>
+            </a:pPr>
+            <a:r>
+              <a:rPr sz="1050" b="1">
+                <a:solidFill>
+                  <a:srgbClr val="2A78D6"/>
+                </a:solidFill>
+                <a:latin typeface="Arial"/>
+              </a:rPr>
+              <a:t>THE AI IN PLAIN VIEW</a:t>
+            </a:r>
+          </a:p>
+        </p:txBody>
+      </p:sp>
+      <p:sp>
+        <p:nvSpPr>
+          <p:cNvPr id="3" name="TextBox 2"/>
+          <p:cNvSpPr txBox="1"/>
+          <p:nvPr/>
+        </p:nvSpPr>
+        <p:spPr>
+          <a:xfrm>
+            <a:off x="658368" y="749808"/>
+            <a:ext cx="10881360" cy="822960"/>
+          </a:xfrm>
+          <a:prstGeom prst="rect">
+            <a:avLst/>
+          </a:prstGeom>
+          <a:noFill/>
+        </p:spPr>
+        <p:txBody>
+          <a:bodyPr wrap="square" lIns="0" rIns="0" tIns="0" bIns="0">
+            <a:spAutoFit/>
+          </a:bodyPr>
+          <a:lstStyle/>
+          <a:p>
+            <a:pPr algn="l">
+              <a:lnSpc>
+                <a:spcPct val="125000"/>
+              </a:lnSpc>
+              <a:spcAft>
+                <a:spcPts val="600"/>
+              </a:spcAft>
+            </a:pPr>
+            <a:r>
+              <a:rPr sz="2800" b="1">
+                <a:solidFill>
+                  <a:srgbClr val="16181A"/>
+                </a:solidFill>
+                <a:latin typeface="Arial"/>
+              </a:rPr>
+              <a:t>It narrates every decision, in English</a:t>
+            </a:r>
+          </a:p>
+        </p:txBody>
+      </p:sp>
+      <p:sp>
+        <p:nvSpPr>
+          <p:cNvPr id="4" name="Rectangle 3"/>
+          <p:cNvSpPr/>
+          <p:nvPr/>
+        </p:nvSpPr>
+        <p:spPr>
+          <a:xfrm>
+            <a:off x="658368" y="1481328"/>
+            <a:ext cx="10881360" cy="18288"/>
+          </a:xfrm>
+          <a:prstGeom prst="rect">
+            <a:avLst/>
+          </a:prstGeom>
+          <a:solidFill>
+            <a:srgbClr val="D8DCE0"/>
+          </a:solidFill>
+          <a:ln>
+            <a:noFill/>
+          </a:ln>
+          <a:effectLst/>
+        </p:spPr>
+        <p:style>
+          <a:lnRef idx="1">
+            <a:schemeClr val="accent1"/>
+          </a:lnRef>
+          <a:fillRef idx="3">
+            <a:schemeClr val="accent1"/>
+          </a:fillRef>
+          <a:effectRef idx="2">
+            <a:schemeClr val="accent1"/>
+          </a:effectRef>
+          <a:fontRef idx="minor">
+            <a:schemeClr val="lt1"/>
+          </a:fontRef>
+        </p:style>
+        <p:txBody>
+          <a:bodyPr rtlCol="0" anchor="ctr"/>
+          <a:lstStyle/>
+          <a:p>
+            <a:pPr algn="ctr"/>
+          </a:p>
+        </p:txBody>
+      </p:sp>
       <p:sp>
         <p:nvSpPr>
           <p:cNvPr id="5" name="TextBox 4"/>
@@ -13739,7 +14354,7 @@
 </p:sld>
 </file>
 
-<file path=ppt/slides/slide5.xml><?xml version="1.0" encoding="utf-8"?>
+<file path=ppt/slides/slide6.xml><?xml version="1.0" encoding="utf-8"?>
 <p:sld xmlns:a="http://schemas.openxmlformats.org/drawingml/2006/main" xmlns:p="http://schemas.openxmlformats.org/presentationml/2006/main" xmlns:r="http://schemas.openxmlformats.org/officeDocument/2006/relationships">
   <p:cSld>
     <p:bg>
@@ -13909,7 +14524,7 @@
                 <a:gridCol w="1463040"/>
                 <a:gridCol w="3291840"/>
               </a:tblGrid>
-              <a:tr h="344658">
+              <a:tr h="320040">
                 <a:tc>
                   <a:txBody>
                     <a:bodyPr/>
@@ -14019,7 +14634,7 @@
                   </a:tcPr>
                 </a:tc>
               </a:tr>
-              <a:tr h="344658">
+              <a:tr h="320040">
                 <a:tc>
                   <a:txBody>
                     <a:bodyPr/>
@@ -14129,7 +14744,7 @@
                   </a:tcPr>
                 </a:tc>
               </a:tr>
-              <a:tr h="344658">
+              <a:tr h="320040">
                 <a:tc>
                   <a:txBody>
                     <a:bodyPr/>
@@ -14239,7 +14854,7 @@
                   </a:tcPr>
                 </a:tc>
               </a:tr>
-              <a:tr h="344658">
+              <a:tr h="320040">
                 <a:tc>
                   <a:txBody>
                     <a:bodyPr/>
@@ -14349,7 +14964,7 @@
                   </a:tcPr>
                 </a:tc>
               </a:tr>
-              <a:tr h="344658">
+              <a:tr h="320040">
                 <a:tc>
                   <a:txBody>
                     <a:bodyPr/>
@@ -14459,7 +15074,7 @@
                   </a:tcPr>
                 </a:tc>
               </a:tr>
-              <a:tr h="344658">
+              <a:tr h="320040">
                 <a:tc>
                   <a:txBody>
                     <a:bodyPr/>
@@ -14569,7 +15184,7 @@
                   </a:tcPr>
                 </a:tc>
               </a:tr>
-              <a:tr h="344658">
+              <a:tr h="320040">
                 <a:tc>
                   <a:txBody>
                     <a:bodyPr/>
@@ -14679,7 +15294,7 @@
                   </a:tcPr>
                 </a:tc>
               </a:tr>
-              <a:tr h="344658">
+              <a:tr h="320040">
                 <a:tc>
                   <a:txBody>
                     <a:bodyPr/>
@@ -14789,7 +15404,7 @@
                   </a:tcPr>
                 </a:tc>
               </a:tr>
-              <a:tr h="344658">
+              <a:tr h="320040">
                 <a:tc>
                   <a:txBody>
                     <a:bodyPr/>
@@ -14899,7 +15514,7 @@
                   </a:tcPr>
                 </a:tc>
               </a:tr>
-              <a:tr h="344658">
+              <a:tr h="320040">
                 <a:tc>
                   <a:txBody>
                     <a:bodyPr/>
@@ -15009,7 +15624,7 @@
                   </a:tcPr>
                 </a:tc>
               </a:tr>
-              <a:tr h="344658">
+              <a:tr h="320040">
                 <a:tc>
                   <a:txBody>
                     <a:bodyPr/>
@@ -15119,7 +15734,7 @@
                   </a:tcPr>
                 </a:tc>
               </a:tr>
-              <a:tr h="344658">
+              <a:tr h="320040">
                 <a:tc>
                   <a:txBody>
                     <a:bodyPr/>
@@ -15137,7 +15752,7 @@
                           </a:solidFill>
                           <a:latin typeface="Arial"/>
                         </a:rPr>
-                        <a:t>3D presentation</a:t>
+                        <a:t>First-person build</a:t>
                       </a:r>
                     </a:p>
                   </a:txBody>
@@ -15164,7 +15779,7 @@
                           </a:solidFill>
                           <a:latin typeface="Arial"/>
                         </a:rPr>
-                        <a:t>Godot first-person build</a:t>
+                        <a:t>Walkable facility, clock, entity, AI narration</a:t>
                       </a:r>
                     </a:p>
                   </a:txBody>
@@ -15191,6 +15806,116 @@
                           </a:solidFill>
                           <a:latin typeface="Arial"/>
                         </a:rPr>
+                        <a:t>Playable</a:t>
+                      </a:r>
+                    </a:p>
+                  </a:txBody>
+                  <a:tcPr marL="73152" marR="73152" marT="36576" marB="36576">
+                    <a:solidFill>
+                      <a:srgbClr val="FCFCFB"/>
+                    </a:solidFill>
+                  </a:tcPr>
+                </a:tc>
+                <a:tc>
+                  <a:txBody>
+                    <a:bodyPr/>
+                    <a:lstStyle/>
+                    <a:p>
+                      <a:pPr>
+                        <a:lnSpc>
+                          <a:spcPct val="115000"/>
+                        </a:lnSpc>
+                      </a:pPr>
+                      <a:r>
+                        <a:rPr sz="1000" b="0">
+                          <a:solidFill>
+                            <a:srgbClr val="16181A"/>
+                          </a:solidFill>
+                          <a:latin typeface="Arial"/>
+                        </a:rPr>
+                        <a:t>parity-3d.html</a:t>
+                      </a:r>
+                    </a:p>
+                  </a:txBody>
+                  <a:tcPr marL="73152" marR="73152" marT="36576" marB="36576">
+                    <a:solidFill>
+                      <a:srgbClr val="FCFCFB"/>
+                    </a:solidFill>
+                  </a:tcPr>
+                </a:tc>
+              </a:tr>
+              <a:tr h="320040">
+                <a:tc>
+                  <a:txBody>
+                    <a:bodyPr/>
+                    <a:lstStyle/>
+                    <a:p>
+                      <a:pPr>
+                        <a:lnSpc>
+                          <a:spcPct val="115000"/>
+                        </a:lnSpc>
+                      </a:pPr>
+                      <a:r>
+                        <a:rPr sz="1000" b="0">
+                          <a:solidFill>
+                            <a:srgbClr val="16181A"/>
+                          </a:solidFill>
+                          <a:latin typeface="Arial"/>
+                        </a:rPr>
+                        <a:t>Godot port</a:t>
+                      </a:r>
+                    </a:p>
+                  </a:txBody>
+                  <a:tcPr marL="73152" marR="73152" marT="36576" marB="36576">
+                    <a:solidFill>
+                      <a:srgbClr val="FCFCFB"/>
+                    </a:solidFill>
+                  </a:tcPr>
+                </a:tc>
+                <a:tc>
+                  <a:txBody>
+                    <a:bodyPr/>
+                    <a:lstStyle/>
+                    <a:p>
+                      <a:pPr>
+                        <a:lnSpc>
+                          <a:spcPct val="115000"/>
+                        </a:lnSpc>
+                      </a:pPr>
+                      <a:r>
+                        <a:rPr sz="1000" b="0">
+                          <a:solidFill>
+                            <a:srgbClr val="16181A"/>
+                          </a:solidFill>
+                          <a:latin typeface="Arial"/>
+                        </a:rPr>
+                        <a:t>Engine build, lighting, animation</a:t>
+                      </a:r>
+                    </a:p>
+                  </a:txBody>
+                  <a:tcPr marL="73152" marR="73152" marT="36576" marB="36576">
+                    <a:solidFill>
+                      <a:srgbClr val="FCFCFB"/>
+                    </a:solidFill>
+                  </a:tcPr>
+                </a:tc>
+                <a:tc>
+                  <a:txBody>
+                    <a:bodyPr/>
+                    <a:lstStyle/>
+                    <a:p>
+                      <a:pPr>
+                        <a:lnSpc>
+                          <a:spcPct val="115000"/>
+                        </a:lnSpc>
+                      </a:pPr>
+                      <a:r>
+                        <a:rPr sz="1000" b="0">
+                          <a:solidFill>
+                            <a:srgbClr val="16181A"/>
+                          </a:solidFill>
+                          <a:latin typeface="Arial"/>
+                        </a:rPr>
                         <a:t>Not started</a:t>
                       </a:r>
                     </a:p>
@@ -15218,7 +15943,7 @@
                           </a:solidFill>
                           <a:latin typeface="Arial"/>
                         </a:rPr>
-                        <a:t>art study only</a:t>
+                        <a:t>—</a:t>
                       </a:r>
                     </a:p>
                   </a:txBody>
@@ -15229,7 +15954,7 @@
                   </a:tcPr>
                 </a:tc>
               </a:tr>
-              <a:tr h="344664">
+              <a:tr h="320040">
                 <a:tc>
                   <a:txBody>
                     <a:bodyPr/>
@@ -15393,7 +16118,7 @@
 </p:sld>
 </file>
 
-<file path=ppt/slides/slide6.xml><?xml version="1.0" encoding="utf-8"?>
+<file path=ppt/slides/slide7.xml><?xml version="1.0" encoding="utf-8"?>
 <p:sld xmlns:a="http://schemas.openxmlformats.org/drawingml/2006/main" xmlns:p="http://schemas.openxmlformats.org/presentationml/2006/main" xmlns:r="http://schemas.openxmlformats.org/officeDocument/2006/relationships">
   <p:cSld>
     <p:bg>
@@ -16249,7 +16974,7 @@
 </p:sld>
 </file>
 
-<file path=ppt/slides/slide7.xml><?xml version="1.0" encoding="utf-8"?>
+<file path=ppt/slides/slide8.xml><?xml version="1.0" encoding="utf-8"?>
 <p:sld xmlns:a="http://schemas.openxmlformats.org/drawingml/2006/main" xmlns:p="http://schemas.openxmlformats.org/presentationml/2006/main" xmlns:r="http://schemas.openxmlformats.org/officeDocument/2006/relationships">
   <p:cSld>
     <p:bg>
@@ -16427,7 +17152,7 @@
 </p:sld>
 </file>
 
-<file path=ppt/slides/slide8.xml><?xml version="1.0" encoding="utf-8"?>
+<file path=ppt/slides/slide9.xml><?xml version="1.0" encoding="utf-8"?>
 <p:sld xmlns:a="http://schemas.openxmlformats.org/drawingml/2006/main" xmlns:p="http://schemas.openxmlformats.org/presentationml/2006/main" xmlns:r="http://schemas.openxmlformats.org/officeDocument/2006/relationships">
   <p:cSld>
     <p:bg>
@@ -16783,400 +17508,6 @@
                 <a:latin typeface="Arial"/>
               </a:rPr>
               <a:t>two new experiments, one confirming the old negative result and one identifying the counter-play that actually works.</a:t>
-            </a:r>
-          </a:p>
-        </p:txBody>
-      </p:sp>
-    </p:spTree>
-  </p:cSld>
-  <p:clrMapOvr>
-    <a:masterClrMapping/>
-  </p:clrMapOvr>
-</p:sld>
-</file>
-
-<file path=ppt/slides/slide9.xml><?xml version="1.0" encoding="utf-8"?>
-<p:sld xmlns:a="http://schemas.openxmlformats.org/drawingml/2006/main" xmlns:p="http://schemas.openxmlformats.org/presentationml/2006/main" xmlns:r="http://schemas.openxmlformats.org/officeDocument/2006/relationships">
-  <p:cSld>
-    <p:bg>
-      <p:bgPr>
-        <a:solidFill>
-          <a:srgbClr val="FCFCFB"/>
-        </a:solidFill>
-        <a:effectLst/>
-      </p:bgPr>
-    </p:bg>
-    <p:spTree>
-      <p:nvGrpSpPr>
-        <p:cNvPr id="1" name=""/>
-        <p:cNvGrpSpPr/>
-        <p:nvPr/>
-      </p:nvGrpSpPr>
-      <p:grpSpPr/>
-      <p:sp>
-        <p:nvSpPr>
-          <p:cNvPr id="2" name="TextBox 1"/>
-          <p:cNvSpPr txBox="1"/>
-          <p:nvPr/>
-        </p:nvSpPr>
-        <p:spPr>
-          <a:xfrm>
-            <a:off x="658368" y="420624"/>
-            <a:ext cx="10881360" cy="274320"/>
-          </a:xfrm>
-          <a:prstGeom prst="rect">
-            <a:avLst/>
-          </a:prstGeom>
-          <a:noFill/>
-        </p:spPr>
-        <p:txBody>
-          <a:bodyPr wrap="square" lIns="0" rIns="0" tIns="0" bIns="0">
-            <a:spAutoFit/>
-          </a:bodyPr>
-          <a:lstStyle/>
-          <a:p>
-            <a:pPr algn="l">
-              <a:lnSpc>
-                <a:spcPct val="125000"/>
-              </a:lnSpc>
-              <a:spcAft>
-                <a:spcPts val="600"/>
-              </a:spcAft>
-            </a:pPr>
-            <a:r>
-              <a:rPr sz="1050" b="1">
-                <a:solidFill>
-                  <a:srgbClr val="2A78D6"/>
-                </a:solidFill>
-                <a:latin typeface="Arial"/>
-              </a:rPr>
-              <a:t>TECHNICAL ACCURACY</a:t>
-            </a:r>
-          </a:p>
-        </p:txBody>
-      </p:sp>
-      <p:sp>
-        <p:nvSpPr>
-          <p:cNvPr id="3" name="TextBox 2"/>
-          <p:cNvSpPr txBox="1"/>
-          <p:nvPr/>
-        </p:nvSpPr>
-        <p:spPr>
-          <a:xfrm>
-            <a:off x="658368" y="749808"/>
-            <a:ext cx="10881360" cy="822960"/>
-          </a:xfrm>
-          <a:prstGeom prst="rect">
-            <a:avLst/>
-          </a:prstGeom>
-          <a:noFill/>
-        </p:spPr>
-        <p:txBody>
-          <a:bodyPr wrap="square" lIns="0" rIns="0" tIns="0" bIns="0">
-            <a:spAutoFit/>
-          </a:bodyPr>
-          <a:lstStyle/>
-          <a:p>
-            <a:pPr algn="l">
-              <a:lnSpc>
-                <a:spcPct val="125000"/>
-              </a:lnSpc>
-              <a:spcAft>
-                <a:spcPts val="600"/>
-              </a:spcAft>
-            </a:pPr>
-            <a:r>
-              <a:rPr sz="2800" b="1">
-                <a:solidFill>
-                  <a:srgbClr val="16181A"/>
-                </a:solidFill>
-                <a:latin typeface="Arial"/>
-              </a:rPr>
-              <a:t>The predictor: variable-order Markov with back-off</a:t>
-            </a:r>
-          </a:p>
-        </p:txBody>
-      </p:sp>
-      <p:sp>
-        <p:nvSpPr>
-          <p:cNvPr id="4" name="Rectangle 3"/>
-          <p:cNvSpPr/>
-          <p:nvPr/>
-        </p:nvSpPr>
-        <p:spPr>
-          <a:xfrm>
-            <a:off x="658368" y="1481328"/>
-            <a:ext cx="10881360" cy="18288"/>
-          </a:xfrm>
-          <a:prstGeom prst="rect">
-            <a:avLst/>
-          </a:prstGeom>
-          <a:solidFill>
-            <a:srgbClr val="D8DCE0"/>
-          </a:solidFill>
-          <a:ln>
-            <a:noFill/>
-          </a:ln>
-          <a:effectLst/>
-        </p:spPr>
-        <p:style>
-          <a:lnRef idx="1">
-            <a:schemeClr val="accent1"/>
-          </a:lnRef>
-          <a:fillRef idx="3">
-            <a:schemeClr val="accent1"/>
-          </a:fillRef>
-          <a:effectRef idx="2">
-            <a:schemeClr val="accent1"/>
-          </a:effectRef>
-          <a:fontRef idx="minor">
-            <a:schemeClr val="lt1"/>
-          </a:fontRef>
-        </p:style>
-        <p:txBody>
-          <a:bodyPr rtlCol="0" anchor="ctr"/>
-          <a:lstStyle/>
-          <a:p>
-            <a:pPr algn="ctr"/>
-          </a:p>
-        </p:txBody>
-      </p:sp>
-      <p:sp>
-        <p:nvSpPr>
-          <p:cNvPr id="5" name="Rectangle 4"/>
-          <p:cNvSpPr/>
-          <p:nvPr/>
-        </p:nvSpPr>
-        <p:spPr>
-          <a:xfrm>
-            <a:off x="658368" y="1783080"/>
-            <a:ext cx="10881360" cy="1234440"/>
-          </a:xfrm>
-          <a:prstGeom prst="rect">
-            <a:avLst/>
-          </a:prstGeom>
-          <a:solidFill>
-            <a:srgbClr val="16181A"/>
-          </a:solidFill>
-          <a:ln>
-            <a:noFill/>
-          </a:ln>
-          <a:effectLst/>
-        </p:spPr>
-        <p:style>
-          <a:lnRef idx="1">
-            <a:schemeClr val="accent1"/>
-          </a:lnRef>
-          <a:fillRef idx="3">
-            <a:schemeClr val="accent1"/>
-          </a:fillRef>
-          <a:effectRef idx="2">
-            <a:schemeClr val="accent1"/>
-          </a:effectRef>
-          <a:fontRef idx="minor">
-            <a:schemeClr val="lt1"/>
-          </a:fontRef>
-        </p:style>
-        <p:txBody>
-          <a:bodyPr rtlCol="0" anchor="ctr"/>
-          <a:lstStyle/>
-          <a:p>
-            <a:pPr algn="ctr"/>
-          </a:p>
-        </p:txBody>
-      </p:sp>
-      <p:sp>
-        <p:nvSpPr>
-          <p:cNvPr id="6" name="TextBox 5"/>
-          <p:cNvSpPr txBox="1"/>
-          <p:nvPr/>
-        </p:nvSpPr>
-        <p:spPr>
-          <a:xfrm>
-            <a:off x="1005840" y="1993392"/>
-            <a:ext cx="10241280" cy="914400"/>
-          </a:xfrm>
-          <a:prstGeom prst="rect">
-            <a:avLst/>
-          </a:prstGeom>
-          <a:noFill/>
-        </p:spPr>
-        <p:txBody>
-          <a:bodyPr wrap="square" lIns="0" rIns="0" tIns="0" bIns="0">
-            <a:spAutoFit/>
-          </a:bodyPr>
-          <a:lstStyle/>
-          <a:p>
-            <a:pPr algn="l">
-              <a:lnSpc>
-                <a:spcPct val="160000"/>
-              </a:lnSpc>
-              <a:spcAft>
-                <a:spcPts val="400"/>
-              </a:spcAft>
-            </a:pPr>
-            <a:r>
-              <a:rPr sz="1500" b="0">
-                <a:solidFill>
-                  <a:srgbClr val="FFFFFF"/>
-                </a:solidFill>
-                <a:latin typeface="Consolas"/>
-              </a:rPr>
-              <a:t>P_o(x | ctx)  =  w · f_o(x | ctx)  +  (1 − w) · P_(o−1)(x | ctx[1:])</a:t>
-            </a:r>
-          </a:p>
-          <a:p>
-            <a:pPr algn="l">
-              <a:lnSpc>
-                <a:spcPct val="160000"/>
-              </a:lnSpc>
-              <a:spcAft>
-                <a:spcPts val="400"/>
-              </a:spcAft>
-            </a:pPr>
-            <a:r>
-              <a:rPr sz="1500" b="0">
-                <a:solidFill>
-                  <a:srgbClr val="FFFFFF"/>
-                </a:solidFill>
-                <a:latin typeface="Consolas"/>
-              </a:rPr>
-              <a:t>w  =  C(ctx) / (C(ctx) + α)                    α = 1.6,  k = 4</a:t>
-            </a:r>
-          </a:p>
-        </p:txBody>
-      </p:sp>
-      <p:sp>
-        <p:nvSpPr>
-          <p:cNvPr id="7" name="TextBox 6"/>
-          <p:cNvSpPr txBox="1"/>
-          <p:nvPr/>
-        </p:nvSpPr>
-        <p:spPr>
-          <a:xfrm>
-            <a:off x="658368" y="3246120"/>
-            <a:ext cx="10881360" cy="4480560"/>
-          </a:xfrm>
-          <a:prstGeom prst="rect">
-            <a:avLst/>
-          </a:prstGeom>
-          <a:noFill/>
-        </p:spPr>
-        <p:txBody>
-          <a:bodyPr wrap="square" lIns="0" rIns="0" tIns="0" bIns="0">
-            <a:spAutoFit/>
-          </a:bodyPr>
-          <a:lstStyle/>
-          <a:p>
-            <a:pPr>
-              <a:lnSpc>
-                <a:spcPct val="130000"/>
-              </a:lnSpc>
-              <a:spcAft>
-                <a:spcPts val="900"/>
-              </a:spcAft>
-            </a:pPr>
-            <a:r>
-              <a:rPr sz="1350" b="1">
-                <a:solidFill>
-                  <a:srgbClr val="16181A"/>
-                </a:solidFill>
-                <a:latin typeface="Arial"/>
-              </a:rPr>
-              <a:t>Why not order-1 —  </a:t>
-            </a:r>
-            <a:r>
-              <a:rPr sz="1350">
-                <a:solidFill>
-                  <a:srgbClr val="6B7178"/>
-                </a:solidFill>
-                <a:latin typeface="Arial"/>
-              </a:rPr>
-              <a:t>a route means the same room has different successors depending on how it was entered. Order-1 conditions only on the current room and cannot represent that.</a:t>
-            </a:r>
-          </a:p>
-          <a:p>
-            <a:pPr>
-              <a:lnSpc>
-                <a:spcPct val="130000"/>
-              </a:lnSpc>
-              <a:spcAft>
-                <a:spcPts val="900"/>
-              </a:spcAft>
-            </a:pPr>
-            <a:r>
-              <a:rPr sz="1350" b="1">
-                <a:solidFill>
-                  <a:srgbClr val="16181A"/>
-                </a:solidFill>
-                <a:latin typeface="Arial"/>
-              </a:rPr>
-              <a:t>Why not fixed high order —  </a:t>
-            </a:r>
-            <a:r>
-              <a:rPr sz="1350">
-                <a:solidFill>
-                  <a:srgbClr val="6B7178"/>
-                </a:solidFill>
-                <a:latin typeface="Arial"/>
-              </a:rPr>
-              <a:t>10 rooms and order 4 is 10,000 contexts; almost all are never seen.</a:t>
-            </a:r>
-          </a:p>
-          <a:p>
-            <a:pPr>
-              <a:lnSpc>
-                <a:spcPct val="130000"/>
-              </a:lnSpc>
-              <a:spcAft>
-                <a:spcPts val="900"/>
-              </a:spcAft>
-            </a:pPr>
-            <a:r>
-              <a:rPr sz="1350" b="1">
-                <a:solidFill>
-                  <a:srgbClr val="16181A"/>
-                </a:solidFill>
-                <a:latin typeface="Arial"/>
-              </a:rPr>
-              <a:t>Variable order resolves both —  </a:t>
-            </a:r>
-            <a:r>
-              <a:rPr sz="1350">
-                <a:solidFill>
-                  <a:srgbClr val="6B7178"/>
-                </a:solidFill>
-                <a:latin typeface="Arial"/>
-              </a:rPr>
-              <a:t>use the longest context with enough support, back off when there is not. Witten-Bell interpolation, following Begleiter et al., JAIR 22 (2004).</a:t>
-            </a:r>
-          </a:p>
-          <a:p>
-            <a:pPr>
-              <a:lnSpc>
-                <a:spcPct val="130000"/>
-              </a:lnSpc>
-              <a:spcAft>
-                <a:spcPts val="900"/>
-              </a:spcAft>
-            </a:pPr>
-            <a:r>
-              <a:rPr sz="1350" b="1">
-                <a:solidFill>
-                  <a:srgbClr val="16181A"/>
-                </a:solidFill>
-                <a:latin typeface="Arial"/>
-              </a:rPr>
-              <a:t>Action space —  </a:t>
-            </a:r>
-            <a:r>
-              <a:rPr sz="1350">
-                <a:solidFill>
-                  <a:srgbClr val="6B7178"/>
-                </a:solidFill>
-                <a:latin typeface="Arial"/>
-              </a:rPr>
-              <a:t>at each window the player takes a door OR declines to move, so the candidate set is N(v) ∪ {v}. Dwell is predicted, not assumed.</a:t>
             </a:r>
           </a:p>
         </p:txBody>

--- a/docs/PARITY-review3-deck.pptx
+++ b/docs/PARITY-review3-deck.pptx
@@ -30,6 +30,7 @@
     <p:sldId id="278" r:id="rId29"/>
     <p:sldId id="279" r:id="rId30"/>
     <p:sldId id="280" r:id="rId31"/>
+    <p:sldId id="281" r:id="rId32"/>
   </p:sldIdLst>
   <p:sldSz cx="12191695" cy="6858000" type="screen4x3"/>
   <p:notesSz cx="6858000" cy="9144000"/>
@@ -736,7 +737,7 @@
           <a:lstStyle/>
           <a:p>
             <a:r>
-              <a:t>Lead with the control column, not the 61%.</a:t>
+              <a:t>The answer to 'is it trained properly'. Measure the ceiling, then show where you sit against it. Say the three things that did NOT work: hyperparameter search, intent tagging, goal inference. All three were redundant because the variable-order context already encodes them. That is a finding about the architecture, not a failure.</a:t>
             </a:r>
           </a:p>
         </p:txBody>
@@ -7113,7 +7114,7 @@
                 </a:solidFill>
                 <a:latin typeface="Arial"/>
               </a:rPr>
-              <a:t>RESULTS</a:t>
+              <a:t>TECHNICAL ACCURACY</a:t>
             </a:r>
           </a:p>
         </p:txBody>
@@ -7155,7 +7156,7 @@
                 </a:solidFill>
                 <a:latin typeface="Arial"/>
               </a:rPr>
-              <a:t>Next-move prediction</a:t>
+              <a:t>How well is the model actually trained?</a:t>
             </a:r>
           </a:p>
         </p:txBody>
@@ -7206,7 +7207,7 @@
       </p:sp>
       <p:pic>
         <p:nvPicPr>
-          <p:cNvPr id="5" name="Picture 4" descr="fig_accuracy.png"/>
+          <p:cNvPr id="5" name="Picture 4" descr="fig_training.png"/>
           <p:cNvPicPr>
             <a:picLocks noChangeAspect="1"/>
           </p:cNvPicPr>
@@ -7220,8 +7221,8 @@
         </p:blipFill>
         <p:spPr>
           <a:xfrm>
-            <a:off x="2075688" y="1691640"/>
-            <a:ext cx="8046720" cy="4121491"/>
+            <a:off x="2194560" y="1645920"/>
+            <a:ext cx="7863840" cy="3931920"/>
           </a:xfrm>
           <a:prstGeom prst="rect">
             <a:avLst/>
@@ -7236,8 +7237,8 @@
         </p:nvSpPr>
         <p:spPr>
           <a:xfrm>
-            <a:off x="658368" y="6035040"/>
-            <a:ext cx="10881360" cy="548640"/>
+            <a:off x="658368" y="5742432"/>
+            <a:ext cx="10881360" cy="960120"/>
           </a:xfrm>
           <a:prstGeom prst="rect">
             <a:avLst/>
@@ -7252,20 +7253,20 @@
           <a:p>
             <a:pPr algn="l">
               <a:lnSpc>
-                <a:spcPct val="130000"/>
+                <a:spcPct val="128000"/>
               </a:lnSpc>
               <a:spcAft>
                 <a:spcPts val="600"/>
               </a:spcAft>
             </a:pPr>
             <a:r>
-              <a:rPr sz="1300" b="0">
+              <a:rPr sz="1200" b="0">
                 <a:solidFill>
                   <a:srgbClr val="6B7178"/>
                 </a:solidFill>
                 <a:latin typeface="Arial"/>
               </a:rPr>
-              <a:t>Read the control first: on a random player VOMM scores 26.7% against a 26.9% baseline — identical. The gains on structured players are learned habit, not leakage.</a:t>
+              <a:t>A predictor is only as good as the ceiling allows. An oracle that can see the player's own internal state — which objective they are walking to, whether they are mid-page — reaches 70.9%; the rest is their own coin-flips. Our model reaches 59.9% from behaviour alone, which is 85% of the achievable signal. Grid-searching the hyperparameters changed nothing, and inferring intent explicitly made it worse.</a:t>
             </a:r>
           </a:p>
         </p:txBody>
@@ -7375,7 +7376,7 @@
                 </a:solidFill>
                 <a:latin typeface="Arial"/>
               </a:rPr>
-              <a:t>It learned where you stop to write</a:t>
+              <a:t>Next-move prediction</a:t>
             </a:r>
           </a:p>
         </p:txBody>
@@ -7426,7 +7427,7 @@
       </p:sp>
       <p:pic>
         <p:nvPicPr>
-          <p:cNvPr id="5" name="Picture 4" descr="fig_dwell.png"/>
+          <p:cNvPr id="5" name="Picture 4" descr="fig_accuracy.png"/>
           <p:cNvPicPr>
             <a:picLocks noChangeAspect="1"/>
           </p:cNvPicPr>
@@ -7440,8 +7441,8 @@
         </p:blipFill>
         <p:spPr>
           <a:xfrm>
-            <a:off x="2286000" y="1664208"/>
-            <a:ext cx="7680960" cy="3746810"/>
+            <a:off x="2075688" y="1691640"/>
+            <a:ext cx="8046720" cy="4121491"/>
           </a:xfrm>
           <a:prstGeom prst="rect">
             <a:avLst/>
@@ -7456,8 +7457,8 @@
         </p:nvSpPr>
         <p:spPr>
           <a:xfrm>
-            <a:off x="658368" y="5806440"/>
-            <a:ext cx="10881360" cy="822960"/>
+            <a:off x="658368" y="6035040"/>
+            <a:ext cx="10881360" cy="548640"/>
           </a:xfrm>
           <a:prstGeom prst="rect">
             <a:avLst/>
@@ -7479,13 +7480,13 @@
               </a:spcAft>
             </a:pPr>
             <a:r>
-              <a:rPr sz="1250" b="0">
+              <a:rPr sz="1300" b="0">
                 <a:solidFill>
                   <a:srgbClr val="6B7178"/>
                 </a:solidFill>
                 <a:latin typeface="Arial"/>
               </a:rPr>
-              <a:t>Dwell is behaviour, not a parameter. Predicting 'will they decline this window?' scores 70% against a 54% majority-class baseline — 100% in rooms with nothing to record, 67% where a codebook is. The uncertainty sits exactly where the real variation is.</a:t>
+              <a:t>Read the control first: on a random player VOMM scores 26.7% against a 26.9% baseline — identical. The gains on structured players are learned habit, not leakage.</a:t>
             </a:r>
           </a:p>
         </p:txBody>
@@ -7595,7 +7596,7 @@
                 </a:solidFill>
                 <a:latin typeface="Arial"/>
               </a:rPr>
-              <a:t>The advantage grows with the facility</a:t>
+              <a:t>It learned where you stop to write</a:t>
             </a:r>
           </a:p>
         </p:txBody>
@@ -7646,7 +7647,7 @@
       </p:sp>
       <p:pic>
         <p:nvPicPr>
-          <p:cNvPr id="5" name="Picture 4" descr="fig_scaling.png"/>
+          <p:cNvPr id="5" name="Picture 4" descr="fig_dwell.png"/>
           <p:cNvPicPr>
             <a:picLocks noChangeAspect="1"/>
           </p:cNvPicPr>
@@ -7660,8 +7661,8 @@
         </p:blipFill>
         <p:spPr>
           <a:xfrm>
-            <a:off x="2286000" y="1691640"/>
-            <a:ext cx="7680960" cy="4027820"/>
+            <a:off x="2286000" y="1664208"/>
+            <a:ext cx="7680960" cy="3746810"/>
           </a:xfrm>
           <a:prstGeom prst="rect">
             <a:avLst/>
@@ -7676,8 +7677,8 @@
         </p:nvSpPr>
         <p:spPr>
           <a:xfrm>
-            <a:off x="658368" y="5623560"/>
-            <a:ext cx="10881360" cy="914400"/>
+            <a:off x="658368" y="5806440"/>
+            <a:ext cx="10881360" cy="822960"/>
           </a:xfrm>
           <a:prstGeom prst="rect">
             <a:avLst/>
@@ -7705,7 +7706,7 @@
                 </a:solidFill>
                 <a:latin typeface="Arial"/>
               </a:rPr>
-              <a:t>On 10 rooms with one dominant junction, 'camp the busiest room' is competitive for reasons unrelated to intelligence. As the facility grows it decays fastest and the interceptor's advantage widens from 1.15× to 1.57×.</a:t>
+              <a:t>Dwell is behaviour, not a parameter. Predicting 'will they decline this window?' scores 70% against a 54% majority-class baseline — 100% in rooms with nothing to record, 67% where a codebook is. The uncertainty sits exactly where the real variation is.</a:t>
             </a:r>
           </a:p>
         </p:txBody>
@@ -7815,7 +7816,7 @@
                 </a:solidFill>
                 <a:latin typeface="Arial"/>
               </a:rPr>
-              <a:t>World editing imposes a real cost</a:t>
+              <a:t>The advantage grows with the facility</a:t>
             </a:r>
           </a:p>
         </p:txBody>
@@ -7866,7 +7867,7 @@
       </p:sp>
       <p:pic>
         <p:nvPicPr>
-          <p:cNvPr id="5" name="Picture 4" descr="fig_disruption.png"/>
+          <p:cNvPr id="5" name="Picture 4" descr="fig_scaling.png"/>
           <p:cNvPicPr>
             <a:picLocks noChangeAspect="1"/>
           </p:cNvPicPr>
@@ -7880,8 +7881,8 @@
         </p:blipFill>
         <p:spPr>
           <a:xfrm>
-            <a:off x="2286000" y="1737360"/>
-            <a:ext cx="7680960" cy="3653140"/>
+            <a:off x="2286000" y="1691640"/>
+            <a:ext cx="7680960" cy="4027820"/>
           </a:xfrm>
           <a:prstGeom prst="rect">
             <a:avLst/>
@@ -7925,7 +7926,7 @@
                 </a:solidFill>
                 <a:latin typeface="Arial"/>
               </a:rPr>
-              <a:t>The entity is removed here, isolating topology mutation from hunting. Sealing and rewiring ahead of the player raises the cost of an objective by 54% (20.9 to 32.3 moves per lap). Every mutation passed a reachability check, so no run was ever soft-locked.</a:t>
+              <a:t>On 10 rooms with one dominant junction, 'camp the busiest room' is competitive for reasons unrelated to intelligence. As the facility grows it decays fastest and the interceptor's advantage widens from 1.15× to 1.57×.</a:t>
             </a:r>
           </a:p>
         </p:txBody>
@@ -7993,7 +7994,7 @@
                 </a:solidFill>
                 <a:latin typeface="Arial"/>
               </a:rPr>
-              <a:t>RESULTS — NEW</a:t>
+              <a:t>RESULTS</a:t>
             </a:r>
           </a:p>
         </p:txBody>
@@ -8035,7 +8036,7 @@
                 </a:solidFill>
                 <a:latin typeface="Arial"/>
               </a:rPr>
-              <a:t>What the sensors actually buy the antagonist</a:t>
+              <a:t>World editing imposes a real cost</a:t>
             </a:r>
           </a:p>
         </p:txBody>
@@ -8086,7 +8087,7 @@
       </p:sp>
       <p:pic>
         <p:nvPicPr>
-          <p:cNvPr id="5" name="Picture 4" descr="fig_localisation.png"/>
+          <p:cNvPr id="5" name="Picture 4" descr="fig_disruption.png"/>
           <p:cNvPicPr>
             <a:picLocks noChangeAspect="1"/>
           </p:cNvPicPr>
@@ -8100,8 +8101,8 @@
         </p:blipFill>
         <p:spPr>
           <a:xfrm>
-            <a:off x="2286000" y="1691640"/>
-            <a:ext cx="7680960" cy="3840480"/>
+            <a:off x="2286000" y="1737360"/>
+            <a:ext cx="7680960" cy="3653140"/>
           </a:xfrm>
           <a:prstGeom prst="rect">
             <a:avLst/>
@@ -8145,7 +8146,7 @@
                 </a:solidFill>
                 <a:latin typeface="Arial"/>
               </a:rPr>
-              <a:t>A fully wired facility leaks everything: with a sensor on every door, silence proves the player stayed, so tracking is essentially perfect. Localisation falls roughly linearly as coverage drops. The learned transition prior helps only where there is still evidence to sharpen.</a:t>
+              <a:t>The entity is removed here, isolating topology mutation from hunting. Sealing and rewiring ahead of the player raises the cost of an objective by 54% (20.9 to 32.3 moves per lap). Every mutation passed a reachability check, so no run was ever soft-locked.</a:t>
             </a:r>
           </a:p>
         </p:txBody>
@@ -8255,7 +8256,7 @@
                 </a:solidFill>
                 <a:latin typeface="Arial"/>
               </a:rPr>
-              <a:t>What the player can actually do about it</a:t>
+              <a:t>What the sensors actually buy the antagonist</a:t>
             </a:r>
           </a:p>
         </p:txBody>
@@ -8306,7 +8307,7 @@
       </p:sp>
       <p:pic>
         <p:nvPicPr>
-          <p:cNvPr id="5" name="Picture 4" descr="fig_counterplay.png"/>
+          <p:cNvPr id="5" name="Picture 4" descr="fig_localisation.png"/>
           <p:cNvPicPr>
             <a:picLocks noChangeAspect="1"/>
           </p:cNvPicPr>
@@ -8320,8 +8321,8 @@
         </p:blipFill>
         <p:spPr>
           <a:xfrm>
-            <a:off x="2194560" y="1664208"/>
-            <a:ext cx="7863840" cy="4025537"/>
+            <a:off x="2286000" y="1691640"/>
+            <a:ext cx="7680960" cy="3840480"/>
           </a:xfrm>
           <a:prstGeom prst="rect">
             <a:avLst/>
@@ -8336,7 +8337,7 @@
         </p:nvSpPr>
         <p:spPr>
           <a:xfrm>
-            <a:off x="658368" y="5760720"/>
+            <a:off x="658368" y="5623560"/>
             <a:ext cx="10881360" cy="914400"/>
           </a:xfrm>
           <a:prstGeom prst="rect">
@@ -8365,7 +8366,7 @@
                 </a:solidFill>
                 <a:latin typeface="Arial"/>
               </a:rPr>
-              <a:t>Measured per objective completed, not per window. Waiting at random is WORSE than not waiting at every coverage level. Routing around sensors helps a little. Spending three dangerous tasks to silence sensors on the route you already use cuts capture risk by 39% at 60% coverage.</a:t>
+              <a:t>A fully wired facility leaks everything: with a sensor on every door, silence proves the player stayed, so tracking is essentially perfect. Localisation falls roughly linearly as coverage drops. The learned transition prior helps only where there is still evidence to sharpen.</a:t>
             </a:r>
           </a:p>
         </p:txBody>
@@ -8433,7 +8434,7 @@
                 </a:solidFill>
                 <a:latin typeface="Arial"/>
               </a:rPr>
-              <a:t>RESULTS</a:t>
+              <a:t>RESULTS — NEW</a:t>
             </a:r>
           </a:p>
         </p:txBody>
@@ -8475,7 +8476,7 @@
                 </a:solidFill>
                 <a:latin typeface="Arial"/>
               </a:rPr>
-              <a:t>All twelve experiments at a glance</a:t>
+              <a:t>What the player can actually do about it</a:t>
             </a:r>
           </a:p>
         </p:txBody>
@@ -8524,1464 +8525,72 @@
           </a:p>
         </p:txBody>
       </p:sp>
-      <p:graphicFrame>
-        <p:nvGraphicFramePr>
-          <p:cNvPr id="5" name="Table 4"/>
-          <p:cNvGraphicFramePr>
-            <a:graphicFrameLocks noGrp="1"/>
-          </p:cNvGraphicFramePr>
+      <p:pic>
+        <p:nvPicPr>
+          <p:cNvPr id="5" name="Picture 4" descr="fig_counterplay.png"/>
+          <p:cNvPicPr>
+            <a:picLocks noChangeAspect="1"/>
+          </p:cNvPicPr>
           <p:nvPr/>
-        </p:nvGraphicFramePr>
-        <p:xfrm>
-          <a:off x="658368" y="1783080"/>
-          <a:ext cx="10881360" cy="4480560"/>
-        </p:xfrm>
-        <a:graphic>
-          <a:graphicData uri="http://schemas.openxmlformats.org/drawingml/2006/table">
-            <a:tbl>
-              <a:tblPr firstRow="1" bandRow="1">
-                <a:tableStyleId>{5C22544A-7EE6-4342-B048-85BDC9FD1C3A}</a:tableStyleId>
-              </a:tblPr>
-              <a:tblGrid>
-                <a:gridCol w="548640"/>
-                <a:gridCol w="3840480"/>
-                <a:gridCol w="4114800"/>
-                <a:gridCol w="2377440"/>
-              </a:tblGrid>
-              <a:tr h="344658">
-                <a:tc>
-                  <a:txBody>
-                    <a:bodyPr/>
-                    <a:lstStyle/>
-                    <a:p>
-                      <a:pPr>
-                        <a:lnSpc>
-                          <a:spcPct val="115000"/>
-                        </a:lnSpc>
-                      </a:pPr>
-                      <a:r>
-                        <a:rPr sz="850" b="1">
-                          <a:solidFill>
-                            <a:srgbClr val="6B7178"/>
-                          </a:solidFill>
-                          <a:latin typeface="Arial"/>
-                        </a:rPr>
-                        <a:t>#</a:t>
-                      </a:r>
-                    </a:p>
-                  </a:txBody>
-                  <a:tcPr marL="73152" marR="73152" marT="36576" marB="36576">
-                    <a:solidFill>
-                      <a:srgbClr val="F4F6F8"/>
-                    </a:solidFill>
-                  </a:tcPr>
-                </a:tc>
-                <a:tc>
-                  <a:txBody>
-                    <a:bodyPr/>
-                    <a:lstStyle/>
-                    <a:p>
-                      <a:pPr>
-                        <a:lnSpc>
-                          <a:spcPct val="115000"/>
-                        </a:lnSpc>
-                      </a:pPr>
-                      <a:r>
-                        <a:rPr sz="850" b="1">
-                          <a:solidFill>
-                            <a:srgbClr val="6B7178"/>
-                          </a:solidFill>
-                          <a:latin typeface="Arial"/>
-                        </a:rPr>
-                        <a:t>Question</a:t>
-                      </a:r>
-                    </a:p>
-                  </a:txBody>
-                  <a:tcPr marL="73152" marR="73152" marT="36576" marB="36576">
-                    <a:solidFill>
-                      <a:srgbClr val="F4F6F8"/>
-                    </a:solidFill>
-                  </a:tcPr>
-                </a:tc>
-                <a:tc>
-                  <a:txBody>
-                    <a:bodyPr/>
-                    <a:lstStyle/>
-                    <a:p>
-                      <a:pPr>
-                        <a:lnSpc>
-                          <a:spcPct val="115000"/>
-                        </a:lnSpc>
-                      </a:pPr>
-                      <a:r>
-                        <a:rPr sz="850" b="1">
-                          <a:solidFill>
-                            <a:srgbClr val="6B7178"/>
-                          </a:solidFill>
-                          <a:latin typeface="Arial"/>
-                        </a:rPr>
-                        <a:t>Headline</a:t>
-                      </a:r>
-                    </a:p>
-                  </a:txBody>
-                  <a:tcPr marL="73152" marR="73152" marT="36576" marB="36576">
-                    <a:solidFill>
-                      <a:srgbClr val="F4F6F8"/>
-                    </a:solidFill>
-                  </a:tcPr>
-                </a:tc>
-                <a:tc>
-                  <a:txBody>
-                    <a:bodyPr/>
-                    <a:lstStyle/>
-                    <a:p>
-                      <a:pPr>
-                        <a:lnSpc>
-                          <a:spcPct val="115000"/>
-                        </a:lnSpc>
-                      </a:pPr>
-                      <a:r>
-                        <a:rPr sz="850" b="1">
-                          <a:solidFill>
-                            <a:srgbClr val="6B7178"/>
-                          </a:solidFill>
-                          <a:latin typeface="Arial"/>
-                        </a:rPr>
-                        <a:t>Reading</a:t>
-                      </a:r>
-                    </a:p>
-                  </a:txBody>
-                  <a:tcPr marL="73152" marR="73152" marT="36576" marB="36576">
-                    <a:solidFill>
-                      <a:srgbClr val="F4F6F8"/>
-                    </a:solidFill>
-                  </a:tcPr>
-                </a:tc>
-              </a:tr>
-              <a:tr h="344658">
-                <a:tc>
-                  <a:txBody>
-                    <a:bodyPr/>
-                    <a:lstStyle/>
-                    <a:p>
-                      <a:pPr>
-                        <a:lnSpc>
-                          <a:spcPct val="115000"/>
-                        </a:lnSpc>
-                      </a:pPr>
-                      <a:r>
-                        <a:rPr sz="1050" b="0">
-                          <a:solidFill>
-                            <a:srgbClr val="16181A"/>
-                          </a:solidFill>
-                          <a:latin typeface="Arial"/>
-                        </a:rPr>
-                        <a:t>E1</a:t>
-                      </a:r>
-                    </a:p>
-                  </a:txBody>
-                  <a:tcPr marL="73152" marR="73152" marT="36576" marB="36576">
-                    <a:solidFill>
-                      <a:srgbClr val="FCFCFB"/>
-                    </a:solidFill>
-                  </a:tcPr>
-                </a:tc>
-                <a:tc>
-                  <a:txBody>
-                    <a:bodyPr/>
-                    <a:lstStyle/>
-                    <a:p>
-                      <a:pPr>
-                        <a:lnSpc>
-                          <a:spcPct val="115000"/>
-                        </a:lnSpc>
-                      </a:pPr>
-                      <a:r>
-                        <a:rPr sz="1050" b="0">
-                          <a:solidFill>
-                            <a:srgbClr val="16181A"/>
-                          </a:solidFill>
-                          <a:latin typeface="Arial"/>
-                        </a:rPr>
-                        <a:t>Can it predict the next move?</a:t>
-                      </a:r>
-                    </a:p>
-                  </a:txBody>
-                  <a:tcPr marL="73152" marR="73152" marT="36576" marB="36576">
-                    <a:solidFill>
-                      <a:srgbClr val="FCFCFB"/>
-                    </a:solidFill>
-                  </a:tcPr>
-                </a:tc>
-                <a:tc>
-                  <a:txBody>
-                    <a:bodyPr/>
-                    <a:lstStyle/>
-                    <a:p>
-                      <a:pPr>
-                        <a:lnSpc>
-                          <a:spcPct val="115000"/>
-                        </a:lnSpc>
-                      </a:pPr>
-                      <a:r>
-                        <a:rPr sz="1050" b="0">
-                          <a:solidFill>
-                            <a:srgbClr val="16181A"/>
-                          </a:solidFill>
-                          <a:latin typeface="Arial"/>
-                        </a:rPr>
-                        <a:t>60.5% vs 46.5% vs 30.5%</a:t>
-                      </a:r>
-                    </a:p>
-                  </a:txBody>
-                  <a:tcPr marL="73152" marR="73152" marT="36576" marB="36576">
-                    <a:solidFill>
-                      <a:srgbClr val="FCFCFB"/>
-                    </a:solidFill>
-                  </a:tcPr>
-                </a:tc>
-                <a:tc>
-                  <a:txBody>
-                    <a:bodyPr/>
-                    <a:lstStyle/>
-                    <a:p>
-                      <a:pPr>
-                        <a:lnSpc>
-                          <a:spcPct val="115000"/>
-                        </a:lnSpc>
-                      </a:pPr>
-                      <a:r>
-                        <a:rPr sz="1050" b="0">
-                          <a:solidFill>
-                            <a:srgbClr val="16181A"/>
-                          </a:solidFill>
-                          <a:latin typeface="Arial"/>
-                        </a:rPr>
-                        <a:t>Learns routes</a:t>
-                      </a:r>
-                    </a:p>
-                  </a:txBody>
-                  <a:tcPr marL="73152" marR="73152" marT="36576" marB="36576">
-                    <a:solidFill>
-                      <a:srgbClr val="FCFCFB"/>
-                    </a:solidFill>
-                  </a:tcPr>
-                </a:tc>
-              </a:tr>
-              <a:tr h="344658">
-                <a:tc>
-                  <a:txBody>
-                    <a:bodyPr/>
-                    <a:lstStyle/>
-                    <a:p>
-                      <a:pPr>
-                        <a:lnSpc>
-                          <a:spcPct val="115000"/>
-                        </a:lnSpc>
-                      </a:pPr>
-                      <a:r>
-                        <a:rPr sz="1050" b="0">
-                          <a:solidFill>
-                            <a:srgbClr val="16181A"/>
-                          </a:solidFill>
-                          <a:latin typeface="Arial"/>
-                        </a:rPr>
-                        <a:t>E1c</a:t>
-                      </a:r>
-                    </a:p>
-                  </a:txBody>
-                  <a:tcPr marL="73152" marR="73152" marT="36576" marB="36576">
-                    <a:solidFill>
-                      <a:srgbClr val="FCFCFB"/>
-                    </a:solidFill>
-                  </a:tcPr>
-                </a:tc>
-                <a:tc>
-                  <a:txBody>
-                    <a:bodyPr/>
-                    <a:lstStyle/>
-                    <a:p>
-                      <a:pPr>
-                        <a:lnSpc>
-                          <a:spcPct val="115000"/>
-                        </a:lnSpc>
-                      </a:pPr>
-                      <a:r>
-                        <a:rPr sz="1050" b="0">
-                          <a:solidFill>
-                            <a:srgbClr val="16181A"/>
-                          </a:solidFill>
-                          <a:latin typeface="Arial"/>
-                        </a:rPr>
-                        <a:t>Does it learn from a random player?</a:t>
-                      </a:r>
-                    </a:p>
-                  </a:txBody>
-                  <a:tcPr marL="73152" marR="73152" marT="36576" marB="36576">
-                    <a:solidFill>
-                      <a:srgbClr val="FCFCFB"/>
-                    </a:solidFill>
-                  </a:tcPr>
-                </a:tc>
-                <a:tc>
-                  <a:txBody>
-                    <a:bodyPr/>
-                    <a:lstStyle/>
-                    <a:p>
-                      <a:pPr>
-                        <a:lnSpc>
-                          <a:spcPct val="115000"/>
-                        </a:lnSpc>
-                      </a:pPr>
-                      <a:r>
-                        <a:rPr sz="1050" b="0">
-                          <a:solidFill>
-                            <a:srgbClr val="16181A"/>
-                          </a:solidFill>
-                          <a:latin typeface="Arial"/>
-                        </a:rPr>
-                        <a:t>26.7% vs 26.9%</a:t>
-                      </a:r>
-                    </a:p>
-                  </a:txBody>
-                  <a:tcPr marL="73152" marR="73152" marT="36576" marB="36576">
-                    <a:solidFill>
-                      <a:srgbClr val="FCFCFB"/>
-                    </a:solidFill>
-                  </a:tcPr>
-                </a:tc>
-                <a:tc>
-                  <a:txBody>
-                    <a:bodyPr/>
-                    <a:lstStyle/>
-                    <a:p>
-                      <a:pPr>
-                        <a:lnSpc>
-                          <a:spcPct val="115000"/>
-                        </a:lnSpc>
-                      </a:pPr>
-                      <a:r>
-                        <a:rPr sz="1050" b="0">
-                          <a:solidFill>
-                            <a:srgbClr val="16181A"/>
-                          </a:solidFill>
-                          <a:latin typeface="Arial"/>
-                        </a:rPr>
-                        <a:t>No leakage</a:t>
-                      </a:r>
-                    </a:p>
-                  </a:txBody>
-                  <a:tcPr marL="73152" marR="73152" marT="36576" marB="36576">
-                    <a:solidFill>
-                      <a:srgbClr val="FCFCFB"/>
-                    </a:solidFill>
-                  </a:tcPr>
-                </a:tc>
-              </a:tr>
-              <a:tr h="344658">
-                <a:tc>
-                  <a:txBody>
-                    <a:bodyPr/>
-                    <a:lstStyle/>
-                    <a:p>
-                      <a:pPr>
-                        <a:lnSpc>
-                          <a:spcPct val="115000"/>
-                        </a:lnSpc>
-                      </a:pPr>
-                      <a:r>
-                        <a:rPr sz="1050" b="0">
-                          <a:solidFill>
-                            <a:srgbClr val="16181A"/>
-                          </a:solidFill>
-                          <a:latin typeface="Arial"/>
-                        </a:rPr>
-                        <a:t>E2</a:t>
-                      </a:r>
-                    </a:p>
-                  </a:txBody>
-                  <a:tcPr marL="73152" marR="73152" marT="36576" marB="36576">
-                    <a:solidFill>
-                      <a:srgbClr val="FCFCFB"/>
-                    </a:solidFill>
-                  </a:tcPr>
-                </a:tc>
-                <a:tc>
-                  <a:txBody>
-                    <a:bodyPr/>
-                    <a:lstStyle/>
-                    <a:p>
-                      <a:pPr>
-                        <a:lnSpc>
-                          <a:spcPct val="115000"/>
-                        </a:lnSpc>
-                      </a:pPr>
-                      <a:r>
-                        <a:rPr sz="1050" b="0">
-                          <a:solidFill>
-                            <a:srgbClr val="16181A"/>
-                          </a:solidFill>
-                          <a:latin typeface="Arial"/>
-                        </a:rPr>
-                        <a:t>How fast does it learn?</a:t>
-                      </a:r>
-                    </a:p>
-                  </a:txBody>
-                  <a:tcPr marL="73152" marR="73152" marT="36576" marB="36576">
-                    <a:solidFill>
-                      <a:srgbClr val="FCFCFB"/>
-                    </a:solidFill>
-                  </a:tcPr>
-                </a:tc>
-                <a:tc>
-                  <a:txBody>
-                    <a:bodyPr/>
-                    <a:lstStyle/>
-                    <a:p>
-                      <a:pPr>
-                        <a:lnSpc>
-                          <a:spcPct val="115000"/>
-                        </a:lnSpc>
-                      </a:pPr>
-                      <a:r>
-                        <a:rPr sz="1050" b="0">
-                          <a:solidFill>
-                            <a:srgbClr val="16181A"/>
-                          </a:solidFill>
-                          <a:latin typeface="Arial"/>
-                        </a:rPr>
-                        <a:t>Useful inside ~60 moves</a:t>
-                      </a:r>
-                    </a:p>
-                  </a:txBody>
-                  <a:tcPr marL="73152" marR="73152" marT="36576" marB="36576">
-                    <a:solidFill>
-                      <a:srgbClr val="FCFCFB"/>
-                    </a:solidFill>
-                  </a:tcPr>
-                </a:tc>
-                <a:tc>
-                  <a:txBody>
-                    <a:bodyPr/>
-                    <a:lstStyle/>
-                    <a:p>
-                      <a:pPr>
-                        <a:lnSpc>
-                          <a:spcPct val="115000"/>
-                        </a:lnSpc>
-                      </a:pPr>
-                      <a:r>
-                        <a:rPr sz="1050" b="0">
-                          <a:solidFill>
-                            <a:srgbClr val="16181A"/>
-                          </a:solidFill>
-                          <a:latin typeface="Arial"/>
-                        </a:rPr>
-                        <a:t>Cold start solved</a:t>
-                      </a:r>
-                    </a:p>
-                  </a:txBody>
-                  <a:tcPr marL="73152" marR="73152" marT="36576" marB="36576">
-                    <a:solidFill>
-                      <a:srgbClr val="FCFCFB"/>
-                    </a:solidFill>
-                  </a:tcPr>
-                </a:tc>
-              </a:tr>
-              <a:tr h="344658">
-                <a:tc>
-                  <a:txBody>
-                    <a:bodyPr/>
-                    <a:lstStyle/>
-                    <a:p>
-                      <a:pPr>
-                        <a:lnSpc>
-                          <a:spcPct val="115000"/>
-                        </a:lnSpc>
-                      </a:pPr>
-                      <a:r>
-                        <a:rPr sz="1050" b="0">
-                          <a:solidFill>
-                            <a:srgbClr val="16181A"/>
-                          </a:solidFill>
-                          <a:latin typeface="Arial"/>
-                        </a:rPr>
-                        <a:t>E4</a:t>
-                      </a:r>
-                    </a:p>
-                  </a:txBody>
-                  <a:tcPr marL="73152" marR="73152" marT="36576" marB="36576">
-                    <a:solidFill>
-                      <a:srgbClr val="FCFCFB"/>
-                    </a:solidFill>
-                  </a:tcPr>
-                </a:tc>
-                <a:tc>
-                  <a:txBody>
-                    <a:bodyPr/>
-                    <a:lstStyle/>
-                    <a:p>
-                      <a:pPr>
-                        <a:lnSpc>
-                          <a:spcPct val="115000"/>
-                        </a:lnSpc>
-                      </a:pPr>
-                      <a:r>
-                        <a:rPr sz="1050" b="0">
-                          <a:solidFill>
-                            <a:srgbClr val="16181A"/>
-                          </a:solidFill>
-                          <a:latin typeface="Arial"/>
-                        </a:rPr>
-                        <a:t>Does prediction make it deadlier?</a:t>
-                      </a:r>
-                    </a:p>
-                  </a:txBody>
-                  <a:tcPr marL="73152" marR="73152" marT="36576" marB="36576">
-                    <a:solidFill>
-                      <a:srgbClr val="FCFCFB"/>
-                    </a:solidFill>
-                  </a:tcPr>
-                </a:tc>
-                <a:tc>
-                  <a:txBody>
-                    <a:bodyPr/>
-                    <a:lstStyle/>
-                    <a:p>
-                      <a:pPr>
-                        <a:lnSpc>
-                          <a:spcPct val="115000"/>
-                        </a:lnSpc>
-                      </a:pPr>
-                      <a:r>
-                        <a:rPr sz="1050" b="0">
-                          <a:solidFill>
-                            <a:srgbClr val="16181A"/>
-                          </a:solidFill>
-                          <a:latin typeface="Arial"/>
-                        </a:rPr>
-                        <a:t>319 vs 111 per 1000</a:t>
-                      </a:r>
-                    </a:p>
-                  </a:txBody>
-                  <a:tcPr marL="73152" marR="73152" marT="36576" marB="36576">
-                    <a:solidFill>
-                      <a:srgbClr val="FCFCFB"/>
-                    </a:solidFill>
-                  </a:tcPr>
-                </a:tc>
-                <a:tc>
-                  <a:txBody>
-                    <a:bodyPr/>
-                    <a:lstStyle/>
-                    <a:p>
-                      <a:pPr>
-                        <a:lnSpc>
-                          <a:spcPct val="115000"/>
-                        </a:lnSpc>
-                      </a:pPr>
-                      <a:r>
-                        <a:rPr sz="1050" b="0">
-                          <a:solidFill>
-                            <a:srgbClr val="16181A"/>
-                          </a:solidFill>
-                          <a:latin typeface="Arial"/>
-                        </a:rPr>
-                        <a:t>Yes, vs no model</a:t>
-                      </a:r>
-                    </a:p>
-                  </a:txBody>
-                  <a:tcPr marL="73152" marR="73152" marT="36576" marB="36576">
-                    <a:solidFill>
-                      <a:srgbClr val="FCFCFB"/>
-                    </a:solidFill>
-                  </a:tcPr>
-                </a:tc>
-              </a:tr>
-              <a:tr h="344658">
-                <a:tc>
-                  <a:txBody>
-                    <a:bodyPr/>
-                    <a:lstStyle/>
-                    <a:p>
-                      <a:pPr>
-                        <a:lnSpc>
-                          <a:spcPct val="115000"/>
-                        </a:lnSpc>
-                      </a:pPr>
-                      <a:r>
-                        <a:rPr sz="1050" b="0">
-                          <a:solidFill>
-                            <a:srgbClr val="16181A"/>
-                          </a:solidFill>
-                          <a:latin typeface="Arial"/>
-                        </a:rPr>
-                        <a:t>E7</a:t>
-                      </a:r>
-                    </a:p>
-                  </a:txBody>
-                  <a:tcPr marL="73152" marR="73152" marT="36576" marB="36576">
-                    <a:solidFill>
-                      <a:srgbClr val="FCFCFB"/>
-                    </a:solidFill>
-                  </a:tcPr>
-                </a:tc>
-                <a:tc>
-                  <a:txBody>
-                    <a:bodyPr/>
-                    <a:lstStyle/>
-                    <a:p>
-                      <a:pPr>
-                        <a:lnSpc>
-                          <a:spcPct val="115000"/>
-                        </a:lnSpc>
-                      </a:pPr>
-                      <a:r>
-                        <a:rPr sz="1050" b="0">
-                          <a:solidFill>
-                            <a:srgbClr val="16181A"/>
-                          </a:solidFill>
-                          <a:latin typeface="Arial"/>
-                        </a:rPr>
-                        <a:t>Does that hold at scale?</a:t>
-                      </a:r>
-                    </a:p>
-                  </a:txBody>
-                  <a:tcPr marL="73152" marR="73152" marT="36576" marB="36576">
-                    <a:solidFill>
-                      <a:srgbClr val="FCFCFB"/>
-                    </a:solidFill>
-                  </a:tcPr>
-                </a:tc>
-                <a:tc>
-                  <a:txBody>
-                    <a:bodyPr/>
-                    <a:lstStyle/>
-                    <a:p>
-                      <a:pPr>
-                        <a:lnSpc>
-                          <a:spcPct val="115000"/>
-                        </a:lnSpc>
-                      </a:pPr>
-                      <a:r>
-                        <a:rPr sz="1050" b="0">
-                          <a:solidFill>
-                            <a:srgbClr val="16181A"/>
-                          </a:solidFill>
-                          <a:latin typeface="Arial"/>
-                        </a:rPr>
-                        <a:t>1.15× → 1.57× over hub-camping</a:t>
-                      </a:r>
-                    </a:p>
-                  </a:txBody>
-                  <a:tcPr marL="73152" marR="73152" marT="36576" marB="36576">
-                    <a:solidFill>
-                      <a:srgbClr val="FCFCFB"/>
-                    </a:solidFill>
-                  </a:tcPr>
-                </a:tc>
-                <a:tc>
-                  <a:txBody>
-                    <a:bodyPr/>
-                    <a:lstStyle/>
-                    <a:p>
-                      <a:pPr>
-                        <a:lnSpc>
-                          <a:spcPct val="115000"/>
-                        </a:lnSpc>
-                      </a:pPr>
-                      <a:r>
-                        <a:rPr sz="1050" b="0">
-                          <a:solidFill>
-                            <a:srgbClr val="16181A"/>
-                          </a:solidFill>
-                          <a:latin typeface="Arial"/>
-                        </a:rPr>
-                        <a:t>Grows with size</a:t>
-                      </a:r>
-                    </a:p>
-                  </a:txBody>
-                  <a:tcPr marL="73152" marR="73152" marT="36576" marB="36576">
-                    <a:solidFill>
-                      <a:srgbClr val="FCFCFB"/>
-                    </a:solidFill>
-                  </a:tcPr>
-                </a:tc>
-              </a:tr>
-              <a:tr h="344658">
-                <a:tc>
-                  <a:txBody>
-                    <a:bodyPr/>
-                    <a:lstStyle/>
-                    <a:p>
-                      <a:pPr>
-                        <a:lnSpc>
-                          <a:spcPct val="115000"/>
-                        </a:lnSpc>
-                      </a:pPr>
-                      <a:r>
-                        <a:rPr sz="1050" b="0">
-                          <a:solidFill>
-                            <a:srgbClr val="16181A"/>
-                          </a:solidFill>
-                          <a:latin typeface="Arial"/>
-                        </a:rPr>
-                        <a:t>E5</a:t>
-                      </a:r>
-                    </a:p>
-                  </a:txBody>
-                  <a:tcPr marL="73152" marR="73152" marT="36576" marB="36576">
-                    <a:solidFill>
-                      <a:srgbClr val="FCFCFB"/>
-                    </a:solidFill>
-                  </a:tcPr>
-                </a:tc>
-                <a:tc>
-                  <a:txBody>
-                    <a:bodyPr/>
-                    <a:lstStyle/>
-                    <a:p>
-                      <a:pPr>
-                        <a:lnSpc>
-                          <a:spcPct val="115000"/>
-                        </a:lnSpc>
-                      </a:pPr>
-                      <a:r>
-                        <a:rPr sz="1050" b="0">
-                          <a:solidFill>
-                            <a:srgbClr val="16181A"/>
-                          </a:solidFill>
-                          <a:latin typeface="Arial"/>
-                        </a:rPr>
-                        <a:t>Do world edits cost the player?</a:t>
-                      </a:r>
-                    </a:p>
-                  </a:txBody>
-                  <a:tcPr marL="73152" marR="73152" marT="36576" marB="36576">
-                    <a:solidFill>
-                      <a:srgbClr val="FCFCFB"/>
-                    </a:solidFill>
-                  </a:tcPr>
-                </a:tc>
-                <a:tc>
-                  <a:txBody>
-                    <a:bodyPr/>
-                    <a:lstStyle/>
-                    <a:p>
-                      <a:pPr>
-                        <a:lnSpc>
-                          <a:spcPct val="115000"/>
-                        </a:lnSpc>
-                      </a:pPr>
-                      <a:r>
-                        <a:rPr sz="1050" b="0">
-                          <a:solidFill>
-                            <a:srgbClr val="16181A"/>
-                          </a:solidFill>
-                          <a:latin typeface="Arial"/>
-                        </a:rPr>
-                        <a:t>+54% per objective</a:t>
-                      </a:r>
-                    </a:p>
-                  </a:txBody>
-                  <a:tcPr marL="73152" marR="73152" marT="36576" marB="36576">
-                    <a:solidFill>
-                      <a:srgbClr val="FCFCFB"/>
-                    </a:solidFill>
-                  </a:tcPr>
-                </a:tc>
-                <a:tc>
-                  <a:txBody>
-                    <a:bodyPr/>
-                    <a:lstStyle/>
-                    <a:p>
-                      <a:pPr>
-                        <a:lnSpc>
-                          <a:spcPct val="115000"/>
-                        </a:lnSpc>
-                      </a:pPr>
-                      <a:r>
-                        <a:rPr sz="1050" b="0">
-                          <a:solidFill>
-                            <a:srgbClr val="16181A"/>
-                          </a:solidFill>
-                          <a:latin typeface="Arial"/>
-                        </a:rPr>
-                        <a:t>Yes</a:t>
-                      </a:r>
-                    </a:p>
-                  </a:txBody>
-                  <a:tcPr marL="73152" marR="73152" marT="36576" marB="36576">
-                    <a:solidFill>
-                      <a:srgbClr val="FCFCFB"/>
-                    </a:solidFill>
-                  </a:tcPr>
-                </a:tc>
-              </a:tr>
-              <a:tr h="344658">
-                <a:tc>
-                  <a:txBody>
-                    <a:bodyPr/>
-                    <a:lstStyle/>
-                    <a:p>
-                      <a:pPr>
-                        <a:lnSpc>
-                          <a:spcPct val="115000"/>
-                        </a:lnSpc>
-                      </a:pPr>
-                      <a:r>
-                        <a:rPr sz="1050" b="0">
-                          <a:solidFill>
-                            <a:srgbClr val="16181A"/>
-                          </a:solidFill>
-                          <a:latin typeface="Arial"/>
-                        </a:rPr>
-                        <a:t>E6</a:t>
-                      </a:r>
-                    </a:p>
-                  </a:txBody>
-                  <a:tcPr marL="73152" marR="73152" marT="36576" marB="36576">
-                    <a:solidFill>
-                      <a:srgbClr val="FCFCFB"/>
-                    </a:solidFill>
-                  </a:tcPr>
-                </a:tc>
-                <a:tc>
-                  <a:txBody>
-                    <a:bodyPr/>
-                    <a:lstStyle/>
-                    <a:p>
-                      <a:pPr>
-                        <a:lnSpc>
-                          <a:spcPct val="115000"/>
-                        </a:lnSpc>
-                      </a:pPr>
-                      <a:r>
-                        <a:rPr sz="1050" b="0">
-                          <a:solidFill>
-                            <a:srgbClr val="16181A"/>
-                          </a:solidFill>
-                          <a:latin typeface="Arial"/>
-                        </a:rPr>
-                        <a:t>Is sabotage aimed?</a:t>
-                      </a:r>
-                    </a:p>
-                  </a:txBody>
-                  <a:tcPr marL="73152" marR="73152" marT="36576" marB="36576">
-                    <a:solidFill>
-                      <a:srgbClr val="FCFCFB"/>
-                    </a:solidFill>
-                  </a:tcPr>
-                </a:tc>
-                <a:tc>
-                  <a:txBody>
-                    <a:bodyPr/>
-                    <a:lstStyle/>
-                    <a:p>
-                      <a:pPr>
-                        <a:lnSpc>
-                          <a:spcPct val="115000"/>
-                        </a:lnSpc>
-                      </a:pPr>
-                      <a:r>
-                        <a:rPr sz="1050" b="0">
-                          <a:solidFill>
-                            <a:srgbClr val="16181A"/>
-                          </a:solidFill>
-                          <a:latin typeface="Arial"/>
-                        </a:rPr>
-                        <a:t>No gain on uniform reliance; 13% on uneven</a:t>
-                      </a:r>
-                    </a:p>
-                  </a:txBody>
-                  <a:tcPr marL="73152" marR="73152" marT="36576" marB="36576">
-                    <a:solidFill>
-                      <a:srgbClr val="FCFCFB"/>
-                    </a:solidFill>
-                  </a:tcPr>
-                </a:tc>
-                <a:tc>
-                  <a:txBody>
-                    <a:bodyPr/>
-                    <a:lstStyle/>
-                    <a:p>
-                      <a:pPr>
-                        <a:lnSpc>
-                          <a:spcPct val="115000"/>
-                        </a:lnSpc>
-                      </a:pPr>
-                      <a:r>
-                        <a:rPr sz="1050" b="0">
-                          <a:solidFill>
-                            <a:srgbClr val="16181A"/>
-                          </a:solidFill>
-                          <a:latin typeface="Arial"/>
-                        </a:rPr>
-                        <a:t>Conditional</a:t>
-                      </a:r>
-                    </a:p>
-                  </a:txBody>
-                  <a:tcPr marL="73152" marR="73152" marT="36576" marB="36576">
-                    <a:solidFill>
-                      <a:srgbClr val="FCFCFB"/>
-                    </a:solidFill>
-                  </a:tcPr>
-                </a:tc>
-              </a:tr>
-              <a:tr h="344658">
-                <a:tc>
-                  <a:txBody>
-                    <a:bodyPr/>
-                    <a:lstStyle/>
-                    <a:p>
-                      <a:pPr>
-                        <a:lnSpc>
-                          <a:spcPct val="115000"/>
-                        </a:lnSpc>
-                      </a:pPr>
-                      <a:r>
-                        <a:rPr sz="1050" b="0">
-                          <a:solidFill>
-                            <a:srgbClr val="16181A"/>
-                          </a:solidFill>
-                          <a:latin typeface="Arial"/>
-                        </a:rPr>
-                        <a:t>E8</a:t>
-                      </a:r>
-                    </a:p>
-                  </a:txBody>
-                  <a:tcPr marL="73152" marR="73152" marT="36576" marB="36576">
-                    <a:solidFill>
-                      <a:srgbClr val="FCFCFB"/>
-                    </a:solidFill>
-                  </a:tcPr>
-                </a:tc>
-                <a:tc>
-                  <a:txBody>
-                    <a:bodyPr/>
-                    <a:lstStyle/>
-                    <a:p>
-                      <a:pPr>
-                        <a:lnSpc>
-                          <a:spcPct val="115000"/>
-                        </a:lnSpc>
-                      </a:pPr>
-                      <a:r>
-                        <a:rPr sz="1050" b="0">
-                          <a:solidFill>
-                            <a:srgbClr val="16181A"/>
-                          </a:solidFill>
-                          <a:latin typeface="Arial"/>
-                        </a:rPr>
-                        <a:t>Does waiting defend? (full obs.)</a:t>
-                      </a:r>
-                    </a:p>
-                  </a:txBody>
-                  <a:tcPr marL="73152" marR="73152" marT="36576" marB="36576">
-                    <a:solidFill>
-                      <a:srgbClr val="FCFCFB"/>
-                    </a:solidFill>
-                  </a:tcPr>
-                </a:tc>
-                <a:tc>
-                  <a:txBody>
-                    <a:bodyPr/>
-                    <a:lstStyle/>
-                    <a:p>
-                      <a:pPr>
-                        <a:lnSpc>
-                          <a:spcPct val="115000"/>
-                        </a:lnSpc>
-                      </a:pPr>
-                      <a:r>
-                        <a:rPr sz="1050" b="0">
-                          <a:solidFill>
-                            <a:srgbClr val="16181A"/>
-                          </a:solidFill>
-                          <a:latin typeface="Arial"/>
-                        </a:rPr>
-                        <a:t>1.7% risk cut</a:t>
-                      </a:r>
-                    </a:p>
-                  </a:txBody>
-                  <a:tcPr marL="73152" marR="73152" marT="36576" marB="36576">
-                    <a:solidFill>
-                      <a:srgbClr val="FCFCFB"/>
-                    </a:solidFill>
-                  </a:tcPr>
-                </a:tc>
-                <a:tc>
-                  <a:txBody>
-                    <a:bodyPr/>
-                    <a:lstStyle/>
-                    <a:p>
-                      <a:pPr>
-                        <a:lnSpc>
-                          <a:spcPct val="115000"/>
-                        </a:lnSpc>
-                      </a:pPr>
-                      <a:r>
-                        <a:rPr sz="1050" b="0">
-                          <a:solidFill>
-                            <a:srgbClr val="16181A"/>
-                          </a:solidFill>
-                          <a:latin typeface="Arial"/>
-                        </a:rPr>
-                        <a:t>NEGATIVE</a:t>
-                      </a:r>
-                    </a:p>
-                  </a:txBody>
-                  <a:tcPr marL="73152" marR="73152" marT="36576" marB="36576">
-                    <a:solidFill>
-                      <a:srgbClr val="FCFCFB"/>
-                    </a:solidFill>
-                  </a:tcPr>
-                </a:tc>
-              </a:tr>
-              <a:tr h="344658">
-                <a:tc>
-                  <a:txBody>
-                    <a:bodyPr/>
-                    <a:lstStyle/>
-                    <a:p>
-                      <a:pPr>
-                        <a:lnSpc>
-                          <a:spcPct val="115000"/>
-                        </a:lnSpc>
-                      </a:pPr>
-                      <a:r>
-                        <a:rPr sz="1050" b="0">
-                          <a:solidFill>
-                            <a:srgbClr val="16181A"/>
-                          </a:solidFill>
-                          <a:latin typeface="Arial"/>
-                        </a:rPr>
-                        <a:t>E9</a:t>
-                      </a:r>
-                    </a:p>
-                  </a:txBody>
-                  <a:tcPr marL="73152" marR="73152" marT="36576" marB="36576">
-                    <a:solidFill>
-                      <a:srgbClr val="FCFCFB"/>
-                    </a:solidFill>
-                  </a:tcPr>
-                </a:tc>
-                <a:tc>
-                  <a:txBody>
-                    <a:bodyPr/>
-                    <a:lstStyle/>
-                    <a:p>
-                      <a:pPr>
-                        <a:lnSpc>
-                          <a:spcPct val="115000"/>
-                        </a:lnSpc>
-                      </a:pPr>
-                      <a:r>
-                        <a:rPr sz="1050" b="0">
-                          <a:solidFill>
-                            <a:srgbClr val="16181A"/>
-                          </a:solidFill>
-                          <a:latin typeface="Arial"/>
-                        </a:rPr>
-                        <a:t>Does explicit dwell modelling help?</a:t>
-                      </a:r>
-                    </a:p>
-                  </a:txBody>
-                  <a:tcPr marL="73152" marR="73152" marT="36576" marB="36576">
-                    <a:solidFill>
-                      <a:srgbClr val="FCFCFB"/>
-                    </a:solidFill>
-                  </a:tcPr>
-                </a:tc>
-                <a:tc>
-                  <a:txBody>
-                    <a:bodyPr/>
-                    <a:lstStyle/>
-                    <a:p>
-                      <a:pPr>
-                        <a:lnSpc>
-                          <a:spcPct val="115000"/>
-                        </a:lnSpc>
-                      </a:pPr>
-                      <a:r>
-                        <a:rPr sz="1050" b="0">
-                          <a:solidFill>
-                            <a:srgbClr val="16181A"/>
-                          </a:solidFill>
-                          <a:latin typeface="Arial"/>
-                        </a:rPr>
-                        <a:t>2.0% worse than position-only</a:t>
-                      </a:r>
-                    </a:p>
-                  </a:txBody>
-                  <a:tcPr marL="73152" marR="73152" marT="36576" marB="36576">
-                    <a:solidFill>
-                      <a:srgbClr val="FCFCFB"/>
-                    </a:solidFill>
-                  </a:tcPr>
-                </a:tc>
-                <a:tc>
-                  <a:txBody>
-                    <a:bodyPr/>
-                    <a:lstStyle/>
-                    <a:p>
-                      <a:pPr>
-                        <a:lnSpc>
-                          <a:spcPct val="115000"/>
-                        </a:lnSpc>
-                      </a:pPr>
-                      <a:r>
-                        <a:rPr sz="1050" b="0">
-                          <a:solidFill>
-                            <a:srgbClr val="16181A"/>
-                          </a:solidFill>
-                          <a:latin typeface="Arial"/>
-                        </a:rPr>
-                        <a:t>NEGATIVE</a:t>
-                      </a:r>
-                    </a:p>
-                  </a:txBody>
-                  <a:tcPr marL="73152" marR="73152" marT="36576" marB="36576">
-                    <a:solidFill>
-                      <a:srgbClr val="FCFCFB"/>
-                    </a:solidFill>
-                  </a:tcPr>
-                </a:tc>
-              </a:tr>
-              <a:tr h="344658">
-                <a:tc>
-                  <a:txBody>
-                    <a:bodyPr/>
-                    <a:lstStyle/>
-                    <a:p>
-                      <a:pPr>
-                        <a:lnSpc>
-                          <a:spcPct val="115000"/>
-                        </a:lnSpc>
-                      </a:pPr>
-                      <a:r>
-                        <a:rPr sz="1050" b="0">
-                          <a:solidFill>
-                            <a:srgbClr val="16181A"/>
-                          </a:solidFill>
-                          <a:latin typeface="Arial"/>
-                        </a:rPr>
-                        <a:t>E10</a:t>
-                      </a:r>
-                    </a:p>
-                  </a:txBody>
-                  <a:tcPr marL="73152" marR="73152" marT="36576" marB="36576">
-                    <a:solidFill>
-                      <a:srgbClr val="FCFCFB"/>
-                    </a:solidFill>
-                  </a:tcPr>
-                </a:tc>
-                <a:tc>
-                  <a:txBody>
-                    <a:bodyPr/>
-                    <a:lstStyle/>
-                    <a:p>
-                      <a:pPr>
-                        <a:lnSpc>
-                          <a:spcPct val="115000"/>
-                        </a:lnSpc>
-                      </a:pPr>
-                      <a:r>
-                        <a:rPr sz="1050" b="0">
-                          <a:solidFill>
-                            <a:srgbClr val="16181A"/>
-                          </a:solidFill>
-                          <a:latin typeface="Arial"/>
-                        </a:rPr>
-                        <a:t>Is dwell learnable?</a:t>
-                      </a:r>
-                    </a:p>
-                  </a:txBody>
-                  <a:tcPr marL="73152" marR="73152" marT="36576" marB="36576">
-                    <a:solidFill>
-                      <a:srgbClr val="FCFCFB"/>
-                    </a:solidFill>
-                  </a:tcPr>
-                </a:tc>
-                <a:tc>
-                  <a:txBody>
-                    <a:bodyPr/>
-                    <a:lstStyle/>
-                    <a:p>
-                      <a:pPr>
-                        <a:lnSpc>
-                          <a:spcPct val="115000"/>
-                        </a:lnSpc>
-                      </a:pPr>
-                      <a:r>
-                        <a:rPr sz="1050" b="0">
-                          <a:solidFill>
-                            <a:srgbClr val="16181A"/>
-                          </a:solidFill>
-                          <a:latin typeface="Arial"/>
-                        </a:rPr>
-                        <a:t>70% vs 54% baseline</a:t>
-                      </a:r>
-                    </a:p>
-                  </a:txBody>
-                  <a:tcPr marL="73152" marR="73152" marT="36576" marB="36576">
-                    <a:solidFill>
-                      <a:srgbClr val="FCFCFB"/>
-                    </a:solidFill>
-                  </a:tcPr>
-                </a:tc>
-                <a:tc>
-                  <a:txBody>
-                    <a:bodyPr/>
-                    <a:lstStyle/>
-                    <a:p>
-                      <a:pPr>
-                        <a:lnSpc>
-                          <a:spcPct val="115000"/>
-                        </a:lnSpc>
-                      </a:pPr>
-                      <a:r>
-                        <a:rPr sz="1050" b="0">
-                          <a:solidFill>
-                            <a:srgbClr val="16181A"/>
-                          </a:solidFill>
-                          <a:latin typeface="Arial"/>
-                        </a:rPr>
-                        <a:t>Yes</a:t>
-                      </a:r>
-                    </a:p>
-                  </a:txBody>
-                  <a:tcPr marL="73152" marR="73152" marT="36576" marB="36576">
-                    <a:solidFill>
-                      <a:srgbClr val="FCFCFB"/>
-                    </a:solidFill>
-                  </a:tcPr>
-                </a:tc>
-              </a:tr>
-              <a:tr h="344658">
-                <a:tc>
-                  <a:txBody>
-                    <a:bodyPr/>
-                    <a:lstStyle/>
-                    <a:p>
-                      <a:pPr>
-                        <a:lnSpc>
-                          <a:spcPct val="115000"/>
-                        </a:lnSpc>
-                      </a:pPr>
-                      <a:r>
-                        <a:rPr sz="1050" b="0">
-                          <a:solidFill>
-                            <a:srgbClr val="16181A"/>
-                          </a:solidFill>
-                          <a:latin typeface="Arial"/>
-                        </a:rPr>
-                        <a:t>E11</a:t>
-                      </a:r>
-                    </a:p>
-                  </a:txBody>
-                  <a:tcPr marL="73152" marR="73152" marT="36576" marB="36576">
-                    <a:solidFill>
-                      <a:srgbClr val="FCFCFB"/>
-                    </a:solidFill>
-                  </a:tcPr>
-                </a:tc>
-                <a:tc>
-                  <a:txBody>
-                    <a:bodyPr/>
-                    <a:lstStyle/>
-                    <a:p>
-                      <a:pPr>
-                        <a:lnSpc>
-                          <a:spcPct val="115000"/>
-                        </a:lnSpc>
-                      </a:pPr>
-                      <a:r>
-                        <a:rPr sz="1050" b="0">
-                          <a:solidFill>
-                            <a:srgbClr val="16181A"/>
-                          </a:solidFill>
-                          <a:latin typeface="Arial"/>
-                        </a:rPr>
-                        <a:t>What do sensors buy? (NEW)</a:t>
-                      </a:r>
-                    </a:p>
-                  </a:txBody>
-                  <a:tcPr marL="73152" marR="73152" marT="36576" marB="36576">
-                    <a:solidFill>
-                      <a:srgbClr val="FCFCFB"/>
-                    </a:solidFill>
-                  </a:tcPr>
-                </a:tc>
-                <a:tc>
-                  <a:txBody>
-                    <a:bodyPr/>
-                    <a:lstStyle/>
-                    <a:p>
-                      <a:pPr>
-                        <a:lnSpc>
-                          <a:spcPct val="115000"/>
-                        </a:lnSpc>
-                      </a:pPr>
-                      <a:r>
-                        <a:rPr sz="1050" b="0">
-                          <a:solidFill>
-                            <a:srgbClr val="16181A"/>
-                          </a:solidFill>
-                          <a:latin typeface="Arial"/>
-                        </a:rPr>
-                        <a:t>Full coverage = perfect tracking</a:t>
-                      </a:r>
-                    </a:p>
-                  </a:txBody>
-                  <a:tcPr marL="73152" marR="73152" marT="36576" marB="36576">
-                    <a:solidFill>
-                      <a:srgbClr val="FCFCFB"/>
-                    </a:solidFill>
-                  </a:tcPr>
-                </a:tc>
-                <a:tc>
-                  <a:txBody>
-                    <a:bodyPr/>
-                    <a:lstStyle/>
-                    <a:p>
-                      <a:pPr>
-                        <a:lnSpc>
-                          <a:spcPct val="115000"/>
-                        </a:lnSpc>
-                      </a:pPr>
-                      <a:r>
-                        <a:rPr sz="1050" b="0">
-                          <a:solidFill>
-                            <a:srgbClr val="16181A"/>
-                          </a:solidFill>
-                          <a:latin typeface="Arial"/>
-                        </a:rPr>
-                        <a:t>Mechanism</a:t>
-                      </a:r>
-                    </a:p>
-                  </a:txBody>
-                  <a:tcPr marL="73152" marR="73152" marT="36576" marB="36576">
-                    <a:solidFill>
-                      <a:srgbClr val="FCFCFB"/>
-                    </a:solidFill>
-                  </a:tcPr>
-                </a:tc>
-              </a:tr>
-              <a:tr h="344664">
-                <a:tc>
-                  <a:txBody>
-                    <a:bodyPr/>
-                    <a:lstStyle/>
-                    <a:p>
-                      <a:pPr>
-                        <a:lnSpc>
-                          <a:spcPct val="115000"/>
-                        </a:lnSpc>
-                      </a:pPr>
-                      <a:r>
-                        <a:rPr sz="1050" b="0">
-                          <a:solidFill>
-                            <a:srgbClr val="16181A"/>
-                          </a:solidFill>
-                          <a:latin typeface="Arial"/>
-                        </a:rPr>
-                        <a:t>E12</a:t>
-                      </a:r>
-                    </a:p>
-                  </a:txBody>
-                  <a:tcPr marL="73152" marR="73152" marT="36576" marB="36576">
-                    <a:solidFill>
-                      <a:srgbClr val="FCFCFB"/>
-                    </a:solidFill>
-                  </a:tcPr>
-                </a:tc>
-                <a:tc>
-                  <a:txBody>
-                    <a:bodyPr/>
-                    <a:lstStyle/>
-                    <a:p>
-                      <a:pPr>
-                        <a:lnSpc>
-                          <a:spcPct val="115000"/>
-                        </a:lnSpc>
-                      </a:pPr>
-                      <a:r>
-                        <a:rPr sz="1050" b="0">
-                          <a:solidFill>
-                            <a:srgbClr val="16181A"/>
-                          </a:solidFill>
-                          <a:latin typeface="Arial"/>
-                        </a:rPr>
-                        <a:t>What is the counter-play? (NEW)</a:t>
-                      </a:r>
-                    </a:p>
-                  </a:txBody>
-                  <a:tcPr marL="73152" marR="73152" marT="36576" marB="36576">
-                    <a:solidFill>
-                      <a:srgbClr val="FCFCFB"/>
-                    </a:solidFill>
-                  </a:tcPr>
-                </a:tc>
-                <a:tc>
-                  <a:txBody>
-                    <a:bodyPr/>
-                    <a:lstStyle/>
-                    <a:p>
-                      <a:pPr>
-                        <a:lnSpc>
-                          <a:spcPct val="115000"/>
-                        </a:lnSpc>
-                      </a:pPr>
-                      <a:r>
-                        <a:rPr sz="1050" b="0">
-                          <a:solidFill>
-                            <a:srgbClr val="16181A"/>
-                          </a:solidFill>
-                          <a:latin typeface="Arial"/>
-                        </a:rPr>
-                        <a:t>Disabling sensors: 39% risk cut</a:t>
-                      </a:r>
-                    </a:p>
-                  </a:txBody>
-                  <a:tcPr marL="73152" marR="73152" marT="36576" marB="36576">
-                    <a:solidFill>
-                      <a:srgbClr val="FCFCFB"/>
-                    </a:solidFill>
-                  </a:tcPr>
-                </a:tc>
-                <a:tc>
-                  <a:txBody>
-                    <a:bodyPr/>
-                    <a:lstStyle/>
-                    <a:p>
-                      <a:pPr>
-                        <a:lnSpc>
-                          <a:spcPct val="115000"/>
-                        </a:lnSpc>
-                      </a:pPr>
-                      <a:r>
-                        <a:rPr sz="1050" b="0">
-                          <a:solidFill>
-                            <a:srgbClr val="16181A"/>
-                          </a:solidFill>
-                          <a:latin typeface="Arial"/>
-                        </a:rPr>
-                        <a:t>Design answer</a:t>
-                      </a:r>
-                    </a:p>
-                  </a:txBody>
-                  <a:tcPr marL="73152" marR="73152" marT="36576" marB="36576">
-                    <a:solidFill>
-                      <a:srgbClr val="FCFCFB"/>
-                    </a:solidFill>
-                  </a:tcPr>
-                </a:tc>
-              </a:tr>
-            </a:tbl>
-          </a:graphicData>
-        </a:graphic>
-      </p:graphicFrame>
+        </p:nvPicPr>
+        <p:blipFill>
+          <a:blip r:embed="rId2"/>
+          <a:stretch>
+            <a:fillRect/>
+          </a:stretch>
+        </p:blipFill>
+        <p:spPr>
+          <a:xfrm>
+            <a:off x="2194560" y="1664208"/>
+            <a:ext cx="7863840" cy="4025537"/>
+          </a:xfrm>
+          <a:prstGeom prst="rect">
+            <a:avLst/>
+          </a:prstGeom>
+        </p:spPr>
+      </p:pic>
+      <p:sp>
+        <p:nvSpPr>
+          <p:cNvPr id="6" name="TextBox 5"/>
+          <p:cNvSpPr txBox="1"/>
+          <p:nvPr/>
+        </p:nvSpPr>
+        <p:spPr>
+          <a:xfrm>
+            <a:off x="658368" y="5760720"/>
+            <a:ext cx="10881360" cy="914400"/>
+          </a:xfrm>
+          <a:prstGeom prst="rect">
+            <a:avLst/>
+          </a:prstGeom>
+          <a:noFill/>
+        </p:spPr>
+        <p:txBody>
+          <a:bodyPr wrap="square" lIns="0" rIns="0" tIns="0" bIns="0">
+            <a:spAutoFit/>
+          </a:bodyPr>
+          <a:lstStyle/>
+          <a:p>
+            <a:pPr algn="l">
+              <a:lnSpc>
+                <a:spcPct val="130000"/>
+              </a:lnSpc>
+              <a:spcAft>
+                <a:spcPts val="600"/>
+              </a:spcAft>
+            </a:pPr>
+            <a:r>
+              <a:rPr sz="1250" b="0">
+                <a:solidFill>
+                  <a:srgbClr val="6B7178"/>
+                </a:solidFill>
+                <a:latin typeface="Arial"/>
+              </a:rPr>
+              <a:t>Measured per objective completed, not per window. Waiting at random is WORSE than not waiting at every coverage level. Routing around sensors helps a little. Spending three dangerous tasks to silence sensors on the route you already use cuts capture risk by 39% at 60% coverage.</a:t>
+            </a:r>
+          </a:p>
+        </p:txBody>
+      </p:sp>
     </p:spTree>
   </p:cSld>
   <p:clrMapOvr>
@@ -10696,7 +9305,7 @@
                 </a:solidFill>
                 <a:latin typeface="Arial"/>
               </a:rPr>
-              <a:t>INTERPRETATION</a:t>
+              <a:t>RESULTS</a:t>
             </a:r>
           </a:p>
         </p:txBody>
@@ -10738,7 +9347,7 @@
                 </a:solidFill>
                 <a:latin typeface="Arial"/>
               </a:rPr>
-              <a:t>Three findings changed the design</a:t>
+              <a:t>All twelve experiments at a glance</a:t>
             </a:r>
           </a:p>
         </p:txBody>
@@ -10787,113 +9396,1464 @@
           </a:p>
         </p:txBody>
       </p:sp>
-      <p:sp>
-        <p:nvSpPr>
-          <p:cNvPr id="5" name="TextBox 4"/>
-          <p:cNvSpPr txBox="1"/>
+      <p:graphicFrame>
+        <p:nvGraphicFramePr>
+          <p:cNvPr id="5" name="Table 4"/>
+          <p:cNvGraphicFramePr>
+            <a:graphicFrameLocks noGrp="1"/>
+          </p:cNvGraphicFramePr>
           <p:nvPr/>
-        </p:nvSpPr>
-        <p:spPr>
-          <a:xfrm>
-            <a:off x="658368" y="1783080"/>
-            <a:ext cx="10881360" cy="4480560"/>
-          </a:xfrm>
-          <a:prstGeom prst="rect">
-            <a:avLst/>
-          </a:prstGeom>
-          <a:noFill/>
-        </p:spPr>
-        <p:txBody>
-          <a:bodyPr wrap="square" lIns="0" rIns="0" tIns="0" bIns="0">
-            <a:spAutoFit/>
-          </a:bodyPr>
-          <a:lstStyle/>
-          <a:p>
-            <a:pPr>
-              <a:lnSpc>
-                <a:spcPct val="130000"/>
-              </a:lnSpc>
-              <a:spcAft>
-                <a:spcPts val="1300"/>
-              </a:spcAft>
-            </a:pPr>
-            <a:r>
-              <a:rPr sz="1350" b="1">
-                <a:solidFill>
-                  <a:srgbClr val="16181A"/>
-                </a:solidFill>
-                <a:latin typeface="Arial"/>
-              </a:rPr>
-              <a:t>1 · A negative result set this cycle's work.  </a:t>
-            </a:r>
-            <a:r>
-              <a:rPr sz="1350">
-                <a:solidFill>
-                  <a:srgbClr val="6B7178"/>
-                </a:solidFill>
-                <a:latin typeface="Arial"/>
-              </a:rPr>
-              <a:t>Waiting did not defend, and the cause was perfect observation. That diagnosis — not a guess — is why door sensors were the next milestone. The fix was verified: at 100% coverage the new filter reproduces the old fully-observed behaviour, which is how we know the re-implementation is sound.</a:t>
-            </a:r>
-          </a:p>
-          <a:p>
-            <a:pPr>
-              <a:lnSpc>
-                <a:spcPct val="130000"/>
-              </a:lnSpc>
-              <a:spcAft>
-                <a:spcPts val="1300"/>
-              </a:spcAft>
-            </a:pPr>
-            <a:r>
-              <a:rPr sz="1350" b="1">
-                <a:solidFill>
-                  <a:srgbClr val="16181A"/>
-                </a:solidFill>
-                <a:latin typeface="Arial"/>
-              </a:rPr>
-              <a:t>2 · The metric was hiding the answer.  </a:t>
-            </a:r>
-            <a:r>
-              <a:rPr sz="1350">
-                <a:solidFill>
-                  <a:srgbClr val="6B7178"/>
-                </a:solidFill>
-                <a:latin typeface="Arial"/>
-              </a:rPr>
-              <a:t>Measured per window, avoiding sensors looked excellent. Measured per objective completed, it was worse than doing nothing — the player was simply achieving less. Two strategies that looked like wins disappeared under the corrected metric.</a:t>
-            </a:r>
-          </a:p>
-          <a:p>
-            <a:pPr>
-              <a:lnSpc>
-                <a:spcPct val="130000"/>
-              </a:lnSpc>
-              <a:spcAft>
-                <a:spcPts val="1300"/>
-              </a:spcAft>
-            </a:pPr>
-            <a:r>
-              <a:rPr sz="1350" b="1">
-                <a:solidFill>
-                  <a:srgbClr val="16181A"/>
-                </a:solidFill>
-                <a:latin typeface="Arial"/>
-              </a:rPr>
-              <a:t>3 · The mechanic the fiction already had is the one that works.  </a:t>
-            </a:r>
-            <a:r>
-              <a:rPr sz="1350">
-                <a:solidFill>
-                  <a:srgbClr val="6B7178"/>
-                </a:solidFill>
-                <a:latin typeface="Arial"/>
-              </a:rPr>
-              <a:t>Detouring around live sensors costs more exposure than it saves. Spending a dangerous task to silence a sensor on your existing route is the strategy that cuts risk. The design was right before the measurement was.</a:t>
-            </a:r>
-          </a:p>
-        </p:txBody>
-      </p:sp>
+        </p:nvGraphicFramePr>
+        <p:xfrm>
+          <a:off x="658368" y="1783080"/>
+          <a:ext cx="10881360" cy="4480560"/>
+        </p:xfrm>
+        <a:graphic>
+          <a:graphicData uri="http://schemas.openxmlformats.org/drawingml/2006/table">
+            <a:tbl>
+              <a:tblPr firstRow="1" bandRow="1">
+                <a:tableStyleId>{5C22544A-7EE6-4342-B048-85BDC9FD1C3A}</a:tableStyleId>
+              </a:tblPr>
+              <a:tblGrid>
+                <a:gridCol w="548640"/>
+                <a:gridCol w="3840480"/>
+                <a:gridCol w="4114800"/>
+                <a:gridCol w="2377440"/>
+              </a:tblGrid>
+              <a:tr h="344658">
+                <a:tc>
+                  <a:txBody>
+                    <a:bodyPr/>
+                    <a:lstStyle/>
+                    <a:p>
+                      <a:pPr>
+                        <a:lnSpc>
+                          <a:spcPct val="115000"/>
+                        </a:lnSpc>
+                      </a:pPr>
+                      <a:r>
+                        <a:rPr sz="850" b="1">
+                          <a:solidFill>
+                            <a:srgbClr val="6B7178"/>
+                          </a:solidFill>
+                          <a:latin typeface="Arial"/>
+                        </a:rPr>
+                        <a:t>#</a:t>
+                      </a:r>
+                    </a:p>
+                  </a:txBody>
+                  <a:tcPr marL="73152" marR="73152" marT="36576" marB="36576">
+                    <a:solidFill>
+                      <a:srgbClr val="F4F6F8"/>
+                    </a:solidFill>
+                  </a:tcPr>
+                </a:tc>
+                <a:tc>
+                  <a:txBody>
+                    <a:bodyPr/>
+                    <a:lstStyle/>
+                    <a:p>
+                      <a:pPr>
+                        <a:lnSpc>
+                          <a:spcPct val="115000"/>
+                        </a:lnSpc>
+                      </a:pPr>
+                      <a:r>
+                        <a:rPr sz="850" b="1">
+                          <a:solidFill>
+                            <a:srgbClr val="6B7178"/>
+                          </a:solidFill>
+                          <a:latin typeface="Arial"/>
+                        </a:rPr>
+                        <a:t>Question</a:t>
+                      </a:r>
+                    </a:p>
+                  </a:txBody>
+                  <a:tcPr marL="73152" marR="73152" marT="36576" marB="36576">
+                    <a:solidFill>
+                      <a:srgbClr val="F4F6F8"/>
+                    </a:solidFill>
+                  </a:tcPr>
+                </a:tc>
+                <a:tc>
+                  <a:txBody>
+                    <a:bodyPr/>
+                    <a:lstStyle/>
+                    <a:p>
+                      <a:pPr>
+                        <a:lnSpc>
+                          <a:spcPct val="115000"/>
+                        </a:lnSpc>
+                      </a:pPr>
+                      <a:r>
+                        <a:rPr sz="850" b="1">
+                          <a:solidFill>
+                            <a:srgbClr val="6B7178"/>
+                          </a:solidFill>
+                          <a:latin typeface="Arial"/>
+                        </a:rPr>
+                        <a:t>Headline</a:t>
+                      </a:r>
+                    </a:p>
+                  </a:txBody>
+                  <a:tcPr marL="73152" marR="73152" marT="36576" marB="36576">
+                    <a:solidFill>
+                      <a:srgbClr val="F4F6F8"/>
+                    </a:solidFill>
+                  </a:tcPr>
+                </a:tc>
+                <a:tc>
+                  <a:txBody>
+                    <a:bodyPr/>
+                    <a:lstStyle/>
+                    <a:p>
+                      <a:pPr>
+                        <a:lnSpc>
+                          <a:spcPct val="115000"/>
+                        </a:lnSpc>
+                      </a:pPr>
+                      <a:r>
+                        <a:rPr sz="850" b="1">
+                          <a:solidFill>
+                            <a:srgbClr val="6B7178"/>
+                          </a:solidFill>
+                          <a:latin typeface="Arial"/>
+                        </a:rPr>
+                        <a:t>Reading</a:t>
+                      </a:r>
+                    </a:p>
+                  </a:txBody>
+                  <a:tcPr marL="73152" marR="73152" marT="36576" marB="36576">
+                    <a:solidFill>
+                      <a:srgbClr val="F4F6F8"/>
+                    </a:solidFill>
+                  </a:tcPr>
+                </a:tc>
+              </a:tr>
+              <a:tr h="344658">
+                <a:tc>
+                  <a:txBody>
+                    <a:bodyPr/>
+                    <a:lstStyle/>
+                    <a:p>
+                      <a:pPr>
+                        <a:lnSpc>
+                          <a:spcPct val="115000"/>
+                        </a:lnSpc>
+                      </a:pPr>
+                      <a:r>
+                        <a:rPr sz="1050" b="0">
+                          <a:solidFill>
+                            <a:srgbClr val="16181A"/>
+                          </a:solidFill>
+                          <a:latin typeface="Arial"/>
+                        </a:rPr>
+                        <a:t>E1</a:t>
+                      </a:r>
+                    </a:p>
+                  </a:txBody>
+                  <a:tcPr marL="73152" marR="73152" marT="36576" marB="36576">
+                    <a:solidFill>
+                      <a:srgbClr val="FCFCFB"/>
+                    </a:solidFill>
+                  </a:tcPr>
+                </a:tc>
+                <a:tc>
+                  <a:txBody>
+                    <a:bodyPr/>
+                    <a:lstStyle/>
+                    <a:p>
+                      <a:pPr>
+                        <a:lnSpc>
+                          <a:spcPct val="115000"/>
+                        </a:lnSpc>
+                      </a:pPr>
+                      <a:r>
+                        <a:rPr sz="1050" b="0">
+                          <a:solidFill>
+                            <a:srgbClr val="16181A"/>
+                          </a:solidFill>
+                          <a:latin typeface="Arial"/>
+                        </a:rPr>
+                        <a:t>Can it predict the next move?</a:t>
+                      </a:r>
+                    </a:p>
+                  </a:txBody>
+                  <a:tcPr marL="73152" marR="73152" marT="36576" marB="36576">
+                    <a:solidFill>
+                      <a:srgbClr val="FCFCFB"/>
+                    </a:solidFill>
+                  </a:tcPr>
+                </a:tc>
+                <a:tc>
+                  <a:txBody>
+                    <a:bodyPr/>
+                    <a:lstStyle/>
+                    <a:p>
+                      <a:pPr>
+                        <a:lnSpc>
+                          <a:spcPct val="115000"/>
+                        </a:lnSpc>
+                      </a:pPr>
+                      <a:r>
+                        <a:rPr sz="1050" b="0">
+                          <a:solidFill>
+                            <a:srgbClr val="16181A"/>
+                          </a:solidFill>
+                          <a:latin typeface="Arial"/>
+                        </a:rPr>
+                        <a:t>60.5% vs 46.5% vs 30.5%</a:t>
+                      </a:r>
+                    </a:p>
+                  </a:txBody>
+                  <a:tcPr marL="73152" marR="73152" marT="36576" marB="36576">
+                    <a:solidFill>
+                      <a:srgbClr val="FCFCFB"/>
+                    </a:solidFill>
+                  </a:tcPr>
+                </a:tc>
+                <a:tc>
+                  <a:txBody>
+                    <a:bodyPr/>
+                    <a:lstStyle/>
+                    <a:p>
+                      <a:pPr>
+                        <a:lnSpc>
+                          <a:spcPct val="115000"/>
+                        </a:lnSpc>
+                      </a:pPr>
+                      <a:r>
+                        <a:rPr sz="1050" b="0">
+                          <a:solidFill>
+                            <a:srgbClr val="16181A"/>
+                          </a:solidFill>
+                          <a:latin typeface="Arial"/>
+                        </a:rPr>
+                        <a:t>Learns routes</a:t>
+                      </a:r>
+                    </a:p>
+                  </a:txBody>
+                  <a:tcPr marL="73152" marR="73152" marT="36576" marB="36576">
+                    <a:solidFill>
+                      <a:srgbClr val="FCFCFB"/>
+                    </a:solidFill>
+                  </a:tcPr>
+                </a:tc>
+              </a:tr>
+              <a:tr h="344658">
+                <a:tc>
+                  <a:txBody>
+                    <a:bodyPr/>
+                    <a:lstStyle/>
+                    <a:p>
+                      <a:pPr>
+                        <a:lnSpc>
+                          <a:spcPct val="115000"/>
+                        </a:lnSpc>
+                      </a:pPr>
+                      <a:r>
+                        <a:rPr sz="1050" b="0">
+                          <a:solidFill>
+                            <a:srgbClr val="16181A"/>
+                          </a:solidFill>
+                          <a:latin typeface="Arial"/>
+                        </a:rPr>
+                        <a:t>E1c</a:t>
+                      </a:r>
+                    </a:p>
+                  </a:txBody>
+                  <a:tcPr marL="73152" marR="73152" marT="36576" marB="36576">
+                    <a:solidFill>
+                      <a:srgbClr val="FCFCFB"/>
+                    </a:solidFill>
+                  </a:tcPr>
+                </a:tc>
+                <a:tc>
+                  <a:txBody>
+                    <a:bodyPr/>
+                    <a:lstStyle/>
+                    <a:p>
+                      <a:pPr>
+                        <a:lnSpc>
+                          <a:spcPct val="115000"/>
+                        </a:lnSpc>
+                      </a:pPr>
+                      <a:r>
+                        <a:rPr sz="1050" b="0">
+                          <a:solidFill>
+                            <a:srgbClr val="16181A"/>
+                          </a:solidFill>
+                          <a:latin typeface="Arial"/>
+                        </a:rPr>
+                        <a:t>Does it learn from a random player?</a:t>
+                      </a:r>
+                    </a:p>
+                  </a:txBody>
+                  <a:tcPr marL="73152" marR="73152" marT="36576" marB="36576">
+                    <a:solidFill>
+                      <a:srgbClr val="FCFCFB"/>
+                    </a:solidFill>
+                  </a:tcPr>
+                </a:tc>
+                <a:tc>
+                  <a:txBody>
+                    <a:bodyPr/>
+                    <a:lstStyle/>
+                    <a:p>
+                      <a:pPr>
+                        <a:lnSpc>
+                          <a:spcPct val="115000"/>
+                        </a:lnSpc>
+                      </a:pPr>
+                      <a:r>
+                        <a:rPr sz="1050" b="0">
+                          <a:solidFill>
+                            <a:srgbClr val="16181A"/>
+                          </a:solidFill>
+                          <a:latin typeface="Arial"/>
+                        </a:rPr>
+                        <a:t>26.7% vs 26.9%</a:t>
+                      </a:r>
+                    </a:p>
+                  </a:txBody>
+                  <a:tcPr marL="73152" marR="73152" marT="36576" marB="36576">
+                    <a:solidFill>
+                      <a:srgbClr val="FCFCFB"/>
+                    </a:solidFill>
+                  </a:tcPr>
+                </a:tc>
+                <a:tc>
+                  <a:txBody>
+                    <a:bodyPr/>
+                    <a:lstStyle/>
+                    <a:p>
+                      <a:pPr>
+                        <a:lnSpc>
+                          <a:spcPct val="115000"/>
+                        </a:lnSpc>
+                      </a:pPr>
+                      <a:r>
+                        <a:rPr sz="1050" b="0">
+                          <a:solidFill>
+                            <a:srgbClr val="16181A"/>
+                          </a:solidFill>
+                          <a:latin typeface="Arial"/>
+                        </a:rPr>
+                        <a:t>No leakage</a:t>
+                      </a:r>
+                    </a:p>
+                  </a:txBody>
+                  <a:tcPr marL="73152" marR="73152" marT="36576" marB="36576">
+                    <a:solidFill>
+                      <a:srgbClr val="FCFCFB"/>
+                    </a:solidFill>
+                  </a:tcPr>
+                </a:tc>
+              </a:tr>
+              <a:tr h="344658">
+                <a:tc>
+                  <a:txBody>
+                    <a:bodyPr/>
+                    <a:lstStyle/>
+                    <a:p>
+                      <a:pPr>
+                        <a:lnSpc>
+                          <a:spcPct val="115000"/>
+                        </a:lnSpc>
+                      </a:pPr>
+                      <a:r>
+                        <a:rPr sz="1050" b="0">
+                          <a:solidFill>
+                            <a:srgbClr val="16181A"/>
+                          </a:solidFill>
+                          <a:latin typeface="Arial"/>
+                        </a:rPr>
+                        <a:t>E2</a:t>
+                      </a:r>
+                    </a:p>
+                  </a:txBody>
+                  <a:tcPr marL="73152" marR="73152" marT="36576" marB="36576">
+                    <a:solidFill>
+                      <a:srgbClr val="FCFCFB"/>
+                    </a:solidFill>
+                  </a:tcPr>
+                </a:tc>
+                <a:tc>
+                  <a:txBody>
+                    <a:bodyPr/>
+                    <a:lstStyle/>
+                    <a:p>
+                      <a:pPr>
+                        <a:lnSpc>
+                          <a:spcPct val="115000"/>
+                        </a:lnSpc>
+                      </a:pPr>
+                      <a:r>
+                        <a:rPr sz="1050" b="0">
+                          <a:solidFill>
+                            <a:srgbClr val="16181A"/>
+                          </a:solidFill>
+                          <a:latin typeface="Arial"/>
+                        </a:rPr>
+                        <a:t>How fast does it learn?</a:t>
+                      </a:r>
+                    </a:p>
+                  </a:txBody>
+                  <a:tcPr marL="73152" marR="73152" marT="36576" marB="36576">
+                    <a:solidFill>
+                      <a:srgbClr val="FCFCFB"/>
+                    </a:solidFill>
+                  </a:tcPr>
+                </a:tc>
+                <a:tc>
+                  <a:txBody>
+                    <a:bodyPr/>
+                    <a:lstStyle/>
+                    <a:p>
+                      <a:pPr>
+                        <a:lnSpc>
+                          <a:spcPct val="115000"/>
+                        </a:lnSpc>
+                      </a:pPr>
+                      <a:r>
+                        <a:rPr sz="1050" b="0">
+                          <a:solidFill>
+                            <a:srgbClr val="16181A"/>
+                          </a:solidFill>
+                          <a:latin typeface="Arial"/>
+                        </a:rPr>
+                        <a:t>Useful inside ~60 moves</a:t>
+                      </a:r>
+                    </a:p>
+                  </a:txBody>
+                  <a:tcPr marL="73152" marR="73152" marT="36576" marB="36576">
+                    <a:solidFill>
+                      <a:srgbClr val="FCFCFB"/>
+                    </a:solidFill>
+                  </a:tcPr>
+                </a:tc>
+                <a:tc>
+                  <a:txBody>
+                    <a:bodyPr/>
+                    <a:lstStyle/>
+                    <a:p>
+                      <a:pPr>
+                        <a:lnSpc>
+                          <a:spcPct val="115000"/>
+                        </a:lnSpc>
+                      </a:pPr>
+                      <a:r>
+                        <a:rPr sz="1050" b="0">
+                          <a:solidFill>
+                            <a:srgbClr val="16181A"/>
+                          </a:solidFill>
+                          <a:latin typeface="Arial"/>
+                        </a:rPr>
+                        <a:t>Cold start solved</a:t>
+                      </a:r>
+                    </a:p>
+                  </a:txBody>
+                  <a:tcPr marL="73152" marR="73152" marT="36576" marB="36576">
+                    <a:solidFill>
+                      <a:srgbClr val="FCFCFB"/>
+                    </a:solidFill>
+                  </a:tcPr>
+                </a:tc>
+              </a:tr>
+              <a:tr h="344658">
+                <a:tc>
+                  <a:txBody>
+                    <a:bodyPr/>
+                    <a:lstStyle/>
+                    <a:p>
+                      <a:pPr>
+                        <a:lnSpc>
+                          <a:spcPct val="115000"/>
+                        </a:lnSpc>
+                      </a:pPr>
+                      <a:r>
+                        <a:rPr sz="1050" b="0">
+                          <a:solidFill>
+                            <a:srgbClr val="16181A"/>
+                          </a:solidFill>
+                          <a:latin typeface="Arial"/>
+                        </a:rPr>
+                        <a:t>E4</a:t>
+                      </a:r>
+                    </a:p>
+                  </a:txBody>
+                  <a:tcPr marL="73152" marR="73152" marT="36576" marB="36576">
+                    <a:solidFill>
+                      <a:srgbClr val="FCFCFB"/>
+                    </a:solidFill>
+                  </a:tcPr>
+                </a:tc>
+                <a:tc>
+                  <a:txBody>
+                    <a:bodyPr/>
+                    <a:lstStyle/>
+                    <a:p>
+                      <a:pPr>
+                        <a:lnSpc>
+                          <a:spcPct val="115000"/>
+                        </a:lnSpc>
+                      </a:pPr>
+                      <a:r>
+                        <a:rPr sz="1050" b="0">
+                          <a:solidFill>
+                            <a:srgbClr val="16181A"/>
+                          </a:solidFill>
+                          <a:latin typeface="Arial"/>
+                        </a:rPr>
+                        <a:t>Does prediction make it deadlier?</a:t>
+                      </a:r>
+                    </a:p>
+                  </a:txBody>
+                  <a:tcPr marL="73152" marR="73152" marT="36576" marB="36576">
+                    <a:solidFill>
+                      <a:srgbClr val="FCFCFB"/>
+                    </a:solidFill>
+                  </a:tcPr>
+                </a:tc>
+                <a:tc>
+                  <a:txBody>
+                    <a:bodyPr/>
+                    <a:lstStyle/>
+                    <a:p>
+                      <a:pPr>
+                        <a:lnSpc>
+                          <a:spcPct val="115000"/>
+                        </a:lnSpc>
+                      </a:pPr>
+                      <a:r>
+                        <a:rPr sz="1050" b="0">
+                          <a:solidFill>
+                            <a:srgbClr val="16181A"/>
+                          </a:solidFill>
+                          <a:latin typeface="Arial"/>
+                        </a:rPr>
+                        <a:t>319 vs 111 per 1000</a:t>
+                      </a:r>
+                    </a:p>
+                  </a:txBody>
+                  <a:tcPr marL="73152" marR="73152" marT="36576" marB="36576">
+                    <a:solidFill>
+                      <a:srgbClr val="FCFCFB"/>
+                    </a:solidFill>
+                  </a:tcPr>
+                </a:tc>
+                <a:tc>
+                  <a:txBody>
+                    <a:bodyPr/>
+                    <a:lstStyle/>
+                    <a:p>
+                      <a:pPr>
+                        <a:lnSpc>
+                          <a:spcPct val="115000"/>
+                        </a:lnSpc>
+                      </a:pPr>
+                      <a:r>
+                        <a:rPr sz="1050" b="0">
+                          <a:solidFill>
+                            <a:srgbClr val="16181A"/>
+                          </a:solidFill>
+                          <a:latin typeface="Arial"/>
+                        </a:rPr>
+                        <a:t>Yes, vs no model</a:t>
+                      </a:r>
+                    </a:p>
+                  </a:txBody>
+                  <a:tcPr marL="73152" marR="73152" marT="36576" marB="36576">
+                    <a:solidFill>
+                      <a:srgbClr val="FCFCFB"/>
+                    </a:solidFill>
+                  </a:tcPr>
+                </a:tc>
+              </a:tr>
+              <a:tr h="344658">
+                <a:tc>
+                  <a:txBody>
+                    <a:bodyPr/>
+                    <a:lstStyle/>
+                    <a:p>
+                      <a:pPr>
+                        <a:lnSpc>
+                          <a:spcPct val="115000"/>
+                        </a:lnSpc>
+                      </a:pPr>
+                      <a:r>
+                        <a:rPr sz="1050" b="0">
+                          <a:solidFill>
+                            <a:srgbClr val="16181A"/>
+                          </a:solidFill>
+                          <a:latin typeface="Arial"/>
+                        </a:rPr>
+                        <a:t>E7</a:t>
+                      </a:r>
+                    </a:p>
+                  </a:txBody>
+                  <a:tcPr marL="73152" marR="73152" marT="36576" marB="36576">
+                    <a:solidFill>
+                      <a:srgbClr val="FCFCFB"/>
+                    </a:solidFill>
+                  </a:tcPr>
+                </a:tc>
+                <a:tc>
+                  <a:txBody>
+                    <a:bodyPr/>
+                    <a:lstStyle/>
+                    <a:p>
+                      <a:pPr>
+                        <a:lnSpc>
+                          <a:spcPct val="115000"/>
+                        </a:lnSpc>
+                      </a:pPr>
+                      <a:r>
+                        <a:rPr sz="1050" b="0">
+                          <a:solidFill>
+                            <a:srgbClr val="16181A"/>
+                          </a:solidFill>
+                          <a:latin typeface="Arial"/>
+                        </a:rPr>
+                        <a:t>Does that hold at scale?</a:t>
+                      </a:r>
+                    </a:p>
+                  </a:txBody>
+                  <a:tcPr marL="73152" marR="73152" marT="36576" marB="36576">
+                    <a:solidFill>
+                      <a:srgbClr val="FCFCFB"/>
+                    </a:solidFill>
+                  </a:tcPr>
+                </a:tc>
+                <a:tc>
+                  <a:txBody>
+                    <a:bodyPr/>
+                    <a:lstStyle/>
+                    <a:p>
+                      <a:pPr>
+                        <a:lnSpc>
+                          <a:spcPct val="115000"/>
+                        </a:lnSpc>
+                      </a:pPr>
+                      <a:r>
+                        <a:rPr sz="1050" b="0">
+                          <a:solidFill>
+                            <a:srgbClr val="16181A"/>
+                          </a:solidFill>
+                          <a:latin typeface="Arial"/>
+                        </a:rPr>
+                        <a:t>1.15× → 1.57× over hub-camping</a:t>
+                      </a:r>
+                    </a:p>
+                  </a:txBody>
+                  <a:tcPr marL="73152" marR="73152" marT="36576" marB="36576">
+                    <a:solidFill>
+                      <a:srgbClr val="FCFCFB"/>
+                    </a:solidFill>
+                  </a:tcPr>
+                </a:tc>
+                <a:tc>
+                  <a:txBody>
+                    <a:bodyPr/>
+                    <a:lstStyle/>
+                    <a:p>
+                      <a:pPr>
+                        <a:lnSpc>
+                          <a:spcPct val="115000"/>
+                        </a:lnSpc>
+                      </a:pPr>
+                      <a:r>
+                        <a:rPr sz="1050" b="0">
+                          <a:solidFill>
+                            <a:srgbClr val="16181A"/>
+                          </a:solidFill>
+                          <a:latin typeface="Arial"/>
+                        </a:rPr>
+                        <a:t>Grows with size</a:t>
+                      </a:r>
+                    </a:p>
+                  </a:txBody>
+                  <a:tcPr marL="73152" marR="73152" marT="36576" marB="36576">
+                    <a:solidFill>
+                      <a:srgbClr val="FCFCFB"/>
+                    </a:solidFill>
+                  </a:tcPr>
+                </a:tc>
+              </a:tr>
+              <a:tr h="344658">
+                <a:tc>
+                  <a:txBody>
+                    <a:bodyPr/>
+                    <a:lstStyle/>
+                    <a:p>
+                      <a:pPr>
+                        <a:lnSpc>
+                          <a:spcPct val="115000"/>
+                        </a:lnSpc>
+                      </a:pPr>
+                      <a:r>
+                        <a:rPr sz="1050" b="0">
+                          <a:solidFill>
+                            <a:srgbClr val="16181A"/>
+                          </a:solidFill>
+                          <a:latin typeface="Arial"/>
+                        </a:rPr>
+                        <a:t>E5</a:t>
+                      </a:r>
+                    </a:p>
+                  </a:txBody>
+                  <a:tcPr marL="73152" marR="73152" marT="36576" marB="36576">
+                    <a:solidFill>
+                      <a:srgbClr val="FCFCFB"/>
+                    </a:solidFill>
+                  </a:tcPr>
+                </a:tc>
+                <a:tc>
+                  <a:txBody>
+                    <a:bodyPr/>
+                    <a:lstStyle/>
+                    <a:p>
+                      <a:pPr>
+                        <a:lnSpc>
+                          <a:spcPct val="115000"/>
+                        </a:lnSpc>
+                      </a:pPr>
+                      <a:r>
+                        <a:rPr sz="1050" b="0">
+                          <a:solidFill>
+                            <a:srgbClr val="16181A"/>
+                          </a:solidFill>
+                          <a:latin typeface="Arial"/>
+                        </a:rPr>
+                        <a:t>Do world edits cost the player?</a:t>
+                      </a:r>
+                    </a:p>
+                  </a:txBody>
+                  <a:tcPr marL="73152" marR="73152" marT="36576" marB="36576">
+                    <a:solidFill>
+                      <a:srgbClr val="FCFCFB"/>
+                    </a:solidFill>
+                  </a:tcPr>
+                </a:tc>
+                <a:tc>
+                  <a:txBody>
+                    <a:bodyPr/>
+                    <a:lstStyle/>
+                    <a:p>
+                      <a:pPr>
+                        <a:lnSpc>
+                          <a:spcPct val="115000"/>
+                        </a:lnSpc>
+                      </a:pPr>
+                      <a:r>
+                        <a:rPr sz="1050" b="0">
+                          <a:solidFill>
+                            <a:srgbClr val="16181A"/>
+                          </a:solidFill>
+                          <a:latin typeface="Arial"/>
+                        </a:rPr>
+                        <a:t>+54% per objective</a:t>
+                      </a:r>
+                    </a:p>
+                  </a:txBody>
+                  <a:tcPr marL="73152" marR="73152" marT="36576" marB="36576">
+                    <a:solidFill>
+                      <a:srgbClr val="FCFCFB"/>
+                    </a:solidFill>
+                  </a:tcPr>
+                </a:tc>
+                <a:tc>
+                  <a:txBody>
+                    <a:bodyPr/>
+                    <a:lstStyle/>
+                    <a:p>
+                      <a:pPr>
+                        <a:lnSpc>
+                          <a:spcPct val="115000"/>
+                        </a:lnSpc>
+                      </a:pPr>
+                      <a:r>
+                        <a:rPr sz="1050" b="0">
+                          <a:solidFill>
+                            <a:srgbClr val="16181A"/>
+                          </a:solidFill>
+                          <a:latin typeface="Arial"/>
+                        </a:rPr>
+                        <a:t>Yes</a:t>
+                      </a:r>
+                    </a:p>
+                  </a:txBody>
+                  <a:tcPr marL="73152" marR="73152" marT="36576" marB="36576">
+                    <a:solidFill>
+                      <a:srgbClr val="FCFCFB"/>
+                    </a:solidFill>
+                  </a:tcPr>
+                </a:tc>
+              </a:tr>
+              <a:tr h="344658">
+                <a:tc>
+                  <a:txBody>
+                    <a:bodyPr/>
+                    <a:lstStyle/>
+                    <a:p>
+                      <a:pPr>
+                        <a:lnSpc>
+                          <a:spcPct val="115000"/>
+                        </a:lnSpc>
+                      </a:pPr>
+                      <a:r>
+                        <a:rPr sz="1050" b="0">
+                          <a:solidFill>
+                            <a:srgbClr val="16181A"/>
+                          </a:solidFill>
+                          <a:latin typeface="Arial"/>
+                        </a:rPr>
+                        <a:t>E6</a:t>
+                      </a:r>
+                    </a:p>
+                  </a:txBody>
+                  <a:tcPr marL="73152" marR="73152" marT="36576" marB="36576">
+                    <a:solidFill>
+                      <a:srgbClr val="FCFCFB"/>
+                    </a:solidFill>
+                  </a:tcPr>
+                </a:tc>
+                <a:tc>
+                  <a:txBody>
+                    <a:bodyPr/>
+                    <a:lstStyle/>
+                    <a:p>
+                      <a:pPr>
+                        <a:lnSpc>
+                          <a:spcPct val="115000"/>
+                        </a:lnSpc>
+                      </a:pPr>
+                      <a:r>
+                        <a:rPr sz="1050" b="0">
+                          <a:solidFill>
+                            <a:srgbClr val="16181A"/>
+                          </a:solidFill>
+                          <a:latin typeface="Arial"/>
+                        </a:rPr>
+                        <a:t>Is sabotage aimed?</a:t>
+                      </a:r>
+                    </a:p>
+                  </a:txBody>
+                  <a:tcPr marL="73152" marR="73152" marT="36576" marB="36576">
+                    <a:solidFill>
+                      <a:srgbClr val="FCFCFB"/>
+                    </a:solidFill>
+                  </a:tcPr>
+                </a:tc>
+                <a:tc>
+                  <a:txBody>
+                    <a:bodyPr/>
+                    <a:lstStyle/>
+                    <a:p>
+                      <a:pPr>
+                        <a:lnSpc>
+                          <a:spcPct val="115000"/>
+                        </a:lnSpc>
+                      </a:pPr>
+                      <a:r>
+                        <a:rPr sz="1050" b="0">
+                          <a:solidFill>
+                            <a:srgbClr val="16181A"/>
+                          </a:solidFill>
+                          <a:latin typeface="Arial"/>
+                        </a:rPr>
+                        <a:t>No gain on uniform reliance; 13% on uneven</a:t>
+                      </a:r>
+                    </a:p>
+                  </a:txBody>
+                  <a:tcPr marL="73152" marR="73152" marT="36576" marB="36576">
+                    <a:solidFill>
+                      <a:srgbClr val="FCFCFB"/>
+                    </a:solidFill>
+                  </a:tcPr>
+                </a:tc>
+                <a:tc>
+                  <a:txBody>
+                    <a:bodyPr/>
+                    <a:lstStyle/>
+                    <a:p>
+                      <a:pPr>
+                        <a:lnSpc>
+                          <a:spcPct val="115000"/>
+                        </a:lnSpc>
+                      </a:pPr>
+                      <a:r>
+                        <a:rPr sz="1050" b="0">
+                          <a:solidFill>
+                            <a:srgbClr val="16181A"/>
+                          </a:solidFill>
+                          <a:latin typeface="Arial"/>
+                        </a:rPr>
+                        <a:t>Conditional</a:t>
+                      </a:r>
+                    </a:p>
+                  </a:txBody>
+                  <a:tcPr marL="73152" marR="73152" marT="36576" marB="36576">
+                    <a:solidFill>
+                      <a:srgbClr val="FCFCFB"/>
+                    </a:solidFill>
+                  </a:tcPr>
+                </a:tc>
+              </a:tr>
+              <a:tr h="344658">
+                <a:tc>
+                  <a:txBody>
+                    <a:bodyPr/>
+                    <a:lstStyle/>
+                    <a:p>
+                      <a:pPr>
+                        <a:lnSpc>
+                          <a:spcPct val="115000"/>
+                        </a:lnSpc>
+                      </a:pPr>
+                      <a:r>
+                        <a:rPr sz="1050" b="0">
+                          <a:solidFill>
+                            <a:srgbClr val="16181A"/>
+                          </a:solidFill>
+                          <a:latin typeface="Arial"/>
+                        </a:rPr>
+                        <a:t>E8</a:t>
+                      </a:r>
+                    </a:p>
+                  </a:txBody>
+                  <a:tcPr marL="73152" marR="73152" marT="36576" marB="36576">
+                    <a:solidFill>
+                      <a:srgbClr val="FCFCFB"/>
+                    </a:solidFill>
+                  </a:tcPr>
+                </a:tc>
+                <a:tc>
+                  <a:txBody>
+                    <a:bodyPr/>
+                    <a:lstStyle/>
+                    <a:p>
+                      <a:pPr>
+                        <a:lnSpc>
+                          <a:spcPct val="115000"/>
+                        </a:lnSpc>
+                      </a:pPr>
+                      <a:r>
+                        <a:rPr sz="1050" b="0">
+                          <a:solidFill>
+                            <a:srgbClr val="16181A"/>
+                          </a:solidFill>
+                          <a:latin typeface="Arial"/>
+                        </a:rPr>
+                        <a:t>Does waiting defend? (full obs.)</a:t>
+                      </a:r>
+                    </a:p>
+                  </a:txBody>
+                  <a:tcPr marL="73152" marR="73152" marT="36576" marB="36576">
+                    <a:solidFill>
+                      <a:srgbClr val="FCFCFB"/>
+                    </a:solidFill>
+                  </a:tcPr>
+                </a:tc>
+                <a:tc>
+                  <a:txBody>
+                    <a:bodyPr/>
+                    <a:lstStyle/>
+                    <a:p>
+                      <a:pPr>
+                        <a:lnSpc>
+                          <a:spcPct val="115000"/>
+                        </a:lnSpc>
+                      </a:pPr>
+                      <a:r>
+                        <a:rPr sz="1050" b="0">
+                          <a:solidFill>
+                            <a:srgbClr val="16181A"/>
+                          </a:solidFill>
+                          <a:latin typeface="Arial"/>
+                        </a:rPr>
+                        <a:t>1.7% risk cut</a:t>
+                      </a:r>
+                    </a:p>
+                  </a:txBody>
+                  <a:tcPr marL="73152" marR="73152" marT="36576" marB="36576">
+                    <a:solidFill>
+                      <a:srgbClr val="FCFCFB"/>
+                    </a:solidFill>
+                  </a:tcPr>
+                </a:tc>
+                <a:tc>
+                  <a:txBody>
+                    <a:bodyPr/>
+                    <a:lstStyle/>
+                    <a:p>
+                      <a:pPr>
+                        <a:lnSpc>
+                          <a:spcPct val="115000"/>
+                        </a:lnSpc>
+                      </a:pPr>
+                      <a:r>
+                        <a:rPr sz="1050" b="0">
+                          <a:solidFill>
+                            <a:srgbClr val="16181A"/>
+                          </a:solidFill>
+                          <a:latin typeface="Arial"/>
+                        </a:rPr>
+                        <a:t>NEGATIVE</a:t>
+                      </a:r>
+                    </a:p>
+                  </a:txBody>
+                  <a:tcPr marL="73152" marR="73152" marT="36576" marB="36576">
+                    <a:solidFill>
+                      <a:srgbClr val="FCFCFB"/>
+                    </a:solidFill>
+                  </a:tcPr>
+                </a:tc>
+              </a:tr>
+              <a:tr h="344658">
+                <a:tc>
+                  <a:txBody>
+                    <a:bodyPr/>
+                    <a:lstStyle/>
+                    <a:p>
+                      <a:pPr>
+                        <a:lnSpc>
+                          <a:spcPct val="115000"/>
+                        </a:lnSpc>
+                      </a:pPr>
+                      <a:r>
+                        <a:rPr sz="1050" b="0">
+                          <a:solidFill>
+                            <a:srgbClr val="16181A"/>
+                          </a:solidFill>
+                          <a:latin typeface="Arial"/>
+                        </a:rPr>
+                        <a:t>E9</a:t>
+                      </a:r>
+                    </a:p>
+                  </a:txBody>
+                  <a:tcPr marL="73152" marR="73152" marT="36576" marB="36576">
+                    <a:solidFill>
+                      <a:srgbClr val="FCFCFB"/>
+                    </a:solidFill>
+                  </a:tcPr>
+                </a:tc>
+                <a:tc>
+                  <a:txBody>
+                    <a:bodyPr/>
+                    <a:lstStyle/>
+                    <a:p>
+                      <a:pPr>
+                        <a:lnSpc>
+                          <a:spcPct val="115000"/>
+                        </a:lnSpc>
+                      </a:pPr>
+                      <a:r>
+                        <a:rPr sz="1050" b="0">
+                          <a:solidFill>
+                            <a:srgbClr val="16181A"/>
+                          </a:solidFill>
+                          <a:latin typeface="Arial"/>
+                        </a:rPr>
+                        <a:t>Does explicit dwell modelling help?</a:t>
+                      </a:r>
+                    </a:p>
+                  </a:txBody>
+                  <a:tcPr marL="73152" marR="73152" marT="36576" marB="36576">
+                    <a:solidFill>
+                      <a:srgbClr val="FCFCFB"/>
+                    </a:solidFill>
+                  </a:tcPr>
+                </a:tc>
+                <a:tc>
+                  <a:txBody>
+                    <a:bodyPr/>
+                    <a:lstStyle/>
+                    <a:p>
+                      <a:pPr>
+                        <a:lnSpc>
+                          <a:spcPct val="115000"/>
+                        </a:lnSpc>
+                      </a:pPr>
+                      <a:r>
+                        <a:rPr sz="1050" b="0">
+                          <a:solidFill>
+                            <a:srgbClr val="16181A"/>
+                          </a:solidFill>
+                          <a:latin typeface="Arial"/>
+                        </a:rPr>
+                        <a:t>2.0% worse than position-only</a:t>
+                      </a:r>
+                    </a:p>
+                  </a:txBody>
+                  <a:tcPr marL="73152" marR="73152" marT="36576" marB="36576">
+                    <a:solidFill>
+                      <a:srgbClr val="FCFCFB"/>
+                    </a:solidFill>
+                  </a:tcPr>
+                </a:tc>
+                <a:tc>
+                  <a:txBody>
+                    <a:bodyPr/>
+                    <a:lstStyle/>
+                    <a:p>
+                      <a:pPr>
+                        <a:lnSpc>
+                          <a:spcPct val="115000"/>
+                        </a:lnSpc>
+                      </a:pPr>
+                      <a:r>
+                        <a:rPr sz="1050" b="0">
+                          <a:solidFill>
+                            <a:srgbClr val="16181A"/>
+                          </a:solidFill>
+                          <a:latin typeface="Arial"/>
+                        </a:rPr>
+                        <a:t>NEGATIVE</a:t>
+                      </a:r>
+                    </a:p>
+                  </a:txBody>
+                  <a:tcPr marL="73152" marR="73152" marT="36576" marB="36576">
+                    <a:solidFill>
+                      <a:srgbClr val="FCFCFB"/>
+                    </a:solidFill>
+                  </a:tcPr>
+                </a:tc>
+              </a:tr>
+              <a:tr h="344658">
+                <a:tc>
+                  <a:txBody>
+                    <a:bodyPr/>
+                    <a:lstStyle/>
+                    <a:p>
+                      <a:pPr>
+                        <a:lnSpc>
+                          <a:spcPct val="115000"/>
+                        </a:lnSpc>
+                      </a:pPr>
+                      <a:r>
+                        <a:rPr sz="1050" b="0">
+                          <a:solidFill>
+                            <a:srgbClr val="16181A"/>
+                          </a:solidFill>
+                          <a:latin typeface="Arial"/>
+                        </a:rPr>
+                        <a:t>E10</a:t>
+                      </a:r>
+                    </a:p>
+                  </a:txBody>
+                  <a:tcPr marL="73152" marR="73152" marT="36576" marB="36576">
+                    <a:solidFill>
+                      <a:srgbClr val="FCFCFB"/>
+                    </a:solidFill>
+                  </a:tcPr>
+                </a:tc>
+                <a:tc>
+                  <a:txBody>
+                    <a:bodyPr/>
+                    <a:lstStyle/>
+                    <a:p>
+                      <a:pPr>
+                        <a:lnSpc>
+                          <a:spcPct val="115000"/>
+                        </a:lnSpc>
+                      </a:pPr>
+                      <a:r>
+                        <a:rPr sz="1050" b="0">
+                          <a:solidFill>
+                            <a:srgbClr val="16181A"/>
+                          </a:solidFill>
+                          <a:latin typeface="Arial"/>
+                        </a:rPr>
+                        <a:t>Is dwell learnable?</a:t>
+                      </a:r>
+                    </a:p>
+                  </a:txBody>
+                  <a:tcPr marL="73152" marR="73152" marT="36576" marB="36576">
+                    <a:solidFill>
+                      <a:srgbClr val="FCFCFB"/>
+                    </a:solidFill>
+                  </a:tcPr>
+                </a:tc>
+                <a:tc>
+                  <a:txBody>
+                    <a:bodyPr/>
+                    <a:lstStyle/>
+                    <a:p>
+                      <a:pPr>
+                        <a:lnSpc>
+                          <a:spcPct val="115000"/>
+                        </a:lnSpc>
+                      </a:pPr>
+                      <a:r>
+                        <a:rPr sz="1050" b="0">
+                          <a:solidFill>
+                            <a:srgbClr val="16181A"/>
+                          </a:solidFill>
+                          <a:latin typeface="Arial"/>
+                        </a:rPr>
+                        <a:t>70% vs 54% baseline</a:t>
+                      </a:r>
+                    </a:p>
+                  </a:txBody>
+                  <a:tcPr marL="73152" marR="73152" marT="36576" marB="36576">
+                    <a:solidFill>
+                      <a:srgbClr val="FCFCFB"/>
+                    </a:solidFill>
+                  </a:tcPr>
+                </a:tc>
+                <a:tc>
+                  <a:txBody>
+                    <a:bodyPr/>
+                    <a:lstStyle/>
+                    <a:p>
+                      <a:pPr>
+                        <a:lnSpc>
+                          <a:spcPct val="115000"/>
+                        </a:lnSpc>
+                      </a:pPr>
+                      <a:r>
+                        <a:rPr sz="1050" b="0">
+                          <a:solidFill>
+                            <a:srgbClr val="16181A"/>
+                          </a:solidFill>
+                          <a:latin typeface="Arial"/>
+                        </a:rPr>
+                        <a:t>Yes</a:t>
+                      </a:r>
+                    </a:p>
+                  </a:txBody>
+                  <a:tcPr marL="73152" marR="73152" marT="36576" marB="36576">
+                    <a:solidFill>
+                      <a:srgbClr val="FCFCFB"/>
+                    </a:solidFill>
+                  </a:tcPr>
+                </a:tc>
+              </a:tr>
+              <a:tr h="344658">
+                <a:tc>
+                  <a:txBody>
+                    <a:bodyPr/>
+                    <a:lstStyle/>
+                    <a:p>
+                      <a:pPr>
+                        <a:lnSpc>
+                          <a:spcPct val="115000"/>
+                        </a:lnSpc>
+                      </a:pPr>
+                      <a:r>
+                        <a:rPr sz="1050" b="0">
+                          <a:solidFill>
+                            <a:srgbClr val="16181A"/>
+                          </a:solidFill>
+                          <a:latin typeface="Arial"/>
+                        </a:rPr>
+                        <a:t>E11</a:t>
+                      </a:r>
+                    </a:p>
+                  </a:txBody>
+                  <a:tcPr marL="73152" marR="73152" marT="36576" marB="36576">
+                    <a:solidFill>
+                      <a:srgbClr val="FCFCFB"/>
+                    </a:solidFill>
+                  </a:tcPr>
+                </a:tc>
+                <a:tc>
+                  <a:txBody>
+                    <a:bodyPr/>
+                    <a:lstStyle/>
+                    <a:p>
+                      <a:pPr>
+                        <a:lnSpc>
+                          <a:spcPct val="115000"/>
+                        </a:lnSpc>
+                      </a:pPr>
+                      <a:r>
+                        <a:rPr sz="1050" b="0">
+                          <a:solidFill>
+                            <a:srgbClr val="16181A"/>
+                          </a:solidFill>
+                          <a:latin typeface="Arial"/>
+                        </a:rPr>
+                        <a:t>What do sensors buy? (NEW)</a:t>
+                      </a:r>
+                    </a:p>
+                  </a:txBody>
+                  <a:tcPr marL="73152" marR="73152" marT="36576" marB="36576">
+                    <a:solidFill>
+                      <a:srgbClr val="FCFCFB"/>
+                    </a:solidFill>
+                  </a:tcPr>
+                </a:tc>
+                <a:tc>
+                  <a:txBody>
+                    <a:bodyPr/>
+                    <a:lstStyle/>
+                    <a:p>
+                      <a:pPr>
+                        <a:lnSpc>
+                          <a:spcPct val="115000"/>
+                        </a:lnSpc>
+                      </a:pPr>
+                      <a:r>
+                        <a:rPr sz="1050" b="0">
+                          <a:solidFill>
+                            <a:srgbClr val="16181A"/>
+                          </a:solidFill>
+                          <a:latin typeface="Arial"/>
+                        </a:rPr>
+                        <a:t>Full coverage = perfect tracking</a:t>
+                      </a:r>
+                    </a:p>
+                  </a:txBody>
+                  <a:tcPr marL="73152" marR="73152" marT="36576" marB="36576">
+                    <a:solidFill>
+                      <a:srgbClr val="FCFCFB"/>
+                    </a:solidFill>
+                  </a:tcPr>
+                </a:tc>
+                <a:tc>
+                  <a:txBody>
+                    <a:bodyPr/>
+                    <a:lstStyle/>
+                    <a:p>
+                      <a:pPr>
+                        <a:lnSpc>
+                          <a:spcPct val="115000"/>
+                        </a:lnSpc>
+                      </a:pPr>
+                      <a:r>
+                        <a:rPr sz="1050" b="0">
+                          <a:solidFill>
+                            <a:srgbClr val="16181A"/>
+                          </a:solidFill>
+                          <a:latin typeface="Arial"/>
+                        </a:rPr>
+                        <a:t>Mechanism</a:t>
+                      </a:r>
+                    </a:p>
+                  </a:txBody>
+                  <a:tcPr marL="73152" marR="73152" marT="36576" marB="36576">
+                    <a:solidFill>
+                      <a:srgbClr val="FCFCFB"/>
+                    </a:solidFill>
+                  </a:tcPr>
+                </a:tc>
+              </a:tr>
+              <a:tr h="344664">
+                <a:tc>
+                  <a:txBody>
+                    <a:bodyPr/>
+                    <a:lstStyle/>
+                    <a:p>
+                      <a:pPr>
+                        <a:lnSpc>
+                          <a:spcPct val="115000"/>
+                        </a:lnSpc>
+                      </a:pPr>
+                      <a:r>
+                        <a:rPr sz="1050" b="0">
+                          <a:solidFill>
+                            <a:srgbClr val="16181A"/>
+                          </a:solidFill>
+                          <a:latin typeface="Arial"/>
+                        </a:rPr>
+                        <a:t>E12</a:t>
+                      </a:r>
+                    </a:p>
+                  </a:txBody>
+                  <a:tcPr marL="73152" marR="73152" marT="36576" marB="36576">
+                    <a:solidFill>
+                      <a:srgbClr val="FCFCFB"/>
+                    </a:solidFill>
+                  </a:tcPr>
+                </a:tc>
+                <a:tc>
+                  <a:txBody>
+                    <a:bodyPr/>
+                    <a:lstStyle/>
+                    <a:p>
+                      <a:pPr>
+                        <a:lnSpc>
+                          <a:spcPct val="115000"/>
+                        </a:lnSpc>
+                      </a:pPr>
+                      <a:r>
+                        <a:rPr sz="1050" b="0">
+                          <a:solidFill>
+                            <a:srgbClr val="16181A"/>
+                          </a:solidFill>
+                          <a:latin typeface="Arial"/>
+                        </a:rPr>
+                        <a:t>What is the counter-play? (NEW)</a:t>
+                      </a:r>
+                    </a:p>
+                  </a:txBody>
+                  <a:tcPr marL="73152" marR="73152" marT="36576" marB="36576">
+                    <a:solidFill>
+                      <a:srgbClr val="FCFCFB"/>
+                    </a:solidFill>
+                  </a:tcPr>
+                </a:tc>
+                <a:tc>
+                  <a:txBody>
+                    <a:bodyPr/>
+                    <a:lstStyle/>
+                    <a:p>
+                      <a:pPr>
+                        <a:lnSpc>
+                          <a:spcPct val="115000"/>
+                        </a:lnSpc>
+                      </a:pPr>
+                      <a:r>
+                        <a:rPr sz="1050" b="0">
+                          <a:solidFill>
+                            <a:srgbClr val="16181A"/>
+                          </a:solidFill>
+                          <a:latin typeface="Arial"/>
+                        </a:rPr>
+                        <a:t>Disabling sensors: 39% risk cut</a:t>
+                      </a:r>
+                    </a:p>
+                  </a:txBody>
+                  <a:tcPr marL="73152" marR="73152" marT="36576" marB="36576">
+                    <a:solidFill>
+                      <a:srgbClr val="FCFCFB"/>
+                    </a:solidFill>
+                  </a:tcPr>
+                </a:tc>
+                <a:tc>
+                  <a:txBody>
+                    <a:bodyPr/>
+                    <a:lstStyle/>
+                    <a:p>
+                      <a:pPr>
+                        <a:lnSpc>
+                          <a:spcPct val="115000"/>
+                        </a:lnSpc>
+                      </a:pPr>
+                      <a:r>
+                        <a:rPr sz="1050" b="0">
+                          <a:solidFill>
+                            <a:srgbClr val="16181A"/>
+                          </a:solidFill>
+                          <a:latin typeface="Arial"/>
+                        </a:rPr>
+                        <a:t>Design answer</a:t>
+                      </a:r>
+                    </a:p>
+                  </a:txBody>
+                  <a:tcPr marL="73152" marR="73152" marT="36576" marB="36576">
+                    <a:solidFill>
+                      <a:srgbClr val="FCFCFB"/>
+                    </a:solidFill>
+                  </a:tcPr>
+                </a:tc>
+              </a:tr>
+            </a:tbl>
+          </a:graphicData>
+        </a:graphic>
+      </p:graphicFrame>
     </p:spTree>
   </p:cSld>
   <p:clrMapOvr>
@@ -10957,7 +10917,7 @@
                 </a:solidFill>
                 <a:latin typeface="Arial"/>
               </a:rPr>
-              <a:t>LIMITATIONS</a:t>
+              <a:t>INTERPRETATION</a:t>
             </a:r>
           </a:p>
         </p:txBody>
@@ -10999,7 +10959,7 @@
                 </a:solidFill>
                 <a:latin typeface="Arial"/>
               </a:rPr>
-              <a:t>Stated before the panel finds them</a:t>
+              <a:t>Three findings changed the design</a:t>
             </a:r>
           </a:p>
         </p:txBody>
@@ -11048,541 +11008,16 @@
           </a:p>
         </p:txBody>
       </p:sp>
-      <p:graphicFrame>
-        <p:nvGraphicFramePr>
-          <p:cNvPr id="5" name="Table 4"/>
-          <p:cNvGraphicFramePr>
-            <a:graphicFrameLocks noGrp="1"/>
-          </p:cNvGraphicFramePr>
-          <p:nvPr/>
-        </p:nvGraphicFramePr>
-        <p:xfrm>
-          <a:off x="658368" y="1783080"/>
-          <a:ext cx="10881360" cy="2304288"/>
-        </p:xfrm>
-        <a:graphic>
-          <a:graphicData uri="http://schemas.openxmlformats.org/drawingml/2006/table">
-            <a:tbl>
-              <a:tblPr firstRow="1" bandRow="1">
-                <a:tableStyleId>{5C22544A-7EE6-4342-B048-85BDC9FD1C3A}</a:tableStyleId>
-              </a:tblPr>
-              <a:tblGrid>
-                <a:gridCol w="2834640"/>
-                <a:gridCol w="4480560"/>
-                <a:gridCol w="3566160"/>
-              </a:tblGrid>
-              <a:tr h="384048">
-                <a:tc>
-                  <a:txBody>
-                    <a:bodyPr/>
-                    <a:lstStyle/>
-                    <a:p>
-                      <a:pPr>
-                        <a:lnSpc>
-                          <a:spcPct val="115000"/>
-                        </a:lnSpc>
-                      </a:pPr>
-                      <a:r>
-                        <a:rPr sz="900" b="1">
-                          <a:solidFill>
-                            <a:srgbClr val="6B7178"/>
-                          </a:solidFill>
-                          <a:latin typeface="Arial"/>
-                        </a:rPr>
-                        <a:t>Limitation</a:t>
-                      </a:r>
-                    </a:p>
-                  </a:txBody>
-                  <a:tcPr marL="73152" marR="73152" marT="36576" marB="36576">
-                    <a:solidFill>
-                      <a:srgbClr val="F4F6F8"/>
-                    </a:solidFill>
-                  </a:tcPr>
-                </a:tc>
-                <a:tc>
-                  <a:txBody>
-                    <a:bodyPr/>
-                    <a:lstStyle/>
-                    <a:p>
-                      <a:pPr>
-                        <a:lnSpc>
-                          <a:spcPct val="115000"/>
-                        </a:lnSpc>
-                      </a:pPr>
-                      <a:r>
-                        <a:rPr sz="900" b="1">
-                          <a:solidFill>
-                            <a:srgbClr val="6B7178"/>
-                          </a:solidFill>
-                          <a:latin typeface="Arial"/>
-                        </a:rPr>
-                        <a:t>Why it stands</a:t>
-                      </a:r>
-                    </a:p>
-                  </a:txBody>
-                  <a:tcPr marL="73152" marR="73152" marT="36576" marB="36576">
-                    <a:solidFill>
-                      <a:srgbClr val="F4F6F8"/>
-                    </a:solidFill>
-                  </a:tcPr>
-                </a:tc>
-                <a:tc>
-                  <a:txBody>
-                    <a:bodyPr/>
-                    <a:lstStyle/>
-                    <a:p>
-                      <a:pPr>
-                        <a:lnSpc>
-                          <a:spcPct val="115000"/>
-                        </a:lnSpc>
-                      </a:pPr>
-                      <a:r>
-                        <a:rPr sz="900" b="1">
-                          <a:solidFill>
-                            <a:srgbClr val="6B7178"/>
-                          </a:solidFill>
-                          <a:latin typeface="Arial"/>
-                        </a:rPr>
-                        <a:t>What resolves it</a:t>
-                      </a:r>
-                    </a:p>
-                  </a:txBody>
-                  <a:tcPr marL="73152" marR="73152" marT="36576" marB="36576">
-                    <a:solidFill>
-                      <a:srgbClr val="F4F6F8"/>
-                    </a:solidFill>
-                  </a:tcPr>
-                </a:tc>
-              </a:tr>
-              <a:tr h="384048">
-                <a:tc>
-                  <a:txBody>
-                    <a:bodyPr/>
-                    <a:lstStyle/>
-                    <a:p>
-                      <a:pPr>
-                        <a:lnSpc>
-                          <a:spcPct val="115000"/>
-                        </a:lnSpc>
-                      </a:pPr>
-                      <a:r>
-                        <a:rPr sz="1150" b="0">
-                          <a:solidFill>
-                            <a:srgbClr val="16181A"/>
-                          </a:solidFill>
-                          <a:latin typeface="Arial"/>
-                        </a:rPr>
-                        <a:t>No human playtest data</a:t>
-                      </a:r>
-                    </a:p>
-                  </a:txBody>
-                  <a:tcPr marL="73152" marR="73152" marT="36576" marB="36576">
-                    <a:solidFill>
-                      <a:srgbClr val="FCFCFB"/>
-                    </a:solidFill>
-                  </a:tcPr>
-                </a:tc>
-                <a:tc>
-                  <a:txBody>
-                    <a:bodyPr/>
-                    <a:lstStyle/>
-                    <a:p>
-                      <a:pPr>
-                        <a:lnSpc>
-                          <a:spcPct val="115000"/>
-                        </a:lnSpc>
-                      </a:pPr>
-                      <a:r>
-                        <a:rPr sz="1150" b="0">
-                          <a:solidFill>
-                            <a:srgbClr val="16181A"/>
-                          </a:solidFill>
-                          <a:latin typeface="Arial"/>
-                        </a:rPr>
-                        <a:t>All evaluation is against scripted players</a:t>
-                      </a:r>
-                    </a:p>
-                  </a:txBody>
-                  <a:tcPr marL="73152" marR="73152" marT="36576" marB="36576">
-                    <a:solidFill>
-                      <a:srgbClr val="FCFCFB"/>
-                    </a:solidFill>
-                  </a:tcPr>
-                </a:tc>
-                <a:tc>
-                  <a:txBody>
-                    <a:bodyPr/>
-                    <a:lstStyle/>
-                    <a:p>
-                      <a:pPr>
-                        <a:lnSpc>
-                          <a:spcPct val="115000"/>
-                        </a:lnSpc>
-                      </a:pPr>
-                      <a:r>
-                        <a:rPr sz="1150" b="0">
-                          <a:solidFill>
-                            <a:srgbClr val="16181A"/>
-                          </a:solidFill>
-                          <a:latin typeface="Arial"/>
-                        </a:rPr>
-                        <a:t>M5 playtest; telemetry format exists</a:t>
-                      </a:r>
-                    </a:p>
-                  </a:txBody>
-                  <a:tcPr marL="73152" marR="73152" marT="36576" marB="36576">
-                    <a:solidFill>
-                      <a:srgbClr val="FCFCFB"/>
-                    </a:solidFill>
-                  </a:tcPr>
-                </a:tc>
-              </a:tr>
-              <a:tr h="384048">
-                <a:tc>
-                  <a:txBody>
-                    <a:bodyPr/>
-                    <a:lstStyle/>
-                    <a:p>
-                      <a:pPr>
-                        <a:lnSpc>
-                          <a:spcPct val="115000"/>
-                        </a:lnSpc>
-                      </a:pPr>
-                      <a:r>
-                        <a:rPr sz="1150" b="0">
-                          <a:solidFill>
-                            <a:srgbClr val="16181A"/>
-                          </a:solidFill>
-                          <a:latin typeface="Arial"/>
-                        </a:rPr>
-                        <a:t>Dwell rate is an assumption</a:t>
-                      </a:r>
-                    </a:p>
-                  </a:txBody>
-                  <a:tcPr marL="73152" marR="73152" marT="36576" marB="36576">
-                    <a:solidFill>
-                      <a:srgbClr val="FCFCFB"/>
-                    </a:solidFill>
-                  </a:tcPr>
-                </a:tc>
-                <a:tc>
-                  <a:txBody>
-                    <a:bodyPr/>
-                    <a:lstStyle/>
-                    <a:p>
-                      <a:pPr>
-                        <a:lnSpc>
-                          <a:spcPct val="115000"/>
-                        </a:lnSpc>
-                      </a:pPr>
-                      <a:r>
-                        <a:rPr sz="1150" b="0">
-                          <a:solidFill>
-                            <a:srgbClr val="16181A"/>
-                          </a:solidFill>
-                          <a:latin typeface="Arial"/>
-                        </a:rPr>
-                        <a:t>Calibrated to ~24% of windows, not measured</a:t>
-                      </a:r>
-                    </a:p>
-                  </a:txBody>
-                  <a:tcPr marL="73152" marR="73152" marT="36576" marB="36576">
-                    <a:solidFill>
-                      <a:srgbClr val="FCFCFB"/>
-                    </a:solidFill>
-                  </a:tcPr>
-                </a:tc>
-                <a:tc>
-                  <a:txBody>
-                    <a:bodyPr/>
-                    <a:lstStyle/>
-                    <a:p>
-                      <a:pPr>
-                        <a:lnSpc>
-                          <a:spcPct val="115000"/>
-                        </a:lnSpc>
-                      </a:pPr>
-                      <a:r>
-                        <a:rPr sz="1150" b="0">
-                          <a:solidFill>
-                            <a:srgbClr val="16181A"/>
-                          </a:solidFill>
-                          <a:latin typeface="Arial"/>
-                        </a:rPr>
-                        <a:t>Same playtest</a:t>
-                      </a:r>
-                    </a:p>
-                  </a:txBody>
-                  <a:tcPr marL="73152" marR="73152" marT="36576" marB="36576">
-                    <a:solidFill>
-                      <a:srgbClr val="FCFCFB"/>
-                    </a:solidFill>
-                  </a:tcPr>
-                </a:tc>
-              </a:tr>
-              <a:tr h="384048">
-                <a:tc>
-                  <a:txBody>
-                    <a:bodyPr/>
-                    <a:lstStyle/>
-                    <a:p>
-                      <a:pPr>
-                        <a:lnSpc>
-                          <a:spcPct val="115000"/>
-                        </a:lnSpc>
-                      </a:pPr>
-                      <a:r>
-                        <a:rPr sz="1150" b="0">
-                          <a:solidFill>
-                            <a:srgbClr val="16181A"/>
-                          </a:solidFill>
-                          <a:latin typeface="Arial"/>
-                        </a:rPr>
-                        <a:t>Models close at interception</a:t>
-                      </a:r>
-                    </a:p>
-                  </a:txBody>
-                  <a:tcPr marL="73152" marR="73152" marT="36576" marB="36576">
-                    <a:solidFill>
-                      <a:srgbClr val="FCFCFB"/>
-                    </a:solidFill>
-                  </a:tcPr>
-                </a:tc>
-                <a:tc>
-                  <a:txBody>
-                    <a:bodyPr/>
-                    <a:lstStyle/>
-                    <a:p>
-                      <a:pPr>
-                        <a:lnSpc>
-                          <a:spcPct val="115000"/>
-                        </a:lnSpc>
-                      </a:pPr>
-                      <a:r>
-                        <a:rPr sz="1150" b="0">
-                          <a:solidFill>
-                            <a:srgbClr val="16181A"/>
-                          </a:solidFill>
-                          <a:latin typeface="Arial"/>
-                        </a:rPr>
-                        <a:t>VOMM and order-1 within noise on capture rate</a:t>
-                      </a:r>
-                    </a:p>
-                  </a:txBody>
-                  <a:tcPr marL="73152" marR="73152" marT="36576" marB="36576">
-                    <a:solidFill>
-                      <a:srgbClr val="FCFCFB"/>
-                    </a:solidFill>
-                  </a:tcPr>
-                </a:tc>
-                <a:tc>
-                  <a:txBody>
-                    <a:bodyPr/>
-                    <a:lstStyle/>
-                    <a:p>
-                      <a:pPr>
-                        <a:lnSpc>
-                          <a:spcPct val="115000"/>
-                        </a:lnSpc>
-                      </a:pPr>
-                      <a:r>
-                        <a:rPr sz="1150" b="0">
-                          <a:solidFill>
-                            <a:srgbClr val="16181A"/>
-                          </a:solidFill>
-                          <a:latin typeface="Arial"/>
-                        </a:rPr>
-                        <a:t>Clear gap is at prediction, not pursuit</a:t>
-                      </a:r>
-                    </a:p>
-                  </a:txBody>
-                  <a:tcPr marL="73152" marR="73152" marT="36576" marB="36576">
-                    <a:solidFill>
-                      <a:srgbClr val="FCFCFB"/>
-                    </a:solidFill>
-                  </a:tcPr>
-                </a:tc>
-              </a:tr>
-              <a:tr h="384048">
-                <a:tc>
-                  <a:txBody>
-                    <a:bodyPr/>
-                    <a:lstStyle/>
-                    <a:p>
-                      <a:pPr>
-                        <a:lnSpc>
-                          <a:spcPct val="115000"/>
-                        </a:lnSpc>
-                      </a:pPr>
-                      <a:r>
-                        <a:rPr sz="1150" b="0">
-                          <a:solidFill>
-                            <a:srgbClr val="16181A"/>
-                          </a:solidFill>
-                          <a:latin typeface="Arial"/>
-                        </a:rPr>
-                        <a:t>Lookahead can hurt</a:t>
-                      </a:r>
-                    </a:p>
-                  </a:txBody>
-                  <a:tcPr marL="73152" marR="73152" marT="36576" marB="36576">
-                    <a:solidFill>
-                      <a:srgbClr val="FCFCFB"/>
-                    </a:solidFill>
-                  </a:tcPr>
-                </a:tc>
-                <a:tc>
-                  <a:txBody>
-                    <a:bodyPr/>
-                    <a:lstStyle/>
-                    <a:p>
-                      <a:pPr>
-                        <a:lnSpc>
-                          <a:spcPct val="115000"/>
-                        </a:lnSpc>
-                      </a:pPr>
-                      <a:r>
-                        <a:rPr sz="1150" b="0">
-                          <a:solidFill>
-                            <a:srgbClr val="16181A"/>
-                          </a:solidFill>
-                          <a:latin typeface="Arial"/>
-                        </a:rPr>
-                        <a:t>At 61% single-step accuracy, rollout error compounds</a:t>
-                      </a:r>
-                    </a:p>
-                  </a:txBody>
-                  <a:tcPr marL="73152" marR="73152" marT="36576" marB="36576">
-                    <a:solidFill>
-                      <a:srgbClr val="FCFCFB"/>
-                    </a:solidFill>
-                  </a:tcPr>
-                </a:tc>
-                <a:tc>
-                  <a:txBody>
-                    <a:bodyPr/>
-                    <a:lstStyle/>
-                    <a:p>
-                      <a:pPr>
-                        <a:lnSpc>
-                          <a:spcPct val="115000"/>
-                        </a:lnSpc>
-                      </a:pPr>
-                      <a:r>
-                        <a:rPr sz="1150" b="0">
-                          <a:solidFill>
-                            <a:srgbClr val="16181A"/>
-                          </a:solidFill>
-                          <a:latin typeface="Arial"/>
-                        </a:rPr>
-                        <a:t>Expected; documented, not hidden</a:t>
-                      </a:r>
-                    </a:p>
-                  </a:txBody>
-                  <a:tcPr marL="73152" marR="73152" marT="36576" marB="36576">
-                    <a:solidFill>
-                      <a:srgbClr val="FCFCFB"/>
-                    </a:solidFill>
-                  </a:tcPr>
-                </a:tc>
-              </a:tr>
-              <a:tr h="384048">
-                <a:tc>
-                  <a:txBody>
-                    <a:bodyPr/>
-                    <a:lstStyle/>
-                    <a:p>
-                      <a:pPr>
-                        <a:lnSpc>
-                          <a:spcPct val="115000"/>
-                        </a:lnSpc>
-                      </a:pPr>
-                      <a:r>
-                        <a:rPr sz="1150" b="0">
-                          <a:solidFill>
-                            <a:srgbClr val="16181A"/>
-                          </a:solidFill>
-                          <a:latin typeface="Arial"/>
-                        </a:rPr>
-                        <a:t>No 3D integration</a:t>
-                      </a:r>
-                    </a:p>
-                  </a:txBody>
-                  <a:tcPr marL="73152" marR="73152" marT="36576" marB="36576">
-                    <a:solidFill>
-                      <a:srgbClr val="FCFCFB"/>
-                    </a:solidFill>
-                  </a:tcPr>
-                </a:tc>
-                <a:tc>
-                  <a:txBody>
-                    <a:bodyPr/>
-                    <a:lstStyle/>
-                    <a:p>
-                      <a:pPr>
-                        <a:lnSpc>
-                          <a:spcPct val="115000"/>
-                        </a:lnSpc>
-                      </a:pPr>
-                      <a:r>
-                        <a:rPr sz="1150" b="0">
-                          <a:solidFill>
-                            <a:srgbClr val="16181A"/>
-                          </a:solidFill>
-                          <a:latin typeface="Arial"/>
-                        </a:rPr>
-                        <a:t>Godot build not started; art study only</a:t>
-                      </a:r>
-                    </a:p>
-                  </a:txBody>
-                  <a:tcPr marL="73152" marR="73152" marT="36576" marB="36576">
-                    <a:solidFill>
-                      <a:srgbClr val="FCFCFB"/>
-                    </a:solidFill>
-                  </a:tcPr>
-                </a:tc>
-                <a:tc>
-                  <a:txBody>
-                    <a:bodyPr/>
-                    <a:lstStyle/>
-                    <a:p>
-                      <a:pPr>
-                        <a:lnSpc>
-                          <a:spcPct val="115000"/>
-                        </a:lnSpc>
-                      </a:pPr>
-                      <a:r>
-                        <a:rPr sz="1150" b="0">
-                          <a:solidFill>
-                            <a:srgbClr val="16181A"/>
-                          </a:solidFill>
-                          <a:latin typeface="Arial"/>
-                        </a:rPr>
-                        <a:t>M3, next cycle</a:t>
-                      </a:r>
-                    </a:p>
-                  </a:txBody>
-                  <a:tcPr marL="73152" marR="73152" marT="36576" marB="36576">
-                    <a:solidFill>
-                      <a:srgbClr val="FCFCFB"/>
-                    </a:solidFill>
-                  </a:tcPr>
-                </a:tc>
-              </a:tr>
-            </a:tbl>
-          </a:graphicData>
-        </a:graphic>
-      </p:graphicFrame>
-      <p:sp>
-        <p:nvSpPr>
-          <p:cNvPr id="6" name="TextBox 5"/>
+      <p:sp>
+        <p:nvSpPr>
+          <p:cNvPr id="5" name="TextBox 4"/>
           <p:cNvSpPr txBox="1"/>
           <p:nvPr/>
         </p:nvSpPr>
         <p:spPr>
           <a:xfrm>
-            <a:off x="658368" y="4846320"/>
-            <a:ext cx="10881360" cy="1097280"/>
+            <a:off x="658368" y="1783080"/>
+            <a:ext cx="10881360" cy="4480560"/>
           </a:xfrm>
           <a:prstGeom prst="rect">
             <a:avLst/>
@@ -11595,22 +11030,87 @@
           </a:bodyPr>
           <a:lstStyle/>
           <a:p>
-            <a:pPr algn="l">
+            <a:pPr>
               <a:lnSpc>
-                <a:spcPct val="132000"/>
+                <a:spcPct val="130000"/>
               </a:lnSpc>
               <a:spcAft>
-                <a:spcPts val="600"/>
+                <a:spcPts val="1300"/>
               </a:spcAft>
             </a:pPr>
             <a:r>
-              <a:rPr sz="1300" b="0">
+              <a:rPr sz="1350" b="1">
+                <a:solidFill>
+                  <a:srgbClr val="16181A"/>
+                </a:solidFill>
+                <a:latin typeface="Arial"/>
+              </a:rPr>
+              <a:t>1 · A negative result set this cycle's work.  </a:t>
+            </a:r>
+            <a:r>
+              <a:rPr sz="1350">
                 <a:solidFill>
                   <a:srgbClr val="6B7178"/>
                 </a:solidFill>
                 <a:latin typeface="Arial"/>
               </a:rPr>
-              <a:t>Roadmap — M3 the Godot greybox driven by the room graph; M7 polygonal room tiles where side count is the difficulty setting; M8 the outbound register with pre-send tampering, already prototyped in the browser slice. M6 landed this cycle, ahead of M3, because the evidence said it mattered more.</a:t>
+              <a:t>Waiting did not defend, and the cause was perfect observation. That diagnosis — not a guess — is why door sensors were the next milestone. The fix was verified: at 100% coverage the new filter reproduces the old fully-observed behaviour, which is how we know the re-implementation is sound.</a:t>
+            </a:r>
+          </a:p>
+          <a:p>
+            <a:pPr>
+              <a:lnSpc>
+                <a:spcPct val="130000"/>
+              </a:lnSpc>
+              <a:spcAft>
+                <a:spcPts val="1300"/>
+              </a:spcAft>
+            </a:pPr>
+            <a:r>
+              <a:rPr sz="1350" b="1">
+                <a:solidFill>
+                  <a:srgbClr val="16181A"/>
+                </a:solidFill>
+                <a:latin typeface="Arial"/>
+              </a:rPr>
+              <a:t>2 · The metric was hiding the answer.  </a:t>
+            </a:r>
+            <a:r>
+              <a:rPr sz="1350">
+                <a:solidFill>
+                  <a:srgbClr val="6B7178"/>
+                </a:solidFill>
+                <a:latin typeface="Arial"/>
+              </a:rPr>
+              <a:t>Measured per window, avoiding sensors looked excellent. Measured per objective completed, it was worse than doing nothing — the player was simply achieving less. Two strategies that looked like wins disappeared under the corrected metric.</a:t>
+            </a:r>
+          </a:p>
+          <a:p>
+            <a:pPr>
+              <a:lnSpc>
+                <a:spcPct val="130000"/>
+              </a:lnSpc>
+              <a:spcAft>
+                <a:spcPts val="1300"/>
+              </a:spcAft>
+            </a:pPr>
+            <a:r>
+              <a:rPr sz="1350" b="1">
+                <a:solidFill>
+                  <a:srgbClr val="16181A"/>
+                </a:solidFill>
+                <a:latin typeface="Arial"/>
+              </a:rPr>
+              <a:t>3 · The mechanic the fiction already had is the one that works.  </a:t>
+            </a:r>
+            <a:r>
+              <a:rPr sz="1350">
+                <a:solidFill>
+                  <a:srgbClr val="6B7178"/>
+                </a:solidFill>
+                <a:latin typeface="Arial"/>
+              </a:rPr>
+              <a:t>Detouring around live sensors costs more exposure than it saves. Spending a dangerous task to silence a sensor on your existing route is the strategy that cuts risk. The design was right before the measurement was.</a:t>
             </a:r>
           </a:p>
         </p:txBody>
@@ -11678,7 +11178,7 @@
                 </a:solidFill>
                 <a:latin typeface="Arial"/>
               </a:rPr>
-              <a:t>DEMONSTRATION</a:t>
+              <a:t>LIMITATIONS</a:t>
             </a:r>
           </a:p>
         </p:txBody>
@@ -11720,7 +11220,7 @@
                 </a:solidFill>
                 <a:latin typeface="Arial"/>
               </a:rPr>
-              <a:t>Four things that run right now</a:t>
+              <a:t>Stated before the panel finds them</a:t>
             </a:r>
           </a:p>
         </p:txBody>
@@ -11779,6 +11279,727 @@
         </p:nvGraphicFramePr>
         <p:xfrm>
           <a:off x="658368" y="1783080"/>
+          <a:ext cx="10881360" cy="2304288"/>
+        </p:xfrm>
+        <a:graphic>
+          <a:graphicData uri="http://schemas.openxmlformats.org/drawingml/2006/table">
+            <a:tbl>
+              <a:tblPr firstRow="1" bandRow="1">
+                <a:tableStyleId>{5C22544A-7EE6-4342-B048-85BDC9FD1C3A}</a:tableStyleId>
+              </a:tblPr>
+              <a:tblGrid>
+                <a:gridCol w="2834640"/>
+                <a:gridCol w="4480560"/>
+                <a:gridCol w="3566160"/>
+              </a:tblGrid>
+              <a:tr h="384048">
+                <a:tc>
+                  <a:txBody>
+                    <a:bodyPr/>
+                    <a:lstStyle/>
+                    <a:p>
+                      <a:pPr>
+                        <a:lnSpc>
+                          <a:spcPct val="115000"/>
+                        </a:lnSpc>
+                      </a:pPr>
+                      <a:r>
+                        <a:rPr sz="900" b="1">
+                          <a:solidFill>
+                            <a:srgbClr val="6B7178"/>
+                          </a:solidFill>
+                          <a:latin typeface="Arial"/>
+                        </a:rPr>
+                        <a:t>Limitation</a:t>
+                      </a:r>
+                    </a:p>
+                  </a:txBody>
+                  <a:tcPr marL="73152" marR="73152" marT="36576" marB="36576">
+                    <a:solidFill>
+                      <a:srgbClr val="F4F6F8"/>
+                    </a:solidFill>
+                  </a:tcPr>
+                </a:tc>
+                <a:tc>
+                  <a:txBody>
+                    <a:bodyPr/>
+                    <a:lstStyle/>
+                    <a:p>
+                      <a:pPr>
+                        <a:lnSpc>
+                          <a:spcPct val="115000"/>
+                        </a:lnSpc>
+                      </a:pPr>
+                      <a:r>
+                        <a:rPr sz="900" b="1">
+                          <a:solidFill>
+                            <a:srgbClr val="6B7178"/>
+                          </a:solidFill>
+                          <a:latin typeface="Arial"/>
+                        </a:rPr>
+                        <a:t>Why it stands</a:t>
+                      </a:r>
+                    </a:p>
+                  </a:txBody>
+                  <a:tcPr marL="73152" marR="73152" marT="36576" marB="36576">
+                    <a:solidFill>
+                      <a:srgbClr val="F4F6F8"/>
+                    </a:solidFill>
+                  </a:tcPr>
+                </a:tc>
+                <a:tc>
+                  <a:txBody>
+                    <a:bodyPr/>
+                    <a:lstStyle/>
+                    <a:p>
+                      <a:pPr>
+                        <a:lnSpc>
+                          <a:spcPct val="115000"/>
+                        </a:lnSpc>
+                      </a:pPr>
+                      <a:r>
+                        <a:rPr sz="900" b="1">
+                          <a:solidFill>
+                            <a:srgbClr val="6B7178"/>
+                          </a:solidFill>
+                          <a:latin typeface="Arial"/>
+                        </a:rPr>
+                        <a:t>What resolves it</a:t>
+                      </a:r>
+                    </a:p>
+                  </a:txBody>
+                  <a:tcPr marL="73152" marR="73152" marT="36576" marB="36576">
+                    <a:solidFill>
+                      <a:srgbClr val="F4F6F8"/>
+                    </a:solidFill>
+                  </a:tcPr>
+                </a:tc>
+              </a:tr>
+              <a:tr h="384048">
+                <a:tc>
+                  <a:txBody>
+                    <a:bodyPr/>
+                    <a:lstStyle/>
+                    <a:p>
+                      <a:pPr>
+                        <a:lnSpc>
+                          <a:spcPct val="115000"/>
+                        </a:lnSpc>
+                      </a:pPr>
+                      <a:r>
+                        <a:rPr sz="1150" b="0">
+                          <a:solidFill>
+                            <a:srgbClr val="16181A"/>
+                          </a:solidFill>
+                          <a:latin typeface="Arial"/>
+                        </a:rPr>
+                        <a:t>No human playtest data</a:t>
+                      </a:r>
+                    </a:p>
+                  </a:txBody>
+                  <a:tcPr marL="73152" marR="73152" marT="36576" marB="36576">
+                    <a:solidFill>
+                      <a:srgbClr val="FCFCFB"/>
+                    </a:solidFill>
+                  </a:tcPr>
+                </a:tc>
+                <a:tc>
+                  <a:txBody>
+                    <a:bodyPr/>
+                    <a:lstStyle/>
+                    <a:p>
+                      <a:pPr>
+                        <a:lnSpc>
+                          <a:spcPct val="115000"/>
+                        </a:lnSpc>
+                      </a:pPr>
+                      <a:r>
+                        <a:rPr sz="1150" b="0">
+                          <a:solidFill>
+                            <a:srgbClr val="16181A"/>
+                          </a:solidFill>
+                          <a:latin typeface="Arial"/>
+                        </a:rPr>
+                        <a:t>All evaluation is against scripted players</a:t>
+                      </a:r>
+                    </a:p>
+                  </a:txBody>
+                  <a:tcPr marL="73152" marR="73152" marT="36576" marB="36576">
+                    <a:solidFill>
+                      <a:srgbClr val="FCFCFB"/>
+                    </a:solidFill>
+                  </a:tcPr>
+                </a:tc>
+                <a:tc>
+                  <a:txBody>
+                    <a:bodyPr/>
+                    <a:lstStyle/>
+                    <a:p>
+                      <a:pPr>
+                        <a:lnSpc>
+                          <a:spcPct val="115000"/>
+                        </a:lnSpc>
+                      </a:pPr>
+                      <a:r>
+                        <a:rPr sz="1150" b="0">
+                          <a:solidFill>
+                            <a:srgbClr val="16181A"/>
+                          </a:solidFill>
+                          <a:latin typeface="Arial"/>
+                        </a:rPr>
+                        <a:t>M5 playtest; telemetry format exists</a:t>
+                      </a:r>
+                    </a:p>
+                  </a:txBody>
+                  <a:tcPr marL="73152" marR="73152" marT="36576" marB="36576">
+                    <a:solidFill>
+                      <a:srgbClr val="FCFCFB"/>
+                    </a:solidFill>
+                  </a:tcPr>
+                </a:tc>
+              </a:tr>
+              <a:tr h="384048">
+                <a:tc>
+                  <a:txBody>
+                    <a:bodyPr/>
+                    <a:lstStyle/>
+                    <a:p>
+                      <a:pPr>
+                        <a:lnSpc>
+                          <a:spcPct val="115000"/>
+                        </a:lnSpc>
+                      </a:pPr>
+                      <a:r>
+                        <a:rPr sz="1150" b="0">
+                          <a:solidFill>
+                            <a:srgbClr val="16181A"/>
+                          </a:solidFill>
+                          <a:latin typeface="Arial"/>
+                        </a:rPr>
+                        <a:t>Dwell rate is an assumption</a:t>
+                      </a:r>
+                    </a:p>
+                  </a:txBody>
+                  <a:tcPr marL="73152" marR="73152" marT="36576" marB="36576">
+                    <a:solidFill>
+                      <a:srgbClr val="FCFCFB"/>
+                    </a:solidFill>
+                  </a:tcPr>
+                </a:tc>
+                <a:tc>
+                  <a:txBody>
+                    <a:bodyPr/>
+                    <a:lstStyle/>
+                    <a:p>
+                      <a:pPr>
+                        <a:lnSpc>
+                          <a:spcPct val="115000"/>
+                        </a:lnSpc>
+                      </a:pPr>
+                      <a:r>
+                        <a:rPr sz="1150" b="0">
+                          <a:solidFill>
+                            <a:srgbClr val="16181A"/>
+                          </a:solidFill>
+                          <a:latin typeface="Arial"/>
+                        </a:rPr>
+                        <a:t>Calibrated to ~24% of windows, not measured</a:t>
+                      </a:r>
+                    </a:p>
+                  </a:txBody>
+                  <a:tcPr marL="73152" marR="73152" marT="36576" marB="36576">
+                    <a:solidFill>
+                      <a:srgbClr val="FCFCFB"/>
+                    </a:solidFill>
+                  </a:tcPr>
+                </a:tc>
+                <a:tc>
+                  <a:txBody>
+                    <a:bodyPr/>
+                    <a:lstStyle/>
+                    <a:p>
+                      <a:pPr>
+                        <a:lnSpc>
+                          <a:spcPct val="115000"/>
+                        </a:lnSpc>
+                      </a:pPr>
+                      <a:r>
+                        <a:rPr sz="1150" b="0">
+                          <a:solidFill>
+                            <a:srgbClr val="16181A"/>
+                          </a:solidFill>
+                          <a:latin typeface="Arial"/>
+                        </a:rPr>
+                        <a:t>Same playtest</a:t>
+                      </a:r>
+                    </a:p>
+                  </a:txBody>
+                  <a:tcPr marL="73152" marR="73152" marT="36576" marB="36576">
+                    <a:solidFill>
+                      <a:srgbClr val="FCFCFB"/>
+                    </a:solidFill>
+                  </a:tcPr>
+                </a:tc>
+              </a:tr>
+              <a:tr h="384048">
+                <a:tc>
+                  <a:txBody>
+                    <a:bodyPr/>
+                    <a:lstStyle/>
+                    <a:p>
+                      <a:pPr>
+                        <a:lnSpc>
+                          <a:spcPct val="115000"/>
+                        </a:lnSpc>
+                      </a:pPr>
+                      <a:r>
+                        <a:rPr sz="1150" b="0">
+                          <a:solidFill>
+                            <a:srgbClr val="16181A"/>
+                          </a:solidFill>
+                          <a:latin typeface="Arial"/>
+                        </a:rPr>
+                        <a:t>Models close at interception</a:t>
+                      </a:r>
+                    </a:p>
+                  </a:txBody>
+                  <a:tcPr marL="73152" marR="73152" marT="36576" marB="36576">
+                    <a:solidFill>
+                      <a:srgbClr val="FCFCFB"/>
+                    </a:solidFill>
+                  </a:tcPr>
+                </a:tc>
+                <a:tc>
+                  <a:txBody>
+                    <a:bodyPr/>
+                    <a:lstStyle/>
+                    <a:p>
+                      <a:pPr>
+                        <a:lnSpc>
+                          <a:spcPct val="115000"/>
+                        </a:lnSpc>
+                      </a:pPr>
+                      <a:r>
+                        <a:rPr sz="1150" b="0">
+                          <a:solidFill>
+                            <a:srgbClr val="16181A"/>
+                          </a:solidFill>
+                          <a:latin typeface="Arial"/>
+                        </a:rPr>
+                        <a:t>VOMM and order-1 within noise on capture rate</a:t>
+                      </a:r>
+                    </a:p>
+                  </a:txBody>
+                  <a:tcPr marL="73152" marR="73152" marT="36576" marB="36576">
+                    <a:solidFill>
+                      <a:srgbClr val="FCFCFB"/>
+                    </a:solidFill>
+                  </a:tcPr>
+                </a:tc>
+                <a:tc>
+                  <a:txBody>
+                    <a:bodyPr/>
+                    <a:lstStyle/>
+                    <a:p>
+                      <a:pPr>
+                        <a:lnSpc>
+                          <a:spcPct val="115000"/>
+                        </a:lnSpc>
+                      </a:pPr>
+                      <a:r>
+                        <a:rPr sz="1150" b="0">
+                          <a:solidFill>
+                            <a:srgbClr val="16181A"/>
+                          </a:solidFill>
+                          <a:latin typeface="Arial"/>
+                        </a:rPr>
+                        <a:t>Clear gap is at prediction, not pursuit</a:t>
+                      </a:r>
+                    </a:p>
+                  </a:txBody>
+                  <a:tcPr marL="73152" marR="73152" marT="36576" marB="36576">
+                    <a:solidFill>
+                      <a:srgbClr val="FCFCFB"/>
+                    </a:solidFill>
+                  </a:tcPr>
+                </a:tc>
+              </a:tr>
+              <a:tr h="384048">
+                <a:tc>
+                  <a:txBody>
+                    <a:bodyPr/>
+                    <a:lstStyle/>
+                    <a:p>
+                      <a:pPr>
+                        <a:lnSpc>
+                          <a:spcPct val="115000"/>
+                        </a:lnSpc>
+                      </a:pPr>
+                      <a:r>
+                        <a:rPr sz="1150" b="0">
+                          <a:solidFill>
+                            <a:srgbClr val="16181A"/>
+                          </a:solidFill>
+                          <a:latin typeface="Arial"/>
+                        </a:rPr>
+                        <a:t>Lookahead can hurt</a:t>
+                      </a:r>
+                    </a:p>
+                  </a:txBody>
+                  <a:tcPr marL="73152" marR="73152" marT="36576" marB="36576">
+                    <a:solidFill>
+                      <a:srgbClr val="FCFCFB"/>
+                    </a:solidFill>
+                  </a:tcPr>
+                </a:tc>
+                <a:tc>
+                  <a:txBody>
+                    <a:bodyPr/>
+                    <a:lstStyle/>
+                    <a:p>
+                      <a:pPr>
+                        <a:lnSpc>
+                          <a:spcPct val="115000"/>
+                        </a:lnSpc>
+                      </a:pPr>
+                      <a:r>
+                        <a:rPr sz="1150" b="0">
+                          <a:solidFill>
+                            <a:srgbClr val="16181A"/>
+                          </a:solidFill>
+                          <a:latin typeface="Arial"/>
+                        </a:rPr>
+                        <a:t>At 61% single-step accuracy, rollout error compounds</a:t>
+                      </a:r>
+                    </a:p>
+                  </a:txBody>
+                  <a:tcPr marL="73152" marR="73152" marT="36576" marB="36576">
+                    <a:solidFill>
+                      <a:srgbClr val="FCFCFB"/>
+                    </a:solidFill>
+                  </a:tcPr>
+                </a:tc>
+                <a:tc>
+                  <a:txBody>
+                    <a:bodyPr/>
+                    <a:lstStyle/>
+                    <a:p>
+                      <a:pPr>
+                        <a:lnSpc>
+                          <a:spcPct val="115000"/>
+                        </a:lnSpc>
+                      </a:pPr>
+                      <a:r>
+                        <a:rPr sz="1150" b="0">
+                          <a:solidFill>
+                            <a:srgbClr val="16181A"/>
+                          </a:solidFill>
+                          <a:latin typeface="Arial"/>
+                        </a:rPr>
+                        <a:t>Expected; documented, not hidden</a:t>
+                      </a:r>
+                    </a:p>
+                  </a:txBody>
+                  <a:tcPr marL="73152" marR="73152" marT="36576" marB="36576">
+                    <a:solidFill>
+                      <a:srgbClr val="FCFCFB"/>
+                    </a:solidFill>
+                  </a:tcPr>
+                </a:tc>
+              </a:tr>
+              <a:tr h="384048">
+                <a:tc>
+                  <a:txBody>
+                    <a:bodyPr/>
+                    <a:lstStyle/>
+                    <a:p>
+                      <a:pPr>
+                        <a:lnSpc>
+                          <a:spcPct val="115000"/>
+                        </a:lnSpc>
+                      </a:pPr>
+                      <a:r>
+                        <a:rPr sz="1150" b="0">
+                          <a:solidFill>
+                            <a:srgbClr val="16181A"/>
+                          </a:solidFill>
+                          <a:latin typeface="Arial"/>
+                        </a:rPr>
+                        <a:t>No 3D integration</a:t>
+                      </a:r>
+                    </a:p>
+                  </a:txBody>
+                  <a:tcPr marL="73152" marR="73152" marT="36576" marB="36576">
+                    <a:solidFill>
+                      <a:srgbClr val="FCFCFB"/>
+                    </a:solidFill>
+                  </a:tcPr>
+                </a:tc>
+                <a:tc>
+                  <a:txBody>
+                    <a:bodyPr/>
+                    <a:lstStyle/>
+                    <a:p>
+                      <a:pPr>
+                        <a:lnSpc>
+                          <a:spcPct val="115000"/>
+                        </a:lnSpc>
+                      </a:pPr>
+                      <a:r>
+                        <a:rPr sz="1150" b="0">
+                          <a:solidFill>
+                            <a:srgbClr val="16181A"/>
+                          </a:solidFill>
+                          <a:latin typeface="Arial"/>
+                        </a:rPr>
+                        <a:t>Godot build not started; art study only</a:t>
+                      </a:r>
+                    </a:p>
+                  </a:txBody>
+                  <a:tcPr marL="73152" marR="73152" marT="36576" marB="36576">
+                    <a:solidFill>
+                      <a:srgbClr val="FCFCFB"/>
+                    </a:solidFill>
+                  </a:tcPr>
+                </a:tc>
+                <a:tc>
+                  <a:txBody>
+                    <a:bodyPr/>
+                    <a:lstStyle/>
+                    <a:p>
+                      <a:pPr>
+                        <a:lnSpc>
+                          <a:spcPct val="115000"/>
+                        </a:lnSpc>
+                      </a:pPr>
+                      <a:r>
+                        <a:rPr sz="1150" b="0">
+                          <a:solidFill>
+                            <a:srgbClr val="16181A"/>
+                          </a:solidFill>
+                          <a:latin typeface="Arial"/>
+                        </a:rPr>
+                        <a:t>M3, next cycle</a:t>
+                      </a:r>
+                    </a:p>
+                  </a:txBody>
+                  <a:tcPr marL="73152" marR="73152" marT="36576" marB="36576">
+                    <a:solidFill>
+                      <a:srgbClr val="FCFCFB"/>
+                    </a:solidFill>
+                  </a:tcPr>
+                </a:tc>
+              </a:tr>
+            </a:tbl>
+          </a:graphicData>
+        </a:graphic>
+      </p:graphicFrame>
+      <p:sp>
+        <p:nvSpPr>
+          <p:cNvPr id="6" name="TextBox 5"/>
+          <p:cNvSpPr txBox="1"/>
+          <p:nvPr/>
+        </p:nvSpPr>
+        <p:spPr>
+          <a:xfrm>
+            <a:off x="658368" y="4846320"/>
+            <a:ext cx="10881360" cy="1097280"/>
+          </a:xfrm>
+          <a:prstGeom prst="rect">
+            <a:avLst/>
+          </a:prstGeom>
+          <a:noFill/>
+        </p:spPr>
+        <p:txBody>
+          <a:bodyPr wrap="square" lIns="0" rIns="0" tIns="0" bIns="0">
+            <a:spAutoFit/>
+          </a:bodyPr>
+          <a:lstStyle/>
+          <a:p>
+            <a:pPr algn="l">
+              <a:lnSpc>
+                <a:spcPct val="132000"/>
+              </a:lnSpc>
+              <a:spcAft>
+                <a:spcPts val="600"/>
+              </a:spcAft>
+            </a:pPr>
+            <a:r>
+              <a:rPr sz="1300" b="0">
+                <a:solidFill>
+                  <a:srgbClr val="6B7178"/>
+                </a:solidFill>
+                <a:latin typeface="Arial"/>
+              </a:rPr>
+              <a:t>Roadmap — M3 the Godot greybox driven by the room graph; M7 polygonal room tiles where side count is the difficulty setting; M8 the outbound register with pre-send tampering, already prototyped in the browser slice. M6 landed this cycle, ahead of M3, because the evidence said it mattered more.</a:t>
+            </a:r>
+          </a:p>
+        </p:txBody>
+      </p:sp>
+    </p:spTree>
+  </p:cSld>
+  <p:clrMapOvr>
+    <a:masterClrMapping/>
+  </p:clrMapOvr>
+</p:sld>
+</file>
+
+<file path=ppt/slides/slide23.xml><?xml version="1.0" encoding="utf-8"?>
+<p:sld xmlns:a="http://schemas.openxmlformats.org/drawingml/2006/main" xmlns:p="http://schemas.openxmlformats.org/presentationml/2006/main" xmlns:r="http://schemas.openxmlformats.org/officeDocument/2006/relationships">
+  <p:cSld>
+    <p:bg>
+      <p:bgPr>
+        <a:solidFill>
+          <a:srgbClr val="FCFCFB"/>
+        </a:solidFill>
+        <a:effectLst/>
+      </p:bgPr>
+    </p:bg>
+    <p:spTree>
+      <p:nvGrpSpPr>
+        <p:cNvPr id="1" name=""/>
+        <p:cNvGrpSpPr/>
+        <p:nvPr/>
+      </p:nvGrpSpPr>
+      <p:grpSpPr/>
+      <p:sp>
+        <p:nvSpPr>
+          <p:cNvPr id="2" name="TextBox 1"/>
+          <p:cNvSpPr txBox="1"/>
+          <p:nvPr/>
+        </p:nvSpPr>
+        <p:spPr>
+          <a:xfrm>
+            <a:off x="658368" y="420624"/>
+            <a:ext cx="10881360" cy="274320"/>
+          </a:xfrm>
+          <a:prstGeom prst="rect">
+            <a:avLst/>
+          </a:prstGeom>
+          <a:noFill/>
+        </p:spPr>
+        <p:txBody>
+          <a:bodyPr wrap="square" lIns="0" rIns="0" tIns="0" bIns="0">
+            <a:spAutoFit/>
+          </a:bodyPr>
+          <a:lstStyle/>
+          <a:p>
+            <a:pPr algn="l">
+              <a:lnSpc>
+                <a:spcPct val="125000"/>
+              </a:lnSpc>
+              <a:spcAft>
+                <a:spcPts val="600"/>
+              </a:spcAft>
+            </a:pPr>
+            <a:r>
+              <a:rPr sz="1050" b="1">
+                <a:solidFill>
+                  <a:srgbClr val="2A78D6"/>
+                </a:solidFill>
+                <a:latin typeface="Arial"/>
+              </a:rPr>
+              <a:t>DEMONSTRATION</a:t>
+            </a:r>
+          </a:p>
+        </p:txBody>
+      </p:sp>
+      <p:sp>
+        <p:nvSpPr>
+          <p:cNvPr id="3" name="TextBox 2"/>
+          <p:cNvSpPr txBox="1"/>
+          <p:nvPr/>
+        </p:nvSpPr>
+        <p:spPr>
+          <a:xfrm>
+            <a:off x="658368" y="749808"/>
+            <a:ext cx="10881360" cy="822960"/>
+          </a:xfrm>
+          <a:prstGeom prst="rect">
+            <a:avLst/>
+          </a:prstGeom>
+          <a:noFill/>
+        </p:spPr>
+        <p:txBody>
+          <a:bodyPr wrap="square" lIns="0" rIns="0" tIns="0" bIns="0">
+            <a:spAutoFit/>
+          </a:bodyPr>
+          <a:lstStyle/>
+          <a:p>
+            <a:pPr algn="l">
+              <a:lnSpc>
+                <a:spcPct val="125000"/>
+              </a:lnSpc>
+              <a:spcAft>
+                <a:spcPts val="600"/>
+              </a:spcAft>
+            </a:pPr>
+            <a:r>
+              <a:rPr sz="2800" b="1">
+                <a:solidFill>
+                  <a:srgbClr val="16181A"/>
+                </a:solidFill>
+                <a:latin typeface="Arial"/>
+              </a:rPr>
+              <a:t>Four things that run right now</a:t>
+            </a:r>
+          </a:p>
+        </p:txBody>
+      </p:sp>
+      <p:sp>
+        <p:nvSpPr>
+          <p:cNvPr id="4" name="Rectangle 3"/>
+          <p:cNvSpPr/>
+          <p:nvPr/>
+        </p:nvSpPr>
+        <p:spPr>
+          <a:xfrm>
+            <a:off x="658368" y="1481328"/>
+            <a:ext cx="10881360" cy="18288"/>
+          </a:xfrm>
+          <a:prstGeom prst="rect">
+            <a:avLst/>
+          </a:prstGeom>
+          <a:solidFill>
+            <a:srgbClr val="D8DCE0"/>
+          </a:solidFill>
+          <a:ln>
+            <a:noFill/>
+          </a:ln>
+          <a:effectLst/>
+        </p:spPr>
+        <p:style>
+          <a:lnRef idx="1">
+            <a:schemeClr val="accent1"/>
+          </a:lnRef>
+          <a:fillRef idx="3">
+            <a:schemeClr val="accent1"/>
+          </a:fillRef>
+          <a:effectRef idx="2">
+            <a:schemeClr val="accent1"/>
+          </a:effectRef>
+          <a:fontRef idx="minor">
+            <a:schemeClr val="lt1"/>
+          </a:fontRef>
+        </p:style>
+        <p:txBody>
+          <a:bodyPr rtlCol="0" anchor="ctr"/>
+          <a:lstStyle/>
+          <a:p>
+            <a:pPr algn="ctr"/>
+          </a:p>
+        </p:txBody>
+      </p:sp>
+      <p:graphicFrame>
+        <p:nvGraphicFramePr>
+          <p:cNvPr id="5" name="Table 4"/>
+          <p:cNvGraphicFramePr>
+            <a:graphicFrameLocks noGrp="1"/>
+          </p:cNvGraphicFramePr>
+          <p:nvPr/>
+        </p:nvGraphicFramePr>
+        <p:xfrm>
+          <a:off x="658368" y="1783080"/>
           <a:ext cx="10881360" cy="1920240"/>
         </p:xfrm>
         <a:graphic>
@@ -12261,7 +12482,7 @@
 </p:sld>
 </file>
 
-<file path=ppt/slides/slide23.xml><?xml version="1.0" encoding="utf-8"?>
+<file path=ppt/slides/slide24.xml><?xml version="1.0" encoding="utf-8"?>
 <p:sld xmlns:a="http://schemas.openxmlformats.org/drawingml/2006/main" xmlns:p="http://schemas.openxmlformats.org/presentationml/2006/main" xmlns:r="http://schemas.openxmlformats.org/officeDocument/2006/relationships">
   <p:cSld>
     <p:bg>
@@ -12439,7 +12660,7 @@
 </p:sld>
 </file>
 
-<file path=ppt/slides/slide24.xml><?xml version="1.0" encoding="utf-8"?>
+<file path=ppt/slides/slide25.xml><?xml version="1.0" encoding="utf-8"?>
 <p:sld xmlns:a="http://schemas.openxmlformats.org/drawingml/2006/main" xmlns:p="http://schemas.openxmlformats.org/presentationml/2006/main" xmlns:r="http://schemas.openxmlformats.org/officeDocument/2006/relationships">
   <p:cSld>
     <p:bg>
@@ -12617,7 +12838,7 @@
 </p:sld>
 </file>
 
-<file path=ppt/slides/slide25.xml><?xml version="1.0" encoding="utf-8"?>
+<file path=ppt/slides/slide26.xml><?xml version="1.0" encoding="utf-8"?>
 <p:sld xmlns:a="http://schemas.openxmlformats.org/drawingml/2006/main" xmlns:p="http://schemas.openxmlformats.org/presentationml/2006/main" xmlns:r="http://schemas.openxmlformats.org/officeDocument/2006/relationships">
   <p:cSld>
     <p:bg>

--- a/docs/PARITY-review3-deck.pptx
+++ b/docs/PARITY-review3-deck.pptx
@@ -7706,7 +7706,7 @@
                 </a:solidFill>
                 <a:latin typeface="Arial"/>
               </a:rPr>
-              <a:t>Dwell is behaviour, not a parameter. Predicting 'will they decline this window?' scores 70% against a 54% majority-class baseline — 100% in rooms with nothing to record, 67% where a codebook is. The uncertainty sits exactly where the real variation is.</a:t>
+              <a:t>Dwell is behaviour, not a parameter. Predicting 'will they decline this window?' scores 94% against a 96% majority-class baseline — 100% in rooms with nothing to record, 93% where a codebook is. The uncertainty sits exactly where the real variation is.</a:t>
             </a:r>
           </a:p>
         </p:txBody>
@@ -7926,7 +7926,7 @@
                 </a:solidFill>
                 <a:latin typeface="Arial"/>
               </a:rPr>
-              <a:t>On 10 rooms with one dominant junction, 'camp the busiest room' is competitive for reasons unrelated to intelligence. As the facility grows it decays fastest and the interceptor's advantage widens from 1.15× to 1.57×.</a:t>
+              <a:t>On 10 rooms with one dominant junction, 'camp the busiest room' is competitive for reasons unrelated to intelligence. As the facility grows it decays fastest and the interceptor's advantage widens from 1.22× to 1.40×.</a:t>
             </a:r>
           </a:p>
         </p:txBody>
@@ -8146,7 +8146,7 @@
                 </a:solidFill>
                 <a:latin typeface="Arial"/>
               </a:rPr>
-              <a:t>The entity is removed here, isolating topology mutation from hunting. Sealing and rewiring ahead of the player raises the cost of an objective by 54% (20.9 to 32.3 moves per lap). Every mutation passed a reachability check, so no run was ever soft-locked.</a:t>
+              <a:t>The entity is removed here, isolating topology mutation from hunting. Sealing and rewiring ahead of the player raises the cost of an objective by 63% (16.4 to 26.8 moves per lap). Every mutation passed a reachability check, so no run was ever soft-locked.</a:t>
             </a:r>
           </a:p>
         </p:txBody>
@@ -8573,20 +8573,20 @@
           <a:p>
             <a:pPr algn="l">
               <a:lnSpc>
-                <a:spcPct val="130000"/>
+                <a:spcPct val="128000"/>
               </a:lnSpc>
               <a:spcAft>
                 <a:spcPts val="600"/>
               </a:spcAft>
             </a:pPr>
             <a:r>
-              <a:rPr sz="1250" b="0">
+              <a:rPr sz="1150" b="0">
                 <a:solidFill>
                   <a:srgbClr val="6B7178"/>
                 </a:solidFill>
                 <a:latin typeface="Arial"/>
               </a:rPr>
-              <a:t>Measured per objective completed, not per window. Waiting at random is WORSE than not waiting at every coverage level. Routing around sensors helps a little. Spending three dangerous tasks to silence sensors on the route you already use cuts capture risk by 39% at 60% coverage.</a:t>
+              <a:t>Per objective completed, not per window. Waiting at random is catastrophic — up to +439%. Routing around sensors barely registers. Killing three sensors on your own route cuts risk 21% at 60% coverage, but BACKFIRES at full coverage (+91%): nine windows stood still in the open buys too little when every other door still reports you. The counter-play has a sweet spot.</a:t>
             </a:r>
           </a:p>
         </p:txBody>
@@ -9602,7 +9602,7 @@
                           </a:solidFill>
                           <a:latin typeface="Arial"/>
                         </a:rPr>
-                        <a:t>60.5% vs 46.5% vs 30.5%</a:t>
+                        <a:t>83.6% vs 60.0% vs 39.1%</a:t>
                       </a:r>
                     </a:p>
                   </a:txBody>
@@ -9932,7 +9932,7 @@
                           </a:solidFill>
                           <a:latin typeface="Arial"/>
                         </a:rPr>
-                        <a:t>319 vs 111 per 1000</a:t>
+                        <a:t>350 vs 95 per 1000</a:t>
                       </a:r>
                     </a:p>
                   </a:txBody>
@@ -10042,7 +10042,7 @@
                           </a:solidFill>
                           <a:latin typeface="Arial"/>
                         </a:rPr>
-                        <a:t>1.15× → 1.57× over hub-camping</a:t>
+                        <a:t>1.22× → 1.40× over hub-camping</a:t>
                       </a:r>
                     </a:p>
                   </a:txBody>
@@ -10152,7 +10152,7 @@
                           </a:solidFill>
                           <a:latin typeface="Arial"/>
                         </a:rPr>
-                        <a:t>+54% per objective</a:t>
+                        <a:t>+63% per objective</a:t>
                       </a:r>
                     </a:p>
                   </a:txBody>
@@ -10592,7 +10592,7 @@
                           </a:solidFill>
                           <a:latin typeface="Arial"/>
                         </a:rPr>
-                        <a:t>70% vs 54% baseline</a:t>
+                        <a:t>94% vs 96% baseline</a:t>
                       </a:r>
                     </a:p>
                   </a:txBody>
@@ -10812,7 +10812,7 @@
                           </a:solidFill>
                           <a:latin typeface="Arial"/>
                         </a:rPr>
-                        <a:t>Disabling sensors: 39% risk cut</a:t>
+                        <a:t>Disabling sensors: 21% risk cut</a:t>
                       </a:r>
                     </a:p>
                   </a:txBody>

--- a/docs/PARITY-review3-deck.pptx
+++ b/docs/PARITY-review3-deck.pptx
@@ -7596,7 +7596,7 @@
                 </a:solidFill>
                 <a:latin typeface="Arial"/>
               </a:rPr>
-              <a:t>It learned where you stop to write</a:t>
+              <a:t>Knowing when you stop to write is still open</a:t>
             </a:r>
           </a:p>
         </p:txBody>
@@ -7693,20 +7693,20 @@
           <a:p>
             <a:pPr algn="l">
               <a:lnSpc>
-                <a:spcPct val="130000"/>
+                <a:spcPct val="128000"/>
               </a:lnSpc>
               <a:spcAft>
                 <a:spcPts val="600"/>
               </a:spcAft>
             </a:pPr>
             <a:r>
-              <a:rPr sz="1250" b="0">
+              <a:rPr sz="1150" b="0">
                 <a:solidFill>
                   <a:srgbClr val="6B7178"/>
                 </a:solidFill>
                 <a:latin typeface="Arial"/>
               </a:rPr>
-              <a:t>Dwell is behaviour, not a parameter. Predicting 'will they decline this window?' scores 94% against a 96% majority-class baseline — 100% in rooms with nothing to record, 93% where a codebook is. The uncertainty sits exactly where the real variation is.</a:t>
+              <a:t>Once the player writes realistically — a codebook copied once, not re-copied every pass — dwell becomes rare (4% of windows) and accuracy stops meaning anything: 'they always move' scores 96% while learning nothing. On recall, the honest measure, the model catches 17% of the moments you stop, at 26% precision, against a baseline that catches none. Four attempts to improve it — including a first-visit feature — all made it worse. This is the open problem.</a:t>
             </a:r>
           </a:p>
         </p:txBody>
@@ -10565,7 +10565,7 @@
                           </a:solidFill>
                           <a:latin typeface="Arial"/>
                         </a:rPr>
-                        <a:t>Is dwell learnable?</a:t>
+                        <a:t>Can it tell WHEN you stop to write?</a:t>
                       </a:r>
                     </a:p>
                   </a:txBody>
@@ -10592,7 +10592,7 @@
                           </a:solidFill>
                           <a:latin typeface="Arial"/>
                         </a:rPr>
-                        <a:t>94% vs 96% baseline</a:t>
+                        <a:t>recall 17% vs 0% baseline</a:t>
                       </a:r>
                     </a:p>
                   </a:txBody>
@@ -10619,7 +10619,7 @@
                           </a:solidFill>
                           <a:latin typeface="Arial"/>
                         </a:rPr>
-                        <a:t>Yes</a:t>
+                        <a:t>OPEN</a:t>
                       </a:r>
                     </a:p>
                   </a:txBody>
@@ -11073,7 +11073,7 @@
                 </a:solidFill>
                 <a:latin typeface="Arial"/>
               </a:rPr>
-              <a:t>2 · The metric was hiding the answer.  </a:t>
+              <a:t>2 · The metric was hiding the answer, twice.  </a:t>
             </a:r>
             <a:r>
               <a:rPr sz="1350">
@@ -11082,7 +11082,7 @@
                 </a:solidFill>
                 <a:latin typeface="Arial"/>
               </a:rPr>
-              <a:t>Measured per window, avoiding sensors looked excellent. Measured per objective completed, it was worse than doing nothing — the player was simply achieving less. Two strategies that looked like wins disappeared under the corrected metric.</a:t>
+              <a:t>Measured per window, avoiding sensors looked excellent — measured per objective completed it was worse than doing nothing, because the player was simply achieving less. And once the player wrote realistically, dwell became rare enough that accuracy was meaningless: 'they always move' scores 96% and learns nothing.</a:t>
             </a:r>
           </a:p>
           <a:p>
@@ -11101,7 +11101,7 @@
                 </a:solidFill>
                 <a:latin typeface="Arial"/>
               </a:rPr>
-              <a:t>3 · The mechanic the fiction already had is the one that works.  </a:t>
+              <a:t>3 · The player model was the bottleneck, not the AI.  </a:t>
             </a:r>
             <a:r>
               <a:rPr sz="1350">
@@ -11110,7 +11110,7 @@
                 </a:solidFill>
                 <a:latin typeface="Arial"/>
               </a:rPr>
-              <a:t>Detouring around live sensors costs more exposure than it saves. Spending a dangerous task to silence a sensor on your existing route is the strategy that cuts risk. The design was right before the measurement was.</a:t>
+              <a:t>The bot re-copied codebooks it already held. Fixing that one unrealistic behaviour moved accuracy from 60% to 89%, within three points of the measured ceiling. Against a perfectly consistent player the model reaches 100%, so the remaining gap is the player's own deviation, not the algorithm.</a:t>
             </a:r>
           </a:p>
         </p:txBody>
@@ -11476,7 +11476,7 @@
                           </a:solidFill>
                           <a:latin typeface="Arial"/>
                         </a:rPr>
-                        <a:t>Dwell rate is an assumption</a:t>
+                        <a:t>Writing behaviour is modelled, not observed</a:t>
                       </a:r>
                     </a:p>
                   </a:txBody>
@@ -11503,7 +11503,7 @@
                           </a:solidFill>
                           <a:latin typeface="Arial"/>
                         </a:rPr>
-                        <a:t>Calibrated to ~24% of windows, not measured</a:t>
+                        <a:t>Record-once plus occasional re-verify is a guess at how people write</a:t>
                       </a:r>
                     </a:p>
                   </a:txBody>
@@ -11559,7 +11559,7 @@
                           </a:solidFill>
                           <a:latin typeface="Arial"/>
                         </a:rPr>
-                        <a:t>Models close at interception</a:t>
+                        <a:t>Predicting WHEN you stop is weak</a:t>
                       </a:r>
                     </a:p>
                   </a:txBody>
@@ -11586,7 +11586,7 @@
                           </a:solidFill>
                           <a:latin typeface="Arial"/>
                         </a:rPr>
-                        <a:t>VOMM and order-1 within noise on capture rate</a:t>
+                        <a:t>17% recall on a rare event; four attempts to improve it failed</a:t>
                       </a:r>
                     </a:p>
                   </a:txBody>
@@ -11613,7 +11613,7 @@
                           </a:solidFill>
                           <a:latin typeface="Arial"/>
                         </a:rPr>
-                        <a:t>Clear gap is at prediction, not pursuit</a:t>
+                        <a:t>The open problem</a:t>
                       </a:r>
                     </a:p>
                   </a:txBody>
@@ -11642,7 +11642,7 @@
                           </a:solidFill>
                           <a:latin typeface="Arial"/>
                         </a:rPr>
-                        <a:t>Lookahead can hurt</a:t>
+                        <a:t>Models close at interception</a:t>
                       </a:r>
                     </a:p>
                   </a:txBody>
@@ -11669,7 +11669,7 @@
                           </a:solidFill>
                           <a:latin typeface="Arial"/>
                         </a:rPr>
-                        <a:t>At 61% single-step accuracy, rollout error compounds</a:t>
+                        <a:t>VOMM and order-1 within noise on capture rate</a:t>
                       </a:r>
                     </a:p>
                   </a:txBody>
@@ -11696,7 +11696,7 @@
                           </a:solidFill>
                           <a:latin typeface="Arial"/>
                         </a:rPr>
-                        <a:t>Expected; documented, not hidden</a:t>
+                        <a:t>The clear gap is at prediction, not pursuit</a:t>
                       </a:r>
                     </a:p>
                   </a:txBody>
@@ -11725,7 +11725,7 @@
                           </a:solidFill>
                           <a:latin typeface="Arial"/>
                         </a:rPr>
-                        <a:t>No 3D integration</a:t>
+                        <a:t>First-person build is WebGL, not an engine</a:t>
                       </a:r>
                     </a:p>
                   </a:txBody>
@@ -11752,7 +11752,7 @@
                           </a:solidFill>
                           <a:latin typeface="Arial"/>
                         </a:rPr>
-                        <a:t>Godot build not started; art study only</a:t>
+                        <a:t>Hand-written; no engine tooling, lighting or animation</a:t>
                       </a:r>
                     </a:p>
                   </a:txBody>
@@ -11779,7 +11779,7 @@
                           </a:solidFill>
                           <a:latin typeface="Arial"/>
                         </a:rPr>
-                        <a:t>M3, next cycle</a:t>
+                        <a:t>M3, the Godot port</a:t>
                       </a:r>
                     </a:p>
                   </a:txBody>

--- a/docs/PARITY-review3-deck.pptx
+++ b/docs/PARITY-review3-deck.pptx
@@ -527,7 +527,7 @@
           <a:lstStyle/>
           <a:p>
             <a:r>
-              <a:t>BCSE497J Review III. Keep this short and move to evidence.</a:t>
+              <a:t>BCSE497J Review III. Keep this short and move to the evidence.</a:t>
             </a:r>
           </a:p>
         </p:txBody>
@@ -597,7 +597,7 @@
           <a:lstStyle/>
           <a:p>
             <a:r>
-              <a:t>The new method. Predict, then rule out whatever the evidence contradicts. The detail that impresses: if every door is wired, SILENCE is evidence — it proves they stayed — so full coverage is still perfect tracking. Partial observation only exists because coverage is incomplete.</a:t>
+              <a:t>Explain the order-1 failure concretely: a route means the same room has different successors depending on how you entered it. Then say staying is a legal action, which is why the action space is N(v) plus v.</a:t>
             </a:r>
           </a:p>
         </p:txBody>
@@ -667,7 +667,7 @@
           <a:lstStyle/>
           <a:p>
             <a:r>
-              <a:t>The rigour slide. The control is the strongest thing in the project. Also mention that two findings this cycle came from catching a bad metric.</a:t>
+              <a:t>The new method. Predict, then rule out whatever the evidence contradicts. The detail that lands: if EVERY door is wired then silence is evidence — it proves they stayed — so full coverage is still perfect tracking. Partial observation only exists because coverage is incomplete.</a:t>
             </a:r>
           </a:p>
         </p:txBody>
@@ -737,7 +737,7 @@
           <a:lstStyle/>
           <a:p>
             <a:r>
-              <a:t>The answer to 'is it trained properly'. Measure the ceiling, then show where you sit against it. Say the three things that did NOT work: hyperparameter search, intent tagging, goal inference. All three were redundant because the variable-order context already encodes them. That is a finding about the architecture, not a failure.</a:t>
+              <a:t>The rigour slide. The control is the strongest thing in the project. Also mention that two findings this cycle came from catching a bad metric.</a:t>
             </a:r>
           </a:p>
         </p:txBody>
@@ -807,7 +807,7 @@
           <a:lstStyle/>
           <a:p>
             <a:r>
-              <a:t>Lead with the 100% bar — it never linger where there is nothing to record. The 67% bar is the honest one: it knows you may be writing, not when you will finish.</a:t>
+              <a:t>The answer to 'is it trained properly'. Measure the ceiling first, then show where you sit against it: 89% against a 91.8% ceiling, and 100% against a perfectly consistent player. Say the three things that did NOT work — grid search, intent tagging, goal inference — all redundant because the variable-order context already encodes them.</a:t>
             </a:r>
           </a:p>
         </p:txBody>
@@ -877,7 +877,7 @@
           <a:lstStyle/>
           <a:p>
             <a:r>
-              <a:t>The answer to 'hub-camping is nearly as good'. Only on a small map.</a:t>
+              <a:t>Lead with the CONTROL group on the right, not the 84%. Against a random player the model scores the same as no model, which is what proves there is no leakage.</a:t>
             </a:r>
           </a:p>
         </p:txBody>
@@ -947,7 +947,7 @@
           <a:lstStyle/>
           <a:p>
             <a:r>
-              <a:t>Note the entity is removed here, isolating world editing from hunting.</a:t>
+              <a:t>Volunteer this as the open problem. Once the player writes realistically, dwell is rare, so accuracy becomes meaningless — 'always move' scores 96% and learns nothing. On recall the model catches about one stop in six. Four attempts to improve it all made it worse.</a:t>
             </a:r>
           </a:p>
         </p:txBody>
@@ -1017,7 +1017,7 @@
           <a:lstStyle/>
           <a:p>
             <a:r>
-              <a:t>First new result. The counter-intuitive bit is that full coverage gives perfect tracking, because silence is informative. That is why the fiction needs unwired doors and disabled sensors.</a:t>
+              <a:t>The answer to 'hub-camping is nearly as good'. Only on a small map.</a:t>
             </a:r>
           </a:p>
         </p:txBody>
@@ -1087,7 +1087,7 @@
           <a:lstStyle/>
           <a:p>
             <a:r>
-              <a:t>The headline. Three things: waiting is worse than useless, avoidance barely helps, and disabling sensors on your own route is the real counter-play. Point out this is your design mechanic validated by measurement, not chosen after the fact.</a:t>
+              <a:t>Note the entity is removed here, which isolates world editing from hunting.</a:t>
             </a:r>
           </a:p>
         </p:txBody>
@@ -1157,7 +1157,7 @@
           <a:lstStyle/>
           <a:p>
             <a:r>
-              <a:t>Do not read this. It is here so the panel can see the shape of the work and pick something to ask about. Note the two rows marked NEGATIVE — volunteer them.</a:t>
+              <a:t>First new result. The counter-intuitive bit is that FULL coverage gives perfect tracking, because silence is informative. That is exactly why the fiction needs unwired doors and cuttable sensors.</a:t>
             </a:r>
           </a:p>
         </p:txBody>
@@ -1227,7 +1227,7 @@
           <a:lstStyle/>
           <a:p>
             <a:r>
-              <a:t>If you only defend one slide, defend this one. It shows evidence driving decisions, a corrected metric overturning two apparent wins, and the design being validated rather than rationalised.</a:t>
+              <a:t>The headline. Waiting is catastrophic. Routing around sensors barely registers. Killing sensors on your own route works at 60% coverage but BACKFIRES at full coverage — nine windows stood still in the open buys too little when every other door still reports you. The counter-play has a sweet spot.</a:t>
             </a:r>
           </a:p>
         </p:txBody>
@@ -1297,7 +1297,7 @@
           <a:lstStyle/>
           <a:p>
             <a:r>
-              <a:t>Thirty seconds of context, then say the sentence that matters: everything in this deck is executable and the panel can run it. Name the new work: partial observation, built because the last review's negative result pointed at it.</a:t>
+              <a:t>Thirty seconds of context, then the sentence that matters: everything here is executable and the panel can run it. Walk the feedback table — it is their own words with what changed beside each one.</a:t>
             </a:r>
           </a:p>
         </p:txBody>
@@ -1367,7 +1367,7 @@
           <a:lstStyle/>
           <a:p>
             <a:r>
-              <a:t>Say these before they are asked. The 3D build not being started is the obvious one — own it and point at the roadmap and at why M6 came first.</a:t>
+              <a:t>Do not read this. It is here so the panel can see the shape of the work and pick something to ask about. Two rows are marked NEGATIVE and one OPEN — volunteer those.</a:t>
             </a:r>
           </a:p>
         </p:txBody>
@@ -1437,7 +1437,147 @@
           <a:lstStyle/>
           <a:p>
             <a:r>
-              <a:t>Run item 1 and item 3 if there is time. Item 3 takes seconds and answers any rigour question.</a:t>
+              <a:t>If you only defend one slide, defend this one. Evidence driving decisions, a corrected metric overturning apparent wins, and the player model turning out to be the bottleneck rather than the AI.</a:t>
+            </a:r>
+          </a:p>
+        </p:txBody>
+      </p:sp>
+      <p:sp>
+        <p:nvSpPr>
+          <p:cNvPr id="4" name="Slide Number Placeholder 3"/>
+          <p:cNvSpPr>
+            <a:spLocks noGrp="1"/>
+          </p:cNvSpPr>
+          <p:nvPr>
+            <p:ph type="sldNum" idx="5" sz="quarter"/>
+          </p:nvPr>
+        </p:nvSpPr>
+        <p:spPr/>
+      </p:sp>
+    </p:spTree>
+  </p:cSld>
+  <p:clrMapOvr>
+    <a:masterClrMapping/>
+  </p:clrMapOvr>
+</p:notes>
+</file>
+
+<file path=ppt/notesSlides/notesSlide22.xml><?xml version="1.0" encoding="utf-8"?>
+<p:notes xmlns:a="http://schemas.openxmlformats.org/drawingml/2006/main" xmlns:p="http://schemas.openxmlformats.org/presentationml/2006/main" xmlns:r="http://schemas.openxmlformats.org/officeDocument/2006/relationships">
+  <p:cSld>
+    <p:spTree>
+      <p:nvGrpSpPr>
+        <p:cNvPr id="1" name=""/>
+        <p:cNvGrpSpPr/>
+        <p:nvPr/>
+      </p:nvGrpSpPr>
+      <p:grpSpPr>
+        <a:xfrm>
+          <a:off x="0" y="0"/>
+          <a:ext cx="0" cy="0"/>
+          <a:chOff x="0" y="0"/>
+          <a:chExt cx="0" cy="0"/>
+        </a:xfrm>
+      </p:grpSpPr>
+      <p:sp>
+        <p:nvSpPr>
+          <p:cNvPr id="2" name="Slide Image Placeholder 1"/>
+          <p:cNvSpPr>
+            <a:spLocks noGrp="1"/>
+          </p:cNvSpPr>
+          <p:nvPr>
+            <p:ph type="sldImg" idx="2"/>
+          </p:nvPr>
+        </p:nvSpPr>
+        <p:spPr/>
+      </p:sp>
+      <p:sp>
+        <p:nvSpPr>
+          <p:cNvPr id="3" name="Notes Placeholder 2"/>
+          <p:cNvSpPr>
+            <a:spLocks noGrp="1"/>
+          </p:cNvSpPr>
+          <p:nvPr>
+            <p:ph type="body" idx="3" sz="quarter"/>
+          </p:nvPr>
+        </p:nvSpPr>
+        <p:spPr/>
+        <p:txBody>
+          <a:bodyPr/>
+          <a:lstStyle/>
+          <a:p>
+            <a:r>
+              <a:t>Say these before they are asked. The Godot port not being started is the obvious one — own it, and point at why partial observation came first.</a:t>
+            </a:r>
+          </a:p>
+        </p:txBody>
+      </p:sp>
+      <p:sp>
+        <p:nvSpPr>
+          <p:cNvPr id="4" name="Slide Number Placeholder 3"/>
+          <p:cNvSpPr>
+            <a:spLocks noGrp="1"/>
+          </p:cNvSpPr>
+          <p:nvPr>
+            <p:ph type="sldNum" idx="5" sz="quarter"/>
+          </p:nvPr>
+        </p:nvSpPr>
+        <p:spPr/>
+      </p:sp>
+    </p:spTree>
+  </p:cSld>
+  <p:clrMapOvr>
+    <a:masterClrMapping/>
+  </p:clrMapOvr>
+</p:notes>
+</file>
+
+<file path=ppt/notesSlides/notesSlide23.xml><?xml version="1.0" encoding="utf-8"?>
+<p:notes xmlns:a="http://schemas.openxmlformats.org/drawingml/2006/main" xmlns:p="http://schemas.openxmlformats.org/presentationml/2006/main" xmlns:r="http://schemas.openxmlformats.org/officeDocument/2006/relationships">
+  <p:cSld>
+    <p:spTree>
+      <p:nvGrpSpPr>
+        <p:cNvPr id="1" name=""/>
+        <p:cNvGrpSpPr/>
+        <p:nvPr/>
+      </p:nvGrpSpPr>
+      <p:grpSpPr>
+        <a:xfrm>
+          <a:off x="0" y="0"/>
+          <a:ext cx="0" cy="0"/>
+          <a:chOff x="0" y="0"/>
+          <a:chExt cx="0" cy="0"/>
+        </a:xfrm>
+      </p:grpSpPr>
+      <p:sp>
+        <p:nvSpPr>
+          <p:cNvPr id="2" name="Slide Image Placeholder 1"/>
+          <p:cNvSpPr>
+            <a:spLocks noGrp="1"/>
+          </p:cNvSpPr>
+          <p:nvPr>
+            <p:ph type="sldImg" idx="2"/>
+          </p:nvPr>
+        </p:nvSpPr>
+        <p:spPr/>
+      </p:sp>
+      <p:sp>
+        <p:nvSpPr>
+          <p:cNvPr id="3" name="Notes Placeholder 2"/>
+          <p:cNvSpPr>
+            <a:spLocks noGrp="1"/>
+          </p:cNvSpPr>
+          <p:nvPr>
+            <p:ph type="body" idx="3" sz="quarter"/>
+          </p:nvPr>
+        </p:nvSpPr>
+        <p:spPr/>
+        <p:txBody>
+          <a:bodyPr/>
+          <a:lstStyle/>
+          <a:p>
+            <a:r>
+              <a:t>Run item 1, and item 3 if there is time. Item 3 takes seconds and answers any rigour question.</a:t>
             </a:r>
           </a:p>
         </p:txBody>
@@ -1577,7 +1717,7 @@
           <a:lstStyle/>
           <a:p>
             <a:r>
-              <a:t>Read two of these lines aloud verbatim. This is the answer to 'explain the AI in plain view' — it is not a diagram of the AI, it is the AI talking. Then say the last line is what the player NEVER sees: the tampering is silent in normal play, and the AI view is how you inspect it.</a:t>
+              <a:t>This is the systems view of the SAME antagonist. Belief drawn as heat on the rooms, solid vs dashed doors for what it can and cannot hear, and a sensor you can cut. Use it when someone asks how the thing in the 3D build actually works.</a:t>
             </a:r>
           </a:p>
         </p:txBody>
@@ -1647,7 +1787,7 @@
           <a:lstStyle/>
           <a:p>
             <a:r>
-              <a:t>THE implementation slide. Walk the Status column, not the whole table. Eight of ten modules complete and measured, two running as prototypes, and be straight that the 3D integration has not started. Say 'roughly 80% of the approved module list' — do not overclaim a finished game.</a:t>
+              <a:t>Read two of these lines aloud verbatim. This is not a diagram of the AI, it is the AI talking. The last line is what the player NEVER sees: tampering is silent in normal play, and the AI view is how you inspect it.</a:t>
             </a:r>
           </a:p>
         </p:txBody>
@@ -1717,7 +1857,7 @@
           <a:lstStyle/>
           <a:p>
             <a:r>
-              <a:t>Offer to run something. 'python3 model/test_invariants.py takes about five seconds' is a strong line. Attribution is the git history: 12 commits, single author.</a:t>
+              <a:t>THE implementation slide. Walk the Status column, not the whole table. Be straight that the Godot port has not started — the first-person build is hand-written WebGL.</a:t>
             </a:r>
           </a:p>
         </p:txBody>
@@ -1787,7 +1927,7 @@
           <a:lstStyle/>
           <a:p>
             <a:r>
-              <a:t>Two decisions to defend: Sabotage is the only mutator so every change is logged and replayable; the Notebook sits outside the loop, which is what makes it the player's counter-move.</a:t>
+              <a:t>Offer to run something. 'python3 model/test_invariants.py takes about five seconds' is a strong line. Attribution is the git history: 19 commits, single author.</a:t>
             </a:r>
           </a:p>
         </p:txBody>
@@ -1857,7 +1997,7 @@
           <a:lstStyle/>
           <a:p>
             <a:r>
-              <a:t>This is the progress slide. Lead with the negative result from last time, then what you built because of it. Panels reward work that follows from evidence rather than from a plan.</a:t>
+              <a:t>Two decisions to defend: Sabotage is the only thing that mutates the world, so every change is logged and replayable; the Notebook sits outside the loop, which is what makes it the player's counter-move rather than decoration.</a:t>
             </a:r>
           </a:p>
         </p:txBody>
@@ -1927,7 +2067,7 @@
           <a:lstStyle/>
           <a:p>
             <a:r>
-              <a:t>Explain the order-1 failure concretely: a route means the same room has different successors depending on how you entered it. Then say staying is a legal action, which is why accuracy is 61% and not 90% — an earlier version forbade waiting and that number was inflated.</a:t>
+              <a:t>The progress slide. Lead with the negative result from last cycle, then what you built because of it. Panels reward work that follows from evidence rather than from a plan.</a:t>
             </a:r>
           </a:p>
         </p:txBody>
@@ -7237,8 +7377,8 @@
         </p:nvSpPr>
         <p:spPr>
           <a:xfrm>
-            <a:off x="658368" y="5742432"/>
-            <a:ext cx="10881360" cy="960120"/>
+            <a:off x="658368" y="5760720"/>
+            <a:ext cx="10881360" cy="868680"/>
           </a:xfrm>
           <a:prstGeom prst="rect">
             <a:avLst/>
@@ -7253,20 +7393,20 @@
           <a:p>
             <a:pPr algn="l">
               <a:lnSpc>
-                <a:spcPct val="128000"/>
+                <a:spcPct val="126000"/>
               </a:lnSpc>
               <a:spcAft>
                 <a:spcPts val="600"/>
               </a:spcAft>
             </a:pPr>
             <a:r>
-              <a:rPr sz="1200" b="0">
+              <a:rPr sz="1150" b="0">
                 <a:solidFill>
                   <a:srgbClr val="6B7178"/>
                 </a:solidFill>
                 <a:latin typeface="Arial"/>
               </a:rPr>
-              <a:t>A predictor is only as good as the ceiling allows. An oracle that can see the player's own internal state — which objective they are walking to, whether they are mid-page — reaches 70.9%; the rest is their own coin-flips. Our model reaches 59.9% from behaviour alone, which is 85% of the achievable signal. Grid-searching the hyperparameters changed nothing, and inferring intent explicitly made it worse.</a:t>
+              <a:t>An oracle that can see the player's own internal state reaches 91.8%; the rest is their own coin-flips. The model reaches 89.0% from behaviour alone — 97% of the achievable signal, and 100% against a perfectly consistent player. Grid search, intent tagging and goal inference all failed to improve it.</a:t>
             </a:r>
           </a:p>
         </p:txBody>
@@ -9347,7 +9487,7 @@
                 </a:solidFill>
                 <a:latin typeface="Arial"/>
               </a:rPr>
-              <a:t>All twelve experiments at a glance</a:t>
+              <a:t>All 12 experiments at a glance</a:t>
             </a:r>
           </a:p>
         </p:txBody>
@@ -16636,7 +16776,7 @@
                           </a:solidFill>
                           <a:latin typeface="Arial"/>
                         </a:rPr>
-                        <a:t>1,850 lines of Python, 10 modules</a:t>
+                        <a:t>2,133 lines of Python across 8 modules</a:t>
                       </a:r>
                     </a:p>
                   </a:txBody>
@@ -16858,7 +16998,7 @@
                           </a:solidFill>
                           <a:latin typeface="Arial"/>
                         </a:rPr>
-                        <a:t>Browser prototypes</a:t>
+                        <a:t>Browser builds</a:t>
                       </a:r>
                     </a:p>
                   </a:txBody>
@@ -16885,7 +17025,7 @@
                           </a:solidFill>
                           <a:latin typeface="Arial"/>
                         </a:rPr>
-                        <a:t>1,818 lines of JavaScript, 4 apps</a:t>
+                        <a:t>3,328 lines of JavaScript across 6 builds</a:t>
                       </a:r>
                     </a:p>
                   </a:txBody>
@@ -16968,7 +17108,7 @@
                           </a:solidFill>
                           <a:latin typeface="Arial"/>
                         </a:rPr>
-                        <a:t>12 commits, single author</a:t>
+                        <a:t>19 commits, single author</a:t>
                       </a:r>
                     </a:p>
                   </a:txBody>

--- a/docs/PARITY-review3-deck.pptx
+++ b/docs/PARITY-review3-deck.pptx
@@ -12308,7 +12308,7 @@
                           </a:solidFill>
                           <a:latin typeface="Arial"/>
                         </a:rPr>
-                        <a:t>Walk it in first person. Three codebooks, then the uplink, with the thing hunting you and narrating itself top-right</a:t>
+                        <a:t>First person. E reads a codebook, TAB is the notebook, the uplink takes the byte on 1-8 and ENTER. It hunts you and narrates itself top-right</a:t>
                       </a:r>
                     </a:p>
                   </a:txBody>
@@ -12530,7 +12530,7 @@
                           </a:solidFill>
                           <a:latin typeface="Arial"/>
                         </a:rPr>
-                        <a:t>Cut a sensor</a:t>
+                        <a:t>Cut a sensor — F at a door</a:t>
                       </a:r>
                     </a:p>
                   </a:txBody>
@@ -12557,7 +12557,7 @@
                           </a:solidFill>
                           <a:latin typeface="Arial"/>
                         </a:rPr>
-                        <a:t>Three windows stood still to kill a door, then watch it lose your trail</a:t>
+                        <a:t>Three windows stood still in the open, then watch it lose your trail</a:t>
                       </a:r>
                     </a:p>
                   </a:txBody>
@@ -13770,8 +13770,8 @@
         </p:nvSpPr>
         <p:spPr>
           <a:xfrm>
-            <a:off x="658368" y="6291072"/>
-            <a:ext cx="10881360" cy="457200"/>
+            <a:off x="658368" y="6217920"/>
+            <a:ext cx="10881360" cy="566928"/>
           </a:xfrm>
           <a:prstGeom prst="rect">
             <a:avLst/>
@@ -13786,20 +13786,20 @@
           <a:p>
             <a:pPr algn="l">
               <a:lnSpc>
-                <a:spcPct val="128000"/>
+                <a:spcPct val="126000"/>
               </a:lnSpc>
               <a:spcAft>
                 <a:spcPts val="600"/>
               </a:spcAft>
             </a:pPr>
             <a:r>
-              <a:rPr sz="1200" b="0">
+              <a:rPr sz="1150" b="0">
                 <a:solidFill>
                   <a:srgbClr val="6B7178"/>
                 </a:solidFill>
                 <a:latin typeface="Arial"/>
               </a:rPr>
-              <a:t>Eight cells of the facility in a hand-written WebGL build. Record three codebooks, reach the uplink, and survive a thing that hears the doors you use. Here it has just found the player — and the panel on the right shows exactly how.</a:t>
+              <a:t>Hand-written WebGL. Each codebook room carries a lit panel with its keyword and eight bits;  E  reads it close up,  TAB  is the notebook,  F  cuts a door sensor, and the uplink takes the byte on  1–8  then  ENTER . Poison a page and the panel itself changes — your notebook does not. Here it has just found the player.</a:t>
             </a:r>
           </a:p>
         </p:txBody>
@@ -14885,7 +14885,7 @@
                 <a:gridCol w="1463040"/>
                 <a:gridCol w="3291840"/>
               </a:tblGrid>
-              <a:tr h="320040">
+              <a:tr h="298704">
                 <a:tc>
                   <a:txBody>
                     <a:bodyPr/>
@@ -14995,7 +14995,7 @@
                   </a:tcPr>
                 </a:tc>
               </a:tr>
-              <a:tr h="320040">
+              <a:tr h="298704">
                 <a:tc>
                   <a:txBody>
                     <a:bodyPr/>
@@ -15105,7 +15105,7 @@
                   </a:tcPr>
                 </a:tc>
               </a:tr>
-              <a:tr h="320040">
+              <a:tr h="298704">
                 <a:tc>
                   <a:txBody>
                     <a:bodyPr/>
@@ -15215,7 +15215,7 @@
                   </a:tcPr>
                 </a:tc>
               </a:tr>
-              <a:tr h="320040">
+              <a:tr h="298704">
                 <a:tc>
                   <a:txBody>
                     <a:bodyPr/>
@@ -15325,7 +15325,7 @@
                   </a:tcPr>
                 </a:tc>
               </a:tr>
-              <a:tr h="320040">
+              <a:tr h="298704">
                 <a:tc>
                   <a:txBody>
                     <a:bodyPr/>
@@ -15435,7 +15435,7 @@
                   </a:tcPr>
                 </a:tc>
               </a:tr>
-              <a:tr h="320040">
+              <a:tr h="298704">
                 <a:tc>
                   <a:txBody>
                     <a:bodyPr/>
@@ -15545,7 +15545,7 @@
                   </a:tcPr>
                 </a:tc>
               </a:tr>
-              <a:tr h="320040">
+              <a:tr h="298704">
                 <a:tc>
                   <a:txBody>
                     <a:bodyPr/>
@@ -15655,7 +15655,7 @@
                   </a:tcPr>
                 </a:tc>
               </a:tr>
-              <a:tr h="320040">
+              <a:tr h="298704">
                 <a:tc>
                   <a:txBody>
                     <a:bodyPr/>
@@ -15765,7 +15765,7 @@
                   </a:tcPr>
                 </a:tc>
               </a:tr>
-              <a:tr h="320040">
+              <a:tr h="298704">
                 <a:tc>
                   <a:txBody>
                     <a:bodyPr/>
@@ -15810,7 +15810,7 @@
                           </a:solidFill>
                           <a:latin typeface="Arial"/>
                         </a:rPr>
-                        <a:t>Freehand editor, strokes, undo, pages</a:t>
+                        <a:t>Freehand drawing, the only record of the bits</a:t>
                       </a:r>
                     </a:p>
                   </a:txBody>
@@ -15837,7 +15837,7 @@
                           </a:solidFill>
                           <a:latin typeface="Arial"/>
                         </a:rPr>
-                        <a:t>In game</a:t>
+                        <a:t>In the 3D build</a:t>
                       </a:r>
                     </a:p>
                   </a:txBody>
@@ -15864,7 +15864,7 @@
                           </a:solidFill>
                           <a:latin typeface="Arial"/>
                         </a:rPr>
-                        <a:t>parity-game.html</a:t>
+                        <a:t>parity-3d.html</a:t>
                       </a:r>
                     </a:p>
                   </a:txBody>
@@ -15875,7 +15875,7 @@
                   </a:tcPr>
                 </a:tc>
               </a:tr>
-              <a:tr h="320040">
+              <a:tr h="298704">
                 <a:tc>
                   <a:txBody>
                     <a:bodyPr/>
@@ -15920,7 +15920,7 @@
                           </a:solidFill>
                           <a:latin typeface="Arial"/>
                         </a:rPr>
-                        <a:t>Codebooks, register, transmit validation</a:t>
+                        <a:t>Codebooks read in-world, register, transmit</a:t>
                       </a:r>
                     </a:p>
                   </a:txBody>
@@ -15947,7 +15947,7 @@
                           </a:solidFill>
                           <a:latin typeface="Arial"/>
                         </a:rPr>
-                        <a:t>In game</a:t>
+                        <a:t>In the 3D build</a:t>
                       </a:r>
                     </a:p>
                   </a:txBody>
@@ -15974,7 +15974,7 @@
                           </a:solidFill>
                           <a:latin typeface="Arial"/>
                         </a:rPr>
-                        <a:t>parity-game.html</a:t>
+                        <a:t>parity-3d.html</a:t>
                       </a:r>
                     </a:p>
                   </a:txBody>
@@ -15985,7 +15985,7 @@
                   </a:tcPr>
                 </a:tc>
               </a:tr>
-              <a:tr h="320040">
+              <a:tr h="298704">
                 <a:tc>
                   <a:txBody>
                     <a:bodyPr/>
@@ -16057,7 +16057,7 @@
                           </a:solidFill>
                           <a:latin typeface="Arial"/>
                         </a:rPr>
-                        <a:t>In game</a:t>
+                        <a:t>In the 3D build</a:t>
                       </a:r>
                     </a:p>
                   </a:txBody>
@@ -16084,7 +16084,7 @@
                           </a:solidFill>
                           <a:latin typeface="Arial"/>
                         </a:rPr>
-                        <a:t>parity-game.html</a:t>
+                        <a:t>parity-3d.html</a:t>
                       </a:r>
                     </a:p>
                   </a:txBody>
@@ -16095,7 +16095,7 @@
                   </a:tcPr>
                 </a:tc>
               </a:tr>
-              <a:tr h="320040">
+              <a:tr h="298704">
                 <a:tc>
                   <a:txBody>
                     <a:bodyPr/>
@@ -16113,6 +16113,116 @@
                           </a:solidFill>
                           <a:latin typeface="Arial"/>
                         </a:rPr>
+                        <a:t>Counter-play</a:t>
+                      </a:r>
+                    </a:p>
+                  </a:txBody>
+                  <a:tcPr marL="73152" marR="73152" marT="36576" marB="36576">
+                    <a:solidFill>
+                      <a:srgbClr val="FCFCFB"/>
+                    </a:solidFill>
+                  </a:tcPr>
+                </a:tc>
+                <a:tc>
+                  <a:txBody>
+                    <a:bodyPr/>
+                    <a:lstStyle/>
+                    <a:p>
+                      <a:pPr>
+                        <a:lnSpc>
+                          <a:spcPct val="115000"/>
+                        </a:lnSpc>
+                      </a:pPr>
+                      <a:r>
+                        <a:rPr sz="1000" b="0">
+                          <a:solidFill>
+                            <a:srgbClr val="16181A"/>
+                          </a:solidFill>
+                          <a:latin typeface="Arial"/>
+                        </a:rPr>
+                        <a:t>Cutting a door sensor as a dangerous task</a:t>
+                      </a:r>
+                    </a:p>
+                  </a:txBody>
+                  <a:tcPr marL="73152" marR="73152" marT="36576" marB="36576">
+                    <a:solidFill>
+                      <a:srgbClr val="FCFCFB"/>
+                    </a:solidFill>
+                  </a:tcPr>
+                </a:tc>
+                <a:tc>
+                  <a:txBody>
+                    <a:bodyPr/>
+                    <a:lstStyle/>
+                    <a:p>
+                      <a:pPr>
+                        <a:lnSpc>
+                          <a:spcPct val="115000"/>
+                        </a:lnSpc>
+                      </a:pPr>
+                      <a:r>
+                        <a:rPr sz="1000" b="0">
+                          <a:solidFill>
+                            <a:srgbClr val="16181A"/>
+                          </a:solidFill>
+                          <a:latin typeface="Arial"/>
+                        </a:rPr>
+                        <a:t>In the 3D build</a:t>
+                      </a:r>
+                    </a:p>
+                  </a:txBody>
+                  <a:tcPr marL="73152" marR="73152" marT="36576" marB="36576">
+                    <a:solidFill>
+                      <a:srgbClr val="FCFCFB"/>
+                    </a:solidFill>
+                  </a:tcPr>
+                </a:tc>
+                <a:tc>
+                  <a:txBody>
+                    <a:bodyPr/>
+                    <a:lstStyle/>
+                    <a:p>
+                      <a:pPr>
+                        <a:lnSpc>
+                          <a:spcPct val="115000"/>
+                        </a:lnSpc>
+                      </a:pPr>
+                      <a:r>
+                        <a:rPr sz="1000" b="0">
+                          <a:solidFill>
+                            <a:srgbClr val="16181A"/>
+                          </a:solidFill>
+                          <a:latin typeface="Arial"/>
+                        </a:rPr>
+                        <a:t>parity-3d.html</a:t>
+                      </a:r>
+                    </a:p>
+                  </a:txBody>
+                  <a:tcPr marL="73152" marR="73152" marT="36576" marB="36576">
+                    <a:solidFill>
+                      <a:srgbClr val="FCFCFB"/>
+                    </a:solidFill>
+                  </a:tcPr>
+                </a:tc>
+              </a:tr>
+              <a:tr h="298704">
+                <a:tc>
+                  <a:txBody>
+                    <a:bodyPr/>
+                    <a:lstStyle/>
+                    <a:p>
+                      <a:pPr>
+                        <a:lnSpc>
+                          <a:spcPct val="115000"/>
+                        </a:lnSpc>
+                      </a:pPr>
+                      <a:r>
+                        <a:rPr sz="1000" b="0">
+                          <a:solidFill>
+                            <a:srgbClr val="16181A"/>
+                          </a:solidFill>
+                          <a:latin typeface="Arial"/>
+                        </a:rPr>
                         <a:t>First-person build</a:t>
                       </a:r>
                     </a:p>
@@ -16205,7 +16315,7 @@
                   </a:tcPr>
                 </a:tc>
               </a:tr>
-              <a:tr h="320040">
+              <a:tr h="298704">
                 <a:tc>
                   <a:txBody>
                     <a:bodyPr/>
@@ -16315,7 +16425,7 @@
                   </a:tcPr>
                 </a:tc>
               </a:tr>
-              <a:tr h="320040">
+              <a:tr h="298704">
                 <a:tc>
                   <a:txBody>
                     <a:bodyPr/>
@@ -17025,7 +17135,7 @@
                           </a:solidFill>
                           <a:latin typeface="Arial"/>
                         </a:rPr>
-                        <a:t>3,328 lines of JavaScript across 6 builds</a:t>
+                        <a:t>3,734 lines of JavaScript across 6 builds</a:t>
                       </a:r>
                     </a:p>
                   </a:txBody>
@@ -17108,7 +17218,7 @@
                           </a:solidFill>
                           <a:latin typeface="Arial"/>
                         </a:rPr>
-                        <a:t>19 commits, single author</a:t>
+                        <a:t>23 commits, single author</a:t>
                       </a:r>
                     </a:p>
                   </a:txBody>
